--- a/langdock/pptx-template/bridgemaker-slides-template.pptx
+++ b/langdock/pptx-template/bridgemaker-slides-template.pptx
@@ -4957,40 +4957,6 @@
         </p:nvSpPr>
         <p:spPr>
           <a:xfrm>
-            <a:off x="10180320" y="838199"/>
-            <a:ext cx="1029546" cy="152400"/>
-          </a:xfrm>
-          <a:prstGeom prst="rect">
-            <a:avLst/>
-          </a:prstGeom>
-          <a:noFill/>
-        </p:spPr>
-        <p:txBody>
-          <a:bodyPr wrap="square" lIns="0" rIns="0" tIns="0" bIns="0">
-            <a:spAutoFit/>
-          </a:bodyPr>
-          <a:lstStyle/>
-          <a:p>
-            <a:r>
-              <a:rPr sz="930" b="0" i="0">
-                <a:solidFill>
-                  <a:srgbClr val="A8A69E"/>
-                </a:solidFill>
-                <a:latin typeface="JetBrains Mono"/>
-              </a:rPr>
-              <a:t>[ Kundenlogo ]</a:t>
-            </a:r>
-          </a:p>
-        </p:txBody>
-      </p:sp>
-      <p:sp>
-        <p:nvSpPr>
-          <p:cNvPr id="6" name="TextBox 5"/>
-          <p:cNvSpPr txBox="1"/>
-          <p:nvPr/>
-        </p:nvSpPr>
-        <p:spPr>
-          <a:xfrm>
             <a:off x="1015999" y="2398606"/>
             <a:ext cx="7508239" cy="176106"/>
           </a:xfrm>
@@ -5000,8 +4966,8 @@
           <a:noFill/>
         </p:spPr>
         <p:txBody>
-          <a:bodyPr wrap="square" lIns="0" rIns="0" tIns="0" bIns="0">
-            <a:spAutoFit/>
+          <a:bodyPr wrap="none" lIns="0" rIns="0" tIns="0" bIns="0">
+            <a:noAutofit/>
           </a:bodyPr>
           <a:lstStyle/>
           <a:p>
@@ -5019,7 +4985,7 @@
       </p:sp>
       <p:sp>
         <p:nvSpPr>
-          <p:cNvPr id="7" name="TextBox 6"/>
+          <p:cNvPr id="6" name="TextBox 5"/>
           <p:cNvSpPr txBox="1"/>
           <p:nvPr/>
         </p:nvSpPr>
@@ -5035,7 +5001,7 @@
         </p:spPr>
         <p:txBody>
           <a:bodyPr wrap="square" lIns="0" rIns="0" tIns="0" bIns="0">
-            <a:spAutoFit/>
+            <a:normAutofit/>
           </a:bodyPr>
           <a:lstStyle/>
           <a:p>
@@ -5064,7 +5030,7 @@
       </p:sp>
       <p:sp>
         <p:nvSpPr>
-          <p:cNvPr id="8" name="TextBox 7"/>
+          <p:cNvPr id="7" name="TextBox 6"/>
           <p:cNvSpPr txBox="1"/>
           <p:nvPr/>
         </p:nvSpPr>
@@ -5080,7 +5046,7 @@
         </p:spPr>
         <p:txBody>
           <a:bodyPr wrap="square" lIns="0" rIns="0" tIns="0" bIns="0">
-            <a:spAutoFit/>
+            <a:normAutofit/>
           </a:bodyPr>
           <a:lstStyle/>
           <a:p>
@@ -5092,6 +5058,40 @@
                 <a:latin typeface="Inter"/>
               </a:rPr>
               <a:t>Gemeinsamer Arbeitsstand, 17. Juli 2026</a:t>
+            </a:r>
+          </a:p>
+        </p:txBody>
+      </p:sp>
+      <p:sp>
+        <p:nvSpPr>
+          <p:cNvPr id="8" name="TextBox 7"/>
+          <p:cNvSpPr txBox="1"/>
+          <p:nvPr/>
+        </p:nvSpPr>
+        <p:spPr>
+          <a:xfrm>
+            <a:off x="10180320" y="838199"/>
+            <a:ext cx="1842346" cy="152400"/>
+          </a:xfrm>
+          <a:prstGeom prst="rect">
+            <a:avLst/>
+          </a:prstGeom>
+          <a:noFill/>
+        </p:spPr>
+        <p:txBody>
+          <a:bodyPr wrap="none" lIns="0" rIns="0" tIns="0" bIns="0">
+            <a:noAutofit/>
+          </a:bodyPr>
+          <a:lstStyle/>
+          <a:p>
+            <a:r>
+              <a:rPr sz="930" b="0" i="0">
+                <a:solidFill>
+                  <a:srgbClr val="A8A69E"/>
+                </a:solidFill>
+                <a:latin typeface="JetBrains Mono"/>
+              </a:rPr>
+              <a:t>[ Kundenlogo ]</a:t>
             </a:r>
           </a:p>
         </p:txBody>
@@ -5331,16 +5331,16 @@
         <p:spPr>
           <a:xfrm>
             <a:off x="1015999" y="389466"/>
-            <a:ext cx="774700" cy="176106"/>
-          </a:xfrm>
-          <a:prstGeom prst="rect">
-            <a:avLst/>
-          </a:prstGeom>
-          <a:noFill/>
-        </p:spPr>
-        <p:txBody>
-          <a:bodyPr wrap="square" lIns="0" rIns="0" tIns="0" bIns="0">
-            <a:spAutoFit/>
+            <a:ext cx="4775200" cy="176106"/>
+          </a:xfrm>
+          <a:prstGeom prst="rect">
+            <a:avLst/>
+          </a:prstGeom>
+          <a:noFill/>
+        </p:spPr>
+        <p:txBody>
+          <a:bodyPr wrap="none" lIns="0" rIns="0" tIns="0" bIns="0">
+            <a:noAutofit/>
           </a:bodyPr>
           <a:lstStyle/>
           <a:p>
@@ -5359,40 +5359,6 @@
       <p:sp>
         <p:nvSpPr>
           <p:cNvPr id="8" name="TextBox 7"/>
-          <p:cNvSpPr txBox="1"/>
-          <p:nvPr/>
-        </p:nvSpPr>
-        <p:spPr>
-          <a:xfrm>
-            <a:off x="2003213" y="6466839"/>
-            <a:ext cx="904239" cy="176106"/>
-          </a:xfrm>
-          <a:prstGeom prst="rect">
-            <a:avLst/>
-          </a:prstGeom>
-          <a:noFill/>
-        </p:spPr>
-        <p:txBody>
-          <a:bodyPr wrap="square" lIns="0" rIns="0" tIns="0" bIns="0">
-            <a:spAutoFit/>
-          </a:bodyPr>
-          <a:lstStyle/>
-          <a:p>
-            <a:r>
-              <a:rPr sz="800" b="1" i="0">
-                <a:solidFill>
-                  <a:srgbClr val="1C1C1E"/>
-                </a:solidFill>
-                <a:latin typeface="Inter"/>
-              </a:rPr>
-              <a:t>Kunde Projekttitel</a:t>
-            </a:r>
-          </a:p>
-        </p:txBody>
-      </p:sp>
-      <p:sp>
-        <p:nvSpPr>
-          <p:cNvPr id="9" name="TextBox 8"/>
           <p:cNvSpPr txBox="1"/>
           <p:nvPr/>
         </p:nvSpPr>
@@ -5408,7 +5374,7 @@
         </p:spPr>
         <p:txBody>
           <a:bodyPr wrap="square" lIns="0" rIns="0" tIns="0" bIns="0">
-            <a:spAutoFit/>
+            <a:normAutofit/>
           </a:bodyPr>
           <a:lstStyle/>
           <a:p>
@@ -5426,7 +5392,7 @@
       </p:sp>
       <p:sp>
         <p:nvSpPr>
-          <p:cNvPr id="10" name="TextBox 9"/>
+          <p:cNvPr id="9" name="TextBox 8"/>
           <p:cNvSpPr txBox="1"/>
           <p:nvPr/>
         </p:nvSpPr>
@@ -5442,7 +5408,7 @@
         </p:spPr>
         <p:txBody>
           <a:bodyPr wrap="square" lIns="0" rIns="0" tIns="0" bIns="0">
-            <a:spAutoFit/>
+            <a:normAutofit/>
           </a:bodyPr>
           <a:lstStyle/>
           <a:p>
@@ -5471,7 +5437,7 @@
       </p:sp>
       <p:sp>
         <p:nvSpPr>
-          <p:cNvPr id="11" name="TextBox 10"/>
+          <p:cNvPr id="10" name="TextBox 9"/>
           <p:cNvSpPr txBox="1"/>
           <p:nvPr/>
         </p:nvSpPr>
@@ -5487,7 +5453,7 @@
         </p:spPr>
         <p:txBody>
           <a:bodyPr wrap="square" lIns="0" rIns="0" tIns="0" bIns="0">
-            <a:spAutoFit/>
+            <a:normAutofit/>
           </a:bodyPr>
           <a:lstStyle/>
           <a:p>
@@ -5505,7 +5471,109 @@
       </p:sp>
       <p:sp>
         <p:nvSpPr>
+          <p:cNvPr id="11" name="TextBox 10"/>
+          <p:cNvSpPr txBox="1"/>
+          <p:nvPr/>
+        </p:nvSpPr>
+        <p:spPr>
+          <a:xfrm>
+            <a:off x="1015999" y="4213860"/>
+            <a:ext cx="1219200" cy="250613"/>
+          </a:xfrm>
+          <a:prstGeom prst="rect">
+            <a:avLst/>
+          </a:prstGeom>
+          <a:noFill/>
+        </p:spPr>
+        <p:txBody>
+          <a:bodyPr wrap="square" lIns="0" rIns="0" tIns="0" bIns="0">
+            <a:normAutofit/>
+          </a:bodyPr>
+          <a:lstStyle/>
+          <a:p>
+            <a:r>
+              <a:rPr sz="1070" b="0" i="0">
+                <a:solidFill>
+                  <a:srgbClr val="1C1C1E"/>
+                </a:solidFill>
+                <a:latin typeface="Inter"/>
+              </a:rPr>
+              <a:t>Zweite Messgröße</a:t>
+            </a:r>
+          </a:p>
+        </p:txBody>
+      </p:sp>
+      <p:sp>
+        <p:nvSpPr>
           <p:cNvPr id="12" name="TextBox 11"/>
+          <p:cNvSpPr txBox="1"/>
+          <p:nvPr/>
+        </p:nvSpPr>
+        <p:spPr>
+          <a:xfrm>
+            <a:off x="1015999" y="4710006"/>
+            <a:ext cx="1141306" cy="250613"/>
+          </a:xfrm>
+          <a:prstGeom prst="rect">
+            <a:avLst/>
+          </a:prstGeom>
+          <a:noFill/>
+        </p:spPr>
+        <p:txBody>
+          <a:bodyPr wrap="square" lIns="0" rIns="0" tIns="0" bIns="0">
+            <a:normAutofit/>
+          </a:bodyPr>
+          <a:lstStyle/>
+          <a:p>
+            <a:r>
+              <a:rPr sz="1070" b="0" i="0">
+                <a:solidFill>
+                  <a:srgbClr val="1C1C1E"/>
+                </a:solidFill>
+                <a:latin typeface="Inter"/>
+              </a:rPr>
+              <a:t>Dritte Messgröße</a:t>
+            </a:r>
+          </a:p>
+        </p:txBody>
+      </p:sp>
+      <p:sp>
+        <p:nvSpPr>
+          <p:cNvPr id="13" name="TextBox 12"/>
+          <p:cNvSpPr txBox="1"/>
+          <p:nvPr/>
+        </p:nvSpPr>
+        <p:spPr>
+          <a:xfrm>
+            <a:off x="2003213" y="6466839"/>
+            <a:ext cx="3928533" cy="176106"/>
+          </a:xfrm>
+          <a:prstGeom prst="rect">
+            <a:avLst/>
+          </a:prstGeom>
+          <a:noFill/>
+        </p:spPr>
+        <p:txBody>
+          <a:bodyPr wrap="none" lIns="0" rIns="0" tIns="0" bIns="0">
+            <a:noAutofit/>
+          </a:bodyPr>
+          <a:lstStyle/>
+          <a:p>
+            <a:r>
+              <a:rPr sz="800" b="1" i="0">
+                <a:solidFill>
+                  <a:srgbClr val="1C1C1E"/>
+                </a:solidFill>
+                <a:latin typeface="Inter"/>
+              </a:rPr>
+              <a:t>Kunde Projekttitel</a:t>
+            </a:r>
+          </a:p>
+        </p:txBody>
+      </p:sp>
+      <p:sp>
+        <p:nvSpPr>
+          <p:cNvPr id="14" name="TextBox 13"/>
           <p:cNvSpPr txBox="1"/>
           <p:nvPr/>
         </p:nvSpPr>
@@ -5521,7 +5589,7 @@
         </p:spPr>
         <p:txBody>
           <a:bodyPr wrap="square" lIns="0" rIns="0" tIns="0" bIns="0">
-            <a:spAutoFit/>
+            <a:normAutofit/>
           </a:bodyPr>
           <a:lstStyle/>
           <a:p>
@@ -5539,41 +5607,7 @@
       </p:sp>
       <p:sp>
         <p:nvSpPr>
-          <p:cNvPr id="13" name="TextBox 12"/>
-          <p:cNvSpPr txBox="1"/>
-          <p:nvPr/>
-        </p:nvSpPr>
-        <p:spPr>
-          <a:xfrm>
-            <a:off x="1015999" y="4213860"/>
-            <a:ext cx="1219200" cy="250613"/>
-          </a:xfrm>
-          <a:prstGeom prst="rect">
-            <a:avLst/>
-          </a:prstGeom>
-          <a:noFill/>
-        </p:spPr>
-        <p:txBody>
-          <a:bodyPr wrap="square" lIns="0" rIns="0" tIns="0" bIns="0">
-            <a:spAutoFit/>
-          </a:bodyPr>
-          <a:lstStyle/>
-          <a:p>
-            <a:r>
-              <a:rPr sz="1070" b="0" i="0">
-                <a:solidFill>
-                  <a:srgbClr val="1C1C1E"/>
-                </a:solidFill>
-                <a:latin typeface="Inter"/>
-              </a:rPr>
-              <a:t>Zweite Messgröße</a:t>
-            </a:r>
-          </a:p>
-        </p:txBody>
-      </p:sp>
-      <p:sp>
-        <p:nvSpPr>
-          <p:cNvPr id="14" name="TextBox 13"/>
+          <p:cNvPr id="15" name="TextBox 14"/>
           <p:cNvSpPr txBox="1"/>
           <p:nvPr/>
         </p:nvSpPr>
@@ -5589,7 +5623,7 @@
         </p:spPr>
         <p:txBody>
           <a:bodyPr wrap="square" lIns="0" rIns="0" tIns="0" bIns="0">
-            <a:spAutoFit/>
+            <a:normAutofit/>
           </a:bodyPr>
           <a:lstStyle/>
           <a:p>
@@ -5601,40 +5635,6 @@
                 <a:latin typeface="Inter"/>
               </a:rPr>
               <a:t>Wert</a:t>
-            </a:r>
-          </a:p>
-        </p:txBody>
-      </p:sp>
-      <p:sp>
-        <p:nvSpPr>
-          <p:cNvPr id="15" name="TextBox 14"/>
-          <p:cNvSpPr txBox="1"/>
-          <p:nvPr/>
-        </p:nvSpPr>
-        <p:spPr>
-          <a:xfrm>
-            <a:off x="1015999" y="4710006"/>
-            <a:ext cx="1141306" cy="250613"/>
-          </a:xfrm>
-          <a:prstGeom prst="rect">
-            <a:avLst/>
-          </a:prstGeom>
-          <a:noFill/>
-        </p:spPr>
-        <p:txBody>
-          <a:bodyPr wrap="square" lIns="0" rIns="0" tIns="0" bIns="0">
-            <a:spAutoFit/>
-          </a:bodyPr>
-          <a:lstStyle/>
-          <a:p>
-            <a:r>
-              <a:rPr sz="1070" b="0" i="0">
-                <a:solidFill>
-                  <a:srgbClr val="1C1C1E"/>
-                </a:solidFill>
-                <a:latin typeface="Inter"/>
-              </a:rPr>
-              <a:t>Dritte Messgröße</a:t>
             </a:r>
           </a:p>
         </p:txBody>
@@ -5657,7 +5657,7 @@
         </p:spPr>
         <p:txBody>
           <a:bodyPr wrap="square" lIns="0" rIns="0" tIns="0" bIns="0">
-            <a:spAutoFit/>
+            <a:normAutofit/>
           </a:bodyPr>
           <a:lstStyle/>
           <a:p>
@@ -5669,6 +5669,41 @@
                 <a:latin typeface="Inter"/>
               </a:rPr>
               <a:t>Wert</a:t>
+            </a:r>
+          </a:p>
+        </p:txBody>
+      </p:sp>
+      <p:sp>
+        <p:nvSpPr>
+          <p:cNvPr id="17" name="TextBox 16"/>
+          <p:cNvSpPr txBox="1"/>
+          <p:nvPr/>
+        </p:nvSpPr>
+        <p:spPr>
+          <a:xfrm>
+            <a:off x="10634133" y="6495626"/>
+            <a:ext cx="575733" cy="176106"/>
+          </a:xfrm>
+          <a:prstGeom prst="rect">
+            <a:avLst/>
+          </a:prstGeom>
+          <a:noFill/>
+        </p:spPr>
+        <p:txBody>
+          <a:bodyPr wrap="none" lIns="0" rIns="0" tIns="0" bIns="0">
+            <a:noAutofit/>
+          </a:bodyPr>
+          <a:lstStyle/>
+          <a:p>
+            <a:pPr algn="r"/>
+            <a:r>
+              <a:rPr sz="800" b="0" i="0">
+                <a:solidFill>
+                  <a:srgbClr val="6B6B65"/>
+                </a:solidFill>
+                <a:latin typeface="Inter"/>
+              </a:rPr>
+              <a:t>10</a:t>
             </a:r>
           </a:p>
         </p:txBody>
@@ -5800,16 +5835,16 @@
         <p:spPr>
           <a:xfrm>
             <a:off x="1015999" y="389466"/>
-            <a:ext cx="774700" cy="176106"/>
-          </a:xfrm>
-          <a:prstGeom prst="rect">
-            <a:avLst/>
-          </a:prstGeom>
-          <a:noFill/>
-        </p:spPr>
-        <p:txBody>
-          <a:bodyPr wrap="square" lIns="0" rIns="0" tIns="0" bIns="0">
-            <a:spAutoFit/>
+            <a:ext cx="4775200" cy="176106"/>
+          </a:xfrm>
+          <a:prstGeom prst="rect">
+            <a:avLst/>
+          </a:prstGeom>
+          <a:noFill/>
+        </p:spPr>
+        <p:txBody>
+          <a:bodyPr wrap="none" lIns="0" rIns="0" tIns="0" bIns="0">
+            <a:noAutofit/>
           </a:bodyPr>
           <a:lstStyle/>
           <a:p>
@@ -5828,40 +5863,6 @@
       <p:sp>
         <p:nvSpPr>
           <p:cNvPr id="6" name="TextBox 5"/>
-          <p:cNvSpPr txBox="1"/>
-          <p:nvPr/>
-        </p:nvSpPr>
-        <p:spPr>
-          <a:xfrm>
-            <a:off x="2003213" y="6466839"/>
-            <a:ext cx="904239" cy="176106"/>
-          </a:xfrm>
-          <a:prstGeom prst="rect">
-            <a:avLst/>
-          </a:prstGeom>
-          <a:noFill/>
-        </p:spPr>
-        <p:txBody>
-          <a:bodyPr wrap="square" lIns="0" rIns="0" tIns="0" bIns="0">
-            <a:spAutoFit/>
-          </a:bodyPr>
-          <a:lstStyle/>
-          <a:p>
-            <a:r>
-              <a:rPr sz="800" b="1" i="0">
-                <a:solidFill>
-                  <a:srgbClr val="1C1C1E"/>
-                </a:solidFill>
-                <a:latin typeface="Inter"/>
-              </a:rPr>
-              <a:t>Kunde Projekttitel</a:t>
-            </a:r>
-          </a:p>
-        </p:txBody>
-      </p:sp>
-      <p:sp>
-        <p:nvSpPr>
-          <p:cNvPr id="7" name="TextBox 6"/>
           <p:cNvSpPr txBox="1"/>
           <p:nvPr/>
         </p:nvSpPr>
@@ -5877,7 +5878,7 @@
         </p:spPr>
         <p:txBody>
           <a:bodyPr wrap="square" lIns="0" rIns="0" tIns="0" bIns="0">
-            <a:spAutoFit/>
+            <a:normAutofit/>
           </a:bodyPr>
           <a:lstStyle/>
           <a:p>
@@ -5895,14 +5896,48 @@
       </p:sp>
       <p:sp>
         <p:nvSpPr>
+          <p:cNvPr id="7" name="TextBox 6"/>
+          <p:cNvSpPr txBox="1"/>
+          <p:nvPr/>
+        </p:nvSpPr>
+        <p:spPr>
+          <a:xfrm>
+            <a:off x="1015999" y="3213100"/>
+            <a:ext cx="4436533" cy="176106"/>
+          </a:xfrm>
+          <a:prstGeom prst="rect">
+            <a:avLst/>
+          </a:prstGeom>
+          <a:noFill/>
+        </p:spPr>
+        <p:txBody>
+          <a:bodyPr wrap="none" lIns="0" rIns="0" tIns="0" bIns="0">
+            <a:noAutofit/>
+          </a:bodyPr>
+          <a:lstStyle/>
+          <a:p>
+            <a:r>
+              <a:rPr sz="800" b="0" i="0">
+                <a:solidFill>
+                  <a:srgbClr val="6B6B65"/>
+                </a:solidFill>
+                <a:latin typeface="Inter"/>
+              </a:rPr>
+              <a:t>VIER BAUSTEINE</a:t>
+            </a:r>
+          </a:p>
+        </p:txBody>
+      </p:sp>
+      <p:sp>
+        <p:nvSpPr>
           <p:cNvPr id="8" name="TextBox 7"/>
           <p:cNvSpPr txBox="1"/>
           <p:nvPr/>
         </p:nvSpPr>
         <p:spPr>
           <a:xfrm>
-            <a:off x="1015999" y="3213100"/>
-            <a:ext cx="1000760" cy="176106"/>
+            <a:off x="1015999" y="3490806"/>
+            <a:ext cx="3881119" cy="1307253"/>
           </a:xfrm>
           <a:prstGeom prst="rect">
             <a:avLst/>
@@ -5911,18 +5946,66 @@
         </p:spPr>
         <p:txBody>
           <a:bodyPr wrap="square" lIns="0" rIns="0" tIns="0" bIns="0">
-            <a:spAutoFit/>
-          </a:bodyPr>
-          <a:lstStyle/>
-          <a:p>
-            <a:r>
-              <a:rPr sz="800" b="0" i="0">
-                <a:solidFill>
-                  <a:srgbClr val="6B6B65"/>
-                </a:solidFill>
-                <a:latin typeface="Inter"/>
-              </a:rPr>
-              <a:t>VIER BAUSTEINE</a:t>
+            <a:normAutofit/>
+          </a:bodyPr>
+          <a:lstStyle/>
+          <a:p>
+            <a:r>
+              <a:rPr sz="1070" b="0" i="0">
+                <a:solidFill>
+                  <a:srgbClr val="3D3D3A"/>
+                </a:solidFill>
+                <a:latin typeface="Inter"/>
+              </a:rPr>
+              <a:t>Erster Baustein. Halber Satz, was er leistet.</a:t>
+            </a:r>
+          </a:p>
+          <a:p>
+            <a:pPr>
+              <a:spcBef>
+                <a:spcPts val="1070"/>
+              </a:spcBef>
+            </a:pPr>
+            <a:r>
+              <a:rPr sz="1070" b="0" i="0">
+                <a:solidFill>
+                  <a:srgbClr val="3D3D3A"/>
+                </a:solidFill>
+                <a:latin typeface="Inter"/>
+              </a:rPr>
+              <a:t>Zweiter Baustein. Halber Satz, was er leistet.</a:t>
+            </a:r>
+          </a:p>
+          <a:p>
+            <a:pPr>
+              <a:spcBef>
+                <a:spcPts val="1070"/>
+              </a:spcBef>
+            </a:pPr>
+            <a:r>
+              <a:rPr sz="1070" b="0" i="0">
+                <a:solidFill>
+                  <a:srgbClr val="3D3D3A"/>
+                </a:solidFill>
+                <a:latin typeface="Inter"/>
+              </a:rPr>
+              <a:t>Dritter Baustein. Halber Satz, was er leistet.</a:t>
+            </a:r>
+          </a:p>
+          <a:p>
+            <a:pPr>
+              <a:spcBef>
+                <a:spcPts val="1070"/>
+              </a:spcBef>
+            </a:pPr>
+            <a:r>
+              <a:rPr sz="1070" b="0" i="0">
+                <a:solidFill>
+                  <a:srgbClr val="3D3D3A"/>
+                </a:solidFill>
+                <a:latin typeface="Inter"/>
+              </a:rPr>
+              <a:t>Vierter Baustein. Halber Satz, was er leistet.</a:t>
             </a:r>
           </a:p>
         </p:txBody>
@@ -5935,28 +6018,28 @@
         </p:nvSpPr>
         <p:spPr>
           <a:xfrm>
-            <a:off x="1015999" y="3490806"/>
-            <a:ext cx="3881119" cy="250613"/>
-          </a:xfrm>
-          <a:prstGeom prst="rect">
-            <a:avLst/>
-          </a:prstGeom>
-          <a:noFill/>
-        </p:spPr>
-        <p:txBody>
-          <a:bodyPr wrap="square" lIns="0" rIns="0" tIns="0" bIns="0">
-            <a:spAutoFit/>
-          </a:bodyPr>
-          <a:lstStyle/>
-          <a:p>
-            <a:r>
-              <a:rPr sz="1070" b="0" i="0">
-                <a:solidFill>
-                  <a:srgbClr val="3D3D3A"/>
-                </a:solidFill>
-                <a:latin typeface="Inter"/>
-              </a:rPr>
-              <a:t>Halber Satz, was er leistet.</a:t>
+            <a:off x="2003213" y="6466839"/>
+            <a:ext cx="3928533" cy="176106"/>
+          </a:xfrm>
+          <a:prstGeom prst="rect">
+            <a:avLst/>
+          </a:prstGeom>
+          <a:noFill/>
+        </p:spPr>
+        <p:txBody>
+          <a:bodyPr wrap="none" lIns="0" rIns="0" tIns="0" bIns="0">
+            <a:noAutofit/>
+          </a:bodyPr>
+          <a:lstStyle/>
+          <a:p>
+            <a:r>
+              <a:rPr sz="800" b="1" i="0">
+                <a:solidFill>
+                  <a:srgbClr val="1C1C1E"/>
+                </a:solidFill>
+                <a:latin typeface="Inter"/>
+              </a:rPr>
+              <a:t>Kunde Projekttitel</a:t>
             </a:r>
           </a:p>
         </p:txBody>
@@ -5964,244 +6047,6 @@
       <p:sp>
         <p:nvSpPr>
           <p:cNvPr id="10" name="TextBox 9"/>
-          <p:cNvSpPr txBox="1"/>
-          <p:nvPr/>
-        </p:nvSpPr>
-        <p:spPr>
-          <a:xfrm>
-            <a:off x="1015999" y="3507740"/>
-            <a:ext cx="1087120" cy="203200"/>
-          </a:xfrm>
-          <a:prstGeom prst="rect">
-            <a:avLst/>
-          </a:prstGeom>
-          <a:noFill/>
-        </p:spPr>
-        <p:txBody>
-          <a:bodyPr wrap="square" lIns="0" rIns="0" tIns="0" bIns="0">
-            <a:spAutoFit/>
-          </a:bodyPr>
-          <a:lstStyle/>
-          <a:p>
-            <a:r>
-              <a:rPr sz="1070" b="1" i="0">
-                <a:solidFill>
-                  <a:srgbClr val="3D3D3A"/>
-                </a:solidFill>
-                <a:latin typeface="Inter"/>
-              </a:rPr>
-              <a:t>Erster Baustein.</a:t>
-            </a:r>
-          </a:p>
-        </p:txBody>
-      </p:sp>
-      <p:sp>
-        <p:nvSpPr>
-          <p:cNvPr id="11" name="TextBox 10"/>
-          <p:cNvSpPr txBox="1"/>
-          <p:nvPr/>
-        </p:nvSpPr>
-        <p:spPr>
-          <a:xfrm>
-            <a:off x="1015999" y="3843019"/>
-            <a:ext cx="3881119" cy="250613"/>
-          </a:xfrm>
-          <a:prstGeom prst="rect">
-            <a:avLst/>
-          </a:prstGeom>
-          <a:noFill/>
-        </p:spPr>
-        <p:txBody>
-          <a:bodyPr wrap="square" lIns="0" rIns="0" tIns="0" bIns="0">
-            <a:spAutoFit/>
-          </a:bodyPr>
-          <a:lstStyle/>
-          <a:p>
-            <a:r>
-              <a:rPr sz="1070" b="0" i="0">
-                <a:solidFill>
-                  <a:srgbClr val="3D3D3A"/>
-                </a:solidFill>
-                <a:latin typeface="Inter"/>
-              </a:rPr>
-              <a:t>Halber Satz, was er leistet.</a:t>
-            </a:r>
-          </a:p>
-        </p:txBody>
-      </p:sp>
-      <p:sp>
-        <p:nvSpPr>
-          <p:cNvPr id="12" name="TextBox 11"/>
-          <p:cNvSpPr txBox="1"/>
-          <p:nvPr/>
-        </p:nvSpPr>
-        <p:spPr>
-          <a:xfrm>
-            <a:off x="1015999" y="3859953"/>
-            <a:ext cx="1194646" cy="203200"/>
-          </a:xfrm>
-          <a:prstGeom prst="rect">
-            <a:avLst/>
-          </a:prstGeom>
-          <a:noFill/>
-        </p:spPr>
-        <p:txBody>
-          <a:bodyPr wrap="square" lIns="0" rIns="0" tIns="0" bIns="0">
-            <a:spAutoFit/>
-          </a:bodyPr>
-          <a:lstStyle/>
-          <a:p>
-            <a:r>
-              <a:rPr sz="1070" b="1" i="0">
-                <a:solidFill>
-                  <a:srgbClr val="3D3D3A"/>
-                </a:solidFill>
-                <a:latin typeface="Inter"/>
-              </a:rPr>
-              <a:t>Zweiter Baustein.</a:t>
-            </a:r>
-          </a:p>
-        </p:txBody>
-      </p:sp>
-      <p:sp>
-        <p:nvSpPr>
-          <p:cNvPr id="13" name="TextBox 12"/>
-          <p:cNvSpPr txBox="1"/>
-          <p:nvPr/>
-        </p:nvSpPr>
-        <p:spPr>
-          <a:xfrm>
-            <a:off x="1015999" y="4195233"/>
-            <a:ext cx="3881119" cy="250613"/>
-          </a:xfrm>
-          <a:prstGeom prst="rect">
-            <a:avLst/>
-          </a:prstGeom>
-          <a:noFill/>
-        </p:spPr>
-        <p:txBody>
-          <a:bodyPr wrap="square" lIns="0" rIns="0" tIns="0" bIns="0">
-            <a:spAutoFit/>
-          </a:bodyPr>
-          <a:lstStyle/>
-          <a:p>
-            <a:r>
-              <a:rPr sz="1070" b="0" i="0">
-                <a:solidFill>
-                  <a:srgbClr val="3D3D3A"/>
-                </a:solidFill>
-                <a:latin typeface="Inter"/>
-              </a:rPr>
-              <a:t>Halber Satz, was er leistet.</a:t>
-            </a:r>
-          </a:p>
-        </p:txBody>
-      </p:sp>
-      <p:sp>
-        <p:nvSpPr>
-          <p:cNvPr id="14" name="TextBox 13"/>
-          <p:cNvSpPr txBox="1"/>
-          <p:nvPr/>
-        </p:nvSpPr>
-        <p:spPr>
-          <a:xfrm>
-            <a:off x="1015999" y="4212166"/>
-            <a:ext cx="1112520" cy="203200"/>
-          </a:xfrm>
-          <a:prstGeom prst="rect">
-            <a:avLst/>
-          </a:prstGeom>
-          <a:noFill/>
-        </p:spPr>
-        <p:txBody>
-          <a:bodyPr wrap="square" lIns="0" rIns="0" tIns="0" bIns="0">
-            <a:spAutoFit/>
-          </a:bodyPr>
-          <a:lstStyle/>
-          <a:p>
-            <a:r>
-              <a:rPr sz="1070" b="1" i="0">
-                <a:solidFill>
-                  <a:srgbClr val="3D3D3A"/>
-                </a:solidFill>
-                <a:latin typeface="Inter"/>
-              </a:rPr>
-              <a:t>Dritter Baustein.</a:t>
-            </a:r>
-          </a:p>
-        </p:txBody>
-      </p:sp>
-      <p:sp>
-        <p:nvSpPr>
-          <p:cNvPr id="15" name="TextBox 14"/>
-          <p:cNvSpPr txBox="1"/>
-          <p:nvPr/>
-        </p:nvSpPr>
-        <p:spPr>
-          <a:xfrm>
-            <a:off x="1015999" y="4547446"/>
-            <a:ext cx="3881119" cy="250613"/>
-          </a:xfrm>
-          <a:prstGeom prst="rect">
-            <a:avLst/>
-          </a:prstGeom>
-          <a:noFill/>
-        </p:spPr>
-        <p:txBody>
-          <a:bodyPr wrap="square" lIns="0" rIns="0" tIns="0" bIns="0">
-            <a:spAutoFit/>
-          </a:bodyPr>
-          <a:lstStyle/>
-          <a:p>
-            <a:r>
-              <a:rPr sz="1070" b="0" i="0">
-                <a:solidFill>
-                  <a:srgbClr val="3D3D3A"/>
-                </a:solidFill>
-                <a:latin typeface="Inter"/>
-              </a:rPr>
-              <a:t>Halber Satz, was er leistet.</a:t>
-            </a:r>
-          </a:p>
-        </p:txBody>
-      </p:sp>
-      <p:sp>
-        <p:nvSpPr>
-          <p:cNvPr id="16" name="TextBox 15"/>
-          <p:cNvSpPr txBox="1"/>
-          <p:nvPr/>
-        </p:nvSpPr>
-        <p:spPr>
-          <a:xfrm>
-            <a:off x="1015999" y="4564380"/>
-            <a:ext cx="1150620" cy="203200"/>
-          </a:xfrm>
-          <a:prstGeom prst="rect">
-            <a:avLst/>
-          </a:prstGeom>
-          <a:noFill/>
-        </p:spPr>
-        <p:txBody>
-          <a:bodyPr wrap="square" lIns="0" rIns="0" tIns="0" bIns="0">
-            <a:spAutoFit/>
-          </a:bodyPr>
-          <a:lstStyle/>
-          <a:p>
-            <a:r>
-              <a:rPr sz="1070" b="1" i="0">
-                <a:solidFill>
-                  <a:srgbClr val="3D3D3A"/>
-                </a:solidFill>
-                <a:latin typeface="Inter"/>
-              </a:rPr>
-              <a:t>Vierter Baustein.</a:t>
-            </a:r>
-          </a:p>
-        </p:txBody>
-      </p:sp>
-      <p:sp>
-        <p:nvSpPr>
-          <p:cNvPr id="17" name="TextBox 16"/>
           <p:cNvSpPr txBox="1"/>
           <p:nvPr/>
         </p:nvSpPr>
@@ -6217,7 +6062,7 @@
         </p:spPr>
         <p:txBody>
           <a:bodyPr wrap="square" lIns="0" rIns="0" tIns="0" bIns="0">
-            <a:spAutoFit/>
+            <a:normAutofit/>
           </a:bodyPr>
           <a:lstStyle/>
           <a:p>
@@ -6230,6 +6075,41 @@
                 <a:latin typeface="Inter"/>
               </a:rPr>
               <a:t>Bildunterschrift mit Inhalt, nicht mit Meta</a:t>
+            </a:r>
+          </a:p>
+        </p:txBody>
+      </p:sp>
+      <p:sp>
+        <p:nvSpPr>
+          <p:cNvPr id="11" name="TextBox 10"/>
+          <p:cNvSpPr txBox="1"/>
+          <p:nvPr/>
+        </p:nvSpPr>
+        <p:spPr>
+          <a:xfrm>
+            <a:off x="10634133" y="6495626"/>
+            <a:ext cx="575733" cy="176106"/>
+          </a:xfrm>
+          <a:prstGeom prst="rect">
+            <a:avLst/>
+          </a:prstGeom>
+          <a:noFill/>
+        </p:spPr>
+        <p:txBody>
+          <a:bodyPr wrap="none" lIns="0" rIns="0" tIns="0" bIns="0">
+            <a:noAutofit/>
+          </a:bodyPr>
+          <a:lstStyle/>
+          <a:p>
+            <a:pPr algn="r"/>
+            <a:r>
+              <a:rPr sz="800" b="0" i="0">
+                <a:solidFill>
+                  <a:srgbClr val="6B6B65"/>
+                </a:solidFill>
+                <a:latin typeface="Inter"/>
+              </a:rPr>
+              <a:t>11</a:t>
             </a:r>
           </a:p>
         </p:txBody>
@@ -6381,16 +6261,16 @@
         <p:spPr>
           <a:xfrm>
             <a:off x="1015999" y="389466"/>
-            <a:ext cx="774700" cy="176106"/>
-          </a:xfrm>
-          <a:prstGeom prst="rect">
-            <a:avLst/>
-          </a:prstGeom>
-          <a:noFill/>
-        </p:spPr>
-        <p:txBody>
-          <a:bodyPr wrap="square" lIns="0" rIns="0" tIns="0" bIns="0">
-            <a:spAutoFit/>
+            <a:ext cx="4775200" cy="176106"/>
+          </a:xfrm>
+          <a:prstGeom prst="rect">
+            <a:avLst/>
+          </a:prstGeom>
+          <a:noFill/>
+        </p:spPr>
+        <p:txBody>
+          <a:bodyPr wrap="none" lIns="0" rIns="0" tIns="0" bIns="0">
+            <a:noAutofit/>
           </a:bodyPr>
           <a:lstStyle/>
           <a:p>
@@ -6409,40 +6289,6 @@
       <p:sp>
         <p:nvSpPr>
           <p:cNvPr id="6" name="TextBox 5"/>
-          <p:cNvSpPr txBox="1"/>
-          <p:nvPr/>
-        </p:nvSpPr>
-        <p:spPr>
-          <a:xfrm>
-            <a:off x="2003213" y="6466839"/>
-            <a:ext cx="904239" cy="176106"/>
-          </a:xfrm>
-          <a:prstGeom prst="rect">
-            <a:avLst/>
-          </a:prstGeom>
-          <a:noFill/>
-        </p:spPr>
-        <p:txBody>
-          <a:bodyPr wrap="square" lIns="0" rIns="0" tIns="0" bIns="0">
-            <a:spAutoFit/>
-          </a:bodyPr>
-          <a:lstStyle/>
-          <a:p>
-            <a:r>
-              <a:rPr sz="800" b="1" i="0">
-                <a:solidFill>
-                  <a:srgbClr val="1C1C1E"/>
-                </a:solidFill>
-                <a:latin typeface="Inter"/>
-              </a:rPr>
-              <a:t>Kunde Projekttitel</a:t>
-            </a:r>
-          </a:p>
-        </p:txBody>
-      </p:sp>
-      <p:sp>
-        <p:nvSpPr>
-          <p:cNvPr id="7" name="TextBox 6"/>
           <p:cNvSpPr txBox="1"/>
           <p:nvPr/>
         </p:nvSpPr>
@@ -6458,7 +6304,7 @@
         </p:spPr>
         <p:txBody>
           <a:bodyPr wrap="square" lIns="0" rIns="0" tIns="0" bIns="0">
-            <a:spAutoFit/>
+            <a:normAutofit/>
           </a:bodyPr>
           <a:lstStyle/>
           <a:p>
@@ -6476,7 +6322,7 @@
       </p:sp>
       <p:sp>
         <p:nvSpPr>
-          <p:cNvPr id="8" name="TextBox 7"/>
+          <p:cNvPr id="7" name="TextBox 6"/>
           <p:cNvSpPr txBox="1"/>
           <p:nvPr/>
         </p:nvSpPr>
@@ -6492,7 +6338,7 @@
         </p:spPr>
         <p:txBody>
           <a:bodyPr wrap="square" lIns="0" rIns="0" tIns="0" bIns="0">
-            <a:spAutoFit/>
+            <a:normAutofit/>
           </a:bodyPr>
           <a:lstStyle/>
           <a:p>
@@ -6510,41 +6356,41 @@
       </p:sp>
       <p:sp>
         <p:nvSpPr>
+          <p:cNvPr id="8" name="TextBox 7"/>
+          <p:cNvSpPr txBox="1"/>
+          <p:nvPr/>
+        </p:nvSpPr>
+        <p:spPr>
+          <a:xfrm>
+            <a:off x="1015999" y="3777826"/>
+            <a:ext cx="3632199" cy="176106"/>
+          </a:xfrm>
+          <a:prstGeom prst="rect">
+            <a:avLst/>
+          </a:prstGeom>
+          <a:noFill/>
+        </p:spPr>
+        <p:txBody>
+          <a:bodyPr wrap="none" lIns="0" rIns="0" tIns="0" bIns="0">
+            <a:noAutofit/>
+          </a:bodyPr>
+          <a:lstStyle/>
+          <a:p>
+            <a:r>
+              <a:rPr sz="800" b="0" i="0">
+                <a:solidFill>
+                  <a:srgbClr val="6B6B65"/>
+                </a:solidFill>
+                <a:latin typeface="Inter"/>
+              </a:rPr>
+              <a:t>KENNZAHL A</a:t>
+            </a:r>
+          </a:p>
+        </p:txBody>
+      </p:sp>
+      <p:sp>
+        <p:nvSpPr>
           <p:cNvPr id="9" name="TextBox 8"/>
-          <p:cNvSpPr txBox="1"/>
-          <p:nvPr/>
-        </p:nvSpPr>
-        <p:spPr>
-          <a:xfrm>
-            <a:off x="1015999" y="3777826"/>
-            <a:ext cx="3081866" cy="176106"/>
-          </a:xfrm>
-          <a:prstGeom prst="rect">
-            <a:avLst/>
-          </a:prstGeom>
-          <a:noFill/>
-        </p:spPr>
-        <p:txBody>
-          <a:bodyPr wrap="square" lIns="0" rIns="0" tIns="0" bIns="0">
-            <a:spAutoFit/>
-          </a:bodyPr>
-          <a:lstStyle/>
-          <a:p>
-            <a:r>
-              <a:rPr sz="800" b="0" i="0">
-                <a:solidFill>
-                  <a:srgbClr val="6B6B65"/>
-                </a:solidFill>
-                <a:latin typeface="Inter"/>
-              </a:rPr>
-              <a:t>KENNZAHL A</a:t>
-            </a:r>
-          </a:p>
-        </p:txBody>
-      </p:sp>
-      <p:sp>
-        <p:nvSpPr>
-          <p:cNvPr id="10" name="TextBox 9"/>
           <p:cNvSpPr txBox="1"/>
           <p:nvPr/>
         </p:nvSpPr>
@@ -6560,7 +6406,7 @@
         </p:spPr>
         <p:txBody>
           <a:bodyPr wrap="square" lIns="0" rIns="0" tIns="0" bIns="0">
-            <a:spAutoFit/>
+            <a:normAutofit/>
           </a:bodyPr>
           <a:lstStyle/>
           <a:p>
@@ -6578,7 +6424,76 @@
       </p:sp>
       <p:sp>
         <p:nvSpPr>
+          <p:cNvPr id="10" name="TextBox 9"/>
+          <p:cNvSpPr txBox="1"/>
+          <p:nvPr/>
+        </p:nvSpPr>
+        <p:spPr>
+          <a:xfrm>
+            <a:off x="1015999" y="4712546"/>
+            <a:ext cx="10193866" cy="176106"/>
+          </a:xfrm>
+          <a:prstGeom prst="rect">
+            <a:avLst/>
+          </a:prstGeom>
+          <a:noFill/>
+        </p:spPr>
+        <p:txBody>
+          <a:bodyPr wrap="square" lIns="0" rIns="0" tIns="0" bIns="0">
+            <a:normAutofit/>
+          </a:bodyPr>
+          <a:lstStyle/>
+          <a:p>
+            <a:pPr algn="r"/>
+            <a:r>
+              <a:rPr sz="800" b="0" i="0">
+                <a:solidFill>
+                  <a:srgbClr val="6B6B65"/>
+                </a:solidFill>
+                <a:latin typeface="Inter"/>
+              </a:rPr>
+              <a:t>Quelle: … in einem Satz</a:t>
+            </a:r>
+          </a:p>
+        </p:txBody>
+      </p:sp>
+      <p:sp>
+        <p:nvSpPr>
           <p:cNvPr id="11" name="TextBox 10"/>
+          <p:cNvSpPr txBox="1"/>
+          <p:nvPr/>
+        </p:nvSpPr>
+        <p:spPr>
+          <a:xfrm>
+            <a:off x="2003213" y="6466839"/>
+            <a:ext cx="3928533" cy="176106"/>
+          </a:xfrm>
+          <a:prstGeom prst="rect">
+            <a:avLst/>
+          </a:prstGeom>
+          <a:noFill/>
+        </p:spPr>
+        <p:txBody>
+          <a:bodyPr wrap="none" lIns="0" rIns="0" tIns="0" bIns="0">
+            <a:noAutofit/>
+          </a:bodyPr>
+          <a:lstStyle/>
+          <a:p>
+            <a:r>
+              <a:rPr sz="800" b="1" i="0">
+                <a:solidFill>
+                  <a:srgbClr val="1C1C1E"/>
+                </a:solidFill>
+                <a:latin typeface="Inter"/>
+              </a:rPr>
+              <a:t>Kunde Projekttitel</a:t>
+            </a:r>
+          </a:p>
+        </p:txBody>
+      </p:sp>
+      <p:sp>
+        <p:nvSpPr>
+          <p:cNvPr id="12" name="TextBox 11"/>
           <p:cNvSpPr txBox="1"/>
           <p:nvPr/>
         </p:nvSpPr>
@@ -6594,7 +6509,7 @@
         </p:spPr>
         <p:txBody>
           <a:bodyPr wrap="square" lIns="0" rIns="0" tIns="0" bIns="0">
-            <a:spAutoFit/>
+            <a:normAutofit/>
           </a:bodyPr>
           <a:lstStyle/>
           <a:p>
@@ -6612,23 +6527,23 @@
       </p:sp>
       <p:sp>
         <p:nvSpPr>
-          <p:cNvPr id="12" name="TextBox 11"/>
+          <p:cNvPr id="13" name="TextBox 12"/>
           <p:cNvSpPr txBox="1"/>
           <p:nvPr/>
         </p:nvSpPr>
         <p:spPr>
           <a:xfrm>
             <a:off x="4749800" y="3777826"/>
-            <a:ext cx="2734733" cy="176106"/>
-          </a:xfrm>
-          <a:prstGeom prst="rect">
-            <a:avLst/>
-          </a:prstGeom>
-          <a:noFill/>
-        </p:spPr>
-        <p:txBody>
-          <a:bodyPr wrap="square" lIns="0" rIns="0" tIns="0" bIns="0">
-            <a:spAutoFit/>
+            <a:ext cx="3285066" cy="176106"/>
+          </a:xfrm>
+          <a:prstGeom prst="rect">
+            <a:avLst/>
+          </a:prstGeom>
+          <a:noFill/>
+        </p:spPr>
+        <p:txBody>
+          <a:bodyPr wrap="none" lIns="0" rIns="0" tIns="0" bIns="0">
+            <a:noAutofit/>
           </a:bodyPr>
           <a:lstStyle/>
           <a:p>
@@ -6646,7 +6561,7 @@
       </p:sp>
       <p:sp>
         <p:nvSpPr>
-          <p:cNvPr id="13" name="TextBox 12"/>
+          <p:cNvPr id="14" name="TextBox 13"/>
           <p:cNvSpPr txBox="1"/>
           <p:nvPr/>
         </p:nvSpPr>
@@ -6662,7 +6577,7 @@
         </p:spPr>
         <p:txBody>
           <a:bodyPr wrap="square" lIns="0" rIns="0" tIns="0" bIns="0">
-            <a:spAutoFit/>
+            <a:normAutofit/>
           </a:bodyPr>
           <a:lstStyle/>
           <a:p>
@@ -6680,7 +6595,7 @@
       </p:sp>
       <p:sp>
         <p:nvSpPr>
-          <p:cNvPr id="14" name="TextBox 13"/>
+          <p:cNvPr id="15" name="TextBox 14"/>
           <p:cNvSpPr txBox="1"/>
           <p:nvPr/>
         </p:nvSpPr>
@@ -6696,7 +6611,7 @@
         </p:spPr>
         <p:txBody>
           <a:bodyPr wrap="square" lIns="0" rIns="0" tIns="0" bIns="0">
-            <a:spAutoFit/>
+            <a:normAutofit/>
           </a:bodyPr>
           <a:lstStyle/>
           <a:p>
@@ -6714,23 +6629,23 @@
       </p:sp>
       <p:sp>
         <p:nvSpPr>
-          <p:cNvPr id="15" name="TextBox 14"/>
+          <p:cNvPr id="16" name="TextBox 15"/>
           <p:cNvSpPr txBox="1"/>
           <p:nvPr/>
         </p:nvSpPr>
         <p:spPr>
           <a:xfrm>
             <a:off x="8136466" y="3777826"/>
-            <a:ext cx="2734733" cy="176106"/>
-          </a:xfrm>
-          <a:prstGeom prst="rect">
-            <a:avLst/>
-          </a:prstGeom>
-          <a:noFill/>
-        </p:spPr>
-        <p:txBody>
-          <a:bodyPr wrap="square" lIns="0" rIns="0" tIns="0" bIns="0">
-            <a:spAutoFit/>
+            <a:ext cx="3886199" cy="176106"/>
+          </a:xfrm>
+          <a:prstGeom prst="rect">
+            <a:avLst/>
+          </a:prstGeom>
+          <a:noFill/>
+        </p:spPr>
+        <p:txBody>
+          <a:bodyPr wrap="none" lIns="0" rIns="0" tIns="0" bIns="0">
+            <a:noAutofit/>
           </a:bodyPr>
           <a:lstStyle/>
           <a:p>
@@ -6748,7 +6663,7 @@
       </p:sp>
       <p:sp>
         <p:nvSpPr>
-          <p:cNvPr id="16" name="TextBox 15"/>
+          <p:cNvPr id="17" name="TextBox 16"/>
           <p:cNvSpPr txBox="1"/>
           <p:nvPr/>
         </p:nvSpPr>
@@ -6764,7 +6679,7 @@
         </p:spPr>
         <p:txBody>
           <a:bodyPr wrap="square" lIns="0" rIns="0" tIns="0" bIns="0">
-            <a:spAutoFit/>
+            <a:normAutofit/>
           </a:bodyPr>
           <a:lstStyle/>
           <a:p>
@@ -6782,23 +6697,23 @@
       </p:sp>
       <p:sp>
         <p:nvSpPr>
-          <p:cNvPr id="17" name="TextBox 16"/>
-          <p:cNvSpPr txBox="1"/>
-          <p:nvPr/>
-        </p:nvSpPr>
-        <p:spPr>
-          <a:xfrm>
-            <a:off x="1015999" y="4712546"/>
-            <a:ext cx="10193866" cy="176106"/>
-          </a:xfrm>
-          <a:prstGeom prst="rect">
-            <a:avLst/>
-          </a:prstGeom>
-          <a:noFill/>
-        </p:spPr>
-        <p:txBody>
-          <a:bodyPr wrap="square" lIns="0" rIns="0" tIns="0" bIns="0">
-            <a:spAutoFit/>
+          <p:cNvPr id="18" name="TextBox 17"/>
+          <p:cNvSpPr txBox="1"/>
+          <p:nvPr/>
+        </p:nvSpPr>
+        <p:spPr>
+          <a:xfrm>
+            <a:off x="10634133" y="6495626"/>
+            <a:ext cx="575733" cy="176106"/>
+          </a:xfrm>
+          <a:prstGeom prst="rect">
+            <a:avLst/>
+          </a:prstGeom>
+          <a:noFill/>
+        </p:spPr>
+        <p:txBody>
+          <a:bodyPr wrap="none" lIns="0" rIns="0" tIns="0" bIns="0">
+            <a:noAutofit/>
           </a:bodyPr>
           <a:lstStyle/>
           <a:p>
@@ -6810,7 +6725,7 @@
                 </a:solidFill>
                 <a:latin typeface="Inter"/>
               </a:rPr>
-              <a:t>Quelle: … in einem Satz</a:t>
+              <a:t>12</a:t>
             </a:r>
           </a:p>
         </p:txBody>
@@ -7050,16 +6965,16 @@
         <p:spPr>
           <a:xfrm>
             <a:off x="1015999" y="389466"/>
-            <a:ext cx="774700" cy="176106"/>
-          </a:xfrm>
-          <a:prstGeom prst="rect">
-            <a:avLst/>
-          </a:prstGeom>
-          <a:noFill/>
-        </p:spPr>
-        <p:txBody>
-          <a:bodyPr wrap="square" lIns="0" rIns="0" tIns="0" bIns="0">
-            <a:spAutoFit/>
+            <a:ext cx="4775200" cy="176106"/>
+          </a:xfrm>
+          <a:prstGeom prst="rect">
+            <a:avLst/>
+          </a:prstGeom>
+          <a:noFill/>
+        </p:spPr>
+        <p:txBody>
+          <a:bodyPr wrap="none" lIns="0" rIns="0" tIns="0" bIns="0">
+            <a:noAutofit/>
           </a:bodyPr>
           <a:lstStyle/>
           <a:p>
@@ -7078,40 +6993,6 @@
       <p:sp>
         <p:nvSpPr>
           <p:cNvPr id="8" name="TextBox 7"/>
-          <p:cNvSpPr txBox="1"/>
-          <p:nvPr/>
-        </p:nvSpPr>
-        <p:spPr>
-          <a:xfrm>
-            <a:off x="2003213" y="6466839"/>
-            <a:ext cx="904239" cy="176106"/>
-          </a:xfrm>
-          <a:prstGeom prst="rect">
-            <a:avLst/>
-          </a:prstGeom>
-          <a:noFill/>
-        </p:spPr>
-        <p:txBody>
-          <a:bodyPr wrap="square" lIns="0" rIns="0" tIns="0" bIns="0">
-            <a:spAutoFit/>
-          </a:bodyPr>
-          <a:lstStyle/>
-          <a:p>
-            <a:r>
-              <a:rPr sz="800" b="1" i="0">
-                <a:solidFill>
-                  <a:srgbClr val="1C1C1E"/>
-                </a:solidFill>
-                <a:latin typeface="Inter"/>
-              </a:rPr>
-              <a:t>Kunde Projekttitel</a:t>
-            </a:r>
-          </a:p>
-        </p:txBody>
-      </p:sp>
-      <p:sp>
-        <p:nvSpPr>
-          <p:cNvPr id="9" name="TextBox 8"/>
           <p:cNvSpPr txBox="1"/>
           <p:nvPr/>
         </p:nvSpPr>
@@ -7127,7 +7008,7 @@
         </p:spPr>
         <p:txBody>
           <a:bodyPr wrap="square" lIns="0" rIns="0" tIns="0" bIns="0">
-            <a:spAutoFit/>
+            <a:normAutofit/>
           </a:bodyPr>
           <a:lstStyle/>
           <a:p>
@@ -7145,14 +7026,48 @@
       </p:sp>
       <p:sp>
         <p:nvSpPr>
+          <p:cNvPr id="9" name="TextBox 8"/>
+          <p:cNvSpPr txBox="1"/>
+          <p:nvPr/>
+        </p:nvSpPr>
+        <p:spPr>
+          <a:xfrm>
+            <a:off x="1015999" y="3496733"/>
+            <a:ext cx="4842933" cy="250613"/>
+          </a:xfrm>
+          <a:prstGeom prst="rect">
+            <a:avLst/>
+          </a:prstGeom>
+          <a:noFill/>
+        </p:spPr>
+        <p:txBody>
+          <a:bodyPr wrap="square" lIns="0" rIns="0" tIns="0" bIns="0">
+            <a:normAutofit/>
+          </a:bodyPr>
+          <a:lstStyle/>
+          <a:p>
+            <a:r>
+              <a:rPr sz="1070" b="0" i="0">
+                <a:solidFill>
+                  <a:srgbClr val="3D3D3A"/>
+                </a:solidFill>
+                <a:latin typeface="Inter"/>
+              </a:rPr>
+              <a:t>Ein bis zwei Sätze, was das konkret heißt.</a:t>
+            </a:r>
+          </a:p>
+        </p:txBody>
+      </p:sp>
+      <p:sp>
+        <p:nvSpPr>
           <p:cNvPr id="10" name="TextBox 9"/>
           <p:cNvSpPr txBox="1"/>
           <p:nvPr/>
         </p:nvSpPr>
         <p:spPr>
           <a:xfrm>
-            <a:off x="1015999" y="3141133"/>
-            <a:ext cx="237066" cy="237066"/>
+            <a:off x="1015999" y="4636346"/>
+            <a:ext cx="4842933" cy="250613"/>
           </a:xfrm>
           <a:prstGeom prst="rect">
             <a:avLst/>
@@ -7161,25 +7076,93 @@
         </p:spPr>
         <p:txBody>
           <a:bodyPr wrap="square" lIns="0" rIns="0" tIns="0" bIns="0">
-            <a:spAutoFit/>
-          </a:bodyPr>
-          <a:lstStyle/>
-          <a:p>
-            <a:r>
-              <a:rPr sz="1600" b="0" i="0">
+            <a:normAutofit/>
+          </a:bodyPr>
+          <a:lstStyle/>
+          <a:p>
+            <a:r>
+              <a:rPr sz="1070" b="0" i="0">
+                <a:solidFill>
+                  <a:srgbClr val="3D3D3A"/>
+                </a:solidFill>
+                <a:latin typeface="Inter"/>
+              </a:rPr>
+              <a:t>Ein bis zwei Sätze, was das konkret heißt.</a:t>
+            </a:r>
+          </a:p>
+        </p:txBody>
+      </p:sp>
+      <p:sp>
+        <p:nvSpPr>
+          <p:cNvPr id="11" name="TextBox 10"/>
+          <p:cNvSpPr txBox="1"/>
+          <p:nvPr/>
+        </p:nvSpPr>
+        <p:spPr>
+          <a:xfrm>
+            <a:off x="2003213" y="6466839"/>
+            <a:ext cx="3928533" cy="176106"/>
+          </a:xfrm>
+          <a:prstGeom prst="rect">
+            <a:avLst/>
+          </a:prstGeom>
+          <a:noFill/>
+        </p:spPr>
+        <p:txBody>
+          <a:bodyPr wrap="none" lIns="0" rIns="0" tIns="0" bIns="0">
+            <a:noAutofit/>
+          </a:bodyPr>
+          <a:lstStyle/>
+          <a:p>
+            <a:r>
+              <a:rPr sz="800" b="1" i="0">
                 <a:solidFill>
                   <a:srgbClr val="1C1C1E"/>
                 </a:solidFill>
                 <a:latin typeface="Inter"/>
               </a:rPr>
-              <a:t>insights</a:t>
-            </a:r>
-          </a:p>
-        </p:txBody>
-      </p:sp>
-      <p:sp>
-        <p:nvSpPr>
-          <p:cNvPr id="11" name="TextBox 10"/>
+              <a:t>Kunde Projekttitel</a:t>
+            </a:r>
+          </a:p>
+        </p:txBody>
+      </p:sp>
+      <p:sp>
+        <p:nvSpPr>
+          <p:cNvPr id="12" name="TextBox 11"/>
+          <p:cNvSpPr txBox="1"/>
+          <p:nvPr/>
+        </p:nvSpPr>
+        <p:spPr>
+          <a:xfrm>
+            <a:off x="4738793" y="4263813"/>
+            <a:ext cx="1120140" cy="270933"/>
+          </a:xfrm>
+          <a:prstGeom prst="rect">
+            <a:avLst/>
+          </a:prstGeom>
+          <a:noFill/>
+        </p:spPr>
+        <p:txBody>
+          <a:bodyPr wrap="square" lIns="0" rIns="0" tIns="0" bIns="0">
+            <a:normAutofit/>
+          </a:bodyPr>
+          <a:lstStyle/>
+          <a:p>
+            <a:r>
+              <a:rPr sz="1330" b="0" i="0">
+                <a:solidFill>
+                  <a:srgbClr val="1C1C1E"/>
+                </a:solidFill>
+                <a:latin typeface="Inter"/>
+              </a:rPr>
+              <a:t>Dritter Aspekt</a:t>
+            </a:r>
+          </a:p>
+        </p:txBody>
+      </p:sp>
+      <p:sp>
+        <p:nvSpPr>
+          <p:cNvPr id="13" name="TextBox 12"/>
           <p:cNvSpPr txBox="1"/>
           <p:nvPr/>
         </p:nvSpPr>
@@ -7195,7 +7178,7 @@
         </p:spPr>
         <p:txBody>
           <a:bodyPr wrap="square" lIns="0" rIns="0" tIns="0" bIns="0">
-            <a:spAutoFit/>
+            <a:normAutofit/>
           </a:bodyPr>
           <a:lstStyle/>
           <a:p>
@@ -7213,13 +7196,13 @@
       </p:sp>
       <p:sp>
         <p:nvSpPr>
-          <p:cNvPr id="12" name="TextBox 11"/>
-          <p:cNvSpPr txBox="1"/>
-          <p:nvPr/>
-        </p:nvSpPr>
-        <p:spPr>
-          <a:xfrm>
-            <a:off x="1015999" y="3496733"/>
+          <p:cNvPr id="14" name="TextBox 13"/>
+          <p:cNvSpPr txBox="1"/>
+          <p:nvPr/>
+        </p:nvSpPr>
+        <p:spPr>
+          <a:xfrm>
+            <a:off x="6366933" y="3496733"/>
             <a:ext cx="4842933" cy="250613"/>
           </a:xfrm>
           <a:prstGeom prst="rect">
@@ -7229,7 +7212,7 @@
         </p:spPr>
         <p:txBody>
           <a:bodyPr wrap="square" lIns="0" rIns="0" tIns="0" bIns="0">
-            <a:spAutoFit/>
+            <a:normAutofit/>
           </a:bodyPr>
           <a:lstStyle/>
           <a:p>
@@ -7247,14 +7230,14 @@
       </p:sp>
       <p:sp>
         <p:nvSpPr>
-          <p:cNvPr id="13" name="TextBox 12"/>
-          <p:cNvSpPr txBox="1"/>
-          <p:nvPr/>
-        </p:nvSpPr>
-        <p:spPr>
-          <a:xfrm>
-            <a:off x="6366933" y="3141133"/>
-            <a:ext cx="237066" cy="237066"/>
+          <p:cNvPr id="15" name="TextBox 14"/>
+          <p:cNvSpPr txBox="1"/>
+          <p:nvPr/>
+        </p:nvSpPr>
+        <p:spPr>
+          <a:xfrm>
+            <a:off x="6366933" y="4636346"/>
+            <a:ext cx="4842933" cy="250613"/>
           </a:xfrm>
           <a:prstGeom prst="rect">
             <a:avLst/>
@@ -7263,25 +7246,25 @@
         </p:spPr>
         <p:txBody>
           <a:bodyPr wrap="square" lIns="0" rIns="0" tIns="0" bIns="0">
-            <a:spAutoFit/>
-          </a:bodyPr>
-          <a:lstStyle/>
-          <a:p>
-            <a:r>
-              <a:rPr sz="1600" b="0" i="0">
-                <a:solidFill>
-                  <a:srgbClr val="1C1C1E"/>
-                </a:solidFill>
-                <a:latin typeface="Inter"/>
-              </a:rPr>
-              <a:t>hub</a:t>
-            </a:r>
-          </a:p>
-        </p:txBody>
-      </p:sp>
-      <p:sp>
-        <p:nvSpPr>
-          <p:cNvPr id="14" name="TextBox 13"/>
+            <a:normAutofit/>
+          </a:bodyPr>
+          <a:lstStyle/>
+          <a:p>
+            <a:r>
+              <a:rPr sz="1070" b="0" i="0">
+                <a:solidFill>
+                  <a:srgbClr val="3D3D3A"/>
+                </a:solidFill>
+                <a:latin typeface="Inter"/>
+              </a:rPr>
+              <a:t>Ein bis zwei Sätze, was das konkret heißt.</a:t>
+            </a:r>
+          </a:p>
+        </p:txBody>
+      </p:sp>
+      <p:sp>
+        <p:nvSpPr>
+          <p:cNvPr id="16" name="TextBox 15"/>
           <p:cNvSpPr txBox="1"/>
           <p:nvPr/>
         </p:nvSpPr>
@@ -7297,7 +7280,7 @@
         </p:spPr>
         <p:txBody>
           <a:bodyPr wrap="square" lIns="0" rIns="0" tIns="0" bIns="0">
-            <a:spAutoFit/>
+            <a:normAutofit/>
           </a:bodyPr>
           <a:lstStyle/>
           <a:p>
@@ -7315,177 +7298,7 @@
       </p:sp>
       <p:sp>
         <p:nvSpPr>
-          <p:cNvPr id="15" name="TextBox 14"/>
-          <p:cNvSpPr txBox="1"/>
-          <p:nvPr/>
-        </p:nvSpPr>
-        <p:spPr>
-          <a:xfrm>
-            <a:off x="6366933" y="3496733"/>
-            <a:ext cx="4842933" cy="250613"/>
-          </a:xfrm>
-          <a:prstGeom prst="rect">
-            <a:avLst/>
-          </a:prstGeom>
-          <a:noFill/>
-        </p:spPr>
-        <p:txBody>
-          <a:bodyPr wrap="square" lIns="0" rIns="0" tIns="0" bIns="0">
-            <a:spAutoFit/>
-          </a:bodyPr>
-          <a:lstStyle/>
-          <a:p>
-            <a:r>
-              <a:rPr sz="1070" b="0" i="0">
-                <a:solidFill>
-                  <a:srgbClr val="3D3D3A"/>
-                </a:solidFill>
-                <a:latin typeface="Inter"/>
-              </a:rPr>
-              <a:t>Ein bis zwei Sätze, was das konkret heißt.</a:t>
-            </a:r>
-          </a:p>
-        </p:txBody>
-      </p:sp>
-      <p:sp>
-        <p:nvSpPr>
-          <p:cNvPr id="16" name="TextBox 15"/>
-          <p:cNvSpPr txBox="1"/>
-          <p:nvPr/>
-        </p:nvSpPr>
-        <p:spPr>
-          <a:xfrm>
-            <a:off x="1015999" y="4280746"/>
-            <a:ext cx="237066" cy="237066"/>
-          </a:xfrm>
-          <a:prstGeom prst="rect">
-            <a:avLst/>
-          </a:prstGeom>
-          <a:noFill/>
-        </p:spPr>
-        <p:txBody>
-          <a:bodyPr wrap="square" lIns="0" rIns="0" tIns="0" bIns="0">
-            <a:spAutoFit/>
-          </a:bodyPr>
-          <a:lstStyle/>
-          <a:p>
-            <a:r>
-              <a:rPr sz="1600" b="0" i="0">
-                <a:solidFill>
-                  <a:srgbClr val="1C1C1E"/>
-                </a:solidFill>
-                <a:latin typeface="Inter"/>
-              </a:rPr>
-              <a:t>query_stats</a:t>
-            </a:r>
-          </a:p>
-        </p:txBody>
-      </p:sp>
-      <p:sp>
-        <p:nvSpPr>
           <p:cNvPr id="17" name="TextBox 16"/>
-          <p:cNvSpPr txBox="1"/>
-          <p:nvPr/>
-        </p:nvSpPr>
-        <p:spPr>
-          <a:xfrm>
-            <a:off x="4738793" y="4263813"/>
-            <a:ext cx="1120140" cy="270933"/>
-          </a:xfrm>
-          <a:prstGeom prst="rect">
-            <a:avLst/>
-          </a:prstGeom>
-          <a:noFill/>
-        </p:spPr>
-        <p:txBody>
-          <a:bodyPr wrap="square" lIns="0" rIns="0" tIns="0" bIns="0">
-            <a:spAutoFit/>
-          </a:bodyPr>
-          <a:lstStyle/>
-          <a:p>
-            <a:r>
-              <a:rPr sz="1330" b="0" i="0">
-                <a:solidFill>
-                  <a:srgbClr val="1C1C1E"/>
-                </a:solidFill>
-                <a:latin typeface="Inter"/>
-              </a:rPr>
-              <a:t>Dritter Aspekt</a:t>
-            </a:r>
-          </a:p>
-        </p:txBody>
-      </p:sp>
-      <p:sp>
-        <p:nvSpPr>
-          <p:cNvPr id="18" name="TextBox 17"/>
-          <p:cNvSpPr txBox="1"/>
-          <p:nvPr/>
-        </p:nvSpPr>
-        <p:spPr>
-          <a:xfrm>
-            <a:off x="1015999" y="4636346"/>
-            <a:ext cx="4842933" cy="250613"/>
-          </a:xfrm>
-          <a:prstGeom prst="rect">
-            <a:avLst/>
-          </a:prstGeom>
-          <a:noFill/>
-        </p:spPr>
-        <p:txBody>
-          <a:bodyPr wrap="square" lIns="0" rIns="0" tIns="0" bIns="0">
-            <a:spAutoFit/>
-          </a:bodyPr>
-          <a:lstStyle/>
-          <a:p>
-            <a:r>
-              <a:rPr sz="1070" b="0" i="0">
-                <a:solidFill>
-                  <a:srgbClr val="3D3D3A"/>
-                </a:solidFill>
-                <a:latin typeface="Inter"/>
-              </a:rPr>
-              <a:t>Ein bis zwei Sätze, was das konkret heißt.</a:t>
-            </a:r>
-          </a:p>
-        </p:txBody>
-      </p:sp>
-      <p:sp>
-        <p:nvSpPr>
-          <p:cNvPr id="19" name="TextBox 18"/>
-          <p:cNvSpPr txBox="1"/>
-          <p:nvPr/>
-        </p:nvSpPr>
-        <p:spPr>
-          <a:xfrm>
-            <a:off x="6366933" y="4280746"/>
-            <a:ext cx="237066" cy="237066"/>
-          </a:xfrm>
-          <a:prstGeom prst="rect">
-            <a:avLst/>
-          </a:prstGeom>
-          <a:noFill/>
-        </p:spPr>
-        <p:txBody>
-          <a:bodyPr wrap="square" lIns="0" rIns="0" tIns="0" bIns="0">
-            <a:spAutoFit/>
-          </a:bodyPr>
-          <a:lstStyle/>
-          <a:p>
-            <a:r>
-              <a:rPr sz="1600" b="0" i="0">
-                <a:solidFill>
-                  <a:srgbClr val="1C1C1E"/>
-                </a:solidFill>
-                <a:latin typeface="Inter"/>
-              </a:rPr>
-              <a:t>rocket_launch</a:t>
-            </a:r>
-          </a:p>
-        </p:txBody>
-      </p:sp>
-      <p:sp>
-        <p:nvSpPr>
-          <p:cNvPr id="20" name="TextBox 19"/>
           <p:cNvSpPr txBox="1"/>
           <p:nvPr/>
         </p:nvSpPr>
@@ -7501,7 +7314,7 @@
         </p:spPr>
         <p:txBody>
           <a:bodyPr wrap="square" lIns="0" rIns="0" tIns="0" bIns="0">
-            <a:spAutoFit/>
+            <a:normAutofit/>
           </a:bodyPr>
           <a:lstStyle/>
           <a:p>
@@ -7519,34 +7332,35 @@
       </p:sp>
       <p:sp>
         <p:nvSpPr>
-          <p:cNvPr id="21" name="TextBox 20"/>
-          <p:cNvSpPr txBox="1"/>
-          <p:nvPr/>
-        </p:nvSpPr>
-        <p:spPr>
-          <a:xfrm>
-            <a:off x="6366933" y="4636346"/>
-            <a:ext cx="4842933" cy="250613"/>
-          </a:xfrm>
-          <a:prstGeom prst="rect">
-            <a:avLst/>
-          </a:prstGeom>
-          <a:noFill/>
-        </p:spPr>
-        <p:txBody>
-          <a:bodyPr wrap="square" lIns="0" rIns="0" tIns="0" bIns="0">
-            <a:spAutoFit/>
-          </a:bodyPr>
-          <a:lstStyle/>
-          <a:p>
-            <a:r>
-              <a:rPr sz="1070" b="0" i="0">
-                <a:solidFill>
-                  <a:srgbClr val="3D3D3A"/>
-                </a:solidFill>
-                <a:latin typeface="Inter"/>
-              </a:rPr>
-              <a:t>Ein bis zwei Sätze, was das konkret heißt.</a:t>
+          <p:cNvPr id="18" name="TextBox 17"/>
+          <p:cNvSpPr txBox="1"/>
+          <p:nvPr/>
+        </p:nvSpPr>
+        <p:spPr>
+          <a:xfrm>
+            <a:off x="10634133" y="6495626"/>
+            <a:ext cx="575733" cy="176106"/>
+          </a:xfrm>
+          <a:prstGeom prst="rect">
+            <a:avLst/>
+          </a:prstGeom>
+          <a:noFill/>
+        </p:spPr>
+        <p:txBody>
+          <a:bodyPr wrap="none" lIns="0" rIns="0" tIns="0" bIns="0">
+            <a:noAutofit/>
+          </a:bodyPr>
+          <a:lstStyle/>
+          <a:p>
+            <a:pPr algn="r"/>
+            <a:r>
+              <a:rPr sz="800" b="0" i="0">
+                <a:solidFill>
+                  <a:srgbClr val="6B6B65"/>
+                </a:solidFill>
+                <a:latin typeface="Inter"/>
+              </a:rPr>
+              <a:t>13</a:t>
             </a:r>
           </a:p>
         </p:txBody>
@@ -7698,16 +7512,16 @@
         <p:spPr>
           <a:xfrm>
             <a:off x="1015999" y="389466"/>
-            <a:ext cx="774700" cy="176106"/>
-          </a:xfrm>
-          <a:prstGeom prst="rect">
-            <a:avLst/>
-          </a:prstGeom>
-          <a:noFill/>
-        </p:spPr>
-        <p:txBody>
-          <a:bodyPr wrap="square" lIns="0" rIns="0" tIns="0" bIns="0">
-            <a:spAutoFit/>
+            <a:ext cx="4775200" cy="176106"/>
+          </a:xfrm>
+          <a:prstGeom prst="rect">
+            <a:avLst/>
+          </a:prstGeom>
+          <a:noFill/>
+        </p:spPr>
+        <p:txBody>
+          <a:bodyPr wrap="none" lIns="0" rIns="0" tIns="0" bIns="0">
+            <a:noAutofit/>
           </a:bodyPr>
           <a:lstStyle/>
           <a:p>
@@ -7726,40 +7540,6 @@
       <p:sp>
         <p:nvSpPr>
           <p:cNvPr id="6" name="TextBox 5"/>
-          <p:cNvSpPr txBox="1"/>
-          <p:nvPr/>
-        </p:nvSpPr>
-        <p:spPr>
-          <a:xfrm>
-            <a:off x="2003213" y="6466839"/>
-            <a:ext cx="904239" cy="176106"/>
-          </a:xfrm>
-          <a:prstGeom prst="rect">
-            <a:avLst/>
-          </a:prstGeom>
-          <a:noFill/>
-        </p:spPr>
-        <p:txBody>
-          <a:bodyPr wrap="square" lIns="0" rIns="0" tIns="0" bIns="0">
-            <a:spAutoFit/>
-          </a:bodyPr>
-          <a:lstStyle/>
-          <a:p>
-            <a:r>
-              <a:rPr sz="800" b="1" i="0">
-                <a:solidFill>
-                  <a:srgbClr val="1C1C1E"/>
-                </a:solidFill>
-                <a:latin typeface="Inter"/>
-              </a:rPr>
-              <a:t>Kunde Projekttitel</a:t>
-            </a:r>
-          </a:p>
-        </p:txBody>
-      </p:sp>
-      <p:sp>
-        <p:nvSpPr>
-          <p:cNvPr id="7" name="TextBox 6"/>
           <p:cNvSpPr txBox="1"/>
           <p:nvPr/>
         </p:nvSpPr>
@@ -7775,7 +7555,7 @@
         </p:spPr>
         <p:txBody>
           <a:bodyPr wrap="square" lIns="0" rIns="0" tIns="0" bIns="0">
-            <a:spAutoFit/>
+            <a:normAutofit/>
           </a:bodyPr>
           <a:lstStyle/>
           <a:p>
@@ -7793,14 +7573,48 @@
       </p:sp>
       <p:sp>
         <p:nvSpPr>
+          <p:cNvPr id="7" name="TextBox 6"/>
+          <p:cNvSpPr txBox="1"/>
+          <p:nvPr/>
+        </p:nvSpPr>
+        <p:spPr>
+          <a:xfrm>
+            <a:off x="1015999" y="3389206"/>
+            <a:ext cx="4436533" cy="176106"/>
+          </a:xfrm>
+          <a:prstGeom prst="rect">
+            <a:avLst/>
+          </a:prstGeom>
+          <a:noFill/>
+        </p:spPr>
+        <p:txBody>
+          <a:bodyPr wrap="none" lIns="0" rIns="0" tIns="0" bIns="0">
+            <a:noAutofit/>
+          </a:bodyPr>
+          <a:lstStyle/>
+          <a:p>
+            <a:r>
+              <a:rPr sz="800" b="0" i="0">
+                <a:solidFill>
+                  <a:srgbClr val="6B6B65"/>
+                </a:solidFill>
+                <a:latin typeface="Inter"/>
+              </a:rPr>
+              <a:t>BLICKWINKEL A</a:t>
+            </a:r>
+          </a:p>
+        </p:txBody>
+      </p:sp>
+      <p:sp>
+        <p:nvSpPr>
           <p:cNvPr id="8" name="TextBox 7"/>
           <p:cNvSpPr txBox="1"/>
           <p:nvPr/>
         </p:nvSpPr>
         <p:spPr>
           <a:xfrm>
-            <a:off x="1015999" y="3389206"/>
-            <a:ext cx="956733" cy="176106"/>
+            <a:off x="1015999" y="3680459"/>
+            <a:ext cx="4910666" cy="955040"/>
           </a:xfrm>
           <a:prstGeom prst="rect">
             <a:avLst/>
@@ -7809,7 +7623,107 @@
         </p:spPr>
         <p:txBody>
           <a:bodyPr wrap="square" lIns="0" rIns="0" tIns="0" bIns="0">
-            <a:spAutoFit/>
+            <a:normAutofit/>
+          </a:bodyPr>
+          <a:lstStyle/>
+          <a:p>
+            <a:r>
+              <a:rPr sz="1070" b="0" i="0">
+                <a:solidFill>
+                  <a:srgbClr val="3D3D3A"/>
+                </a:solidFill>
+                <a:latin typeface="Inter"/>
+              </a:rPr>
+              <a:t>Erster Punkt als ganzer Satz.</a:t>
+            </a:r>
+          </a:p>
+          <a:p>
+            <a:pPr>
+              <a:spcBef>
+                <a:spcPts val="1070"/>
+              </a:spcBef>
+            </a:pPr>
+            <a:r>
+              <a:rPr sz="1070" b="0" i="0">
+                <a:solidFill>
+                  <a:srgbClr val="3D3D3A"/>
+                </a:solidFill>
+                <a:latin typeface="Inter"/>
+              </a:rPr>
+              <a:t>Zweiter Punkt als ganzer Satz.</a:t>
+            </a:r>
+          </a:p>
+          <a:p>
+            <a:pPr>
+              <a:spcBef>
+                <a:spcPts val="1070"/>
+              </a:spcBef>
+            </a:pPr>
+            <a:r>
+              <a:rPr sz="1070" b="0" i="0">
+                <a:solidFill>
+                  <a:srgbClr val="3D3D3A"/>
+                </a:solidFill>
+                <a:latin typeface="Inter"/>
+              </a:rPr>
+              <a:t>Dritter Punkt als ganzer Satz.</a:t>
+            </a:r>
+          </a:p>
+        </p:txBody>
+      </p:sp>
+      <p:sp>
+        <p:nvSpPr>
+          <p:cNvPr id="9" name="TextBox 8"/>
+          <p:cNvSpPr txBox="1"/>
+          <p:nvPr/>
+        </p:nvSpPr>
+        <p:spPr>
+          <a:xfrm>
+            <a:off x="2003213" y="6466839"/>
+            <a:ext cx="3928533" cy="176106"/>
+          </a:xfrm>
+          <a:prstGeom prst="rect">
+            <a:avLst/>
+          </a:prstGeom>
+          <a:noFill/>
+        </p:spPr>
+        <p:txBody>
+          <a:bodyPr wrap="none" lIns="0" rIns="0" tIns="0" bIns="0">
+            <a:noAutofit/>
+          </a:bodyPr>
+          <a:lstStyle/>
+          <a:p>
+            <a:r>
+              <a:rPr sz="800" b="1" i="0">
+                <a:solidFill>
+                  <a:srgbClr val="1C1C1E"/>
+                </a:solidFill>
+                <a:latin typeface="Inter"/>
+              </a:rPr>
+              <a:t>Kunde Projekttitel</a:t>
+            </a:r>
+          </a:p>
+        </p:txBody>
+      </p:sp>
+      <p:sp>
+        <p:nvSpPr>
+          <p:cNvPr id="10" name="TextBox 9"/>
+          <p:cNvSpPr txBox="1"/>
+          <p:nvPr/>
+        </p:nvSpPr>
+        <p:spPr>
+          <a:xfrm>
+            <a:off x="6299200" y="3389206"/>
+            <a:ext cx="4436533" cy="176106"/>
+          </a:xfrm>
+          <a:prstGeom prst="rect">
+            <a:avLst/>
+          </a:prstGeom>
+          <a:noFill/>
+        </p:spPr>
+        <p:txBody>
+          <a:bodyPr wrap="none" lIns="0" rIns="0" tIns="0" bIns="0">
+            <a:noAutofit/>
           </a:bodyPr>
           <a:lstStyle/>
           <a:p>
@@ -7820,21 +7734,21 @@
                 </a:solidFill>
                 <a:latin typeface="Inter"/>
               </a:rPr>
-              <a:t>BLICKWINKEL A</a:t>
-            </a:r>
-          </a:p>
-        </p:txBody>
-      </p:sp>
-      <p:sp>
-        <p:nvSpPr>
-          <p:cNvPr id="9" name="TextBox 8"/>
-          <p:cNvSpPr txBox="1"/>
-          <p:nvPr/>
-        </p:nvSpPr>
-        <p:spPr>
-          <a:xfrm>
-            <a:off x="5723466" y="3375659"/>
-            <a:ext cx="203200" cy="203200"/>
+              <a:t>BLICKWINKEL B</a:t>
+            </a:r>
+          </a:p>
+        </p:txBody>
+      </p:sp>
+      <p:sp>
+        <p:nvSpPr>
+          <p:cNvPr id="11" name="TextBox 10"/>
+          <p:cNvSpPr txBox="1"/>
+          <p:nvPr/>
+        </p:nvSpPr>
+        <p:spPr>
+          <a:xfrm>
+            <a:off x="6299200" y="3680459"/>
+            <a:ext cx="4910666" cy="955040"/>
           </a:xfrm>
           <a:prstGeom prst="rect">
             <a:avLst/>
@@ -7843,41 +7757,7 @@
         </p:spPr>
         <p:txBody>
           <a:bodyPr wrap="square" lIns="0" rIns="0" tIns="0" bIns="0">
-            <a:spAutoFit/>
-          </a:bodyPr>
-          <a:lstStyle/>
-          <a:p>
-            <a:r>
-              <a:rPr sz="1330" b="0" i="0">
-                <a:solidFill>
-                  <a:srgbClr val="1D6B66"/>
-                </a:solidFill>
-                <a:latin typeface="Inter"/>
-              </a:rPr>
-              <a:t>verified</a:t>
-            </a:r>
-          </a:p>
-        </p:txBody>
-      </p:sp>
-      <p:sp>
-        <p:nvSpPr>
-          <p:cNvPr id="10" name="TextBox 9"/>
-          <p:cNvSpPr txBox="1"/>
-          <p:nvPr/>
-        </p:nvSpPr>
-        <p:spPr>
-          <a:xfrm>
-            <a:off x="1015999" y="3680459"/>
-            <a:ext cx="4910666" cy="250613"/>
-          </a:xfrm>
-          <a:prstGeom prst="rect">
-            <a:avLst/>
-          </a:prstGeom>
-          <a:noFill/>
-        </p:spPr>
-        <p:txBody>
-          <a:bodyPr wrap="square" lIns="0" rIns="0" tIns="0" bIns="0">
-            <a:spAutoFit/>
+            <a:normAutofit/>
           </a:bodyPr>
           <a:lstStyle/>
           <a:p>
@@ -7891,30 +7771,12 @@
               <a:t>Erster Punkt als ganzer Satz.</a:t>
             </a:r>
           </a:p>
-        </p:txBody>
-      </p:sp>
-      <p:sp>
-        <p:nvSpPr>
-          <p:cNvPr id="11" name="TextBox 10"/>
-          <p:cNvSpPr txBox="1"/>
-          <p:nvPr/>
-        </p:nvSpPr>
-        <p:spPr>
-          <a:xfrm>
-            <a:off x="1015999" y="4032673"/>
-            <a:ext cx="4910666" cy="250613"/>
-          </a:xfrm>
-          <a:prstGeom prst="rect">
-            <a:avLst/>
-          </a:prstGeom>
-          <a:noFill/>
-        </p:spPr>
-        <p:txBody>
-          <a:bodyPr wrap="square" lIns="0" rIns="0" tIns="0" bIns="0">
-            <a:spAutoFit/>
-          </a:bodyPr>
-          <a:lstStyle/>
-          <a:p>
+          <a:p>
+            <a:pPr>
+              <a:spcBef>
+                <a:spcPts val="1070"/>
+              </a:spcBef>
+            </a:pPr>
             <a:r>
               <a:rPr sz="1070" b="0" i="0">
                 <a:solidFill>
@@ -7925,6 +7787,22 @@
               <a:t>Zweiter Punkt als ganzer Satz.</a:t>
             </a:r>
           </a:p>
+          <a:p>
+            <a:pPr>
+              <a:spcBef>
+                <a:spcPts val="1070"/>
+              </a:spcBef>
+            </a:pPr>
+            <a:r>
+              <a:rPr sz="1070" b="0" i="0">
+                <a:solidFill>
+                  <a:srgbClr val="3D3D3A"/>
+                </a:solidFill>
+                <a:latin typeface="Inter"/>
+              </a:rPr>
+              <a:t>Dritter Punkt als ganzer Satz.</a:t>
+            </a:r>
+          </a:p>
         </p:txBody>
       </p:sp>
       <p:sp>
@@ -7935,54 +7813,21 @@
         </p:nvSpPr>
         <p:spPr>
           <a:xfrm>
-            <a:off x="1015999" y="4384886"/>
-            <a:ext cx="4910666" cy="250613"/>
-          </a:xfrm>
-          <a:prstGeom prst="rect">
-            <a:avLst/>
-          </a:prstGeom>
-          <a:noFill/>
-        </p:spPr>
-        <p:txBody>
-          <a:bodyPr wrap="square" lIns="0" rIns="0" tIns="0" bIns="0">
-            <a:spAutoFit/>
-          </a:bodyPr>
-          <a:lstStyle/>
-          <a:p>
-            <a:r>
-              <a:rPr sz="1070" b="0" i="0">
-                <a:solidFill>
-                  <a:srgbClr val="3D3D3A"/>
-                </a:solidFill>
-                <a:latin typeface="Inter"/>
-              </a:rPr>
-              <a:t>Dritter Punkt als ganzer Satz.</a:t>
-            </a:r>
-          </a:p>
-        </p:txBody>
-      </p:sp>
-      <p:sp>
-        <p:nvSpPr>
-          <p:cNvPr id="13" name="TextBox 12"/>
-          <p:cNvSpPr txBox="1"/>
-          <p:nvPr/>
-        </p:nvSpPr>
-        <p:spPr>
-          <a:xfrm>
-            <a:off x="6299200" y="3389206"/>
-            <a:ext cx="950806" cy="176106"/>
-          </a:xfrm>
-          <a:prstGeom prst="rect">
-            <a:avLst/>
-          </a:prstGeom>
-          <a:noFill/>
-        </p:spPr>
-        <p:txBody>
-          <a:bodyPr wrap="square" lIns="0" rIns="0" tIns="0" bIns="0">
-            <a:spAutoFit/>
-          </a:bodyPr>
-          <a:lstStyle/>
-          <a:p>
+            <a:off x="10634133" y="6495626"/>
+            <a:ext cx="575733" cy="176106"/>
+          </a:xfrm>
+          <a:prstGeom prst="rect">
+            <a:avLst/>
+          </a:prstGeom>
+          <a:noFill/>
+        </p:spPr>
+        <p:txBody>
+          <a:bodyPr wrap="none" lIns="0" rIns="0" tIns="0" bIns="0">
+            <a:noAutofit/>
+          </a:bodyPr>
+          <a:lstStyle/>
+          <a:p>
+            <a:pPr algn="r"/>
             <a:r>
               <a:rPr sz="800" b="0" i="0">
                 <a:solidFill>
@@ -7990,143 +7835,7 @@
                 </a:solidFill>
                 <a:latin typeface="Inter"/>
               </a:rPr>
-              <a:t>BLICKWINKEL B</a:t>
-            </a:r>
-          </a:p>
-        </p:txBody>
-      </p:sp>
-      <p:sp>
-        <p:nvSpPr>
-          <p:cNvPr id="14" name="TextBox 13"/>
-          <p:cNvSpPr txBox="1"/>
-          <p:nvPr/>
-        </p:nvSpPr>
-        <p:spPr>
-          <a:xfrm>
-            <a:off x="11006666" y="3375659"/>
-            <a:ext cx="203200" cy="203200"/>
-          </a:xfrm>
-          <a:prstGeom prst="rect">
-            <a:avLst/>
-          </a:prstGeom>
-          <a:noFill/>
-        </p:spPr>
-        <p:txBody>
-          <a:bodyPr wrap="square" lIns="0" rIns="0" tIns="0" bIns="0">
-            <a:spAutoFit/>
-          </a:bodyPr>
-          <a:lstStyle/>
-          <a:p>
-            <a:r>
-              <a:rPr sz="1330" b="0" i="0">
-                <a:solidFill>
-                  <a:srgbClr val="4A2D6B"/>
-                </a:solidFill>
-                <a:latin typeface="Inter"/>
-              </a:rPr>
-              <a:t>pending</a:t>
-            </a:r>
-          </a:p>
-        </p:txBody>
-      </p:sp>
-      <p:sp>
-        <p:nvSpPr>
-          <p:cNvPr id="15" name="TextBox 14"/>
-          <p:cNvSpPr txBox="1"/>
-          <p:nvPr/>
-        </p:nvSpPr>
-        <p:spPr>
-          <a:xfrm>
-            <a:off x="6299200" y="3680459"/>
-            <a:ext cx="4910666" cy="250613"/>
-          </a:xfrm>
-          <a:prstGeom prst="rect">
-            <a:avLst/>
-          </a:prstGeom>
-          <a:noFill/>
-        </p:spPr>
-        <p:txBody>
-          <a:bodyPr wrap="square" lIns="0" rIns="0" tIns="0" bIns="0">
-            <a:spAutoFit/>
-          </a:bodyPr>
-          <a:lstStyle/>
-          <a:p>
-            <a:r>
-              <a:rPr sz="1070" b="0" i="0">
-                <a:solidFill>
-                  <a:srgbClr val="3D3D3A"/>
-                </a:solidFill>
-                <a:latin typeface="Inter"/>
-              </a:rPr>
-              <a:t>Erster Punkt als ganzer Satz.</a:t>
-            </a:r>
-          </a:p>
-        </p:txBody>
-      </p:sp>
-      <p:sp>
-        <p:nvSpPr>
-          <p:cNvPr id="16" name="TextBox 15"/>
-          <p:cNvSpPr txBox="1"/>
-          <p:nvPr/>
-        </p:nvSpPr>
-        <p:spPr>
-          <a:xfrm>
-            <a:off x="6299200" y="4032673"/>
-            <a:ext cx="4910666" cy="250613"/>
-          </a:xfrm>
-          <a:prstGeom prst="rect">
-            <a:avLst/>
-          </a:prstGeom>
-          <a:noFill/>
-        </p:spPr>
-        <p:txBody>
-          <a:bodyPr wrap="square" lIns="0" rIns="0" tIns="0" bIns="0">
-            <a:spAutoFit/>
-          </a:bodyPr>
-          <a:lstStyle/>
-          <a:p>
-            <a:r>
-              <a:rPr sz="1070" b="0" i="0">
-                <a:solidFill>
-                  <a:srgbClr val="3D3D3A"/>
-                </a:solidFill>
-                <a:latin typeface="Inter"/>
-              </a:rPr>
-              <a:t>Zweiter Punkt als ganzer Satz.</a:t>
-            </a:r>
-          </a:p>
-        </p:txBody>
-      </p:sp>
-      <p:sp>
-        <p:nvSpPr>
-          <p:cNvPr id="17" name="TextBox 16"/>
-          <p:cNvSpPr txBox="1"/>
-          <p:nvPr/>
-        </p:nvSpPr>
-        <p:spPr>
-          <a:xfrm>
-            <a:off x="6299200" y="4384886"/>
-            <a:ext cx="4910666" cy="250613"/>
-          </a:xfrm>
-          <a:prstGeom prst="rect">
-            <a:avLst/>
-          </a:prstGeom>
-          <a:noFill/>
-        </p:spPr>
-        <p:txBody>
-          <a:bodyPr wrap="square" lIns="0" rIns="0" tIns="0" bIns="0">
-            <a:spAutoFit/>
-          </a:bodyPr>
-          <a:lstStyle/>
-          <a:p>
-            <a:r>
-              <a:rPr sz="1070" b="0" i="0">
-                <a:solidFill>
-                  <a:srgbClr val="3D3D3A"/>
-                </a:solidFill>
-                <a:latin typeface="Inter"/>
-              </a:rPr>
-              <a:t>Dritter Punkt als ganzer Satz.</a:t>
+              <a:t>14</a:t>
             </a:r>
           </a:p>
         </p:txBody>
@@ -8190,16 +7899,16 @@
         <p:spPr>
           <a:xfrm>
             <a:off x="1015999" y="389466"/>
-            <a:ext cx="774700" cy="176106"/>
-          </a:xfrm>
-          <a:prstGeom prst="rect">
-            <a:avLst/>
-          </a:prstGeom>
-          <a:noFill/>
-        </p:spPr>
-        <p:txBody>
-          <a:bodyPr wrap="square" lIns="0" rIns="0" tIns="0" bIns="0">
-            <a:spAutoFit/>
+            <a:ext cx="4775200" cy="176106"/>
+          </a:xfrm>
+          <a:prstGeom prst="rect">
+            <a:avLst/>
+          </a:prstGeom>
+          <a:noFill/>
+        </p:spPr>
+        <p:txBody>
+          <a:bodyPr wrap="none" lIns="0" rIns="0" tIns="0" bIns="0">
+            <a:noAutofit/>
           </a:bodyPr>
           <a:lstStyle/>
           <a:p>
@@ -8218,40 +7927,6 @@
       <p:sp>
         <p:nvSpPr>
           <p:cNvPr id="4" name="TextBox 3"/>
-          <p:cNvSpPr txBox="1"/>
-          <p:nvPr/>
-        </p:nvSpPr>
-        <p:spPr>
-          <a:xfrm>
-            <a:off x="2003213" y="6466839"/>
-            <a:ext cx="904239" cy="176106"/>
-          </a:xfrm>
-          <a:prstGeom prst="rect">
-            <a:avLst/>
-          </a:prstGeom>
-          <a:noFill/>
-        </p:spPr>
-        <p:txBody>
-          <a:bodyPr wrap="square" lIns="0" rIns="0" tIns="0" bIns="0">
-            <a:spAutoFit/>
-          </a:bodyPr>
-          <a:lstStyle/>
-          <a:p>
-            <a:r>
-              <a:rPr sz="800" b="1" i="0">
-                <a:solidFill>
-                  <a:srgbClr val="1C1C1E"/>
-                </a:solidFill>
-                <a:latin typeface="Inter"/>
-              </a:rPr>
-              <a:t>Kunde Projekttitel</a:t>
-            </a:r>
-          </a:p>
-        </p:txBody>
-      </p:sp>
-      <p:sp>
-        <p:nvSpPr>
-          <p:cNvPr id="5" name="TextBox 4"/>
           <p:cNvSpPr txBox="1"/>
           <p:nvPr/>
         </p:nvSpPr>
@@ -8267,7 +7942,7 @@
         </p:spPr>
         <p:txBody>
           <a:bodyPr wrap="square" lIns="0" rIns="0" tIns="0" bIns="0">
-            <a:spAutoFit/>
+            <a:normAutofit/>
           </a:bodyPr>
           <a:lstStyle/>
           <a:p>
@@ -8285,7 +7960,7 @@
       </p:sp>
       <p:sp>
         <p:nvSpPr>
-          <p:cNvPr id="6" name="TextBox 5"/>
+          <p:cNvPr id="5" name="TextBox 4"/>
           <p:cNvSpPr txBox="1"/>
           <p:nvPr/>
         </p:nvSpPr>
@@ -8301,7 +7976,7 @@
         </p:spPr>
         <p:txBody>
           <a:bodyPr wrap="square" lIns="0" rIns="0" tIns="0" bIns="0">
-            <a:spAutoFit/>
+            <a:normAutofit/>
           </a:bodyPr>
           <a:lstStyle/>
           <a:p>
@@ -8319,7 +7994,7 @@
       </p:sp>
       <p:sp>
         <p:nvSpPr>
-          <p:cNvPr id="7" name="TextBox 6"/>
+          <p:cNvPr id="6" name="TextBox 5"/>
           <p:cNvSpPr txBox="1"/>
           <p:nvPr/>
         </p:nvSpPr>
@@ -8335,7 +8010,7 @@
         </p:spPr>
         <p:txBody>
           <a:bodyPr wrap="square" lIns="0" rIns="0" tIns="0" bIns="0">
-            <a:spAutoFit/>
+            <a:normAutofit/>
           </a:bodyPr>
           <a:lstStyle/>
           <a:p>
@@ -8353,7 +8028,109 @@
       </p:sp>
       <p:sp>
         <p:nvSpPr>
+          <p:cNvPr id="7" name="TextBox 6"/>
+          <p:cNvSpPr txBox="1"/>
+          <p:nvPr/>
+        </p:nvSpPr>
+        <p:spPr>
+          <a:xfrm>
+            <a:off x="1286933" y="4289213"/>
+            <a:ext cx="3420533" cy="562186"/>
+          </a:xfrm>
+          <a:prstGeom prst="rect">
+            <a:avLst/>
+          </a:prstGeom>
+          <a:noFill/>
+        </p:spPr>
+        <p:txBody>
+          <a:bodyPr wrap="square" lIns="0" rIns="0" tIns="0" bIns="0">
+            <a:normAutofit/>
+          </a:bodyPr>
+          <a:lstStyle/>
+          <a:p>
+            <a:r>
+              <a:rPr sz="1600" b="0" i="0">
+                <a:solidFill>
+                  <a:srgbClr val="1C1C1E"/>
+                </a:solidFill>
+                <a:latin typeface="Inter"/>
+              </a:rPr>
+              <a:t>Statement des dritten Dings in einer Zeile.</a:t>
+            </a:r>
+          </a:p>
+        </p:txBody>
+      </p:sp>
+      <p:sp>
+        <p:nvSpPr>
           <p:cNvPr id="8" name="TextBox 7"/>
+          <p:cNvSpPr txBox="1"/>
+          <p:nvPr/>
+        </p:nvSpPr>
+        <p:spPr>
+          <a:xfrm>
+            <a:off x="1286933" y="5262880"/>
+            <a:ext cx="4470400" cy="211666"/>
+          </a:xfrm>
+          <a:prstGeom prst="rect">
+            <a:avLst/>
+          </a:prstGeom>
+          <a:noFill/>
+        </p:spPr>
+        <p:txBody>
+          <a:bodyPr wrap="square" lIns="0" rIns="0" tIns="0" bIns="0">
+            <a:normAutofit/>
+          </a:bodyPr>
+          <a:lstStyle/>
+          <a:p>
+            <a:r>
+              <a:rPr sz="930" b="0" i="0">
+                <a:solidFill>
+                  <a:srgbClr val="3D3D3A"/>
+                </a:solidFill>
+                <a:latin typeface="Inter"/>
+              </a:rPr>
+              <a:t>Produktname C</a:t>
+            </a:r>
+          </a:p>
+        </p:txBody>
+      </p:sp>
+      <p:sp>
+        <p:nvSpPr>
+          <p:cNvPr id="9" name="TextBox 8"/>
+          <p:cNvSpPr txBox="1"/>
+          <p:nvPr/>
+        </p:nvSpPr>
+        <p:spPr>
+          <a:xfrm>
+            <a:off x="2003213" y="6466839"/>
+            <a:ext cx="3928533" cy="176106"/>
+          </a:xfrm>
+          <a:prstGeom prst="rect">
+            <a:avLst/>
+          </a:prstGeom>
+          <a:noFill/>
+        </p:spPr>
+        <p:txBody>
+          <a:bodyPr wrap="none" lIns="0" rIns="0" tIns="0" bIns="0">
+            <a:noAutofit/>
+          </a:bodyPr>
+          <a:lstStyle/>
+          <a:p>
+            <a:r>
+              <a:rPr sz="800" b="1" i="0">
+                <a:solidFill>
+                  <a:srgbClr val="1C1C1E"/>
+                </a:solidFill>
+                <a:latin typeface="Inter"/>
+              </a:rPr>
+              <a:t>Kunde Projekttitel</a:t>
+            </a:r>
+          </a:p>
+        </p:txBody>
+      </p:sp>
+      <p:sp>
+        <p:nvSpPr>
+          <p:cNvPr id="10" name="TextBox 9"/>
           <p:cNvSpPr txBox="1"/>
           <p:nvPr/>
         </p:nvSpPr>
@@ -8369,7 +8146,7 @@
         </p:spPr>
         <p:txBody>
           <a:bodyPr wrap="square" lIns="0" rIns="0" tIns="0" bIns="0">
-            <a:spAutoFit/>
+            <a:normAutofit/>
           </a:bodyPr>
           <a:lstStyle/>
           <a:p>
@@ -8387,7 +8164,7 @@
       </p:sp>
       <p:sp>
         <p:nvSpPr>
-          <p:cNvPr id="9" name="TextBox 8"/>
+          <p:cNvPr id="11" name="TextBox 10"/>
           <p:cNvSpPr txBox="1"/>
           <p:nvPr/>
         </p:nvSpPr>
@@ -8403,7 +8180,7 @@
         </p:spPr>
         <p:txBody>
           <a:bodyPr wrap="square" lIns="0" rIns="0" tIns="0" bIns="0">
-            <a:spAutoFit/>
+            <a:normAutofit/>
           </a:bodyPr>
           <a:lstStyle/>
           <a:p>
@@ -8415,74 +8192,6 @@
                 <a:latin typeface="Inter"/>
               </a:rPr>
               <a:t>Produktname B</a:t>
-            </a:r>
-          </a:p>
-        </p:txBody>
-      </p:sp>
-      <p:sp>
-        <p:nvSpPr>
-          <p:cNvPr id="10" name="TextBox 9"/>
-          <p:cNvSpPr txBox="1"/>
-          <p:nvPr/>
-        </p:nvSpPr>
-        <p:spPr>
-          <a:xfrm>
-            <a:off x="1286933" y="4289213"/>
-            <a:ext cx="3420533" cy="562186"/>
-          </a:xfrm>
-          <a:prstGeom prst="rect">
-            <a:avLst/>
-          </a:prstGeom>
-          <a:noFill/>
-        </p:spPr>
-        <p:txBody>
-          <a:bodyPr wrap="square" lIns="0" rIns="0" tIns="0" bIns="0">
-            <a:spAutoFit/>
-          </a:bodyPr>
-          <a:lstStyle/>
-          <a:p>
-            <a:r>
-              <a:rPr sz="1600" b="0" i="0">
-                <a:solidFill>
-                  <a:srgbClr val="1C1C1E"/>
-                </a:solidFill>
-                <a:latin typeface="Inter"/>
-              </a:rPr>
-              <a:t>Statement des dritten Dings in einer Zeile.</a:t>
-            </a:r>
-          </a:p>
-        </p:txBody>
-      </p:sp>
-      <p:sp>
-        <p:nvSpPr>
-          <p:cNvPr id="11" name="TextBox 10"/>
-          <p:cNvSpPr txBox="1"/>
-          <p:nvPr/>
-        </p:nvSpPr>
-        <p:spPr>
-          <a:xfrm>
-            <a:off x="1286933" y="5262880"/>
-            <a:ext cx="4470400" cy="211666"/>
-          </a:xfrm>
-          <a:prstGeom prst="rect">
-            <a:avLst/>
-          </a:prstGeom>
-          <a:noFill/>
-        </p:spPr>
-        <p:txBody>
-          <a:bodyPr wrap="square" lIns="0" rIns="0" tIns="0" bIns="0">
-            <a:spAutoFit/>
-          </a:bodyPr>
-          <a:lstStyle/>
-          <a:p>
-            <a:r>
-              <a:rPr sz="930" b="0" i="0">
-                <a:solidFill>
-                  <a:srgbClr val="3D3D3A"/>
-                </a:solidFill>
-                <a:latin typeface="Inter"/>
-              </a:rPr>
-              <a:t>Produktname C</a:t>
             </a:r>
           </a:p>
         </p:txBody>
@@ -8505,7 +8214,7 @@
         </p:spPr>
         <p:txBody>
           <a:bodyPr wrap="square" lIns="0" rIns="0" tIns="0" bIns="0">
-            <a:spAutoFit/>
+            <a:normAutofit/>
           </a:bodyPr>
           <a:lstStyle/>
           <a:p>
@@ -8539,7 +8248,7 @@
         </p:spPr>
         <p:txBody>
           <a:bodyPr wrap="square" lIns="0" rIns="0" tIns="0" bIns="0">
-            <a:spAutoFit/>
+            <a:normAutofit/>
           </a:bodyPr>
           <a:lstStyle/>
           <a:p>
@@ -8551,6 +8260,41 @@
                 <a:latin typeface="Inter"/>
               </a:rPr>
               <a:t>Produktname D</a:t>
+            </a:r>
+          </a:p>
+        </p:txBody>
+      </p:sp>
+      <p:sp>
+        <p:nvSpPr>
+          <p:cNvPr id="14" name="TextBox 13"/>
+          <p:cNvSpPr txBox="1"/>
+          <p:nvPr/>
+        </p:nvSpPr>
+        <p:spPr>
+          <a:xfrm>
+            <a:off x="10634133" y="6495626"/>
+            <a:ext cx="575733" cy="176106"/>
+          </a:xfrm>
+          <a:prstGeom prst="rect">
+            <a:avLst/>
+          </a:prstGeom>
+          <a:noFill/>
+        </p:spPr>
+        <p:txBody>
+          <a:bodyPr wrap="none" lIns="0" rIns="0" tIns="0" bIns="0">
+            <a:noAutofit/>
+          </a:bodyPr>
+          <a:lstStyle/>
+          <a:p>
+            <a:pPr algn="r"/>
+            <a:r>
+              <a:rPr sz="800" b="0" i="0">
+                <a:solidFill>
+                  <a:srgbClr val="6B6B65"/>
+                </a:solidFill>
+                <a:latin typeface="Inter"/>
+              </a:rPr>
+              <a:t>15</a:t>
             </a:r>
           </a:p>
         </p:txBody>
@@ -8614,16 +8358,16 @@
         <p:spPr>
           <a:xfrm>
             <a:off x="1015999" y="389466"/>
-            <a:ext cx="774700" cy="176106"/>
-          </a:xfrm>
-          <a:prstGeom prst="rect">
-            <a:avLst/>
-          </a:prstGeom>
-          <a:noFill/>
-        </p:spPr>
-        <p:txBody>
-          <a:bodyPr wrap="square" lIns="0" rIns="0" tIns="0" bIns="0">
-            <a:spAutoFit/>
+            <a:ext cx="4775200" cy="176106"/>
+          </a:xfrm>
+          <a:prstGeom prst="rect">
+            <a:avLst/>
+          </a:prstGeom>
+          <a:noFill/>
+        </p:spPr>
+        <p:txBody>
+          <a:bodyPr wrap="none" lIns="0" rIns="0" tIns="0" bIns="0">
+            <a:noAutofit/>
           </a:bodyPr>
           <a:lstStyle/>
           <a:p>
@@ -8642,40 +8386,6 @@
       <p:sp>
         <p:nvSpPr>
           <p:cNvPr id="4" name="TextBox 3"/>
-          <p:cNvSpPr txBox="1"/>
-          <p:nvPr/>
-        </p:nvSpPr>
-        <p:spPr>
-          <a:xfrm>
-            <a:off x="2003213" y="6466839"/>
-            <a:ext cx="904239" cy="176106"/>
-          </a:xfrm>
-          <a:prstGeom prst="rect">
-            <a:avLst/>
-          </a:prstGeom>
-          <a:noFill/>
-        </p:spPr>
-        <p:txBody>
-          <a:bodyPr wrap="square" lIns="0" rIns="0" tIns="0" bIns="0">
-            <a:spAutoFit/>
-          </a:bodyPr>
-          <a:lstStyle/>
-          <a:p>
-            <a:r>
-              <a:rPr sz="800" b="1" i="0">
-                <a:solidFill>
-                  <a:srgbClr val="1C1C1E"/>
-                </a:solidFill>
-                <a:latin typeface="Inter"/>
-              </a:rPr>
-              <a:t>Kunde Projekttitel</a:t>
-            </a:r>
-          </a:p>
-        </p:txBody>
-      </p:sp>
-      <p:sp>
-        <p:nvSpPr>
-          <p:cNvPr id="5" name="TextBox 4"/>
           <p:cNvSpPr txBox="1"/>
           <p:nvPr/>
         </p:nvSpPr>
@@ -8691,7 +8401,7 @@
         </p:spPr>
         <p:txBody>
           <a:bodyPr wrap="square" lIns="0" rIns="0" tIns="0" bIns="0">
-            <a:spAutoFit/>
+            <a:normAutofit/>
           </a:bodyPr>
           <a:lstStyle/>
           <a:p>
@@ -8703,6 +8413,41 @@
                 <a:latin typeface="Inter"/>
               </a:rPr>
               <a:t>Vier Punkte, die jetzt aktiv gesteuert werden müssen</a:t>
+            </a:r>
+          </a:p>
+        </p:txBody>
+      </p:sp>
+      <p:sp>
+        <p:nvSpPr>
+          <p:cNvPr id="5" name="TextBox 4"/>
+          <p:cNvSpPr txBox="1"/>
+          <p:nvPr/>
+        </p:nvSpPr>
+        <p:spPr>
+          <a:xfrm>
+            <a:off x="1015999" y="5511800"/>
+            <a:ext cx="10193866" cy="176106"/>
+          </a:xfrm>
+          <a:prstGeom prst="rect">
+            <a:avLst/>
+          </a:prstGeom>
+          <a:noFill/>
+        </p:spPr>
+        <p:txBody>
+          <a:bodyPr wrap="square" lIns="0" rIns="0" tIns="0" bIns="0">
+            <a:normAutofit/>
+          </a:bodyPr>
+          <a:lstStyle/>
+          <a:p>
+            <a:pPr algn="r"/>
+            <a:r>
+              <a:rPr sz="800" b="0" i="0">
+                <a:solidFill>
+                  <a:srgbClr val="6B6B65"/>
+                </a:solidFill>
+                <a:latin typeface="Inter"/>
+              </a:rPr>
+              <a:t>Quellen: … in einem Satz</a:t>
             </a:r>
           </a:p>
         </p:txBody>
@@ -8725,7 +8470,7 @@
         </p:spPr>
         <p:txBody>
           <a:bodyPr wrap="square" lIns="0" rIns="0" tIns="0" bIns="0">
-            <a:spAutoFit/>
+            <a:normAutofit/>
           </a:bodyPr>
           <a:lstStyle/>
           <a:p>
@@ -8750,7 +8495,7 @@
         <p:spPr>
           <a:xfrm>
             <a:off x="1219200" y="3581399"/>
-            <a:ext cx="2015066" cy="507999"/>
+            <a:ext cx="2015066" cy="1244600"/>
           </a:xfrm>
           <a:prstGeom prst="rect">
             <a:avLst/>
@@ -8759,7 +8504,7 @@
         </p:spPr>
         <p:txBody>
           <a:bodyPr wrap="square" lIns="0" rIns="0" tIns="0" bIns="0">
-            <a:spAutoFit/>
+            <a:normAutofit/>
           </a:bodyPr>
           <a:lstStyle/>
           <a:p>
@@ -8773,6 +8518,38 @@
               <a:t>Erster Punkt als ganzer Satz</a:t>
             </a:r>
           </a:p>
+          <a:p>
+            <a:pPr>
+              <a:spcBef>
+                <a:spcPts val="800"/>
+              </a:spcBef>
+            </a:pPr>
+            <a:r>
+              <a:rPr sz="930" b="0" i="0">
+                <a:solidFill>
+                  <a:srgbClr val="3D3D3A"/>
+                </a:solidFill>
+                <a:latin typeface="Inter"/>
+              </a:rPr>
+              <a:t>Zwei bis drei Sätze, die den Punkt tragen und belegen.</a:t>
+            </a:r>
+          </a:p>
+          <a:p>
+            <a:pPr>
+              <a:spcBef>
+                <a:spcPts val="800"/>
+              </a:spcBef>
+            </a:pPr>
+            <a:r>
+              <a:rPr sz="930" b="0" i="0">
+                <a:solidFill>
+                  <a:srgbClr val="6B6B65"/>
+                </a:solidFill>
+                <a:latin typeface="Inter"/>
+              </a:rPr>
+              <a:t>Indikator oder Beleg in einem Satz.</a:t>
+            </a:r>
+          </a:p>
         </p:txBody>
       </p:sp>
       <p:sp>
@@ -8783,28 +8560,28 @@
         </p:nvSpPr>
         <p:spPr>
           <a:xfrm>
-            <a:off x="1219200" y="4157133"/>
-            <a:ext cx="2015066" cy="389466"/>
-          </a:xfrm>
-          <a:prstGeom prst="rect">
-            <a:avLst/>
-          </a:prstGeom>
-          <a:noFill/>
-        </p:spPr>
-        <p:txBody>
-          <a:bodyPr wrap="square" lIns="0" rIns="0" tIns="0" bIns="0">
-            <a:spAutoFit/>
-          </a:bodyPr>
-          <a:lstStyle/>
-          <a:p>
-            <a:r>
-              <a:rPr sz="930" b="0" i="0">
-                <a:solidFill>
-                  <a:srgbClr val="3D3D3A"/>
-                </a:solidFill>
-                <a:latin typeface="Inter"/>
-              </a:rPr>
-              <a:t>Zwei bis drei Sätze, die den Punkt tragen und belegen.</a:t>
+            <a:off x="2003213" y="6466839"/>
+            <a:ext cx="3928533" cy="176106"/>
+          </a:xfrm>
+          <a:prstGeom prst="rect">
+            <a:avLst/>
+          </a:prstGeom>
+          <a:noFill/>
+        </p:spPr>
+        <p:txBody>
+          <a:bodyPr wrap="none" lIns="0" rIns="0" tIns="0" bIns="0">
+            <a:noAutofit/>
+          </a:bodyPr>
+          <a:lstStyle/>
+          <a:p>
+            <a:r>
+              <a:rPr sz="800" b="1" i="0">
+                <a:solidFill>
+                  <a:srgbClr val="1C1C1E"/>
+                </a:solidFill>
+                <a:latin typeface="Inter"/>
+              </a:rPr>
+              <a:t>Kunde Projekttitel</a:t>
             </a:r>
           </a:p>
         </p:txBody>
@@ -8812,40 +8589,6 @@
       <p:sp>
         <p:nvSpPr>
           <p:cNvPr id="9" name="TextBox 8"/>
-          <p:cNvSpPr txBox="1"/>
-          <p:nvPr/>
-        </p:nvSpPr>
-        <p:spPr>
-          <a:xfrm>
-            <a:off x="1219200" y="4614333"/>
-            <a:ext cx="2015066" cy="211666"/>
-          </a:xfrm>
-          <a:prstGeom prst="rect">
-            <a:avLst/>
-          </a:prstGeom>
-          <a:noFill/>
-        </p:spPr>
-        <p:txBody>
-          <a:bodyPr wrap="square" lIns="0" rIns="0" tIns="0" bIns="0">
-            <a:spAutoFit/>
-          </a:bodyPr>
-          <a:lstStyle/>
-          <a:p>
-            <a:r>
-              <a:rPr sz="930" b="0" i="0">
-                <a:solidFill>
-                  <a:srgbClr val="6B6B65"/>
-                </a:solidFill>
-                <a:latin typeface="Inter"/>
-              </a:rPr>
-              <a:t>Indikator oder Beleg in einem Satz.</a:t>
-            </a:r>
-          </a:p>
-        </p:txBody>
-      </p:sp>
-      <p:sp>
-        <p:nvSpPr>
-          <p:cNvPr id="10" name="TextBox 9"/>
           <p:cNvSpPr txBox="1"/>
           <p:nvPr/>
         </p:nvSpPr>
@@ -8861,7 +8604,7 @@
         </p:spPr>
         <p:txBody>
           <a:bodyPr wrap="square" lIns="0" rIns="0" tIns="0" bIns="0">
-            <a:spAutoFit/>
+            <a:normAutofit/>
           </a:bodyPr>
           <a:lstStyle/>
           <a:p>
@@ -8879,109 +8622,73 @@
       </p:sp>
       <p:sp>
         <p:nvSpPr>
+          <p:cNvPr id="10" name="TextBox 9"/>
+          <p:cNvSpPr txBox="1"/>
+          <p:nvPr/>
+        </p:nvSpPr>
+        <p:spPr>
+          <a:xfrm>
+            <a:off x="3809999" y="3581399"/>
+            <a:ext cx="2015066" cy="1422400"/>
+          </a:xfrm>
+          <a:prstGeom prst="rect">
+            <a:avLst/>
+          </a:prstGeom>
+          <a:noFill/>
+        </p:spPr>
+        <p:txBody>
+          <a:bodyPr wrap="square" lIns="0" rIns="0" tIns="0" bIns="0">
+            <a:normAutofit/>
+          </a:bodyPr>
+          <a:lstStyle/>
+          <a:p>
+            <a:r>
+              <a:rPr sz="1330" b="0" i="0">
+                <a:solidFill>
+                  <a:srgbClr val="1C1C1E"/>
+                </a:solidFill>
+                <a:latin typeface="Inter"/>
+              </a:rPr>
+              <a:t>Zweiter Punkt als ganzer Satz</a:t>
+            </a:r>
+          </a:p>
+          <a:p>
+            <a:pPr>
+              <a:spcBef>
+                <a:spcPts val="800"/>
+              </a:spcBef>
+            </a:pPr>
+            <a:r>
+              <a:rPr sz="930" b="0" i="0">
+                <a:solidFill>
+                  <a:srgbClr val="3D3D3A"/>
+                </a:solidFill>
+                <a:latin typeface="Inter"/>
+              </a:rPr>
+              <a:t>Zwei bis drei Sätze, die den Punkt tragen.</a:t>
+            </a:r>
+          </a:p>
+          <a:p>
+            <a:pPr>
+              <a:spcBef>
+                <a:spcPts val="800"/>
+              </a:spcBef>
+            </a:pPr>
+            <a:r>
+              <a:rPr sz="930" b="0" i="1">
+                <a:solidFill>
+                  <a:srgbClr val="3D3D3A"/>
+                </a:solidFill>
+                <a:latin typeface="Inter"/>
+              </a:rPr>
+              <a:t>„Wörtliches Zitat als Beleg." — Rolle, Kontext</a:t>
+            </a:r>
+          </a:p>
+        </p:txBody>
+      </p:sp>
+      <p:sp>
+        <p:nvSpPr>
           <p:cNvPr id="11" name="TextBox 10"/>
-          <p:cNvSpPr txBox="1"/>
-          <p:nvPr/>
-        </p:nvSpPr>
-        <p:spPr>
-          <a:xfrm>
-            <a:off x="3809999" y="3581399"/>
-            <a:ext cx="2015066" cy="507999"/>
-          </a:xfrm>
-          <a:prstGeom prst="rect">
-            <a:avLst/>
-          </a:prstGeom>
-          <a:noFill/>
-        </p:spPr>
-        <p:txBody>
-          <a:bodyPr wrap="square" lIns="0" rIns="0" tIns="0" bIns="0">
-            <a:spAutoFit/>
-          </a:bodyPr>
-          <a:lstStyle/>
-          <a:p>
-            <a:r>
-              <a:rPr sz="1330" b="0" i="0">
-                <a:solidFill>
-                  <a:srgbClr val="1C1C1E"/>
-                </a:solidFill>
-                <a:latin typeface="Inter"/>
-              </a:rPr>
-              <a:t>Zweiter Punkt als ganzer Satz</a:t>
-            </a:r>
-          </a:p>
-        </p:txBody>
-      </p:sp>
-      <p:sp>
-        <p:nvSpPr>
-          <p:cNvPr id="12" name="TextBox 11"/>
-          <p:cNvSpPr txBox="1"/>
-          <p:nvPr/>
-        </p:nvSpPr>
-        <p:spPr>
-          <a:xfrm>
-            <a:off x="3809999" y="4157133"/>
-            <a:ext cx="2015066" cy="389466"/>
-          </a:xfrm>
-          <a:prstGeom prst="rect">
-            <a:avLst/>
-          </a:prstGeom>
-          <a:noFill/>
-        </p:spPr>
-        <p:txBody>
-          <a:bodyPr wrap="square" lIns="0" rIns="0" tIns="0" bIns="0">
-            <a:spAutoFit/>
-          </a:bodyPr>
-          <a:lstStyle/>
-          <a:p>
-            <a:r>
-              <a:rPr sz="930" b="0" i="0">
-                <a:solidFill>
-                  <a:srgbClr val="3D3D3A"/>
-                </a:solidFill>
-                <a:latin typeface="Inter"/>
-              </a:rPr>
-              <a:t>Zwei bis drei Sätze, die den Punkt tragen.</a:t>
-            </a:r>
-          </a:p>
-        </p:txBody>
-      </p:sp>
-      <p:sp>
-        <p:nvSpPr>
-          <p:cNvPr id="13" name="TextBox 12"/>
-          <p:cNvSpPr txBox="1"/>
-          <p:nvPr/>
-        </p:nvSpPr>
-        <p:spPr>
-          <a:xfrm>
-            <a:off x="3809999" y="4614333"/>
-            <a:ext cx="2015066" cy="389466"/>
-          </a:xfrm>
-          <a:prstGeom prst="rect">
-            <a:avLst/>
-          </a:prstGeom>
-          <a:noFill/>
-        </p:spPr>
-        <p:txBody>
-          <a:bodyPr wrap="square" lIns="0" rIns="0" tIns="0" bIns="0">
-            <a:spAutoFit/>
-          </a:bodyPr>
-          <a:lstStyle/>
-          <a:p>
-            <a:r>
-              <a:rPr sz="930" b="0" i="1">
-                <a:solidFill>
-                  <a:srgbClr val="3D3D3A"/>
-                </a:solidFill>
-                <a:latin typeface="Inter"/>
-              </a:rPr>
-              <a:t>„Wörtliches Zitat als Beleg." — Rolle, Kontext</a:t>
-            </a:r>
-          </a:p>
-        </p:txBody>
-      </p:sp>
-      <p:sp>
-        <p:nvSpPr>
-          <p:cNvPr id="14" name="TextBox 13"/>
           <p:cNvSpPr txBox="1"/>
           <p:nvPr/>
         </p:nvSpPr>
@@ -8997,7 +8704,7 @@
         </p:spPr>
         <p:txBody>
           <a:bodyPr wrap="square" lIns="0" rIns="0" tIns="0" bIns="0">
-            <a:spAutoFit/>
+            <a:normAutofit/>
           </a:bodyPr>
           <a:lstStyle/>
           <a:p>
@@ -9015,14 +8722,14 @@
       </p:sp>
       <p:sp>
         <p:nvSpPr>
-          <p:cNvPr id="15" name="TextBox 14"/>
+          <p:cNvPr id="12" name="TextBox 11"/>
           <p:cNvSpPr txBox="1"/>
           <p:nvPr/>
         </p:nvSpPr>
         <p:spPr>
           <a:xfrm>
             <a:off x="6400800" y="3581399"/>
-            <a:ext cx="2015066" cy="507999"/>
+            <a:ext cx="2015066" cy="965199"/>
           </a:xfrm>
           <a:prstGeom prst="rect">
             <a:avLst/>
@@ -9031,7 +8738,7 @@
         </p:spPr>
         <p:txBody>
           <a:bodyPr wrap="square" lIns="0" rIns="0" tIns="0" bIns="0">
-            <a:spAutoFit/>
+            <a:normAutofit/>
           </a:bodyPr>
           <a:lstStyle/>
           <a:p>
@@ -9045,30 +8752,12 @@
               <a:t>Dritter Punkt als ganzer Satz</a:t>
             </a:r>
           </a:p>
-        </p:txBody>
-      </p:sp>
-      <p:sp>
-        <p:nvSpPr>
-          <p:cNvPr id="16" name="TextBox 15"/>
-          <p:cNvSpPr txBox="1"/>
-          <p:nvPr/>
-        </p:nvSpPr>
-        <p:spPr>
-          <a:xfrm>
-            <a:off x="6400800" y="4157133"/>
-            <a:ext cx="2015066" cy="389466"/>
-          </a:xfrm>
-          <a:prstGeom prst="rect">
-            <a:avLst/>
-          </a:prstGeom>
-          <a:noFill/>
-        </p:spPr>
-        <p:txBody>
-          <a:bodyPr wrap="square" lIns="0" rIns="0" tIns="0" bIns="0">
-            <a:spAutoFit/>
-          </a:bodyPr>
-          <a:lstStyle/>
-          <a:p>
+          <a:p>
+            <a:pPr>
+              <a:spcBef>
+                <a:spcPts val="800"/>
+              </a:spcBef>
+            </a:pPr>
             <a:r>
               <a:rPr sz="930" b="0" i="0">
                 <a:solidFill>
@@ -9083,7 +8772,7 @@
       </p:sp>
       <p:sp>
         <p:nvSpPr>
-          <p:cNvPr id="17" name="TextBox 16"/>
+          <p:cNvPr id="13" name="TextBox 12"/>
           <p:cNvSpPr txBox="1"/>
           <p:nvPr/>
         </p:nvSpPr>
@@ -9099,7 +8788,7 @@
         </p:spPr>
         <p:txBody>
           <a:bodyPr wrap="square" lIns="0" rIns="0" tIns="0" bIns="0">
-            <a:spAutoFit/>
+            <a:normAutofit/>
           </a:bodyPr>
           <a:lstStyle/>
           <a:p>
@@ -9117,14 +8806,14 @@
       </p:sp>
       <p:sp>
         <p:nvSpPr>
-          <p:cNvPr id="18" name="TextBox 17"/>
+          <p:cNvPr id="14" name="TextBox 13"/>
           <p:cNvSpPr txBox="1"/>
           <p:nvPr/>
         </p:nvSpPr>
         <p:spPr>
           <a:xfrm>
             <a:off x="8991600" y="3581399"/>
-            <a:ext cx="2015066" cy="507999"/>
+            <a:ext cx="2015066" cy="965199"/>
           </a:xfrm>
           <a:prstGeom prst="rect">
             <a:avLst/>
@@ -9133,7 +8822,7 @@
         </p:spPr>
         <p:txBody>
           <a:bodyPr wrap="square" lIns="0" rIns="0" tIns="0" bIns="0">
-            <a:spAutoFit/>
+            <a:normAutofit/>
           </a:bodyPr>
           <a:lstStyle/>
           <a:p>
@@ -9147,30 +8836,12 @@
               <a:t>Vierter Punkt als ganzer Satz</a:t>
             </a:r>
           </a:p>
-        </p:txBody>
-      </p:sp>
-      <p:sp>
-        <p:nvSpPr>
-          <p:cNvPr id="19" name="TextBox 18"/>
-          <p:cNvSpPr txBox="1"/>
-          <p:nvPr/>
-        </p:nvSpPr>
-        <p:spPr>
-          <a:xfrm>
-            <a:off x="8991600" y="4157133"/>
-            <a:ext cx="2015066" cy="389466"/>
-          </a:xfrm>
-          <a:prstGeom prst="rect">
-            <a:avLst/>
-          </a:prstGeom>
-          <a:noFill/>
-        </p:spPr>
-        <p:txBody>
-          <a:bodyPr wrap="square" lIns="0" rIns="0" tIns="0" bIns="0">
-            <a:spAutoFit/>
-          </a:bodyPr>
-          <a:lstStyle/>
-          <a:p>
+          <a:p>
+            <a:pPr>
+              <a:spcBef>
+                <a:spcPts val="800"/>
+              </a:spcBef>
+            </a:pPr>
             <a:r>
               <a:rPr sz="930" b="0" i="0">
                 <a:solidFill>
@@ -9185,23 +8856,23 @@
       </p:sp>
       <p:sp>
         <p:nvSpPr>
-          <p:cNvPr id="20" name="TextBox 19"/>
-          <p:cNvSpPr txBox="1"/>
-          <p:nvPr/>
-        </p:nvSpPr>
-        <p:spPr>
-          <a:xfrm>
-            <a:off x="1015999" y="5511800"/>
-            <a:ext cx="10193866" cy="176106"/>
-          </a:xfrm>
-          <a:prstGeom prst="rect">
-            <a:avLst/>
-          </a:prstGeom>
-          <a:noFill/>
-        </p:spPr>
-        <p:txBody>
-          <a:bodyPr wrap="square" lIns="0" rIns="0" tIns="0" bIns="0">
-            <a:spAutoFit/>
+          <p:cNvPr id="15" name="TextBox 14"/>
+          <p:cNvSpPr txBox="1"/>
+          <p:nvPr/>
+        </p:nvSpPr>
+        <p:spPr>
+          <a:xfrm>
+            <a:off x="10634133" y="6495626"/>
+            <a:ext cx="575733" cy="176106"/>
+          </a:xfrm>
+          <a:prstGeom prst="rect">
+            <a:avLst/>
+          </a:prstGeom>
+          <a:noFill/>
+        </p:spPr>
+        <p:txBody>
+          <a:bodyPr wrap="none" lIns="0" rIns="0" tIns="0" bIns="0">
+            <a:noAutofit/>
           </a:bodyPr>
           <a:lstStyle/>
           <a:p>
@@ -9213,7 +8884,7 @@
                 </a:solidFill>
                 <a:latin typeface="Inter"/>
               </a:rPr>
-              <a:t>Quellen: … in einem Satz</a:t>
+              <a:t>16</a:t>
             </a:r>
           </a:p>
         </p:txBody>
@@ -9981,16 +9652,16 @@
         <p:spPr>
           <a:xfrm>
             <a:off x="1015999" y="389466"/>
-            <a:ext cx="573193" cy="176106"/>
-          </a:xfrm>
-          <a:prstGeom prst="rect">
-            <a:avLst/>
-          </a:prstGeom>
-          <a:noFill/>
-        </p:spPr>
-        <p:txBody>
-          <a:bodyPr wrap="square" lIns="0" rIns="0" tIns="0" bIns="0">
-            <a:spAutoFit/>
+            <a:ext cx="4775200" cy="176106"/>
+          </a:xfrm>
+          <a:prstGeom prst="rect">
+            <a:avLst/>
+          </a:prstGeom>
+          <a:noFill/>
+        </p:spPr>
+        <p:txBody>
+          <a:bodyPr wrap="none" lIns="0" rIns="0" tIns="0" bIns="0">
+            <a:noAutofit/>
           </a:bodyPr>
           <a:lstStyle/>
           <a:p>
@@ -10009,40 +9680,6 @@
       <p:sp>
         <p:nvSpPr>
           <p:cNvPr id="20" name="TextBox 19"/>
-          <p:cNvSpPr txBox="1"/>
-          <p:nvPr/>
-        </p:nvSpPr>
-        <p:spPr>
-          <a:xfrm>
-            <a:off x="2003213" y="6466839"/>
-            <a:ext cx="904239" cy="176106"/>
-          </a:xfrm>
-          <a:prstGeom prst="rect">
-            <a:avLst/>
-          </a:prstGeom>
-          <a:noFill/>
-        </p:spPr>
-        <p:txBody>
-          <a:bodyPr wrap="square" lIns="0" rIns="0" tIns="0" bIns="0">
-            <a:spAutoFit/>
-          </a:bodyPr>
-          <a:lstStyle/>
-          <a:p>
-            <a:r>
-              <a:rPr sz="800" b="1" i="0">
-                <a:solidFill>
-                  <a:srgbClr val="1C1C1E"/>
-                </a:solidFill>
-                <a:latin typeface="Inter"/>
-              </a:rPr>
-              <a:t>Kunde Projekttitel</a:t>
-            </a:r>
-          </a:p>
-        </p:txBody>
-      </p:sp>
-      <p:sp>
-        <p:nvSpPr>
-          <p:cNvPr id="21" name="TextBox 20"/>
           <p:cNvSpPr txBox="1"/>
           <p:nvPr/>
         </p:nvSpPr>
@@ -10058,7 +9695,7 @@
         </p:spPr>
         <p:txBody>
           <a:bodyPr wrap="square" lIns="0" rIns="0" tIns="0" bIns="0">
-            <a:spAutoFit/>
+            <a:normAutofit/>
           </a:bodyPr>
           <a:lstStyle/>
           <a:p>
@@ -10076,7 +9713,7 @@
       </p:sp>
       <p:sp>
         <p:nvSpPr>
-          <p:cNvPr id="22" name="TextBox 21"/>
+          <p:cNvPr id="21" name="TextBox 20"/>
           <p:cNvSpPr txBox="1"/>
           <p:nvPr/>
         </p:nvSpPr>
@@ -10091,11 +9728,102 @@
           <a:noFill/>
         </p:spPr>
         <p:txBody>
+          <a:bodyPr wrap="none" lIns="0" rIns="0" tIns="0" bIns="0">
+            <a:noAutofit/>
+          </a:bodyPr>
+          <a:lstStyle/>
+          <a:p>
+            <a:r>
+              <a:rPr sz="800" b="0" i="0">
+                <a:solidFill>
+                  <a:srgbClr val="6B6B65"/>
+                </a:solidFill>
+                <a:latin typeface="Inter"/>
+              </a:rPr>
+              <a:t>DIMENSION</a:t>
+            </a:r>
+          </a:p>
+        </p:txBody>
+      </p:sp>
+      <p:sp>
+        <p:nvSpPr>
+          <p:cNvPr id="22" name="TextBox 21"/>
+          <p:cNvSpPr txBox="1"/>
+          <p:nvPr/>
+        </p:nvSpPr>
+        <p:spPr>
+          <a:xfrm>
+            <a:off x="1015999" y="3138593"/>
+            <a:ext cx="2013373" cy="1522306"/>
+          </a:xfrm>
+          <a:prstGeom prst="rect">
+            <a:avLst/>
+          </a:prstGeom>
+          <a:noFill/>
+        </p:spPr>
+        <p:txBody>
           <a:bodyPr wrap="square" lIns="0" rIns="0" tIns="0" bIns="0">
-            <a:spAutoFit/>
-          </a:bodyPr>
-          <a:lstStyle/>
-          <a:p>
+            <a:normAutofit/>
+          </a:bodyPr>
+          <a:lstStyle/>
+          <a:p>
+            <a:r>
+              <a:rPr sz="1070" b="0" i="0">
+                <a:solidFill>
+                  <a:srgbClr val="6B6B65"/>
+                </a:solidFill>
+                <a:latin typeface="Inter"/>
+              </a:rPr>
+              <a:t>Dimension A</a:t>
+            </a:r>
+          </a:p>
+          <a:p>
+            <a:r>
+              <a:rPr sz="1070" b="0" i="0">
+                <a:solidFill>
+                  <a:srgbClr val="6B6B65"/>
+                </a:solidFill>
+                <a:latin typeface="Inter"/>
+              </a:rPr>
+              <a:t>Dimension B</a:t>
+            </a:r>
+          </a:p>
+          <a:p>
+            <a:r>
+              <a:rPr sz="1070" b="0" i="0">
+                <a:solidFill>
+                  <a:srgbClr val="6B6B65"/>
+                </a:solidFill>
+                <a:latin typeface="Inter"/>
+              </a:rPr>
+              <a:t>Dimension C</a:t>
+            </a:r>
+          </a:p>
+        </p:txBody>
+      </p:sp>
+      <p:sp>
+        <p:nvSpPr>
+          <p:cNvPr id="23" name="TextBox 22"/>
+          <p:cNvSpPr txBox="1"/>
+          <p:nvPr/>
+        </p:nvSpPr>
+        <p:spPr>
+          <a:xfrm>
+            <a:off x="1015999" y="4902200"/>
+            <a:ext cx="10193866" cy="176106"/>
+          </a:xfrm>
+          <a:prstGeom prst="rect">
+            <a:avLst/>
+          </a:prstGeom>
+          <a:noFill/>
+        </p:spPr>
+        <p:txBody>
+          <a:bodyPr wrap="square" lIns="0" rIns="0" tIns="0" bIns="0">
+            <a:normAutofit/>
+          </a:bodyPr>
+          <a:lstStyle/>
+          <a:p>
+            <a:pPr algn="r"/>
             <a:r>
               <a:rPr sz="800" b="0" i="0">
                 <a:solidFill>
@@ -10103,14 +9831,48 @@
                 </a:solidFill>
                 <a:latin typeface="Inter"/>
               </a:rPr>
-              <a:t>DIMENSION</a:t>
-            </a:r>
-          </a:p>
-        </p:txBody>
-      </p:sp>
-      <p:sp>
-        <p:nvSpPr>
-          <p:cNvPr id="23" name="TextBox 22"/>
+              <a:t>Quelle: … in einem Satz</a:t>
+            </a:r>
+          </a:p>
+        </p:txBody>
+      </p:sp>
+      <p:sp>
+        <p:nvSpPr>
+          <p:cNvPr id="24" name="TextBox 23"/>
+          <p:cNvSpPr txBox="1"/>
+          <p:nvPr/>
+        </p:nvSpPr>
+        <p:spPr>
+          <a:xfrm>
+            <a:off x="2003213" y="6466839"/>
+            <a:ext cx="3928533" cy="176106"/>
+          </a:xfrm>
+          <a:prstGeom prst="rect">
+            <a:avLst/>
+          </a:prstGeom>
+          <a:noFill/>
+        </p:spPr>
+        <p:txBody>
+          <a:bodyPr wrap="none" lIns="0" rIns="0" tIns="0" bIns="0">
+            <a:noAutofit/>
+          </a:bodyPr>
+          <a:lstStyle/>
+          <a:p>
+            <a:r>
+              <a:rPr sz="800" b="1" i="0">
+                <a:solidFill>
+                  <a:srgbClr val="1C1C1E"/>
+                </a:solidFill>
+                <a:latin typeface="Inter"/>
+              </a:rPr>
+              <a:t>Kunde Projekttitel</a:t>
+            </a:r>
+          </a:p>
+        </p:txBody>
+      </p:sp>
+      <p:sp>
+        <p:nvSpPr>
+          <p:cNvPr id="25" name="TextBox 24"/>
           <p:cNvSpPr txBox="1"/>
           <p:nvPr/>
         </p:nvSpPr>
@@ -10125,26 +9887,82 @@
           <a:noFill/>
         </p:spPr>
         <p:txBody>
+          <a:bodyPr wrap="none" lIns="0" rIns="0" tIns="0" bIns="0">
+            <a:noAutofit/>
+          </a:bodyPr>
+          <a:lstStyle/>
+          <a:p>
+            <a:r>
+              <a:rPr sz="800" b="0" i="0">
+                <a:solidFill>
+                  <a:srgbClr val="6B6B65"/>
+                </a:solidFill>
+                <a:latin typeface="Inter"/>
+              </a:rPr>
+              <a:t>MESSGRÖSSE</a:t>
+            </a:r>
+          </a:p>
+        </p:txBody>
+      </p:sp>
+      <p:sp>
+        <p:nvSpPr>
+          <p:cNvPr id="26" name="TextBox 25"/>
+          <p:cNvSpPr txBox="1"/>
+          <p:nvPr/>
+        </p:nvSpPr>
+        <p:spPr>
+          <a:xfrm>
+            <a:off x="2995506" y="3138593"/>
+            <a:ext cx="4640580" cy="1522306"/>
+          </a:xfrm>
+          <a:prstGeom prst="rect">
+            <a:avLst/>
+          </a:prstGeom>
+          <a:noFill/>
+        </p:spPr>
+        <p:txBody>
           <a:bodyPr wrap="square" lIns="0" rIns="0" tIns="0" bIns="0">
-            <a:spAutoFit/>
-          </a:bodyPr>
-          <a:lstStyle/>
-          <a:p>
-            <a:r>
-              <a:rPr sz="800" b="0" i="0">
-                <a:solidFill>
-                  <a:srgbClr val="6B6B65"/>
-                </a:solidFill>
-                <a:latin typeface="Inter"/>
-              </a:rPr>
-              <a:t>MESSGRÖSSE</a:t>
-            </a:r>
-          </a:p>
-        </p:txBody>
-      </p:sp>
-      <p:sp>
-        <p:nvSpPr>
-          <p:cNvPr id="24" name="TextBox 23"/>
+            <a:normAutofit/>
+          </a:bodyPr>
+          <a:lstStyle/>
+          <a:p>
+            <a:r>
+              <a:rPr sz="1070" b="0" i="0">
+                <a:solidFill>
+                  <a:srgbClr val="1C1C1E"/>
+                </a:solidFill>
+                <a:latin typeface="Inter"/>
+              </a:rPr>
+              <a:t>Messgröße als ganzer Ausdruck</a:t>
+            </a:r>
+          </a:p>
+          <a:p>
+            <a:r>
+              <a:rPr sz="1070" b="0" i="0">
+                <a:solidFill>
+                  <a:srgbClr val="1C1C1E"/>
+                </a:solidFill>
+                <a:latin typeface="Inter"/>
+              </a:rPr>
+              <a:t>Messgröße</a:t>
+            </a:r>
+          </a:p>
+          <a:p>
+            <a:r>
+              <a:rPr sz="1070" b="0" i="0">
+                <a:solidFill>
+                  <a:srgbClr val="1C1C1E"/>
+                </a:solidFill>
+                <a:latin typeface="Inter"/>
+              </a:rPr>
+              <a:t>Messgröße</a:t>
+            </a:r>
+          </a:p>
+        </p:txBody>
+      </p:sp>
+      <p:sp>
+        <p:nvSpPr>
+          <p:cNvPr id="27" name="TextBox 26"/>
           <p:cNvSpPr txBox="1"/>
           <p:nvPr/>
         </p:nvSpPr>
@@ -10159,8 +9977,98 @@
           <a:noFill/>
         </p:spPr>
         <p:txBody>
+          <a:bodyPr wrap="none" lIns="0" rIns="0" tIns="0" bIns="0">
+            <a:noAutofit/>
+          </a:bodyPr>
+          <a:lstStyle/>
+          <a:p>
+            <a:r>
+              <a:rPr sz="800" b="0" i="0">
+                <a:solidFill>
+                  <a:srgbClr val="6B6B65"/>
+                </a:solidFill>
+                <a:latin typeface="Inter"/>
+              </a:rPr>
+              <a:t>HEUTE</a:t>
+            </a:r>
+          </a:p>
+        </p:txBody>
+      </p:sp>
+      <p:sp>
+        <p:nvSpPr>
+          <p:cNvPr id="28" name="TextBox 27"/>
+          <p:cNvSpPr txBox="1"/>
+          <p:nvPr/>
+        </p:nvSpPr>
+        <p:spPr>
+          <a:xfrm>
+            <a:off x="7601373" y="3138593"/>
+            <a:ext cx="2248746" cy="1522306"/>
+          </a:xfrm>
+          <a:prstGeom prst="rect">
+            <a:avLst/>
+          </a:prstGeom>
+          <a:noFill/>
+        </p:spPr>
+        <p:txBody>
           <a:bodyPr wrap="square" lIns="0" rIns="0" tIns="0" bIns="0">
-            <a:spAutoFit/>
+            <a:normAutofit/>
+          </a:bodyPr>
+          <a:lstStyle/>
+          <a:p>
+            <a:r>
+              <a:rPr sz="1070" b="0" i="0">
+                <a:solidFill>
+                  <a:srgbClr val="3D3D3A"/>
+                </a:solidFill>
+                <a:latin typeface="Inter"/>
+              </a:rPr>
+              <a:t>Ausgangswert</a:t>
+            </a:r>
+          </a:p>
+          <a:p>
+            <a:r>
+              <a:rPr sz="1070" b="0" i="0">
+                <a:solidFill>
+                  <a:srgbClr val="3D3D3A"/>
+                </a:solidFill>
+                <a:latin typeface="Inter"/>
+              </a:rPr>
+              <a:t>Ausgangswert</a:t>
+            </a:r>
+          </a:p>
+          <a:p>
+            <a:r>
+              <a:rPr sz="1070" b="0" i="0">
+                <a:solidFill>
+                  <a:srgbClr val="3D3D3A"/>
+                </a:solidFill>
+                <a:latin typeface="Inter"/>
+              </a:rPr>
+              <a:t>Ausgangswert</a:t>
+            </a:r>
+          </a:p>
+        </p:txBody>
+      </p:sp>
+      <p:sp>
+        <p:nvSpPr>
+          <p:cNvPr id="29" name="TextBox 28"/>
+          <p:cNvSpPr txBox="1"/>
+          <p:nvPr/>
+        </p:nvSpPr>
+        <p:spPr>
+          <a:xfrm>
+            <a:off x="9816253" y="2788919"/>
+            <a:ext cx="2206413" cy="383539"/>
+          </a:xfrm>
+          <a:prstGeom prst="rect">
+            <a:avLst/>
+          </a:prstGeom>
+          <a:noFill/>
+        </p:spPr>
+        <p:txBody>
+          <a:bodyPr wrap="none" lIns="0" rIns="0" tIns="0" bIns="0">
+            <a:noAutofit/>
           </a:bodyPr>
           <a:lstStyle/>
           <a:p>
@@ -10171,21 +10079,21 @@
                 </a:solidFill>
                 <a:latin typeface="Inter"/>
               </a:rPr>
-              <a:t>HEUTE</a:t>
-            </a:r>
-          </a:p>
-        </p:txBody>
-      </p:sp>
-      <p:sp>
-        <p:nvSpPr>
-          <p:cNvPr id="25" name="TextBox 24"/>
-          <p:cNvSpPr txBox="1"/>
-          <p:nvPr/>
-        </p:nvSpPr>
-        <p:spPr>
-          <a:xfrm>
-            <a:off x="9816253" y="2788919"/>
-            <a:ext cx="1393613" cy="383539"/>
+              <a:t>ZIEL</a:t>
+            </a:r>
+          </a:p>
+        </p:txBody>
+      </p:sp>
+      <p:sp>
+        <p:nvSpPr>
+          <p:cNvPr id="30" name="TextBox 29"/>
+          <p:cNvSpPr txBox="1"/>
+          <p:nvPr/>
+        </p:nvSpPr>
+        <p:spPr>
+          <a:xfrm>
+            <a:off x="9816253" y="3138593"/>
+            <a:ext cx="1393613" cy="1522306"/>
           </a:xfrm>
           <a:prstGeom prst="rect">
             <a:avLst/>
@@ -10194,10 +10102,67 @@
         </p:spPr>
         <p:txBody>
           <a:bodyPr wrap="square" lIns="0" rIns="0" tIns="0" bIns="0">
-            <a:spAutoFit/>
-          </a:bodyPr>
-          <a:lstStyle/>
-          <a:p>
+            <a:normAutofit/>
+          </a:bodyPr>
+          <a:lstStyle/>
+          <a:p>
+            <a:r>
+              <a:rPr sz="1070" b="0" i="0">
+                <a:solidFill>
+                  <a:srgbClr val="4A2D6B"/>
+                </a:solidFill>
+                <a:latin typeface="Inter"/>
+              </a:rPr>
+              <a:t>Zielwert</a:t>
+            </a:r>
+          </a:p>
+          <a:p>
+            <a:r>
+              <a:rPr sz="1070" b="0" i="0">
+                <a:solidFill>
+                  <a:srgbClr val="4A2D6B"/>
+                </a:solidFill>
+                <a:latin typeface="Inter"/>
+              </a:rPr>
+              <a:t>Zielwert</a:t>
+            </a:r>
+          </a:p>
+          <a:p>
+            <a:r>
+              <a:rPr sz="1070" b="0" i="0">
+                <a:solidFill>
+                  <a:srgbClr val="4A2D6B"/>
+                </a:solidFill>
+                <a:latin typeface="Inter"/>
+              </a:rPr>
+              <a:t>Zielwert</a:t>
+            </a:r>
+          </a:p>
+        </p:txBody>
+      </p:sp>
+      <p:sp>
+        <p:nvSpPr>
+          <p:cNvPr id="31" name="TextBox 30"/>
+          <p:cNvSpPr txBox="1"/>
+          <p:nvPr/>
+        </p:nvSpPr>
+        <p:spPr>
+          <a:xfrm>
+            <a:off x="10634133" y="6495626"/>
+            <a:ext cx="575733" cy="176106"/>
+          </a:xfrm>
+          <a:prstGeom prst="rect">
+            <a:avLst/>
+          </a:prstGeom>
+          <a:noFill/>
+        </p:spPr>
+        <p:txBody>
+          <a:bodyPr wrap="none" lIns="0" rIns="0" tIns="0" bIns="0">
+            <a:noAutofit/>
+          </a:bodyPr>
+          <a:lstStyle/>
+          <a:p>
+            <a:pPr algn="r"/>
             <a:r>
               <a:rPr sz="800" b="0" i="0">
                 <a:solidFill>
@@ -10205,450 +10170,7 @@
                 </a:solidFill>
                 <a:latin typeface="Inter"/>
               </a:rPr>
-              <a:t>ZIEL</a:t>
-            </a:r>
-          </a:p>
-        </p:txBody>
-      </p:sp>
-      <p:sp>
-        <p:nvSpPr>
-          <p:cNvPr id="26" name="TextBox 25"/>
-          <p:cNvSpPr txBox="1"/>
-          <p:nvPr/>
-        </p:nvSpPr>
-        <p:spPr>
-          <a:xfrm>
-            <a:off x="1015999" y="3138593"/>
-            <a:ext cx="2013373" cy="530013"/>
-          </a:xfrm>
-          <a:prstGeom prst="rect">
-            <a:avLst/>
-          </a:prstGeom>
-          <a:noFill/>
-        </p:spPr>
-        <p:txBody>
-          <a:bodyPr wrap="square" lIns="0" rIns="0" tIns="0" bIns="0">
-            <a:spAutoFit/>
-          </a:bodyPr>
-          <a:lstStyle/>
-          <a:p>
-            <a:r>
-              <a:rPr sz="1070" b="0" i="0">
-                <a:solidFill>
-                  <a:srgbClr val="6B6B65"/>
-                </a:solidFill>
-                <a:latin typeface="Inter"/>
-              </a:rPr>
-              <a:t>Dimension A</a:t>
-            </a:r>
-          </a:p>
-        </p:txBody>
-      </p:sp>
-      <p:sp>
-        <p:nvSpPr>
-          <p:cNvPr id="27" name="TextBox 26"/>
-          <p:cNvSpPr txBox="1"/>
-          <p:nvPr/>
-        </p:nvSpPr>
-        <p:spPr>
-          <a:xfrm>
-            <a:off x="2995506" y="3138593"/>
-            <a:ext cx="4640580" cy="530013"/>
-          </a:xfrm>
-          <a:prstGeom prst="rect">
-            <a:avLst/>
-          </a:prstGeom>
-          <a:noFill/>
-        </p:spPr>
-        <p:txBody>
-          <a:bodyPr wrap="square" lIns="0" rIns="0" tIns="0" bIns="0">
-            <a:spAutoFit/>
-          </a:bodyPr>
-          <a:lstStyle/>
-          <a:p>
-            <a:r>
-              <a:rPr sz="1070" b="0" i="0">
-                <a:solidFill>
-                  <a:srgbClr val="1C1C1E"/>
-                </a:solidFill>
-                <a:latin typeface="Inter"/>
-              </a:rPr>
-              <a:t>Messgröße als ganzer Ausdruck</a:t>
-            </a:r>
-          </a:p>
-        </p:txBody>
-      </p:sp>
-      <p:sp>
-        <p:nvSpPr>
-          <p:cNvPr id="28" name="TextBox 27"/>
-          <p:cNvSpPr txBox="1"/>
-          <p:nvPr/>
-        </p:nvSpPr>
-        <p:spPr>
-          <a:xfrm>
-            <a:off x="7601373" y="3138593"/>
-            <a:ext cx="2248746" cy="530013"/>
-          </a:xfrm>
-          <a:prstGeom prst="rect">
-            <a:avLst/>
-          </a:prstGeom>
-          <a:noFill/>
-        </p:spPr>
-        <p:txBody>
-          <a:bodyPr wrap="square" lIns="0" rIns="0" tIns="0" bIns="0">
-            <a:spAutoFit/>
-          </a:bodyPr>
-          <a:lstStyle/>
-          <a:p>
-            <a:r>
-              <a:rPr sz="1070" b="0" i="0">
-                <a:solidFill>
-                  <a:srgbClr val="3D3D3A"/>
-                </a:solidFill>
-                <a:latin typeface="Inter"/>
-              </a:rPr>
-              <a:t>Ausgangswert</a:t>
-            </a:r>
-          </a:p>
-        </p:txBody>
-      </p:sp>
-      <p:sp>
-        <p:nvSpPr>
-          <p:cNvPr id="29" name="TextBox 28"/>
-          <p:cNvSpPr txBox="1"/>
-          <p:nvPr/>
-        </p:nvSpPr>
-        <p:spPr>
-          <a:xfrm>
-            <a:off x="9816253" y="3138593"/>
-            <a:ext cx="1393613" cy="530013"/>
-          </a:xfrm>
-          <a:prstGeom prst="rect">
-            <a:avLst/>
-          </a:prstGeom>
-          <a:noFill/>
-        </p:spPr>
-        <p:txBody>
-          <a:bodyPr wrap="square" lIns="0" rIns="0" tIns="0" bIns="0">
-            <a:spAutoFit/>
-          </a:bodyPr>
-          <a:lstStyle/>
-          <a:p>
-            <a:r>
-              <a:rPr sz="1070" b="0" i="0">
-                <a:solidFill>
-                  <a:srgbClr val="4A2D6B"/>
-                </a:solidFill>
-                <a:latin typeface="Inter"/>
-              </a:rPr>
-              <a:t>Zielwert</a:t>
-            </a:r>
-          </a:p>
-        </p:txBody>
-      </p:sp>
-      <p:sp>
-        <p:nvSpPr>
-          <p:cNvPr id="30" name="TextBox 29"/>
-          <p:cNvSpPr txBox="1"/>
-          <p:nvPr/>
-        </p:nvSpPr>
-        <p:spPr>
-          <a:xfrm>
-            <a:off x="1015999" y="3634740"/>
-            <a:ext cx="2013373" cy="530013"/>
-          </a:xfrm>
-          <a:prstGeom prst="rect">
-            <a:avLst/>
-          </a:prstGeom>
-          <a:noFill/>
-        </p:spPr>
-        <p:txBody>
-          <a:bodyPr wrap="square" lIns="0" rIns="0" tIns="0" bIns="0">
-            <a:spAutoFit/>
-          </a:bodyPr>
-          <a:lstStyle/>
-          <a:p>
-            <a:r>
-              <a:rPr sz="1070" b="0" i="0">
-                <a:solidFill>
-                  <a:srgbClr val="6B6B65"/>
-                </a:solidFill>
-                <a:latin typeface="Inter"/>
-              </a:rPr>
-              <a:t>Dimension B</a:t>
-            </a:r>
-          </a:p>
-        </p:txBody>
-      </p:sp>
-      <p:sp>
-        <p:nvSpPr>
-          <p:cNvPr id="31" name="TextBox 30"/>
-          <p:cNvSpPr txBox="1"/>
-          <p:nvPr/>
-        </p:nvSpPr>
-        <p:spPr>
-          <a:xfrm>
-            <a:off x="2995506" y="3634740"/>
-            <a:ext cx="4640580" cy="530013"/>
-          </a:xfrm>
-          <a:prstGeom prst="rect">
-            <a:avLst/>
-          </a:prstGeom>
-          <a:noFill/>
-        </p:spPr>
-        <p:txBody>
-          <a:bodyPr wrap="square" lIns="0" rIns="0" tIns="0" bIns="0">
-            <a:spAutoFit/>
-          </a:bodyPr>
-          <a:lstStyle/>
-          <a:p>
-            <a:r>
-              <a:rPr sz="1070" b="0" i="0">
-                <a:solidFill>
-                  <a:srgbClr val="1C1C1E"/>
-                </a:solidFill>
-                <a:latin typeface="Inter"/>
-              </a:rPr>
-              <a:t>Messgröße</a:t>
-            </a:r>
-          </a:p>
-        </p:txBody>
-      </p:sp>
-      <p:sp>
-        <p:nvSpPr>
-          <p:cNvPr id="32" name="TextBox 31"/>
-          <p:cNvSpPr txBox="1"/>
-          <p:nvPr/>
-        </p:nvSpPr>
-        <p:spPr>
-          <a:xfrm>
-            <a:off x="7601373" y="3634740"/>
-            <a:ext cx="2248746" cy="530013"/>
-          </a:xfrm>
-          <a:prstGeom prst="rect">
-            <a:avLst/>
-          </a:prstGeom>
-          <a:noFill/>
-        </p:spPr>
-        <p:txBody>
-          <a:bodyPr wrap="square" lIns="0" rIns="0" tIns="0" bIns="0">
-            <a:spAutoFit/>
-          </a:bodyPr>
-          <a:lstStyle/>
-          <a:p>
-            <a:r>
-              <a:rPr sz="1070" b="0" i="0">
-                <a:solidFill>
-                  <a:srgbClr val="3D3D3A"/>
-                </a:solidFill>
-                <a:latin typeface="Inter"/>
-              </a:rPr>
-              <a:t>Ausgangswert</a:t>
-            </a:r>
-          </a:p>
-        </p:txBody>
-      </p:sp>
-      <p:sp>
-        <p:nvSpPr>
-          <p:cNvPr id="33" name="TextBox 32"/>
-          <p:cNvSpPr txBox="1"/>
-          <p:nvPr/>
-        </p:nvSpPr>
-        <p:spPr>
-          <a:xfrm>
-            <a:off x="9816253" y="3634740"/>
-            <a:ext cx="1393613" cy="530013"/>
-          </a:xfrm>
-          <a:prstGeom prst="rect">
-            <a:avLst/>
-          </a:prstGeom>
-          <a:noFill/>
-        </p:spPr>
-        <p:txBody>
-          <a:bodyPr wrap="square" lIns="0" rIns="0" tIns="0" bIns="0">
-            <a:spAutoFit/>
-          </a:bodyPr>
-          <a:lstStyle/>
-          <a:p>
-            <a:r>
-              <a:rPr sz="1070" b="0" i="0">
-                <a:solidFill>
-                  <a:srgbClr val="4A2D6B"/>
-                </a:solidFill>
-                <a:latin typeface="Inter"/>
-              </a:rPr>
-              <a:t>Zielwert</a:t>
-            </a:r>
-          </a:p>
-        </p:txBody>
-      </p:sp>
-      <p:sp>
-        <p:nvSpPr>
-          <p:cNvPr id="34" name="TextBox 33"/>
-          <p:cNvSpPr txBox="1"/>
-          <p:nvPr/>
-        </p:nvSpPr>
-        <p:spPr>
-          <a:xfrm>
-            <a:off x="1015999" y="4130886"/>
-            <a:ext cx="2013373" cy="530013"/>
-          </a:xfrm>
-          <a:prstGeom prst="rect">
-            <a:avLst/>
-          </a:prstGeom>
-          <a:noFill/>
-        </p:spPr>
-        <p:txBody>
-          <a:bodyPr wrap="square" lIns="0" rIns="0" tIns="0" bIns="0">
-            <a:spAutoFit/>
-          </a:bodyPr>
-          <a:lstStyle/>
-          <a:p>
-            <a:r>
-              <a:rPr sz="1070" b="0" i="0">
-                <a:solidFill>
-                  <a:srgbClr val="6B6B65"/>
-                </a:solidFill>
-                <a:latin typeface="Inter"/>
-              </a:rPr>
-              <a:t>Dimension C</a:t>
-            </a:r>
-          </a:p>
-        </p:txBody>
-      </p:sp>
-      <p:sp>
-        <p:nvSpPr>
-          <p:cNvPr id="35" name="TextBox 34"/>
-          <p:cNvSpPr txBox="1"/>
-          <p:nvPr/>
-        </p:nvSpPr>
-        <p:spPr>
-          <a:xfrm>
-            <a:off x="2995506" y="4130886"/>
-            <a:ext cx="4640580" cy="530013"/>
-          </a:xfrm>
-          <a:prstGeom prst="rect">
-            <a:avLst/>
-          </a:prstGeom>
-          <a:noFill/>
-        </p:spPr>
-        <p:txBody>
-          <a:bodyPr wrap="square" lIns="0" rIns="0" tIns="0" bIns="0">
-            <a:spAutoFit/>
-          </a:bodyPr>
-          <a:lstStyle/>
-          <a:p>
-            <a:r>
-              <a:rPr sz="1070" b="0" i="0">
-                <a:solidFill>
-                  <a:srgbClr val="1C1C1E"/>
-                </a:solidFill>
-                <a:latin typeface="Inter"/>
-              </a:rPr>
-              <a:t>Messgröße</a:t>
-            </a:r>
-          </a:p>
-        </p:txBody>
-      </p:sp>
-      <p:sp>
-        <p:nvSpPr>
-          <p:cNvPr id="36" name="TextBox 35"/>
-          <p:cNvSpPr txBox="1"/>
-          <p:nvPr/>
-        </p:nvSpPr>
-        <p:spPr>
-          <a:xfrm>
-            <a:off x="7601373" y="4130886"/>
-            <a:ext cx="2248746" cy="530013"/>
-          </a:xfrm>
-          <a:prstGeom prst="rect">
-            <a:avLst/>
-          </a:prstGeom>
-          <a:noFill/>
-        </p:spPr>
-        <p:txBody>
-          <a:bodyPr wrap="square" lIns="0" rIns="0" tIns="0" bIns="0">
-            <a:spAutoFit/>
-          </a:bodyPr>
-          <a:lstStyle/>
-          <a:p>
-            <a:r>
-              <a:rPr sz="1070" b="0" i="0">
-                <a:solidFill>
-                  <a:srgbClr val="3D3D3A"/>
-                </a:solidFill>
-                <a:latin typeface="Inter"/>
-              </a:rPr>
-              <a:t>Ausgangswert</a:t>
-            </a:r>
-          </a:p>
-        </p:txBody>
-      </p:sp>
-      <p:sp>
-        <p:nvSpPr>
-          <p:cNvPr id="37" name="TextBox 36"/>
-          <p:cNvSpPr txBox="1"/>
-          <p:nvPr/>
-        </p:nvSpPr>
-        <p:spPr>
-          <a:xfrm>
-            <a:off x="9816253" y="4130886"/>
-            <a:ext cx="1393613" cy="530013"/>
-          </a:xfrm>
-          <a:prstGeom prst="rect">
-            <a:avLst/>
-          </a:prstGeom>
-          <a:noFill/>
-        </p:spPr>
-        <p:txBody>
-          <a:bodyPr wrap="square" lIns="0" rIns="0" tIns="0" bIns="0">
-            <a:spAutoFit/>
-          </a:bodyPr>
-          <a:lstStyle/>
-          <a:p>
-            <a:r>
-              <a:rPr sz="1070" b="0" i="0">
-                <a:solidFill>
-                  <a:srgbClr val="4A2D6B"/>
-                </a:solidFill>
-                <a:latin typeface="Inter"/>
-              </a:rPr>
-              <a:t>Zielwert</a:t>
-            </a:r>
-          </a:p>
-        </p:txBody>
-      </p:sp>
-      <p:sp>
-        <p:nvSpPr>
-          <p:cNvPr id="38" name="TextBox 37"/>
-          <p:cNvSpPr txBox="1"/>
-          <p:nvPr/>
-        </p:nvSpPr>
-        <p:spPr>
-          <a:xfrm>
-            <a:off x="1015999" y="4902200"/>
-            <a:ext cx="10193866" cy="176106"/>
-          </a:xfrm>
-          <a:prstGeom prst="rect">
-            <a:avLst/>
-          </a:prstGeom>
-          <a:noFill/>
-        </p:spPr>
-        <p:txBody>
-          <a:bodyPr wrap="square" lIns="0" rIns="0" tIns="0" bIns="0">
-            <a:spAutoFit/>
-          </a:bodyPr>
-          <a:lstStyle/>
-          <a:p>
-            <a:pPr algn="r"/>
-            <a:r>
-              <a:rPr sz="800" b="0" i="0">
-                <a:solidFill>
-                  <a:srgbClr val="6B6B65"/>
-                </a:solidFill>
-                <a:latin typeface="Inter"/>
-              </a:rPr>
-              <a:t>Quelle: … in einem Satz</a:t>
+              <a:t>17</a:t>
             </a:r>
           </a:p>
         </p:txBody>
@@ -10712,16 +10234,16 @@
         <p:spPr>
           <a:xfrm>
             <a:off x="1015999" y="389466"/>
-            <a:ext cx="774700" cy="176106"/>
-          </a:xfrm>
-          <a:prstGeom prst="rect">
-            <a:avLst/>
-          </a:prstGeom>
-          <a:noFill/>
-        </p:spPr>
-        <p:txBody>
-          <a:bodyPr wrap="square" lIns="0" rIns="0" tIns="0" bIns="0">
-            <a:spAutoFit/>
+            <a:ext cx="4775200" cy="176106"/>
+          </a:xfrm>
+          <a:prstGeom prst="rect">
+            <a:avLst/>
+          </a:prstGeom>
+          <a:noFill/>
+        </p:spPr>
+        <p:txBody>
+          <a:bodyPr wrap="none" lIns="0" rIns="0" tIns="0" bIns="0">
+            <a:noAutofit/>
           </a:bodyPr>
           <a:lstStyle/>
           <a:p>
@@ -10740,40 +10262,6 @@
       <p:sp>
         <p:nvSpPr>
           <p:cNvPr id="4" name="TextBox 3"/>
-          <p:cNvSpPr txBox="1"/>
-          <p:nvPr/>
-        </p:nvSpPr>
-        <p:spPr>
-          <a:xfrm>
-            <a:off x="2003213" y="6466839"/>
-            <a:ext cx="904239" cy="176106"/>
-          </a:xfrm>
-          <a:prstGeom prst="rect">
-            <a:avLst/>
-          </a:prstGeom>
-          <a:noFill/>
-        </p:spPr>
-        <p:txBody>
-          <a:bodyPr wrap="square" lIns="0" rIns="0" tIns="0" bIns="0">
-            <a:spAutoFit/>
-          </a:bodyPr>
-          <a:lstStyle/>
-          <a:p>
-            <a:r>
-              <a:rPr sz="800" b="1" i="0">
-                <a:solidFill>
-                  <a:srgbClr val="1C1C1E"/>
-                </a:solidFill>
-                <a:latin typeface="Inter"/>
-              </a:rPr>
-              <a:t>Kunde Projekttitel</a:t>
-            </a:r>
-          </a:p>
-        </p:txBody>
-      </p:sp>
-      <p:sp>
-        <p:nvSpPr>
-          <p:cNvPr id="5" name="TextBox 4"/>
           <p:cNvSpPr txBox="1"/>
           <p:nvPr/>
         </p:nvSpPr>
@@ -10789,7 +10277,7 @@
         </p:spPr>
         <p:txBody>
           <a:bodyPr wrap="square" lIns="0" rIns="0" tIns="0" bIns="0">
-            <a:spAutoFit/>
+            <a:normAutofit/>
           </a:bodyPr>
           <a:lstStyle/>
           <a:p>
@@ -10801,6 +10289,75 @@
                 <a:latin typeface="Inter"/>
               </a:rPr>
               <a:t>Erst die Setup-Phase, dann die priorisierten Wellen</a:t>
+            </a:r>
+          </a:p>
+        </p:txBody>
+      </p:sp>
+      <p:sp>
+        <p:nvSpPr>
+          <p:cNvPr id="5" name="TextBox 4"/>
+          <p:cNvSpPr txBox="1"/>
+          <p:nvPr/>
+        </p:nvSpPr>
+        <p:spPr>
+          <a:xfrm>
+            <a:off x="2003213" y="6466839"/>
+            <a:ext cx="3928533" cy="176106"/>
+          </a:xfrm>
+          <a:prstGeom prst="rect">
+            <a:avLst/>
+          </a:prstGeom>
+          <a:noFill/>
+        </p:spPr>
+        <p:txBody>
+          <a:bodyPr wrap="none" lIns="0" rIns="0" tIns="0" bIns="0">
+            <a:noAutofit/>
+          </a:bodyPr>
+          <a:lstStyle/>
+          <a:p>
+            <a:r>
+              <a:rPr sz="800" b="1" i="0">
+                <a:solidFill>
+                  <a:srgbClr val="1C1C1E"/>
+                </a:solidFill>
+                <a:latin typeface="Inter"/>
+              </a:rPr>
+              <a:t>Kunde Projekttitel</a:t>
+            </a:r>
+          </a:p>
+        </p:txBody>
+      </p:sp>
+      <p:sp>
+        <p:nvSpPr>
+          <p:cNvPr id="6" name="TextBox 5"/>
+          <p:cNvSpPr txBox="1"/>
+          <p:nvPr/>
+        </p:nvSpPr>
+        <p:spPr>
+          <a:xfrm>
+            <a:off x="10634133" y="6495626"/>
+            <a:ext cx="575733" cy="176106"/>
+          </a:xfrm>
+          <a:prstGeom prst="rect">
+            <a:avLst/>
+          </a:prstGeom>
+          <a:noFill/>
+        </p:spPr>
+        <p:txBody>
+          <a:bodyPr wrap="none" lIns="0" rIns="0" tIns="0" bIns="0">
+            <a:noAutofit/>
+          </a:bodyPr>
+          <a:lstStyle/>
+          <a:p>
+            <a:pPr algn="r"/>
+            <a:r>
+              <a:rPr sz="800" b="0" i="0">
+                <a:solidFill>
+                  <a:srgbClr val="6B6B65"/>
+                </a:solidFill>
+                <a:latin typeface="Inter"/>
+              </a:rPr>
+              <a:t>18</a:t>
             </a:r>
           </a:p>
         </p:txBody>
@@ -10865,7 +10422,7 @@
         </p:spPr>
         <p:txBody>
           <a:bodyPr wrap="square" lIns="0" rIns="0" tIns="0" bIns="0">
-            <a:spAutoFit/>
+            <a:normAutofit/>
           </a:bodyPr>
           <a:lstStyle/>
           <a:p>
@@ -10898,8 +10455,8 @@
           <a:noFill/>
         </p:spPr>
         <p:txBody>
-          <a:bodyPr wrap="square" lIns="0" rIns="0" tIns="0" bIns="0">
-            <a:spAutoFit/>
+          <a:bodyPr wrap="none" lIns="0" rIns="0" tIns="0" bIns="0">
+            <a:noAutofit/>
           </a:bodyPr>
           <a:lstStyle/>
           <a:p>
@@ -11238,16 +10795,16 @@
         <p:spPr>
           <a:xfrm>
             <a:off x="1015999" y="389466"/>
-            <a:ext cx="519006" cy="176106"/>
-          </a:xfrm>
-          <a:prstGeom prst="rect">
-            <a:avLst/>
-          </a:prstGeom>
-          <a:noFill/>
-        </p:spPr>
-        <p:txBody>
-          <a:bodyPr wrap="square" lIns="0" rIns="0" tIns="0" bIns="0">
-            <a:spAutoFit/>
+            <a:ext cx="4775200" cy="176106"/>
+          </a:xfrm>
+          <a:prstGeom prst="rect">
+            <a:avLst/>
+          </a:prstGeom>
+          <a:noFill/>
+        </p:spPr>
+        <p:txBody>
+          <a:bodyPr wrap="none" lIns="0" rIns="0" tIns="0" bIns="0">
+            <a:noAutofit/>
           </a:bodyPr>
           <a:lstStyle/>
           <a:p>
@@ -11266,40 +10823,6 @@
       <p:sp>
         <p:nvSpPr>
           <p:cNvPr id="10" name="TextBox 9"/>
-          <p:cNvSpPr txBox="1"/>
-          <p:nvPr/>
-        </p:nvSpPr>
-        <p:spPr>
-          <a:xfrm>
-            <a:off x="2003213" y="6466839"/>
-            <a:ext cx="904239" cy="176106"/>
-          </a:xfrm>
-          <a:prstGeom prst="rect">
-            <a:avLst/>
-          </a:prstGeom>
-          <a:noFill/>
-        </p:spPr>
-        <p:txBody>
-          <a:bodyPr wrap="square" lIns="0" rIns="0" tIns="0" bIns="0">
-            <a:spAutoFit/>
-          </a:bodyPr>
-          <a:lstStyle/>
-          <a:p>
-            <a:r>
-              <a:rPr sz="800" b="1" i="0">
-                <a:solidFill>
-                  <a:srgbClr val="1C1C1E"/>
-                </a:solidFill>
-                <a:latin typeface="Inter"/>
-              </a:rPr>
-              <a:t>Kunde Projekttitel</a:t>
-            </a:r>
-          </a:p>
-        </p:txBody>
-      </p:sp>
-      <p:sp>
-        <p:nvSpPr>
-          <p:cNvPr id="11" name="TextBox 10"/>
           <p:cNvSpPr txBox="1"/>
           <p:nvPr/>
         </p:nvSpPr>
@@ -11315,7 +10838,7 @@
         </p:spPr>
         <p:txBody>
           <a:bodyPr wrap="square" lIns="0" rIns="0" tIns="0" bIns="0">
-            <a:spAutoFit/>
+            <a:normAutofit/>
           </a:bodyPr>
           <a:lstStyle/>
           <a:p>
@@ -11333,7 +10856,7 @@
       </p:sp>
       <p:sp>
         <p:nvSpPr>
-          <p:cNvPr id="12" name="TextBox 11"/>
+          <p:cNvPr id="11" name="TextBox 10"/>
           <p:cNvSpPr txBox="1"/>
           <p:nvPr/>
         </p:nvSpPr>
@@ -11349,7 +10872,7 @@
         </p:spPr>
         <p:txBody>
           <a:bodyPr wrap="square" lIns="0" rIns="0" tIns="0" bIns="0">
-            <a:spAutoFit/>
+            <a:normAutofit/>
           </a:bodyPr>
           <a:lstStyle/>
           <a:p>
@@ -11367,14 +10890,82 @@
       </p:sp>
       <p:sp>
         <p:nvSpPr>
+          <p:cNvPr id="12" name="TextBox 11"/>
+          <p:cNvSpPr txBox="1"/>
+          <p:nvPr/>
+        </p:nvSpPr>
+        <p:spPr>
+          <a:xfrm>
+            <a:off x="1015999" y="3721946"/>
+            <a:ext cx="372533" cy="250613"/>
+          </a:xfrm>
+          <a:prstGeom prst="rect">
+            <a:avLst/>
+          </a:prstGeom>
+          <a:noFill/>
+        </p:spPr>
+        <p:txBody>
+          <a:bodyPr wrap="square" lIns="0" rIns="0" tIns="0" bIns="0">
+            <a:normAutofit/>
+          </a:bodyPr>
+          <a:lstStyle/>
+          <a:p>
+            <a:r>
+              <a:rPr sz="1070" b="0" i="0">
+                <a:solidFill>
+                  <a:srgbClr val="1C1C1E"/>
+                </a:solidFill>
+                <a:latin typeface="Inter"/>
+              </a:rPr>
+              <a:t>02</a:t>
+            </a:r>
+          </a:p>
+        </p:txBody>
+      </p:sp>
+      <p:sp>
+        <p:nvSpPr>
           <p:cNvPr id="13" name="TextBox 12"/>
           <p:cNvSpPr txBox="1"/>
           <p:nvPr/>
         </p:nvSpPr>
         <p:spPr>
           <a:xfrm>
+            <a:off x="1015999" y="4517813"/>
+            <a:ext cx="372533" cy="250613"/>
+          </a:xfrm>
+          <a:prstGeom prst="rect">
+            <a:avLst/>
+          </a:prstGeom>
+          <a:noFill/>
+        </p:spPr>
+        <p:txBody>
+          <a:bodyPr wrap="square" lIns="0" rIns="0" tIns="0" bIns="0">
+            <a:normAutofit/>
+          </a:bodyPr>
+          <a:lstStyle/>
+          <a:p>
+            <a:r>
+              <a:rPr sz="1070" b="0" i="0">
+                <a:solidFill>
+                  <a:srgbClr val="1C1C1E"/>
+                </a:solidFill>
+                <a:latin typeface="Inter"/>
+              </a:rPr>
+              <a:t>03</a:t>
+            </a:r>
+          </a:p>
+        </p:txBody>
+      </p:sp>
+      <p:sp>
+        <p:nvSpPr>
+          <p:cNvPr id="14" name="TextBox 13"/>
+          <p:cNvSpPr txBox="1"/>
+          <p:nvPr/>
+        </p:nvSpPr>
+        <p:spPr>
+          <a:xfrm>
             <a:off x="1557866" y="2900680"/>
-            <a:ext cx="1176866" cy="270933"/>
+            <a:ext cx="1176866" cy="482599"/>
           </a:xfrm>
           <a:prstGeom prst="rect">
             <a:avLst/>
@@ -11383,7 +10974,7 @@
         </p:spPr>
         <p:txBody>
           <a:bodyPr wrap="square" lIns="0" rIns="0" tIns="0" bIns="0">
-            <a:spAutoFit/>
+            <a:normAutofit/>
           </a:bodyPr>
           <a:lstStyle/>
           <a:p>
@@ -11397,18 +10988,34 @@
               <a:t>Erster Punkt</a:t>
             </a:r>
           </a:p>
-        </p:txBody>
-      </p:sp>
-      <p:sp>
-        <p:nvSpPr>
-          <p:cNvPr id="14" name="TextBox 13"/>
-          <p:cNvSpPr txBox="1"/>
-          <p:nvPr/>
-        </p:nvSpPr>
-        <p:spPr>
-          <a:xfrm>
-            <a:off x="1557866" y="3171613"/>
-            <a:ext cx="1176866" cy="211666"/>
+          <a:p>
+            <a:pPr>
+              <a:spcBef>
+                <a:spcPts val="270"/>
+              </a:spcBef>
+            </a:pPr>
+            <a:r>
+              <a:rPr sz="930" b="0" i="0">
+                <a:solidFill>
+                  <a:srgbClr val="3D3D3A"/>
+                </a:solidFill>
+                <a:latin typeface="Inter"/>
+              </a:rPr>
+              <a:t>Ein halber Satz dazu</a:t>
+            </a:r>
+          </a:p>
+        </p:txBody>
+      </p:sp>
+      <p:sp>
+        <p:nvSpPr>
+          <p:cNvPr id="15" name="TextBox 14"/>
+          <p:cNvSpPr txBox="1"/>
+          <p:nvPr/>
+        </p:nvSpPr>
+        <p:spPr>
+          <a:xfrm>
+            <a:off x="1557866" y="3696546"/>
+            <a:ext cx="1176866" cy="482599"/>
           </a:xfrm>
           <a:prstGeom prst="rect">
             <a:avLst/>
@@ -11417,10 +11024,26 @@
         </p:spPr>
         <p:txBody>
           <a:bodyPr wrap="square" lIns="0" rIns="0" tIns="0" bIns="0">
-            <a:spAutoFit/>
-          </a:bodyPr>
-          <a:lstStyle/>
-          <a:p>
+            <a:normAutofit/>
+          </a:bodyPr>
+          <a:lstStyle/>
+          <a:p>
+            <a:r>
+              <a:rPr sz="1330" b="0" i="0">
+                <a:solidFill>
+                  <a:srgbClr val="1C1C1E"/>
+                </a:solidFill>
+                <a:latin typeface="Inter"/>
+              </a:rPr>
+              <a:t>Zweiter Punkt</a:t>
+            </a:r>
+          </a:p>
+          <a:p>
+            <a:pPr>
+              <a:spcBef>
+                <a:spcPts val="270"/>
+              </a:spcBef>
+            </a:pPr>
             <a:r>
               <a:rPr sz="930" b="0" i="0">
                 <a:solidFill>
@@ -11435,7 +11058,91 @@
       </p:sp>
       <p:sp>
         <p:nvSpPr>
-          <p:cNvPr id="15" name="TextBox 14"/>
+          <p:cNvPr id="16" name="TextBox 15"/>
+          <p:cNvSpPr txBox="1"/>
+          <p:nvPr/>
+        </p:nvSpPr>
+        <p:spPr>
+          <a:xfrm>
+            <a:off x="1557866" y="4492413"/>
+            <a:ext cx="1176866" cy="482599"/>
+          </a:xfrm>
+          <a:prstGeom prst="rect">
+            <a:avLst/>
+          </a:prstGeom>
+          <a:noFill/>
+        </p:spPr>
+        <p:txBody>
+          <a:bodyPr wrap="square" lIns="0" rIns="0" tIns="0" bIns="0">
+            <a:normAutofit/>
+          </a:bodyPr>
+          <a:lstStyle/>
+          <a:p>
+            <a:r>
+              <a:rPr sz="1330" b="0" i="0">
+                <a:solidFill>
+                  <a:srgbClr val="1C1C1E"/>
+                </a:solidFill>
+                <a:latin typeface="Inter"/>
+              </a:rPr>
+              <a:t>Dritter Punkt</a:t>
+            </a:r>
+          </a:p>
+          <a:p>
+            <a:pPr>
+              <a:spcBef>
+                <a:spcPts val="270"/>
+              </a:spcBef>
+            </a:pPr>
+            <a:r>
+              <a:rPr sz="930" b="0" i="0">
+                <a:solidFill>
+                  <a:srgbClr val="3D3D3A"/>
+                </a:solidFill>
+                <a:latin typeface="Inter"/>
+              </a:rPr>
+              <a:t>Ein halber Satz dazu</a:t>
+            </a:r>
+          </a:p>
+        </p:txBody>
+      </p:sp>
+      <p:sp>
+        <p:nvSpPr>
+          <p:cNvPr id="17" name="TextBox 16"/>
+          <p:cNvSpPr txBox="1"/>
+          <p:nvPr/>
+        </p:nvSpPr>
+        <p:spPr>
+          <a:xfrm>
+            <a:off x="2003213" y="6466839"/>
+            <a:ext cx="3928533" cy="176106"/>
+          </a:xfrm>
+          <a:prstGeom prst="rect">
+            <a:avLst/>
+          </a:prstGeom>
+          <a:noFill/>
+        </p:spPr>
+        <p:txBody>
+          <a:bodyPr wrap="none" lIns="0" rIns="0" tIns="0" bIns="0">
+            <a:noAutofit/>
+          </a:bodyPr>
+          <a:lstStyle/>
+          <a:p>
+            <a:r>
+              <a:rPr sz="800" b="1" i="0">
+                <a:solidFill>
+                  <a:srgbClr val="1C1C1E"/>
+                </a:solidFill>
+                <a:latin typeface="Inter"/>
+              </a:rPr>
+              <a:t>Kunde Projekttitel</a:t>
+            </a:r>
+          </a:p>
+        </p:txBody>
+      </p:sp>
+      <p:sp>
+        <p:nvSpPr>
+          <p:cNvPr id="18" name="TextBox 17"/>
           <p:cNvSpPr txBox="1"/>
           <p:nvPr/>
         </p:nvSpPr>
@@ -11451,7 +11158,7 @@
         </p:spPr>
         <p:txBody>
           <a:bodyPr wrap="square" lIns="0" rIns="0" tIns="0" bIns="0">
-            <a:spAutoFit/>
+            <a:normAutofit/>
           </a:bodyPr>
           <a:lstStyle/>
           <a:p>
@@ -11469,177 +11176,7 @@
       </p:sp>
       <p:sp>
         <p:nvSpPr>
-          <p:cNvPr id="16" name="TextBox 15"/>
-          <p:cNvSpPr txBox="1"/>
-          <p:nvPr/>
-        </p:nvSpPr>
-        <p:spPr>
-          <a:xfrm>
-            <a:off x="6908799" y="2900680"/>
-            <a:ext cx="1176866" cy="270933"/>
-          </a:xfrm>
-          <a:prstGeom prst="rect">
-            <a:avLst/>
-          </a:prstGeom>
-          <a:noFill/>
-        </p:spPr>
-        <p:txBody>
-          <a:bodyPr wrap="square" lIns="0" rIns="0" tIns="0" bIns="0">
-            <a:spAutoFit/>
-          </a:bodyPr>
-          <a:lstStyle/>
-          <a:p>
-            <a:r>
-              <a:rPr sz="1330" b="0" i="0">
-                <a:solidFill>
-                  <a:srgbClr val="1C1C1E"/>
-                </a:solidFill>
-                <a:latin typeface="Inter"/>
-              </a:rPr>
-              <a:t>Vierter Punkt</a:t>
-            </a:r>
-          </a:p>
-        </p:txBody>
-      </p:sp>
-      <p:sp>
-        <p:nvSpPr>
-          <p:cNvPr id="17" name="TextBox 16"/>
-          <p:cNvSpPr txBox="1"/>
-          <p:nvPr/>
-        </p:nvSpPr>
-        <p:spPr>
-          <a:xfrm>
-            <a:off x="6908799" y="3171613"/>
-            <a:ext cx="1176866" cy="211666"/>
-          </a:xfrm>
-          <a:prstGeom prst="rect">
-            <a:avLst/>
-          </a:prstGeom>
-          <a:noFill/>
-        </p:spPr>
-        <p:txBody>
-          <a:bodyPr wrap="square" lIns="0" rIns="0" tIns="0" bIns="0">
-            <a:spAutoFit/>
-          </a:bodyPr>
-          <a:lstStyle/>
-          <a:p>
-            <a:r>
-              <a:rPr sz="930" b="0" i="0">
-                <a:solidFill>
-                  <a:srgbClr val="3D3D3A"/>
-                </a:solidFill>
-                <a:latin typeface="Inter"/>
-              </a:rPr>
-              <a:t>Ein halber Satz dazu</a:t>
-            </a:r>
-          </a:p>
-        </p:txBody>
-      </p:sp>
-      <p:sp>
-        <p:nvSpPr>
-          <p:cNvPr id="18" name="TextBox 17"/>
-          <p:cNvSpPr txBox="1"/>
-          <p:nvPr/>
-        </p:nvSpPr>
-        <p:spPr>
-          <a:xfrm>
-            <a:off x="1015999" y="3721946"/>
-            <a:ext cx="372533" cy="250613"/>
-          </a:xfrm>
-          <a:prstGeom prst="rect">
-            <a:avLst/>
-          </a:prstGeom>
-          <a:noFill/>
-        </p:spPr>
-        <p:txBody>
-          <a:bodyPr wrap="square" lIns="0" rIns="0" tIns="0" bIns="0">
-            <a:spAutoFit/>
-          </a:bodyPr>
-          <a:lstStyle/>
-          <a:p>
-            <a:r>
-              <a:rPr sz="1070" b="0" i="0">
-                <a:solidFill>
-                  <a:srgbClr val="1C1C1E"/>
-                </a:solidFill>
-                <a:latin typeface="Inter"/>
-              </a:rPr>
-              <a:t>02</a:t>
-            </a:r>
-          </a:p>
-        </p:txBody>
-      </p:sp>
-      <p:sp>
-        <p:nvSpPr>
           <p:cNvPr id="19" name="TextBox 18"/>
-          <p:cNvSpPr txBox="1"/>
-          <p:nvPr/>
-        </p:nvSpPr>
-        <p:spPr>
-          <a:xfrm>
-            <a:off x="1557866" y="3696546"/>
-            <a:ext cx="1176866" cy="270933"/>
-          </a:xfrm>
-          <a:prstGeom prst="rect">
-            <a:avLst/>
-          </a:prstGeom>
-          <a:noFill/>
-        </p:spPr>
-        <p:txBody>
-          <a:bodyPr wrap="square" lIns="0" rIns="0" tIns="0" bIns="0">
-            <a:spAutoFit/>
-          </a:bodyPr>
-          <a:lstStyle/>
-          <a:p>
-            <a:r>
-              <a:rPr sz="1330" b="0" i="0">
-                <a:solidFill>
-                  <a:srgbClr val="1C1C1E"/>
-                </a:solidFill>
-                <a:latin typeface="Inter"/>
-              </a:rPr>
-              <a:t>Zweiter Punkt</a:t>
-            </a:r>
-          </a:p>
-        </p:txBody>
-      </p:sp>
-      <p:sp>
-        <p:nvSpPr>
-          <p:cNvPr id="20" name="TextBox 19"/>
-          <p:cNvSpPr txBox="1"/>
-          <p:nvPr/>
-        </p:nvSpPr>
-        <p:spPr>
-          <a:xfrm>
-            <a:off x="1557866" y="3967480"/>
-            <a:ext cx="1176866" cy="211666"/>
-          </a:xfrm>
-          <a:prstGeom prst="rect">
-            <a:avLst/>
-          </a:prstGeom>
-          <a:noFill/>
-        </p:spPr>
-        <p:txBody>
-          <a:bodyPr wrap="square" lIns="0" rIns="0" tIns="0" bIns="0">
-            <a:spAutoFit/>
-          </a:bodyPr>
-          <a:lstStyle/>
-          <a:p>
-            <a:r>
-              <a:rPr sz="930" b="0" i="0">
-                <a:solidFill>
-                  <a:srgbClr val="3D3D3A"/>
-                </a:solidFill>
-                <a:latin typeface="Inter"/>
-              </a:rPr>
-              <a:t>Ein halber Satz dazu</a:t>
-            </a:r>
-          </a:p>
-        </p:txBody>
-      </p:sp>
-      <p:sp>
-        <p:nvSpPr>
-          <p:cNvPr id="21" name="TextBox 20"/>
           <p:cNvSpPr txBox="1"/>
           <p:nvPr/>
         </p:nvSpPr>
@@ -11655,7 +11192,7 @@
         </p:spPr>
         <p:txBody>
           <a:bodyPr wrap="square" lIns="0" rIns="0" tIns="0" bIns="0">
-            <a:spAutoFit/>
+            <a:normAutofit/>
           </a:bodyPr>
           <a:lstStyle/>
           <a:p>
@@ -11673,177 +11210,7 @@
       </p:sp>
       <p:sp>
         <p:nvSpPr>
-          <p:cNvPr id="22" name="TextBox 21"/>
-          <p:cNvSpPr txBox="1"/>
-          <p:nvPr/>
-        </p:nvSpPr>
-        <p:spPr>
-          <a:xfrm>
-            <a:off x="6908799" y="3696546"/>
-            <a:ext cx="1176866" cy="270933"/>
-          </a:xfrm>
-          <a:prstGeom prst="rect">
-            <a:avLst/>
-          </a:prstGeom>
-          <a:noFill/>
-        </p:spPr>
-        <p:txBody>
-          <a:bodyPr wrap="square" lIns="0" rIns="0" tIns="0" bIns="0">
-            <a:spAutoFit/>
-          </a:bodyPr>
-          <a:lstStyle/>
-          <a:p>
-            <a:r>
-              <a:rPr sz="1330" b="0" i="0">
-                <a:solidFill>
-                  <a:srgbClr val="1C1C1E"/>
-                </a:solidFill>
-                <a:latin typeface="Inter"/>
-              </a:rPr>
-              <a:t>Fünfter Punkt</a:t>
-            </a:r>
-          </a:p>
-        </p:txBody>
-      </p:sp>
-      <p:sp>
-        <p:nvSpPr>
-          <p:cNvPr id="23" name="TextBox 22"/>
-          <p:cNvSpPr txBox="1"/>
-          <p:nvPr/>
-        </p:nvSpPr>
-        <p:spPr>
-          <a:xfrm>
-            <a:off x="6908799" y="3967480"/>
-            <a:ext cx="1176866" cy="211666"/>
-          </a:xfrm>
-          <a:prstGeom prst="rect">
-            <a:avLst/>
-          </a:prstGeom>
-          <a:noFill/>
-        </p:spPr>
-        <p:txBody>
-          <a:bodyPr wrap="square" lIns="0" rIns="0" tIns="0" bIns="0">
-            <a:spAutoFit/>
-          </a:bodyPr>
-          <a:lstStyle/>
-          <a:p>
-            <a:r>
-              <a:rPr sz="930" b="0" i="0">
-                <a:solidFill>
-                  <a:srgbClr val="3D3D3A"/>
-                </a:solidFill>
-                <a:latin typeface="Inter"/>
-              </a:rPr>
-              <a:t>Ein halber Satz dazu</a:t>
-            </a:r>
-          </a:p>
-        </p:txBody>
-      </p:sp>
-      <p:sp>
-        <p:nvSpPr>
-          <p:cNvPr id="24" name="TextBox 23"/>
-          <p:cNvSpPr txBox="1"/>
-          <p:nvPr/>
-        </p:nvSpPr>
-        <p:spPr>
-          <a:xfrm>
-            <a:off x="1015999" y="4517813"/>
-            <a:ext cx="372533" cy="250613"/>
-          </a:xfrm>
-          <a:prstGeom prst="rect">
-            <a:avLst/>
-          </a:prstGeom>
-          <a:noFill/>
-        </p:spPr>
-        <p:txBody>
-          <a:bodyPr wrap="square" lIns="0" rIns="0" tIns="0" bIns="0">
-            <a:spAutoFit/>
-          </a:bodyPr>
-          <a:lstStyle/>
-          <a:p>
-            <a:r>
-              <a:rPr sz="1070" b="0" i="0">
-                <a:solidFill>
-                  <a:srgbClr val="1C1C1E"/>
-                </a:solidFill>
-                <a:latin typeface="Inter"/>
-              </a:rPr>
-              <a:t>03</a:t>
-            </a:r>
-          </a:p>
-        </p:txBody>
-      </p:sp>
-      <p:sp>
-        <p:nvSpPr>
-          <p:cNvPr id="25" name="TextBox 24"/>
-          <p:cNvSpPr txBox="1"/>
-          <p:nvPr/>
-        </p:nvSpPr>
-        <p:spPr>
-          <a:xfrm>
-            <a:off x="1557866" y="4492413"/>
-            <a:ext cx="1176866" cy="270933"/>
-          </a:xfrm>
-          <a:prstGeom prst="rect">
-            <a:avLst/>
-          </a:prstGeom>
-          <a:noFill/>
-        </p:spPr>
-        <p:txBody>
-          <a:bodyPr wrap="square" lIns="0" rIns="0" tIns="0" bIns="0">
-            <a:spAutoFit/>
-          </a:bodyPr>
-          <a:lstStyle/>
-          <a:p>
-            <a:r>
-              <a:rPr sz="1330" b="0" i="0">
-                <a:solidFill>
-                  <a:srgbClr val="1C1C1E"/>
-                </a:solidFill>
-                <a:latin typeface="Inter"/>
-              </a:rPr>
-              <a:t>Dritter Punkt</a:t>
-            </a:r>
-          </a:p>
-        </p:txBody>
-      </p:sp>
-      <p:sp>
-        <p:nvSpPr>
-          <p:cNvPr id="26" name="TextBox 25"/>
-          <p:cNvSpPr txBox="1"/>
-          <p:nvPr/>
-        </p:nvSpPr>
-        <p:spPr>
-          <a:xfrm>
-            <a:off x="1557866" y="4763346"/>
-            <a:ext cx="1176866" cy="211666"/>
-          </a:xfrm>
-          <a:prstGeom prst="rect">
-            <a:avLst/>
-          </a:prstGeom>
-          <a:noFill/>
-        </p:spPr>
-        <p:txBody>
-          <a:bodyPr wrap="square" lIns="0" rIns="0" tIns="0" bIns="0">
-            <a:spAutoFit/>
-          </a:bodyPr>
-          <a:lstStyle/>
-          <a:p>
-            <a:r>
-              <a:rPr sz="930" b="0" i="0">
-                <a:solidFill>
-                  <a:srgbClr val="3D3D3A"/>
-                </a:solidFill>
-                <a:latin typeface="Inter"/>
-              </a:rPr>
-              <a:t>Ein halber Satz dazu</a:t>
-            </a:r>
-          </a:p>
-        </p:txBody>
-      </p:sp>
-      <p:sp>
-        <p:nvSpPr>
-          <p:cNvPr id="27" name="TextBox 26"/>
+          <p:cNvPr id="20" name="TextBox 19"/>
           <p:cNvSpPr txBox="1"/>
           <p:nvPr/>
         </p:nvSpPr>
@@ -11859,7 +11226,7 @@
         </p:spPr>
         <p:txBody>
           <a:bodyPr wrap="square" lIns="0" rIns="0" tIns="0" bIns="0">
-            <a:spAutoFit/>
+            <a:normAutofit/>
           </a:bodyPr>
           <a:lstStyle/>
           <a:p>
@@ -11877,14 +11244,114 @@
       </p:sp>
       <p:sp>
         <p:nvSpPr>
-          <p:cNvPr id="28" name="TextBox 27"/>
+          <p:cNvPr id="21" name="TextBox 20"/>
+          <p:cNvSpPr txBox="1"/>
+          <p:nvPr/>
+        </p:nvSpPr>
+        <p:spPr>
+          <a:xfrm>
+            <a:off x="6908799" y="2900680"/>
+            <a:ext cx="1176866" cy="482599"/>
+          </a:xfrm>
+          <a:prstGeom prst="rect">
+            <a:avLst/>
+          </a:prstGeom>
+          <a:noFill/>
+        </p:spPr>
+        <p:txBody>
+          <a:bodyPr wrap="square" lIns="0" rIns="0" tIns="0" bIns="0">
+            <a:normAutofit/>
+          </a:bodyPr>
+          <a:lstStyle/>
+          <a:p>
+            <a:r>
+              <a:rPr sz="1330" b="0" i="0">
+                <a:solidFill>
+                  <a:srgbClr val="1C1C1E"/>
+                </a:solidFill>
+                <a:latin typeface="Inter"/>
+              </a:rPr>
+              <a:t>Vierter Punkt</a:t>
+            </a:r>
+          </a:p>
+          <a:p>
+            <a:pPr>
+              <a:spcBef>
+                <a:spcPts val="270"/>
+              </a:spcBef>
+            </a:pPr>
+            <a:r>
+              <a:rPr sz="930" b="0" i="0">
+                <a:solidFill>
+                  <a:srgbClr val="3D3D3A"/>
+                </a:solidFill>
+                <a:latin typeface="Inter"/>
+              </a:rPr>
+              <a:t>Ein halber Satz dazu</a:t>
+            </a:r>
+          </a:p>
+        </p:txBody>
+      </p:sp>
+      <p:sp>
+        <p:nvSpPr>
+          <p:cNvPr id="22" name="TextBox 21"/>
+          <p:cNvSpPr txBox="1"/>
+          <p:nvPr/>
+        </p:nvSpPr>
+        <p:spPr>
+          <a:xfrm>
+            <a:off x="6908799" y="3696546"/>
+            <a:ext cx="1176866" cy="482599"/>
+          </a:xfrm>
+          <a:prstGeom prst="rect">
+            <a:avLst/>
+          </a:prstGeom>
+          <a:noFill/>
+        </p:spPr>
+        <p:txBody>
+          <a:bodyPr wrap="square" lIns="0" rIns="0" tIns="0" bIns="0">
+            <a:normAutofit/>
+          </a:bodyPr>
+          <a:lstStyle/>
+          <a:p>
+            <a:r>
+              <a:rPr sz="1330" b="0" i="0">
+                <a:solidFill>
+                  <a:srgbClr val="1C1C1E"/>
+                </a:solidFill>
+                <a:latin typeface="Inter"/>
+              </a:rPr>
+              <a:t>Fünfter Punkt</a:t>
+            </a:r>
+          </a:p>
+          <a:p>
+            <a:pPr>
+              <a:spcBef>
+                <a:spcPts val="270"/>
+              </a:spcBef>
+            </a:pPr>
+            <a:r>
+              <a:rPr sz="930" b="0" i="0">
+                <a:solidFill>
+                  <a:srgbClr val="3D3D3A"/>
+                </a:solidFill>
+                <a:latin typeface="Inter"/>
+              </a:rPr>
+              <a:t>Ein halber Satz dazu</a:t>
+            </a:r>
+          </a:p>
+        </p:txBody>
+      </p:sp>
+      <p:sp>
+        <p:nvSpPr>
+          <p:cNvPr id="23" name="TextBox 22"/>
           <p:cNvSpPr txBox="1"/>
           <p:nvPr/>
         </p:nvSpPr>
         <p:spPr>
           <a:xfrm>
             <a:off x="6908799" y="4492413"/>
-            <a:ext cx="1228513" cy="270933"/>
+            <a:ext cx="1228513" cy="482599"/>
           </a:xfrm>
           <a:prstGeom prst="rect">
             <a:avLst/>
@@ -11893,7 +11360,7 @@
         </p:spPr>
         <p:txBody>
           <a:bodyPr wrap="square" lIns="0" rIns="0" tIns="0" bIns="0">
-            <a:spAutoFit/>
+            <a:normAutofit/>
           </a:bodyPr>
           <a:lstStyle/>
           <a:p>
@@ -11907,30 +11374,12 @@
               <a:t>Sechster Punkt</a:t>
             </a:r>
           </a:p>
-        </p:txBody>
-      </p:sp>
-      <p:sp>
-        <p:nvSpPr>
-          <p:cNvPr id="29" name="TextBox 28"/>
-          <p:cNvSpPr txBox="1"/>
-          <p:nvPr/>
-        </p:nvSpPr>
-        <p:spPr>
-          <a:xfrm>
-            <a:off x="6908799" y="4763346"/>
-            <a:ext cx="1228513" cy="211666"/>
-          </a:xfrm>
-          <a:prstGeom prst="rect">
-            <a:avLst/>
-          </a:prstGeom>
-          <a:noFill/>
-        </p:spPr>
-        <p:txBody>
-          <a:bodyPr wrap="square" lIns="0" rIns="0" tIns="0" bIns="0">
-            <a:spAutoFit/>
-          </a:bodyPr>
-          <a:lstStyle/>
-          <a:p>
+          <a:p>
+            <a:pPr>
+              <a:spcBef>
+                <a:spcPts val="270"/>
+              </a:spcBef>
+            </a:pPr>
             <a:r>
               <a:rPr sz="930" b="0" i="0">
                 <a:solidFill>
@@ -11939,6 +11388,41 @@
                 <a:latin typeface="Inter"/>
               </a:rPr>
               <a:t>Ein halber Satz dazu</a:t>
+            </a:r>
+          </a:p>
+        </p:txBody>
+      </p:sp>
+      <p:sp>
+        <p:nvSpPr>
+          <p:cNvPr id="24" name="TextBox 23"/>
+          <p:cNvSpPr txBox="1"/>
+          <p:nvPr/>
+        </p:nvSpPr>
+        <p:spPr>
+          <a:xfrm>
+            <a:off x="10634133" y="6495626"/>
+            <a:ext cx="575733" cy="176106"/>
+          </a:xfrm>
+          <a:prstGeom prst="rect">
+            <a:avLst/>
+          </a:prstGeom>
+          <a:noFill/>
+        </p:spPr>
+        <p:txBody>
+          <a:bodyPr wrap="none" lIns="0" rIns="0" tIns="0" bIns="0">
+            <a:noAutofit/>
+          </a:bodyPr>
+          <a:lstStyle/>
+          <a:p>
+            <a:pPr algn="r"/>
+            <a:r>
+              <a:rPr sz="800" b="0" i="0">
+                <a:solidFill>
+                  <a:srgbClr val="6B6B65"/>
+                </a:solidFill>
+                <a:latin typeface="Inter"/>
+              </a:rPr>
+              <a:t>02</a:t>
             </a:r>
           </a:p>
         </p:txBody>
@@ -12027,7 +11511,7 @@
         </p:spPr>
         <p:txBody>
           <a:bodyPr wrap="square" lIns="0" rIns="0" tIns="0" bIns="0">
-            <a:spAutoFit/>
+            <a:normAutofit/>
           </a:bodyPr>
           <a:lstStyle/>
           <a:p>
@@ -12053,7 +11537,7 @@
         <p:spPr>
           <a:xfrm>
             <a:off x="4995333" y="4247726"/>
-            <a:ext cx="2235200" cy="250613"/>
+            <a:ext cx="2235200" cy="462279"/>
           </a:xfrm>
           <a:prstGeom prst="rect">
             <a:avLst/>
@@ -12062,7 +11546,7 @@
         </p:spPr>
         <p:txBody>
           <a:bodyPr wrap="square" lIns="0" rIns="0" tIns="0" bIns="0">
-            <a:spAutoFit/>
+            <a:normAutofit/>
           </a:bodyPr>
           <a:lstStyle/>
           <a:p>
@@ -12077,31 +11561,12 @@
               <a:t>Vorname Nachname, Rolle</a:t>
             </a:r>
           </a:p>
-        </p:txBody>
-      </p:sp>
-      <p:sp>
-        <p:nvSpPr>
-          <p:cNvPr id="6" name="TextBox 5"/>
-          <p:cNvSpPr txBox="1"/>
-          <p:nvPr/>
-        </p:nvSpPr>
-        <p:spPr>
-          <a:xfrm>
-            <a:off x="4995333" y="4498339"/>
-            <a:ext cx="2235200" cy="211666"/>
-          </a:xfrm>
-          <a:prstGeom prst="rect">
-            <a:avLst/>
-          </a:prstGeom>
-          <a:noFill/>
-        </p:spPr>
-        <p:txBody>
-          <a:bodyPr wrap="square" lIns="0" rIns="0" tIns="0" bIns="0">
-            <a:spAutoFit/>
-          </a:bodyPr>
-          <a:lstStyle/>
-          <a:p>
-            <a:pPr algn="ctr"/>
+          <a:p>
+            <a:pPr algn="ctr">
+              <a:spcBef>
+                <a:spcPts val="270"/>
+              </a:spcBef>
+            </a:pPr>
             <a:r>
               <a:rPr sz="930" b="0" i="0">
                 <a:solidFill>
@@ -12481,16 +11946,16 @@
         <p:spPr>
           <a:xfrm>
             <a:off x="1015999" y="389466"/>
-            <a:ext cx="1101513" cy="176106"/>
-          </a:xfrm>
-          <a:prstGeom prst="rect">
-            <a:avLst/>
-          </a:prstGeom>
-          <a:noFill/>
-        </p:spPr>
-        <p:txBody>
-          <a:bodyPr wrap="square" lIns="0" rIns="0" tIns="0" bIns="0">
-            <a:spAutoFit/>
+            <a:ext cx="4775200" cy="176106"/>
+          </a:xfrm>
+          <a:prstGeom prst="rect">
+            <a:avLst/>
+          </a:prstGeom>
+          <a:noFill/>
+        </p:spPr>
+        <p:txBody>
+          <a:bodyPr wrap="none" lIns="0" rIns="0" tIns="0" bIns="0">
+            <a:noAutofit/>
           </a:bodyPr>
           <a:lstStyle/>
           <a:p>
@@ -12509,40 +11974,6 @@
       <p:sp>
         <p:nvSpPr>
           <p:cNvPr id="11" name="TextBox 10"/>
-          <p:cNvSpPr txBox="1"/>
-          <p:nvPr/>
-        </p:nvSpPr>
-        <p:spPr>
-          <a:xfrm>
-            <a:off x="2003213" y="6466839"/>
-            <a:ext cx="904239" cy="176106"/>
-          </a:xfrm>
-          <a:prstGeom prst="rect">
-            <a:avLst/>
-          </a:prstGeom>
-          <a:noFill/>
-        </p:spPr>
-        <p:txBody>
-          <a:bodyPr wrap="square" lIns="0" rIns="0" tIns="0" bIns="0">
-            <a:spAutoFit/>
-          </a:bodyPr>
-          <a:lstStyle/>
-          <a:p>
-            <a:r>
-              <a:rPr sz="800" b="1" i="0">
-                <a:solidFill>
-                  <a:srgbClr val="1C1C1E"/>
-                </a:solidFill>
-                <a:latin typeface="Inter"/>
-              </a:rPr>
-              <a:t>Kunde Projekttitel</a:t>
-            </a:r>
-          </a:p>
-        </p:txBody>
-      </p:sp>
-      <p:sp>
-        <p:nvSpPr>
-          <p:cNvPr id="12" name="TextBox 11"/>
           <p:cNvSpPr txBox="1"/>
           <p:nvPr/>
         </p:nvSpPr>
@@ -12558,7 +11989,7 @@
         </p:spPr>
         <p:txBody>
           <a:bodyPr wrap="square" lIns="0" rIns="0" tIns="0" bIns="0">
-            <a:spAutoFit/>
+            <a:normAutofit/>
           </a:bodyPr>
           <a:lstStyle/>
           <a:p>
@@ -12576,7 +12007,7 @@
       </p:sp>
       <p:sp>
         <p:nvSpPr>
-          <p:cNvPr id="13" name="TextBox 12"/>
+          <p:cNvPr id="12" name="TextBox 11"/>
           <p:cNvSpPr txBox="1"/>
           <p:nvPr/>
         </p:nvSpPr>
@@ -12591,8 +12022,8 @@
           <a:noFill/>
         </p:spPr>
         <p:txBody>
-          <a:bodyPr wrap="square" lIns="0" rIns="0" tIns="0" bIns="0">
-            <a:spAutoFit/>
+          <a:bodyPr wrap="none" lIns="0" rIns="0" tIns="0" bIns="0">
+            <a:noAutofit/>
           </a:bodyPr>
           <a:lstStyle/>
           <a:p>
@@ -12610,7 +12041,7 @@
       </p:sp>
       <p:sp>
         <p:nvSpPr>
-          <p:cNvPr id="14" name="TextBox 13"/>
+          <p:cNvPr id="13" name="TextBox 12"/>
           <p:cNvSpPr txBox="1"/>
           <p:nvPr/>
         </p:nvSpPr>
@@ -12626,7 +12057,7 @@
         </p:spPr>
         <p:txBody>
           <a:bodyPr wrap="square" lIns="0" rIns="0" tIns="0" bIns="0">
-            <a:spAutoFit/>
+            <a:normAutofit/>
           </a:bodyPr>
           <a:lstStyle/>
           <a:p>
@@ -12644,7 +12075,75 @@
       </p:sp>
       <p:sp>
         <p:nvSpPr>
+          <p:cNvPr id="14" name="TextBox 13"/>
+          <p:cNvSpPr txBox="1"/>
+          <p:nvPr/>
+        </p:nvSpPr>
+        <p:spPr>
+          <a:xfrm>
+            <a:off x="1015999" y="3489959"/>
+            <a:ext cx="372533" cy="250613"/>
+          </a:xfrm>
+          <a:prstGeom prst="rect">
+            <a:avLst/>
+          </a:prstGeom>
+          <a:noFill/>
+        </p:spPr>
+        <p:txBody>
+          <a:bodyPr wrap="square" lIns="0" rIns="0" tIns="0" bIns="0">
+            <a:normAutofit/>
+          </a:bodyPr>
+          <a:lstStyle/>
+          <a:p>
+            <a:r>
+              <a:rPr sz="1070" b="0" i="0">
+                <a:solidFill>
+                  <a:srgbClr val="1C1C1E"/>
+                </a:solidFill>
+                <a:latin typeface="Inter"/>
+              </a:rPr>
+              <a:t>02</a:t>
+            </a:r>
+          </a:p>
+        </p:txBody>
+      </p:sp>
+      <p:sp>
+        <p:nvSpPr>
           <p:cNvPr id="15" name="TextBox 14"/>
+          <p:cNvSpPr txBox="1"/>
+          <p:nvPr/>
+        </p:nvSpPr>
+        <p:spPr>
+          <a:xfrm>
+            <a:off x="1015999" y="4079240"/>
+            <a:ext cx="372533" cy="250613"/>
+          </a:xfrm>
+          <a:prstGeom prst="rect">
+            <a:avLst/>
+          </a:prstGeom>
+          <a:noFill/>
+        </p:spPr>
+        <p:txBody>
+          <a:bodyPr wrap="square" lIns="0" rIns="0" tIns="0" bIns="0">
+            <a:normAutofit/>
+          </a:bodyPr>
+          <a:lstStyle/>
+          <a:p>
+            <a:r>
+              <a:rPr sz="1070" b="0" i="0">
+                <a:solidFill>
+                  <a:srgbClr val="1C1C1E"/>
+                </a:solidFill>
+                <a:latin typeface="Inter"/>
+              </a:rPr>
+              <a:t>03</a:t>
+            </a:r>
+          </a:p>
+        </p:txBody>
+      </p:sp>
+      <p:sp>
+        <p:nvSpPr>
+          <p:cNvPr id="16" name="TextBox 15"/>
           <p:cNvSpPr txBox="1"/>
           <p:nvPr/>
         </p:nvSpPr>
@@ -12660,7 +12159,7 @@
         </p:spPr>
         <p:txBody>
           <a:bodyPr wrap="square" lIns="0" rIns="0" tIns="0" bIns="0">
-            <a:spAutoFit/>
+            <a:normAutofit/>
           </a:bodyPr>
           <a:lstStyle/>
           <a:p>
@@ -12672,40 +12171,6 @@
                 <a:latin typeface="Inter"/>
               </a:rPr>
               <a:t>Erster Entscheidungspunkt</a:t>
-            </a:r>
-          </a:p>
-        </p:txBody>
-      </p:sp>
-      <p:sp>
-        <p:nvSpPr>
-          <p:cNvPr id="16" name="TextBox 15"/>
-          <p:cNvSpPr txBox="1"/>
-          <p:nvPr/>
-        </p:nvSpPr>
-        <p:spPr>
-          <a:xfrm>
-            <a:off x="1015999" y="3489959"/>
-            <a:ext cx="372533" cy="250613"/>
-          </a:xfrm>
-          <a:prstGeom prst="rect">
-            <a:avLst/>
-          </a:prstGeom>
-          <a:noFill/>
-        </p:spPr>
-        <p:txBody>
-          <a:bodyPr wrap="square" lIns="0" rIns="0" tIns="0" bIns="0">
-            <a:spAutoFit/>
-          </a:bodyPr>
-          <a:lstStyle/>
-          <a:p>
-            <a:r>
-              <a:rPr sz="1070" b="0" i="0">
-                <a:solidFill>
-                  <a:srgbClr val="1C1C1E"/>
-                </a:solidFill>
-                <a:latin typeface="Inter"/>
-              </a:rPr>
-              <a:t>02</a:t>
             </a:r>
           </a:p>
         </p:txBody>
@@ -12728,7 +12193,7 @@
         </p:spPr>
         <p:txBody>
           <a:bodyPr wrap="square" lIns="0" rIns="0" tIns="0" bIns="0">
-            <a:spAutoFit/>
+            <a:normAutofit/>
           </a:bodyPr>
           <a:lstStyle/>
           <a:p>
@@ -12747,40 +12212,6 @@
       <p:sp>
         <p:nvSpPr>
           <p:cNvPr id="18" name="TextBox 17"/>
-          <p:cNvSpPr txBox="1"/>
-          <p:nvPr/>
-        </p:nvSpPr>
-        <p:spPr>
-          <a:xfrm>
-            <a:off x="1015999" y="4079240"/>
-            <a:ext cx="372533" cy="250613"/>
-          </a:xfrm>
-          <a:prstGeom prst="rect">
-            <a:avLst/>
-          </a:prstGeom>
-          <a:noFill/>
-        </p:spPr>
-        <p:txBody>
-          <a:bodyPr wrap="square" lIns="0" rIns="0" tIns="0" bIns="0">
-            <a:spAutoFit/>
-          </a:bodyPr>
-          <a:lstStyle/>
-          <a:p>
-            <a:r>
-              <a:rPr sz="1070" b="0" i="0">
-                <a:solidFill>
-                  <a:srgbClr val="1C1C1E"/>
-                </a:solidFill>
-                <a:latin typeface="Inter"/>
-              </a:rPr>
-              <a:t>03</a:t>
-            </a:r>
-          </a:p>
-        </p:txBody>
-      </p:sp>
-      <p:sp>
-        <p:nvSpPr>
-          <p:cNvPr id="19" name="TextBox 18"/>
           <p:cNvSpPr txBox="1"/>
           <p:nvPr/>
         </p:nvSpPr>
@@ -12796,7 +12227,7 @@
         </p:spPr>
         <p:txBody>
           <a:bodyPr wrap="square" lIns="0" rIns="0" tIns="0" bIns="0">
-            <a:spAutoFit/>
+            <a:normAutofit/>
           </a:bodyPr>
           <a:lstStyle/>
           <a:p>
@@ -12808,6 +12239,40 @@
                 <a:latin typeface="Inter"/>
               </a:rPr>
               <a:t>Dritter Entscheidungspunkt</a:t>
+            </a:r>
+          </a:p>
+        </p:txBody>
+      </p:sp>
+      <p:sp>
+        <p:nvSpPr>
+          <p:cNvPr id="19" name="TextBox 18"/>
+          <p:cNvSpPr txBox="1"/>
+          <p:nvPr/>
+        </p:nvSpPr>
+        <p:spPr>
+          <a:xfrm>
+            <a:off x="2003213" y="6466839"/>
+            <a:ext cx="3928533" cy="176106"/>
+          </a:xfrm>
+          <a:prstGeom prst="rect">
+            <a:avLst/>
+          </a:prstGeom>
+          <a:noFill/>
+        </p:spPr>
+        <p:txBody>
+          <a:bodyPr wrap="none" lIns="0" rIns="0" tIns="0" bIns="0">
+            <a:noAutofit/>
+          </a:bodyPr>
+          <a:lstStyle/>
+          <a:p>
+            <a:r>
+              <a:rPr sz="800" b="1" i="0">
+                <a:solidFill>
+                  <a:srgbClr val="1C1C1E"/>
+                </a:solidFill>
+                <a:latin typeface="Inter"/>
+              </a:rPr>
+              <a:t>Kunde Projekttitel</a:t>
             </a:r>
           </a:p>
         </p:txBody>
@@ -12829,8 +12294,8 @@
           <a:noFill/>
         </p:spPr>
         <p:txBody>
-          <a:bodyPr wrap="square" lIns="0" rIns="0" tIns="0" bIns="0">
-            <a:spAutoFit/>
+          <a:bodyPr wrap="none" lIns="0" rIns="0" tIns="0" bIns="0">
+            <a:noAutofit/>
           </a:bodyPr>
           <a:lstStyle/>
           <a:p>
@@ -12864,7 +12329,7 @@
         </p:spPr>
         <p:txBody>
           <a:bodyPr wrap="square" lIns="0" rIns="0" tIns="0" bIns="0">
-            <a:spAutoFit/>
+            <a:normAutofit/>
           </a:bodyPr>
           <a:lstStyle/>
           <a:p>
@@ -12883,74 +12348,6 @@
       <p:sp>
         <p:nvSpPr>
           <p:cNvPr id="22" name="TextBox 21"/>
-          <p:cNvSpPr txBox="1"/>
-          <p:nvPr/>
-        </p:nvSpPr>
-        <p:spPr>
-          <a:xfrm>
-            <a:off x="6908799" y="2875280"/>
-            <a:ext cx="1705186" cy="270933"/>
-          </a:xfrm>
-          <a:prstGeom prst="rect">
-            <a:avLst/>
-          </a:prstGeom>
-          <a:noFill/>
-        </p:spPr>
-        <p:txBody>
-          <a:bodyPr wrap="square" lIns="0" rIns="0" tIns="0" bIns="0">
-            <a:spAutoFit/>
-          </a:bodyPr>
-          <a:lstStyle/>
-          <a:p>
-            <a:r>
-              <a:rPr sz="1330" b="0" i="0">
-                <a:solidFill>
-                  <a:srgbClr val="1C1C1E"/>
-                </a:solidFill>
-                <a:latin typeface="Inter"/>
-              </a:rPr>
-              <a:t>Erstes Kapitel</a:t>
-            </a:r>
-          </a:p>
-        </p:txBody>
-      </p:sp>
-      <p:sp>
-        <p:nvSpPr>
-          <p:cNvPr id="23" name="TextBox 22"/>
-          <p:cNvSpPr txBox="1"/>
-          <p:nvPr/>
-        </p:nvSpPr>
-        <p:spPr>
-          <a:xfrm>
-            <a:off x="6908799" y="3146213"/>
-            <a:ext cx="1705186" cy="211666"/>
-          </a:xfrm>
-          <a:prstGeom prst="rect">
-            <a:avLst/>
-          </a:prstGeom>
-          <a:noFill/>
-        </p:spPr>
-        <p:txBody>
-          <a:bodyPr wrap="square" lIns="0" rIns="0" tIns="0" bIns="0">
-            <a:spAutoFit/>
-          </a:bodyPr>
-          <a:lstStyle/>
-          <a:p>
-            <a:r>
-              <a:rPr sz="930" b="0" i="0">
-                <a:solidFill>
-                  <a:srgbClr val="6B6B65"/>
-                </a:solidFill>
-                <a:latin typeface="Inter"/>
-              </a:rPr>
-              <a:t>Halber Satz, was hier passiert</a:t>
-            </a:r>
-          </a:p>
-        </p:txBody>
-      </p:sp>
-      <p:sp>
-        <p:nvSpPr>
-          <p:cNvPr id="24" name="TextBox 23"/>
           <p:cNvSpPr txBox="1"/>
           <p:nvPr/>
         </p:nvSpPr>
@@ -12966,7 +12363,7 @@
         </p:spPr>
         <p:txBody>
           <a:bodyPr wrap="square" lIns="0" rIns="0" tIns="0" bIns="0">
-            <a:spAutoFit/>
+            <a:normAutofit/>
           </a:bodyPr>
           <a:lstStyle/>
           <a:p>
@@ -12984,75 +12381,7 @@
       </p:sp>
       <p:sp>
         <p:nvSpPr>
-          <p:cNvPr id="25" name="TextBox 24"/>
-          <p:cNvSpPr txBox="1"/>
-          <p:nvPr/>
-        </p:nvSpPr>
-        <p:spPr>
-          <a:xfrm>
-            <a:off x="6908799" y="3671146"/>
-            <a:ext cx="1705186" cy="270933"/>
-          </a:xfrm>
-          <a:prstGeom prst="rect">
-            <a:avLst/>
-          </a:prstGeom>
-          <a:noFill/>
-        </p:spPr>
-        <p:txBody>
-          <a:bodyPr wrap="square" lIns="0" rIns="0" tIns="0" bIns="0">
-            <a:spAutoFit/>
-          </a:bodyPr>
-          <a:lstStyle/>
-          <a:p>
-            <a:r>
-              <a:rPr sz="1330" b="0" i="0">
-                <a:solidFill>
-                  <a:srgbClr val="1C1C1E"/>
-                </a:solidFill>
-                <a:latin typeface="Inter"/>
-              </a:rPr>
-              <a:t>Zweites Kapitel</a:t>
-            </a:r>
-          </a:p>
-        </p:txBody>
-      </p:sp>
-      <p:sp>
-        <p:nvSpPr>
-          <p:cNvPr id="26" name="TextBox 25"/>
-          <p:cNvSpPr txBox="1"/>
-          <p:nvPr/>
-        </p:nvSpPr>
-        <p:spPr>
-          <a:xfrm>
-            <a:off x="6908799" y="3942080"/>
-            <a:ext cx="1705186" cy="211666"/>
-          </a:xfrm>
-          <a:prstGeom prst="rect">
-            <a:avLst/>
-          </a:prstGeom>
-          <a:noFill/>
-        </p:spPr>
-        <p:txBody>
-          <a:bodyPr wrap="square" lIns="0" rIns="0" tIns="0" bIns="0">
-            <a:spAutoFit/>
-          </a:bodyPr>
-          <a:lstStyle/>
-          <a:p>
-            <a:r>
-              <a:rPr sz="930" b="0" i="0">
-                <a:solidFill>
-                  <a:srgbClr val="6B6B65"/>
-                </a:solidFill>
-                <a:latin typeface="Inter"/>
-              </a:rPr>
-              <a:t>Halber Satz, was hier passiert</a:t>
-            </a:r>
-          </a:p>
-        </p:txBody>
-      </p:sp>
-      <p:sp>
-        <p:nvSpPr>
-          <p:cNvPr id="27" name="TextBox 26"/>
+          <p:cNvPr id="23" name="TextBox 22"/>
           <p:cNvSpPr txBox="1"/>
           <p:nvPr/>
         </p:nvSpPr>
@@ -13068,7 +12397,7 @@
         </p:spPr>
         <p:txBody>
           <a:bodyPr wrap="square" lIns="0" rIns="0" tIns="0" bIns="0">
-            <a:spAutoFit/>
+            <a:normAutofit/>
           </a:bodyPr>
           <a:lstStyle/>
           <a:p>
@@ -13086,75 +12415,7 @@
       </p:sp>
       <p:sp>
         <p:nvSpPr>
-          <p:cNvPr id="28" name="TextBox 27"/>
-          <p:cNvSpPr txBox="1"/>
-          <p:nvPr/>
-        </p:nvSpPr>
-        <p:spPr>
-          <a:xfrm>
-            <a:off x="6908799" y="4467013"/>
-            <a:ext cx="1705186" cy="270933"/>
-          </a:xfrm>
-          <a:prstGeom prst="rect">
-            <a:avLst/>
-          </a:prstGeom>
-          <a:noFill/>
-        </p:spPr>
-        <p:txBody>
-          <a:bodyPr wrap="square" lIns="0" rIns="0" tIns="0" bIns="0">
-            <a:spAutoFit/>
-          </a:bodyPr>
-          <a:lstStyle/>
-          <a:p>
-            <a:r>
-              <a:rPr sz="1330" b="0" i="0">
-                <a:solidFill>
-                  <a:srgbClr val="1C1C1E"/>
-                </a:solidFill>
-                <a:latin typeface="Inter"/>
-              </a:rPr>
-              <a:t>Drittes Kapitel</a:t>
-            </a:r>
-          </a:p>
-        </p:txBody>
-      </p:sp>
-      <p:sp>
-        <p:nvSpPr>
-          <p:cNvPr id="29" name="TextBox 28"/>
-          <p:cNvSpPr txBox="1"/>
-          <p:nvPr/>
-        </p:nvSpPr>
-        <p:spPr>
-          <a:xfrm>
-            <a:off x="6908799" y="4737946"/>
-            <a:ext cx="1705186" cy="211666"/>
-          </a:xfrm>
-          <a:prstGeom prst="rect">
-            <a:avLst/>
-          </a:prstGeom>
-          <a:noFill/>
-        </p:spPr>
-        <p:txBody>
-          <a:bodyPr wrap="square" lIns="0" rIns="0" tIns="0" bIns="0">
-            <a:spAutoFit/>
-          </a:bodyPr>
-          <a:lstStyle/>
-          <a:p>
-            <a:r>
-              <a:rPr sz="930" b="0" i="0">
-                <a:solidFill>
-                  <a:srgbClr val="6B6B65"/>
-                </a:solidFill>
-                <a:latin typeface="Inter"/>
-              </a:rPr>
-              <a:t>Halber Satz, was hier passiert</a:t>
-            </a:r>
-          </a:p>
-        </p:txBody>
-      </p:sp>
-      <p:sp>
-        <p:nvSpPr>
-          <p:cNvPr id="30" name="TextBox 29"/>
+          <p:cNvPr id="24" name="TextBox 23"/>
           <p:cNvSpPr txBox="1"/>
           <p:nvPr/>
         </p:nvSpPr>
@@ -13170,7 +12431,7 @@
         </p:spPr>
         <p:txBody>
           <a:bodyPr wrap="square" lIns="0" rIns="0" tIns="0" bIns="0">
-            <a:spAutoFit/>
+            <a:normAutofit/>
           </a:bodyPr>
           <a:lstStyle/>
           <a:p>
@@ -13188,14 +12449,164 @@
       </p:sp>
       <p:sp>
         <p:nvSpPr>
-          <p:cNvPr id="31" name="TextBox 30"/>
+          <p:cNvPr id="25" name="TextBox 24"/>
+          <p:cNvSpPr txBox="1"/>
+          <p:nvPr/>
+        </p:nvSpPr>
+        <p:spPr>
+          <a:xfrm>
+            <a:off x="6908799" y="2875280"/>
+            <a:ext cx="1705186" cy="482599"/>
+          </a:xfrm>
+          <a:prstGeom prst="rect">
+            <a:avLst/>
+          </a:prstGeom>
+          <a:noFill/>
+        </p:spPr>
+        <p:txBody>
+          <a:bodyPr wrap="square" lIns="0" rIns="0" tIns="0" bIns="0">
+            <a:normAutofit/>
+          </a:bodyPr>
+          <a:lstStyle/>
+          <a:p>
+            <a:r>
+              <a:rPr sz="1330" b="0" i="0">
+                <a:solidFill>
+                  <a:srgbClr val="1C1C1E"/>
+                </a:solidFill>
+                <a:latin typeface="Inter"/>
+              </a:rPr>
+              <a:t>Erstes Kapitel</a:t>
+            </a:r>
+          </a:p>
+          <a:p>
+            <a:pPr>
+              <a:spcBef>
+                <a:spcPts val="270"/>
+              </a:spcBef>
+            </a:pPr>
+            <a:r>
+              <a:rPr sz="930" b="0" i="0">
+                <a:solidFill>
+                  <a:srgbClr val="6B6B65"/>
+                </a:solidFill>
+                <a:latin typeface="Inter"/>
+              </a:rPr>
+              <a:t>Halber Satz, was hier passiert</a:t>
+            </a:r>
+          </a:p>
+        </p:txBody>
+      </p:sp>
+      <p:sp>
+        <p:nvSpPr>
+          <p:cNvPr id="26" name="TextBox 25"/>
+          <p:cNvSpPr txBox="1"/>
+          <p:nvPr/>
+        </p:nvSpPr>
+        <p:spPr>
+          <a:xfrm>
+            <a:off x="6908799" y="3671146"/>
+            <a:ext cx="1705186" cy="482599"/>
+          </a:xfrm>
+          <a:prstGeom prst="rect">
+            <a:avLst/>
+          </a:prstGeom>
+          <a:noFill/>
+        </p:spPr>
+        <p:txBody>
+          <a:bodyPr wrap="square" lIns="0" rIns="0" tIns="0" bIns="0">
+            <a:normAutofit/>
+          </a:bodyPr>
+          <a:lstStyle/>
+          <a:p>
+            <a:r>
+              <a:rPr sz="1330" b="0" i="0">
+                <a:solidFill>
+                  <a:srgbClr val="1C1C1E"/>
+                </a:solidFill>
+                <a:latin typeface="Inter"/>
+              </a:rPr>
+              <a:t>Zweites Kapitel</a:t>
+            </a:r>
+          </a:p>
+          <a:p>
+            <a:pPr>
+              <a:spcBef>
+                <a:spcPts val="270"/>
+              </a:spcBef>
+            </a:pPr>
+            <a:r>
+              <a:rPr sz="930" b="0" i="0">
+                <a:solidFill>
+                  <a:srgbClr val="6B6B65"/>
+                </a:solidFill>
+                <a:latin typeface="Inter"/>
+              </a:rPr>
+              <a:t>Halber Satz, was hier passiert</a:t>
+            </a:r>
+          </a:p>
+        </p:txBody>
+      </p:sp>
+      <p:sp>
+        <p:nvSpPr>
+          <p:cNvPr id="27" name="TextBox 26"/>
+          <p:cNvSpPr txBox="1"/>
+          <p:nvPr/>
+        </p:nvSpPr>
+        <p:spPr>
+          <a:xfrm>
+            <a:off x="6908799" y="4467013"/>
+            <a:ext cx="1705186" cy="482599"/>
+          </a:xfrm>
+          <a:prstGeom prst="rect">
+            <a:avLst/>
+          </a:prstGeom>
+          <a:noFill/>
+        </p:spPr>
+        <p:txBody>
+          <a:bodyPr wrap="square" lIns="0" rIns="0" tIns="0" bIns="0">
+            <a:normAutofit/>
+          </a:bodyPr>
+          <a:lstStyle/>
+          <a:p>
+            <a:r>
+              <a:rPr sz="1330" b="0" i="0">
+                <a:solidFill>
+                  <a:srgbClr val="1C1C1E"/>
+                </a:solidFill>
+                <a:latin typeface="Inter"/>
+              </a:rPr>
+              <a:t>Drittes Kapitel</a:t>
+            </a:r>
+          </a:p>
+          <a:p>
+            <a:pPr>
+              <a:spcBef>
+                <a:spcPts val="270"/>
+              </a:spcBef>
+            </a:pPr>
+            <a:r>
+              <a:rPr sz="930" b="0" i="0">
+                <a:solidFill>
+                  <a:srgbClr val="6B6B65"/>
+                </a:solidFill>
+                <a:latin typeface="Inter"/>
+              </a:rPr>
+              <a:t>Halber Satz, was hier passiert</a:t>
+            </a:r>
+          </a:p>
+        </p:txBody>
+      </p:sp>
+      <p:sp>
+        <p:nvSpPr>
+          <p:cNvPr id="28" name="TextBox 27"/>
           <p:cNvSpPr txBox="1"/>
           <p:nvPr/>
         </p:nvSpPr>
         <p:spPr>
           <a:xfrm>
             <a:off x="6908799" y="5262880"/>
-            <a:ext cx="1705186" cy="270933"/>
+            <a:ext cx="1705186" cy="482599"/>
           </a:xfrm>
           <a:prstGeom prst="rect">
             <a:avLst/>
@@ -13204,7 +12615,7 @@
         </p:spPr>
         <p:txBody>
           <a:bodyPr wrap="square" lIns="0" rIns="0" tIns="0" bIns="0">
-            <a:spAutoFit/>
+            <a:normAutofit/>
           </a:bodyPr>
           <a:lstStyle/>
           <a:p>
@@ -13218,30 +12629,12 @@
               <a:t>Viertes Kapitel</a:t>
             </a:r>
           </a:p>
-        </p:txBody>
-      </p:sp>
-      <p:sp>
-        <p:nvSpPr>
-          <p:cNvPr id="32" name="TextBox 31"/>
-          <p:cNvSpPr txBox="1"/>
-          <p:nvPr/>
-        </p:nvSpPr>
-        <p:spPr>
-          <a:xfrm>
-            <a:off x="6908799" y="5533813"/>
-            <a:ext cx="1705186" cy="211666"/>
-          </a:xfrm>
-          <a:prstGeom prst="rect">
-            <a:avLst/>
-          </a:prstGeom>
-          <a:noFill/>
-        </p:spPr>
-        <p:txBody>
-          <a:bodyPr wrap="square" lIns="0" rIns="0" tIns="0" bIns="0">
-            <a:spAutoFit/>
-          </a:bodyPr>
-          <a:lstStyle/>
-          <a:p>
+          <a:p>
+            <a:pPr>
+              <a:spcBef>
+                <a:spcPts val="270"/>
+              </a:spcBef>
+            </a:pPr>
             <a:r>
               <a:rPr sz="930" b="0" i="0">
                 <a:solidFill>
@@ -13250,6 +12643,41 @@
                 <a:latin typeface="Inter"/>
               </a:rPr>
               <a:t>Halber Satz, was hier passiert</a:t>
+            </a:r>
+          </a:p>
+        </p:txBody>
+      </p:sp>
+      <p:sp>
+        <p:nvSpPr>
+          <p:cNvPr id="29" name="TextBox 28"/>
+          <p:cNvSpPr txBox="1"/>
+          <p:nvPr/>
+        </p:nvSpPr>
+        <p:spPr>
+          <a:xfrm>
+            <a:off x="10634133" y="6495626"/>
+            <a:ext cx="575733" cy="176106"/>
+          </a:xfrm>
+          <a:prstGeom prst="rect">
+            <a:avLst/>
+          </a:prstGeom>
+          <a:noFill/>
+        </p:spPr>
+        <p:txBody>
+          <a:bodyPr wrap="none" lIns="0" rIns="0" tIns="0" bIns="0">
+            <a:noAutofit/>
+          </a:bodyPr>
+          <a:lstStyle/>
+          <a:p>
+            <a:pPr algn="r"/>
+            <a:r>
+              <a:rPr sz="800" b="0" i="0">
+                <a:solidFill>
+                  <a:srgbClr val="6B6B65"/>
+                </a:solidFill>
+                <a:latin typeface="Inter"/>
+              </a:rPr>
+              <a:t>03</a:t>
             </a:r>
           </a:p>
         </p:txBody>
@@ -13328,40 +12756,6 @@
         </p:nvSpPr>
         <p:spPr>
           <a:xfrm>
-            <a:off x="2003213" y="6466839"/>
-            <a:ext cx="904239" cy="176106"/>
-          </a:xfrm>
-          <a:prstGeom prst="rect">
-            <a:avLst/>
-          </a:prstGeom>
-          <a:noFill/>
-        </p:spPr>
-        <p:txBody>
-          <a:bodyPr wrap="square" lIns="0" rIns="0" tIns="0" bIns="0">
-            <a:spAutoFit/>
-          </a:bodyPr>
-          <a:lstStyle/>
-          <a:p>
-            <a:r>
-              <a:rPr sz="800" b="1" i="0">
-                <a:solidFill>
-                  <a:srgbClr val="1C1C1E"/>
-                </a:solidFill>
-                <a:latin typeface="Inter"/>
-              </a:rPr>
-              <a:t>Kunde Projekttitel</a:t>
-            </a:r>
-          </a:p>
-        </p:txBody>
-      </p:sp>
-      <p:sp>
-        <p:nvSpPr>
-          <p:cNvPr id="5" name="TextBox 4"/>
-          <p:cNvSpPr txBox="1"/>
-          <p:nvPr/>
-        </p:nvSpPr>
-        <p:spPr>
-          <a:xfrm>
             <a:off x="1015999" y="4355253"/>
             <a:ext cx="7484533" cy="176106"/>
           </a:xfrm>
@@ -13371,8 +12765,8 @@
           <a:noFill/>
         </p:spPr>
         <p:txBody>
-          <a:bodyPr wrap="square" lIns="0" rIns="0" tIns="0" bIns="0">
-            <a:spAutoFit/>
+          <a:bodyPr wrap="none" lIns="0" rIns="0" tIns="0" bIns="0">
+            <a:noAutofit/>
           </a:bodyPr>
           <a:lstStyle/>
           <a:p>
@@ -13390,7 +12784,7 @@
       </p:sp>
       <p:sp>
         <p:nvSpPr>
-          <p:cNvPr id="6" name="TextBox 5"/>
+          <p:cNvPr id="5" name="TextBox 4"/>
           <p:cNvSpPr txBox="1"/>
           <p:nvPr/>
         </p:nvSpPr>
@@ -13406,7 +12800,7 @@
         </p:spPr>
         <p:txBody>
           <a:bodyPr wrap="square" lIns="0" rIns="0" tIns="0" bIns="0">
-            <a:spAutoFit/>
+            <a:normAutofit/>
           </a:bodyPr>
           <a:lstStyle/>
           <a:p>
@@ -13418,6 +12812,40 @@
                 <a:latin typeface="Inter"/>
               </a:rPr>
               <a:t>Eine Zeile, die das Kapitel trägt</a:t>
+            </a:r>
+          </a:p>
+        </p:txBody>
+      </p:sp>
+      <p:sp>
+        <p:nvSpPr>
+          <p:cNvPr id="6" name="TextBox 5"/>
+          <p:cNvSpPr txBox="1"/>
+          <p:nvPr/>
+        </p:nvSpPr>
+        <p:spPr>
+          <a:xfrm>
+            <a:off x="2003213" y="6466839"/>
+            <a:ext cx="3928533" cy="176106"/>
+          </a:xfrm>
+          <a:prstGeom prst="rect">
+            <a:avLst/>
+          </a:prstGeom>
+          <a:noFill/>
+        </p:spPr>
+        <p:txBody>
+          <a:bodyPr wrap="none" lIns="0" rIns="0" tIns="0" bIns="0">
+            <a:noAutofit/>
+          </a:bodyPr>
+          <a:lstStyle/>
+          <a:p>
+            <a:r>
+              <a:rPr sz="800" b="1" i="0">
+                <a:solidFill>
+                  <a:srgbClr val="1C1C1E"/>
+                </a:solidFill>
+                <a:latin typeface="Inter"/>
+              </a:rPr>
+              <a:t>Kunde Projekttitel</a:t>
             </a:r>
           </a:p>
         </p:txBody>
@@ -13440,7 +12868,7 @@
         </p:spPr>
         <p:txBody>
           <a:bodyPr wrap="square" lIns="0" rIns="0" tIns="0" bIns="0">
-            <a:spAutoFit/>
+            <a:normAutofit/>
           </a:bodyPr>
           <a:lstStyle/>
           <a:p>
@@ -13452,6 +12880,41 @@
                 <a:latin typeface="Inter"/>
               </a:rPr>
               <a:t>01</a:t>
+            </a:r>
+          </a:p>
+        </p:txBody>
+      </p:sp>
+      <p:sp>
+        <p:nvSpPr>
+          <p:cNvPr id="8" name="TextBox 7"/>
+          <p:cNvSpPr txBox="1"/>
+          <p:nvPr/>
+        </p:nvSpPr>
+        <p:spPr>
+          <a:xfrm>
+            <a:off x="10634133" y="6495626"/>
+            <a:ext cx="575733" cy="176106"/>
+          </a:xfrm>
+          <a:prstGeom prst="rect">
+            <a:avLst/>
+          </a:prstGeom>
+          <a:noFill/>
+        </p:spPr>
+        <p:txBody>
+          <a:bodyPr wrap="none" lIns="0" rIns="0" tIns="0" bIns="0">
+            <a:noAutofit/>
+          </a:bodyPr>
+          <a:lstStyle/>
+          <a:p>
+            <a:pPr algn="r"/>
+            <a:r>
+              <a:rPr sz="800" b="0" i="0">
+                <a:solidFill>
+                  <a:srgbClr val="6B6B65"/>
+                </a:solidFill>
+                <a:latin typeface="Inter"/>
+              </a:rPr>
+              <a:t>04</a:t>
             </a:r>
           </a:p>
         </p:txBody>
@@ -13530,40 +12993,6 @@
         </p:nvSpPr>
         <p:spPr>
           <a:xfrm>
-            <a:off x="2003213" y="6466839"/>
-            <a:ext cx="904239" cy="176106"/>
-          </a:xfrm>
-          <a:prstGeom prst="rect">
-            <a:avLst/>
-          </a:prstGeom>
-          <a:noFill/>
-        </p:spPr>
-        <p:txBody>
-          <a:bodyPr wrap="square" lIns="0" rIns="0" tIns="0" bIns="0">
-            <a:spAutoFit/>
-          </a:bodyPr>
-          <a:lstStyle/>
-          <a:p>
-            <a:r>
-              <a:rPr sz="800" b="1" i="0">
-                <a:solidFill>
-                  <a:srgbClr val="1C1C1E"/>
-                </a:solidFill>
-                <a:latin typeface="Inter"/>
-              </a:rPr>
-              <a:t>Kunde Projekttitel</a:t>
-            </a:r>
-          </a:p>
-        </p:txBody>
-      </p:sp>
-      <p:sp>
-        <p:nvSpPr>
-          <p:cNvPr id="5" name="TextBox 4"/>
-          <p:cNvSpPr txBox="1"/>
-          <p:nvPr/>
-        </p:nvSpPr>
-        <p:spPr>
-          <a:xfrm>
             <a:off x="1015999" y="4355253"/>
             <a:ext cx="7484533" cy="176106"/>
           </a:xfrm>
@@ -13573,8 +13002,8 @@
           <a:noFill/>
         </p:spPr>
         <p:txBody>
-          <a:bodyPr wrap="square" lIns="0" rIns="0" tIns="0" bIns="0">
-            <a:spAutoFit/>
+          <a:bodyPr wrap="none" lIns="0" rIns="0" tIns="0" bIns="0">
+            <a:noAutofit/>
           </a:bodyPr>
           <a:lstStyle/>
           <a:p>
@@ -13592,7 +13021,7 @@
       </p:sp>
       <p:sp>
         <p:nvSpPr>
-          <p:cNvPr id="6" name="TextBox 5"/>
+          <p:cNvPr id="5" name="TextBox 4"/>
           <p:cNvSpPr txBox="1"/>
           <p:nvPr/>
         </p:nvSpPr>
@@ -13608,7 +13037,7 @@
         </p:spPr>
         <p:txBody>
           <a:bodyPr wrap="square" lIns="0" rIns="0" tIns="0" bIns="0">
-            <a:spAutoFit/>
+            <a:normAutofit/>
           </a:bodyPr>
           <a:lstStyle/>
           <a:p>
@@ -13620,6 +13049,40 @@
                 <a:latin typeface="Inter"/>
               </a:rPr>
               <a:t>Eine Zeile, die das Kapitel trägt</a:t>
+            </a:r>
+          </a:p>
+        </p:txBody>
+      </p:sp>
+      <p:sp>
+        <p:nvSpPr>
+          <p:cNvPr id="6" name="TextBox 5"/>
+          <p:cNvSpPr txBox="1"/>
+          <p:nvPr/>
+        </p:nvSpPr>
+        <p:spPr>
+          <a:xfrm>
+            <a:off x="2003213" y="6466839"/>
+            <a:ext cx="3928533" cy="176106"/>
+          </a:xfrm>
+          <a:prstGeom prst="rect">
+            <a:avLst/>
+          </a:prstGeom>
+          <a:noFill/>
+        </p:spPr>
+        <p:txBody>
+          <a:bodyPr wrap="none" lIns="0" rIns="0" tIns="0" bIns="0">
+            <a:noAutofit/>
+          </a:bodyPr>
+          <a:lstStyle/>
+          <a:p>
+            <a:r>
+              <a:rPr sz="800" b="1" i="0">
+                <a:solidFill>
+                  <a:srgbClr val="1C1C1E"/>
+                </a:solidFill>
+                <a:latin typeface="Inter"/>
+              </a:rPr>
+              <a:t>Kunde Projekttitel</a:t>
             </a:r>
           </a:p>
         </p:txBody>
@@ -13642,7 +13105,7 @@
         </p:spPr>
         <p:txBody>
           <a:bodyPr wrap="square" lIns="0" rIns="0" tIns="0" bIns="0">
-            <a:spAutoFit/>
+            <a:normAutofit/>
           </a:bodyPr>
           <a:lstStyle/>
           <a:p>
@@ -13654,6 +13117,41 @@
                 <a:latin typeface="Inter"/>
               </a:rPr>
               <a:t>02</a:t>
+            </a:r>
+          </a:p>
+        </p:txBody>
+      </p:sp>
+      <p:sp>
+        <p:nvSpPr>
+          <p:cNvPr id="8" name="TextBox 7"/>
+          <p:cNvSpPr txBox="1"/>
+          <p:nvPr/>
+        </p:nvSpPr>
+        <p:spPr>
+          <a:xfrm>
+            <a:off x="10634133" y="6495626"/>
+            <a:ext cx="575733" cy="176106"/>
+          </a:xfrm>
+          <a:prstGeom prst="rect">
+            <a:avLst/>
+          </a:prstGeom>
+          <a:noFill/>
+        </p:spPr>
+        <p:txBody>
+          <a:bodyPr wrap="none" lIns="0" rIns="0" tIns="0" bIns="0">
+            <a:noAutofit/>
+          </a:bodyPr>
+          <a:lstStyle/>
+          <a:p>
+            <a:pPr algn="r"/>
+            <a:r>
+              <a:rPr sz="800" b="0" i="0">
+                <a:solidFill>
+                  <a:srgbClr val="6B6B65"/>
+                </a:solidFill>
+                <a:latin typeface="Inter"/>
+              </a:rPr>
+              <a:t>05</a:t>
             </a:r>
           </a:p>
         </p:txBody>
@@ -13732,40 +13230,6 @@
         </p:nvSpPr>
         <p:spPr>
           <a:xfrm>
-            <a:off x="2003213" y="6466839"/>
-            <a:ext cx="904239" cy="176106"/>
-          </a:xfrm>
-          <a:prstGeom prst="rect">
-            <a:avLst/>
-          </a:prstGeom>
-          <a:noFill/>
-        </p:spPr>
-        <p:txBody>
-          <a:bodyPr wrap="square" lIns="0" rIns="0" tIns="0" bIns="0">
-            <a:spAutoFit/>
-          </a:bodyPr>
-          <a:lstStyle/>
-          <a:p>
-            <a:r>
-              <a:rPr sz="800" b="1" i="0">
-                <a:solidFill>
-                  <a:srgbClr val="1C1C1E"/>
-                </a:solidFill>
-                <a:latin typeface="Inter"/>
-              </a:rPr>
-              <a:t>Kunde Projekttitel</a:t>
-            </a:r>
-          </a:p>
-        </p:txBody>
-      </p:sp>
-      <p:sp>
-        <p:nvSpPr>
-          <p:cNvPr id="5" name="TextBox 4"/>
-          <p:cNvSpPr txBox="1"/>
-          <p:nvPr/>
-        </p:nvSpPr>
-        <p:spPr>
-          <a:xfrm>
             <a:off x="1015999" y="4355253"/>
             <a:ext cx="7484533" cy="176106"/>
           </a:xfrm>
@@ -13775,8 +13239,8 @@
           <a:noFill/>
         </p:spPr>
         <p:txBody>
-          <a:bodyPr wrap="square" lIns="0" rIns="0" tIns="0" bIns="0">
-            <a:spAutoFit/>
+          <a:bodyPr wrap="none" lIns="0" rIns="0" tIns="0" bIns="0">
+            <a:noAutofit/>
           </a:bodyPr>
           <a:lstStyle/>
           <a:p>
@@ -13794,7 +13258,7 @@
       </p:sp>
       <p:sp>
         <p:nvSpPr>
-          <p:cNvPr id="6" name="TextBox 5"/>
+          <p:cNvPr id="5" name="TextBox 4"/>
           <p:cNvSpPr txBox="1"/>
           <p:nvPr/>
         </p:nvSpPr>
@@ -13810,7 +13274,7 @@
         </p:spPr>
         <p:txBody>
           <a:bodyPr wrap="square" lIns="0" rIns="0" tIns="0" bIns="0">
-            <a:spAutoFit/>
+            <a:normAutofit/>
           </a:bodyPr>
           <a:lstStyle/>
           <a:p>
@@ -13822,6 +13286,40 @@
                 <a:latin typeface="Inter"/>
               </a:rPr>
               <a:t>Eine Zeile, die das Kapitel trägt</a:t>
+            </a:r>
+          </a:p>
+        </p:txBody>
+      </p:sp>
+      <p:sp>
+        <p:nvSpPr>
+          <p:cNvPr id="6" name="TextBox 5"/>
+          <p:cNvSpPr txBox="1"/>
+          <p:nvPr/>
+        </p:nvSpPr>
+        <p:spPr>
+          <a:xfrm>
+            <a:off x="2003213" y="6466839"/>
+            <a:ext cx="3928533" cy="176106"/>
+          </a:xfrm>
+          <a:prstGeom prst="rect">
+            <a:avLst/>
+          </a:prstGeom>
+          <a:noFill/>
+        </p:spPr>
+        <p:txBody>
+          <a:bodyPr wrap="none" lIns="0" rIns="0" tIns="0" bIns="0">
+            <a:noAutofit/>
+          </a:bodyPr>
+          <a:lstStyle/>
+          <a:p>
+            <a:r>
+              <a:rPr sz="800" b="1" i="0">
+                <a:solidFill>
+                  <a:srgbClr val="1C1C1E"/>
+                </a:solidFill>
+                <a:latin typeface="Inter"/>
+              </a:rPr>
+              <a:t>Kunde Projekttitel</a:t>
             </a:r>
           </a:p>
         </p:txBody>
@@ -13844,7 +13342,7 @@
         </p:spPr>
         <p:txBody>
           <a:bodyPr wrap="square" lIns="0" rIns="0" tIns="0" bIns="0">
-            <a:spAutoFit/>
+            <a:normAutofit/>
           </a:bodyPr>
           <a:lstStyle/>
           <a:p>
@@ -13856,6 +13354,41 @@
                 <a:latin typeface="Inter"/>
               </a:rPr>
               <a:t>03</a:t>
+            </a:r>
+          </a:p>
+        </p:txBody>
+      </p:sp>
+      <p:sp>
+        <p:nvSpPr>
+          <p:cNvPr id="8" name="TextBox 7"/>
+          <p:cNvSpPr txBox="1"/>
+          <p:nvPr/>
+        </p:nvSpPr>
+        <p:spPr>
+          <a:xfrm>
+            <a:off x="10634133" y="6495626"/>
+            <a:ext cx="575733" cy="176106"/>
+          </a:xfrm>
+          <a:prstGeom prst="rect">
+            <a:avLst/>
+          </a:prstGeom>
+          <a:noFill/>
+        </p:spPr>
+        <p:txBody>
+          <a:bodyPr wrap="none" lIns="0" rIns="0" tIns="0" bIns="0">
+            <a:noAutofit/>
+          </a:bodyPr>
+          <a:lstStyle/>
+          <a:p>
+            <a:pPr algn="r"/>
+            <a:r>
+              <a:rPr sz="800" b="0" i="0">
+                <a:solidFill>
+                  <a:srgbClr val="6B6B65"/>
+                </a:solidFill>
+                <a:latin typeface="Inter"/>
+              </a:rPr>
+              <a:t>06</a:t>
             </a:r>
           </a:p>
         </p:txBody>
@@ -13934,40 +13467,6 @@
         </p:nvSpPr>
         <p:spPr>
           <a:xfrm>
-            <a:off x="2003213" y="6466839"/>
-            <a:ext cx="904239" cy="176106"/>
-          </a:xfrm>
-          <a:prstGeom prst="rect">
-            <a:avLst/>
-          </a:prstGeom>
-          <a:noFill/>
-        </p:spPr>
-        <p:txBody>
-          <a:bodyPr wrap="square" lIns="0" rIns="0" tIns="0" bIns="0">
-            <a:spAutoFit/>
-          </a:bodyPr>
-          <a:lstStyle/>
-          <a:p>
-            <a:r>
-              <a:rPr sz="800" b="1" i="0">
-                <a:solidFill>
-                  <a:srgbClr val="1C1C1E"/>
-                </a:solidFill>
-                <a:latin typeface="Inter"/>
-              </a:rPr>
-              <a:t>Kunde Projekttitel</a:t>
-            </a:r>
-          </a:p>
-        </p:txBody>
-      </p:sp>
-      <p:sp>
-        <p:nvSpPr>
-          <p:cNvPr id="5" name="TextBox 4"/>
-          <p:cNvSpPr txBox="1"/>
-          <p:nvPr/>
-        </p:nvSpPr>
-        <p:spPr>
-          <a:xfrm>
             <a:off x="1015999" y="4355253"/>
             <a:ext cx="7484533" cy="176106"/>
           </a:xfrm>
@@ -13977,8 +13476,8 @@
           <a:noFill/>
         </p:spPr>
         <p:txBody>
-          <a:bodyPr wrap="square" lIns="0" rIns="0" tIns="0" bIns="0">
-            <a:spAutoFit/>
+          <a:bodyPr wrap="none" lIns="0" rIns="0" tIns="0" bIns="0">
+            <a:noAutofit/>
           </a:bodyPr>
           <a:lstStyle/>
           <a:p>
@@ -13996,7 +13495,7 @@
       </p:sp>
       <p:sp>
         <p:nvSpPr>
-          <p:cNvPr id="6" name="TextBox 5"/>
+          <p:cNvPr id="5" name="TextBox 4"/>
           <p:cNvSpPr txBox="1"/>
           <p:nvPr/>
         </p:nvSpPr>
@@ -14012,7 +13511,7 @@
         </p:spPr>
         <p:txBody>
           <a:bodyPr wrap="square" lIns="0" rIns="0" tIns="0" bIns="0">
-            <a:spAutoFit/>
+            <a:normAutofit/>
           </a:bodyPr>
           <a:lstStyle/>
           <a:p>
@@ -14024,6 +13523,40 @@
                 <a:latin typeface="Inter"/>
               </a:rPr>
               <a:t>Eine Zeile, die das Kapitel trägt</a:t>
+            </a:r>
+          </a:p>
+        </p:txBody>
+      </p:sp>
+      <p:sp>
+        <p:nvSpPr>
+          <p:cNvPr id="6" name="TextBox 5"/>
+          <p:cNvSpPr txBox="1"/>
+          <p:nvPr/>
+        </p:nvSpPr>
+        <p:spPr>
+          <a:xfrm>
+            <a:off x="2003213" y="6466839"/>
+            <a:ext cx="3928533" cy="176106"/>
+          </a:xfrm>
+          <a:prstGeom prst="rect">
+            <a:avLst/>
+          </a:prstGeom>
+          <a:noFill/>
+        </p:spPr>
+        <p:txBody>
+          <a:bodyPr wrap="none" lIns="0" rIns="0" tIns="0" bIns="0">
+            <a:noAutofit/>
+          </a:bodyPr>
+          <a:lstStyle/>
+          <a:p>
+            <a:r>
+              <a:rPr sz="800" b="1" i="0">
+                <a:solidFill>
+                  <a:srgbClr val="1C1C1E"/>
+                </a:solidFill>
+                <a:latin typeface="Inter"/>
+              </a:rPr>
+              <a:t>Kunde Projekttitel</a:t>
             </a:r>
           </a:p>
         </p:txBody>
@@ -14046,7 +13579,7 @@
         </p:spPr>
         <p:txBody>
           <a:bodyPr wrap="square" lIns="0" rIns="0" tIns="0" bIns="0">
-            <a:spAutoFit/>
+            <a:normAutofit/>
           </a:bodyPr>
           <a:lstStyle/>
           <a:p>
@@ -14058,6 +13591,41 @@
                 <a:latin typeface="Inter"/>
               </a:rPr>
               <a:t>04</a:t>
+            </a:r>
+          </a:p>
+        </p:txBody>
+      </p:sp>
+      <p:sp>
+        <p:nvSpPr>
+          <p:cNvPr id="8" name="TextBox 7"/>
+          <p:cNvSpPr txBox="1"/>
+          <p:nvPr/>
+        </p:nvSpPr>
+        <p:spPr>
+          <a:xfrm>
+            <a:off x="10634133" y="6495626"/>
+            <a:ext cx="575733" cy="176106"/>
+          </a:xfrm>
+          <a:prstGeom prst="rect">
+            <a:avLst/>
+          </a:prstGeom>
+          <a:noFill/>
+        </p:spPr>
+        <p:txBody>
+          <a:bodyPr wrap="none" lIns="0" rIns="0" tIns="0" bIns="0">
+            <a:noAutofit/>
+          </a:bodyPr>
+          <a:lstStyle/>
+          <a:p>
+            <a:pPr algn="r"/>
+            <a:r>
+              <a:rPr sz="800" b="0" i="0">
+                <a:solidFill>
+                  <a:srgbClr val="6B6B65"/>
+                </a:solidFill>
+                <a:latin typeface="Inter"/>
+              </a:rPr>
+              <a:t>07</a:t>
             </a:r>
           </a:p>
         </p:txBody>
@@ -14136,40 +13704,6 @@
         </p:nvSpPr>
         <p:spPr>
           <a:xfrm>
-            <a:off x="2003213" y="6466839"/>
-            <a:ext cx="904239" cy="176106"/>
-          </a:xfrm>
-          <a:prstGeom prst="rect">
-            <a:avLst/>
-          </a:prstGeom>
-          <a:noFill/>
-        </p:spPr>
-        <p:txBody>
-          <a:bodyPr wrap="square" lIns="0" rIns="0" tIns="0" bIns="0">
-            <a:spAutoFit/>
-          </a:bodyPr>
-          <a:lstStyle/>
-          <a:p>
-            <a:r>
-              <a:rPr sz="800" b="1" i="0">
-                <a:solidFill>
-                  <a:srgbClr val="1C1C1E"/>
-                </a:solidFill>
-                <a:latin typeface="Inter"/>
-              </a:rPr>
-              <a:t>Kunde Projekttitel</a:t>
-            </a:r>
-          </a:p>
-        </p:txBody>
-      </p:sp>
-      <p:sp>
-        <p:nvSpPr>
-          <p:cNvPr id="5" name="TextBox 4"/>
-          <p:cNvSpPr txBox="1"/>
-          <p:nvPr/>
-        </p:nvSpPr>
-        <p:spPr>
-          <a:xfrm>
             <a:off x="1015999" y="4355253"/>
             <a:ext cx="7484533" cy="176106"/>
           </a:xfrm>
@@ -14179,8 +13713,8 @@
           <a:noFill/>
         </p:spPr>
         <p:txBody>
-          <a:bodyPr wrap="square" lIns="0" rIns="0" tIns="0" bIns="0">
-            <a:spAutoFit/>
+          <a:bodyPr wrap="none" lIns="0" rIns="0" tIns="0" bIns="0">
+            <a:noAutofit/>
           </a:bodyPr>
           <a:lstStyle/>
           <a:p>
@@ -14198,7 +13732,7 @@
       </p:sp>
       <p:sp>
         <p:nvSpPr>
-          <p:cNvPr id="6" name="TextBox 5"/>
+          <p:cNvPr id="5" name="TextBox 4"/>
           <p:cNvSpPr txBox="1"/>
           <p:nvPr/>
         </p:nvSpPr>
@@ -14214,7 +13748,7 @@
         </p:spPr>
         <p:txBody>
           <a:bodyPr wrap="square" lIns="0" rIns="0" tIns="0" bIns="0">
-            <a:spAutoFit/>
+            <a:normAutofit/>
           </a:bodyPr>
           <a:lstStyle/>
           <a:p>
@@ -14226,6 +13760,40 @@
                 <a:latin typeface="Inter"/>
               </a:rPr>
               <a:t>Eine Zeile, die das Kapitel trägt</a:t>
+            </a:r>
+          </a:p>
+        </p:txBody>
+      </p:sp>
+      <p:sp>
+        <p:nvSpPr>
+          <p:cNvPr id="6" name="TextBox 5"/>
+          <p:cNvSpPr txBox="1"/>
+          <p:nvPr/>
+        </p:nvSpPr>
+        <p:spPr>
+          <a:xfrm>
+            <a:off x="2003213" y="6466839"/>
+            <a:ext cx="3928533" cy="176106"/>
+          </a:xfrm>
+          <a:prstGeom prst="rect">
+            <a:avLst/>
+          </a:prstGeom>
+          <a:noFill/>
+        </p:spPr>
+        <p:txBody>
+          <a:bodyPr wrap="none" lIns="0" rIns="0" tIns="0" bIns="0">
+            <a:noAutofit/>
+          </a:bodyPr>
+          <a:lstStyle/>
+          <a:p>
+            <a:r>
+              <a:rPr sz="800" b="1" i="0">
+                <a:solidFill>
+                  <a:srgbClr val="1C1C1E"/>
+                </a:solidFill>
+                <a:latin typeface="Inter"/>
+              </a:rPr>
+              <a:t>Kunde Projekttitel</a:t>
             </a:r>
           </a:p>
         </p:txBody>
@@ -14248,7 +13816,7 @@
         </p:spPr>
         <p:txBody>
           <a:bodyPr wrap="square" lIns="0" rIns="0" tIns="0" bIns="0">
-            <a:spAutoFit/>
+            <a:normAutofit/>
           </a:bodyPr>
           <a:lstStyle/>
           <a:p>
@@ -14260,6 +13828,41 @@
                 <a:latin typeface="Inter"/>
               </a:rPr>
               <a:t>05</a:t>
+            </a:r>
+          </a:p>
+        </p:txBody>
+      </p:sp>
+      <p:sp>
+        <p:nvSpPr>
+          <p:cNvPr id="8" name="TextBox 7"/>
+          <p:cNvSpPr txBox="1"/>
+          <p:nvPr/>
+        </p:nvSpPr>
+        <p:spPr>
+          <a:xfrm>
+            <a:off x="10634133" y="6495626"/>
+            <a:ext cx="575733" cy="176106"/>
+          </a:xfrm>
+          <a:prstGeom prst="rect">
+            <a:avLst/>
+          </a:prstGeom>
+          <a:noFill/>
+        </p:spPr>
+        <p:txBody>
+          <a:bodyPr wrap="none" lIns="0" rIns="0" tIns="0" bIns="0">
+            <a:noAutofit/>
+          </a:bodyPr>
+          <a:lstStyle/>
+          <a:p>
+            <a:pPr algn="r"/>
+            <a:r>
+              <a:rPr sz="800" b="0" i="0">
+                <a:solidFill>
+                  <a:srgbClr val="6B6B65"/>
+                </a:solidFill>
+                <a:latin typeface="Inter"/>
+              </a:rPr>
+              <a:t>08</a:t>
             </a:r>
           </a:p>
         </p:txBody>
@@ -14455,16 +14058,16 @@
         <p:spPr>
           <a:xfrm>
             <a:off x="1015999" y="389466"/>
-            <a:ext cx="774700" cy="176106"/>
-          </a:xfrm>
-          <a:prstGeom prst="rect">
-            <a:avLst/>
-          </a:prstGeom>
-          <a:noFill/>
-        </p:spPr>
-        <p:txBody>
-          <a:bodyPr wrap="square" lIns="0" rIns="0" tIns="0" bIns="0">
-            <a:spAutoFit/>
+            <a:ext cx="4775200" cy="176106"/>
+          </a:xfrm>
+          <a:prstGeom prst="rect">
+            <a:avLst/>
+          </a:prstGeom>
+          <a:noFill/>
+        </p:spPr>
+        <p:txBody>
+          <a:bodyPr wrap="none" lIns="0" rIns="0" tIns="0" bIns="0">
+            <a:noAutofit/>
           </a:bodyPr>
           <a:lstStyle/>
           <a:p>
@@ -14483,40 +14086,6 @@
       <p:sp>
         <p:nvSpPr>
           <p:cNvPr id="7" name="TextBox 6"/>
-          <p:cNvSpPr txBox="1"/>
-          <p:nvPr/>
-        </p:nvSpPr>
-        <p:spPr>
-          <a:xfrm>
-            <a:off x="2003213" y="6466839"/>
-            <a:ext cx="904239" cy="176106"/>
-          </a:xfrm>
-          <a:prstGeom prst="rect">
-            <a:avLst/>
-          </a:prstGeom>
-          <a:noFill/>
-        </p:spPr>
-        <p:txBody>
-          <a:bodyPr wrap="square" lIns="0" rIns="0" tIns="0" bIns="0">
-            <a:spAutoFit/>
-          </a:bodyPr>
-          <a:lstStyle/>
-          <a:p>
-            <a:r>
-              <a:rPr sz="800" b="1" i="0">
-                <a:solidFill>
-                  <a:srgbClr val="1C1C1E"/>
-                </a:solidFill>
-                <a:latin typeface="Inter"/>
-              </a:rPr>
-              <a:t>Kunde Projekttitel</a:t>
-            </a:r>
-          </a:p>
-        </p:txBody>
-      </p:sp>
-      <p:sp>
-        <p:nvSpPr>
-          <p:cNvPr id="8" name="TextBox 7"/>
           <p:cNvSpPr txBox="1"/>
           <p:nvPr/>
         </p:nvSpPr>
@@ -14532,7 +14101,7 @@
         </p:spPr>
         <p:txBody>
           <a:bodyPr wrap="square" lIns="0" rIns="0" tIns="0" bIns="0">
-            <a:spAutoFit/>
+            <a:normAutofit/>
           </a:bodyPr>
           <a:lstStyle/>
           <a:p>
@@ -14550,14 +14119,164 @@
       </p:sp>
       <p:sp>
         <p:nvSpPr>
+          <p:cNvPr id="8" name="TextBox 7"/>
+          <p:cNvSpPr txBox="1"/>
+          <p:nvPr/>
+        </p:nvSpPr>
+        <p:spPr>
+          <a:xfrm>
+            <a:off x="1015999" y="2771986"/>
+            <a:ext cx="3149600" cy="1505373"/>
+          </a:xfrm>
+          <a:prstGeom prst="rect">
+            <a:avLst/>
+          </a:prstGeom>
+          <a:noFill/>
+        </p:spPr>
+        <p:txBody>
+          <a:bodyPr wrap="square" lIns="0" rIns="0" tIns="0" bIns="0">
+            <a:normAutofit/>
+          </a:bodyPr>
+          <a:lstStyle/>
+          <a:p>
+            <a:r>
+              <a:rPr sz="930" b="0" i="0">
+                <a:solidFill>
+                  <a:srgbClr val="6B6B65"/>
+                </a:solidFill>
+                <a:latin typeface="Inter"/>
+              </a:rPr>
+              <a:t>01</a:t>
+            </a:r>
+          </a:p>
+          <a:p>
+            <a:pPr>
+              <a:spcBef>
+                <a:spcPts val="1070"/>
+              </a:spcBef>
+            </a:pPr>
+            <a:r>
+              <a:rPr sz="1330" b="0" i="0">
+                <a:solidFill>
+                  <a:srgbClr val="1C1C1E"/>
+                </a:solidFill>
+                <a:latin typeface="Inter"/>
+              </a:rPr>
+              <a:t>Erster Punkt</a:t>
+            </a:r>
+          </a:p>
+          <a:p>
+            <a:pPr>
+              <a:spcBef>
+                <a:spcPts val="1070"/>
+              </a:spcBef>
+            </a:pPr>
+            <a:r>
+              <a:rPr sz="1070" b="0" i="0">
+                <a:solidFill>
+                  <a:srgbClr val="3D3D3A"/>
+                </a:solidFill>
+                <a:latin typeface="Inter"/>
+              </a:rPr>
+              <a:t>Zwei bis drei Sätze, die den Punkt tragen: als Fließtext, nicht als Halbzeilen.</a:t>
+            </a:r>
+          </a:p>
+          <a:p>
+            <a:pPr>
+              <a:spcBef>
+                <a:spcPts val="1070"/>
+              </a:spcBef>
+            </a:pPr>
+            <a:r>
+              <a:rPr sz="1070" b="0" i="0">
+                <a:solidFill>
+                  <a:srgbClr val="3D3D3A"/>
+                </a:solidFill>
+                <a:latin typeface="Inter"/>
+              </a:rPr>
+              <a:t>Weiterer Absatz nur, wenn er etwas Neues sagt.</a:t>
+            </a:r>
+          </a:p>
+        </p:txBody>
+      </p:sp>
+      <p:sp>
+        <p:nvSpPr>
           <p:cNvPr id="9" name="TextBox 8"/>
           <p:cNvSpPr txBox="1"/>
           <p:nvPr/>
         </p:nvSpPr>
         <p:spPr>
           <a:xfrm>
-            <a:off x="1015999" y="2771986"/>
-            <a:ext cx="156633" cy="211666"/>
+            <a:off x="1286933" y="4836160"/>
+            <a:ext cx="4436533" cy="176106"/>
+          </a:xfrm>
+          <a:prstGeom prst="rect">
+            <a:avLst/>
+          </a:prstGeom>
+          <a:noFill/>
+        </p:spPr>
+        <p:txBody>
+          <a:bodyPr wrap="none" lIns="0" rIns="0" tIns="0" bIns="0">
+            <a:noAutofit/>
+          </a:bodyPr>
+          <a:lstStyle/>
+          <a:p>
+            <a:r>
+              <a:rPr sz="800" b="0" i="0">
+                <a:solidFill>
+                  <a:srgbClr val="4A2D6B"/>
+                </a:solidFill>
+                <a:latin typeface="Inter"/>
+              </a:rPr>
+              <a:t>DAS ERGEBNIS</a:t>
+            </a:r>
+          </a:p>
+        </p:txBody>
+      </p:sp>
+      <p:sp>
+        <p:nvSpPr>
+          <p:cNvPr id="10" name="TextBox 9"/>
+          <p:cNvSpPr txBox="1"/>
+          <p:nvPr/>
+        </p:nvSpPr>
+        <p:spPr>
+          <a:xfrm>
+            <a:off x="2003213" y="6466839"/>
+            <a:ext cx="3928533" cy="176106"/>
+          </a:xfrm>
+          <a:prstGeom prst="rect">
+            <a:avLst/>
+          </a:prstGeom>
+          <a:noFill/>
+        </p:spPr>
+        <p:txBody>
+          <a:bodyPr wrap="none" lIns="0" rIns="0" tIns="0" bIns="0">
+            <a:noAutofit/>
+          </a:bodyPr>
+          <a:lstStyle/>
+          <a:p>
+            <a:r>
+              <a:rPr sz="800" b="1" i="0">
+                <a:solidFill>
+                  <a:srgbClr val="1C1C1E"/>
+                </a:solidFill>
+                <a:latin typeface="Inter"/>
+              </a:rPr>
+              <a:t>Kunde Projekttitel</a:t>
+            </a:r>
+          </a:p>
+        </p:txBody>
+      </p:sp>
+      <p:sp>
+        <p:nvSpPr>
+          <p:cNvPr id="11" name="TextBox 10"/>
+          <p:cNvSpPr txBox="1"/>
+          <p:nvPr/>
+        </p:nvSpPr>
+        <p:spPr>
+          <a:xfrm>
+            <a:off x="4538133" y="2771986"/>
+            <a:ext cx="3149600" cy="936413"/>
           </a:xfrm>
           <a:prstGeom prst="rect">
             <a:avLst/>
@@ -14566,7 +14285,7 @@
         </p:spPr>
         <p:txBody>
           <a:bodyPr wrap="square" lIns="0" rIns="0" tIns="0" bIns="0">
-            <a:spAutoFit/>
+            <a:normAutofit/>
           </a:bodyPr>
           <a:lstStyle/>
           <a:p>
@@ -14577,21 +14296,53 @@
                 </a:solidFill>
                 <a:latin typeface="Inter"/>
               </a:rPr>
-              <a:t>01</a:t>
-            </a:r>
-          </a:p>
-        </p:txBody>
-      </p:sp>
-      <p:sp>
-        <p:nvSpPr>
-          <p:cNvPr id="10" name="TextBox 9"/>
-          <p:cNvSpPr txBox="1"/>
-          <p:nvPr/>
-        </p:nvSpPr>
-        <p:spPr>
-          <a:xfrm>
-            <a:off x="3979333" y="2784686"/>
-            <a:ext cx="186266" cy="186266"/>
+              <a:t>02</a:t>
+            </a:r>
+          </a:p>
+          <a:p>
+            <a:pPr>
+              <a:spcBef>
+                <a:spcPts val="1070"/>
+              </a:spcBef>
+            </a:pPr>
+            <a:r>
+              <a:rPr sz="1330" b="0" i="0">
+                <a:solidFill>
+                  <a:srgbClr val="1C1C1E"/>
+                </a:solidFill>
+                <a:latin typeface="Inter"/>
+              </a:rPr>
+              <a:t>Zweiter Punkt</a:t>
+            </a:r>
+          </a:p>
+          <a:p>
+            <a:pPr>
+              <a:spcBef>
+                <a:spcPts val="1070"/>
+              </a:spcBef>
+            </a:pPr>
+            <a:r>
+              <a:rPr sz="1070" b="0" i="0">
+                <a:solidFill>
+                  <a:srgbClr val="3D3D3A"/>
+                </a:solidFill>
+                <a:latin typeface="Inter"/>
+              </a:rPr>
+              <a:t>Zwei bis drei Sätze, die den Punkt tragen.</a:t>
+            </a:r>
+          </a:p>
+        </p:txBody>
+      </p:sp>
+      <p:sp>
+        <p:nvSpPr>
+          <p:cNvPr id="12" name="TextBox 11"/>
+          <p:cNvSpPr txBox="1"/>
+          <p:nvPr/>
+        </p:nvSpPr>
+        <p:spPr>
+          <a:xfrm>
+            <a:off x="8060266" y="2771986"/>
+            <a:ext cx="3149600" cy="936413"/>
           </a:xfrm>
           <a:prstGeom prst="rect">
             <a:avLst/>
@@ -14600,44 +14351,26 @@
         </p:spPr>
         <p:txBody>
           <a:bodyPr wrap="square" lIns="0" rIns="0" tIns="0" bIns="0">
-            <a:spAutoFit/>
-          </a:bodyPr>
-          <a:lstStyle/>
-          <a:p>
-            <a:r>
-              <a:rPr sz="1200" b="0" i="0">
+            <a:normAutofit/>
+          </a:bodyPr>
+          <a:lstStyle/>
+          <a:p>
+            <a:r>
+              <a:rPr sz="930" b="0" i="0">
                 <a:solidFill>
                   <a:srgbClr val="6B6B65"/>
                 </a:solidFill>
                 <a:latin typeface="Inter"/>
               </a:rPr>
-              <a:t>arrow_forward</a:t>
-            </a:r>
-          </a:p>
-        </p:txBody>
-      </p:sp>
-      <p:sp>
-        <p:nvSpPr>
-          <p:cNvPr id="11" name="TextBox 10"/>
-          <p:cNvSpPr txBox="1"/>
-          <p:nvPr/>
-        </p:nvSpPr>
-        <p:spPr>
-          <a:xfrm>
-            <a:off x="1015999" y="3085253"/>
-            <a:ext cx="3149600" cy="270933"/>
-          </a:xfrm>
-          <a:prstGeom prst="rect">
-            <a:avLst/>
-          </a:prstGeom>
-          <a:noFill/>
-        </p:spPr>
-        <p:txBody>
-          <a:bodyPr wrap="square" lIns="0" rIns="0" tIns="0" bIns="0">
-            <a:spAutoFit/>
-          </a:bodyPr>
-          <a:lstStyle/>
-          <a:p>
+              <a:t>03</a:t>
+            </a:r>
+          </a:p>
+          <a:p>
+            <a:pPr>
+              <a:spcBef>
+                <a:spcPts val="1070"/>
+              </a:spcBef>
+            </a:pPr>
             <a:r>
               <a:rPr sz="1330" b="0" i="0">
                 <a:solidFill>
@@ -14645,33 +14378,15 @@
                 </a:solidFill>
                 <a:latin typeface="Inter"/>
               </a:rPr>
-              <a:t>Erster Punkt</a:t>
-            </a:r>
-          </a:p>
-        </p:txBody>
-      </p:sp>
-      <p:sp>
-        <p:nvSpPr>
-          <p:cNvPr id="12" name="TextBox 11"/>
-          <p:cNvSpPr txBox="1"/>
-          <p:nvPr/>
-        </p:nvSpPr>
-        <p:spPr>
-          <a:xfrm>
-            <a:off x="1015999" y="3457786"/>
-            <a:ext cx="3149600" cy="467360"/>
-          </a:xfrm>
-          <a:prstGeom prst="rect">
-            <a:avLst/>
-          </a:prstGeom>
-          <a:noFill/>
-        </p:spPr>
-        <p:txBody>
-          <a:bodyPr wrap="square" lIns="0" rIns="0" tIns="0" bIns="0">
-            <a:spAutoFit/>
-          </a:bodyPr>
-          <a:lstStyle/>
-          <a:p>
+              <a:t>Dritter Punkt</a:t>
+            </a:r>
+          </a:p>
+          <a:p>
+            <a:pPr>
+              <a:spcBef>
+                <a:spcPts val="1070"/>
+              </a:spcBef>
+            </a:pPr>
             <a:r>
               <a:rPr sz="1070" b="0" i="0">
                 <a:solidFill>
@@ -14679,7 +14394,7 @@
                 </a:solidFill>
                 <a:latin typeface="Inter"/>
               </a:rPr>
-              <a:t>Zwei bis drei Sätze, die den Punkt tragen: als Fließtext, nicht als Halbzeilen.</a:t>
+              <a:t>Zwei bis drei Sätze, die den Punkt tragen.</a:t>
             </a:r>
           </a:p>
         </p:txBody>
@@ -14687,346 +14402,6 @@
       <p:sp>
         <p:nvSpPr>
           <p:cNvPr id="13" name="TextBox 12"/>
-          <p:cNvSpPr txBox="1"/>
-          <p:nvPr/>
-        </p:nvSpPr>
-        <p:spPr>
-          <a:xfrm>
-            <a:off x="1015999" y="4026746"/>
-            <a:ext cx="3149600" cy="250613"/>
-          </a:xfrm>
-          <a:prstGeom prst="rect">
-            <a:avLst/>
-          </a:prstGeom>
-          <a:noFill/>
-        </p:spPr>
-        <p:txBody>
-          <a:bodyPr wrap="square" lIns="0" rIns="0" tIns="0" bIns="0">
-            <a:spAutoFit/>
-          </a:bodyPr>
-          <a:lstStyle/>
-          <a:p>
-            <a:r>
-              <a:rPr sz="1070" b="0" i="0">
-                <a:solidFill>
-                  <a:srgbClr val="3D3D3A"/>
-                </a:solidFill>
-                <a:latin typeface="Inter"/>
-              </a:rPr>
-              <a:t>Weiterer Absatz nur, wenn er etwas Neues sagt.</a:t>
-            </a:r>
-          </a:p>
-        </p:txBody>
-      </p:sp>
-      <p:sp>
-        <p:nvSpPr>
-          <p:cNvPr id="14" name="TextBox 13"/>
-          <p:cNvSpPr txBox="1"/>
-          <p:nvPr/>
-        </p:nvSpPr>
-        <p:spPr>
-          <a:xfrm>
-            <a:off x="4538133" y="2771986"/>
-            <a:ext cx="181186" cy="211666"/>
-          </a:xfrm>
-          <a:prstGeom prst="rect">
-            <a:avLst/>
-          </a:prstGeom>
-          <a:noFill/>
-        </p:spPr>
-        <p:txBody>
-          <a:bodyPr wrap="square" lIns="0" rIns="0" tIns="0" bIns="0">
-            <a:spAutoFit/>
-          </a:bodyPr>
-          <a:lstStyle/>
-          <a:p>
-            <a:r>
-              <a:rPr sz="930" b="0" i="0">
-                <a:solidFill>
-                  <a:srgbClr val="6B6B65"/>
-                </a:solidFill>
-                <a:latin typeface="Inter"/>
-              </a:rPr>
-              <a:t>02</a:t>
-            </a:r>
-          </a:p>
-        </p:txBody>
-      </p:sp>
-      <p:sp>
-        <p:nvSpPr>
-          <p:cNvPr id="15" name="TextBox 14"/>
-          <p:cNvSpPr txBox="1"/>
-          <p:nvPr/>
-        </p:nvSpPr>
-        <p:spPr>
-          <a:xfrm>
-            <a:off x="7501466" y="2784686"/>
-            <a:ext cx="186266" cy="186266"/>
-          </a:xfrm>
-          <a:prstGeom prst="rect">
-            <a:avLst/>
-          </a:prstGeom>
-          <a:noFill/>
-        </p:spPr>
-        <p:txBody>
-          <a:bodyPr wrap="square" lIns="0" rIns="0" tIns="0" bIns="0">
-            <a:spAutoFit/>
-          </a:bodyPr>
-          <a:lstStyle/>
-          <a:p>
-            <a:r>
-              <a:rPr sz="1200" b="0" i="0">
-                <a:solidFill>
-                  <a:srgbClr val="6B6B65"/>
-                </a:solidFill>
-                <a:latin typeface="Inter"/>
-              </a:rPr>
-              <a:t>arrow_forward</a:t>
-            </a:r>
-          </a:p>
-        </p:txBody>
-      </p:sp>
-      <p:sp>
-        <p:nvSpPr>
-          <p:cNvPr id="16" name="TextBox 15"/>
-          <p:cNvSpPr txBox="1"/>
-          <p:nvPr/>
-        </p:nvSpPr>
-        <p:spPr>
-          <a:xfrm>
-            <a:off x="4538133" y="3085253"/>
-            <a:ext cx="3149600" cy="270933"/>
-          </a:xfrm>
-          <a:prstGeom prst="rect">
-            <a:avLst/>
-          </a:prstGeom>
-          <a:noFill/>
-        </p:spPr>
-        <p:txBody>
-          <a:bodyPr wrap="square" lIns="0" rIns="0" tIns="0" bIns="0">
-            <a:spAutoFit/>
-          </a:bodyPr>
-          <a:lstStyle/>
-          <a:p>
-            <a:r>
-              <a:rPr sz="1330" b="0" i="0">
-                <a:solidFill>
-                  <a:srgbClr val="1C1C1E"/>
-                </a:solidFill>
-                <a:latin typeface="Inter"/>
-              </a:rPr>
-              <a:t>Zweiter Punkt</a:t>
-            </a:r>
-          </a:p>
-        </p:txBody>
-      </p:sp>
-      <p:sp>
-        <p:nvSpPr>
-          <p:cNvPr id="17" name="TextBox 16"/>
-          <p:cNvSpPr txBox="1"/>
-          <p:nvPr/>
-        </p:nvSpPr>
-        <p:spPr>
-          <a:xfrm>
-            <a:off x="4538133" y="3457786"/>
-            <a:ext cx="3149600" cy="250613"/>
-          </a:xfrm>
-          <a:prstGeom prst="rect">
-            <a:avLst/>
-          </a:prstGeom>
-          <a:noFill/>
-        </p:spPr>
-        <p:txBody>
-          <a:bodyPr wrap="square" lIns="0" rIns="0" tIns="0" bIns="0">
-            <a:spAutoFit/>
-          </a:bodyPr>
-          <a:lstStyle/>
-          <a:p>
-            <a:r>
-              <a:rPr sz="1070" b="0" i="0">
-                <a:solidFill>
-                  <a:srgbClr val="3D3D3A"/>
-                </a:solidFill>
-                <a:latin typeface="Inter"/>
-              </a:rPr>
-              <a:t>Zwei bis drei Sätze, die den Punkt tragen.</a:t>
-            </a:r>
-          </a:p>
-        </p:txBody>
-      </p:sp>
-      <p:sp>
-        <p:nvSpPr>
-          <p:cNvPr id="18" name="TextBox 17"/>
-          <p:cNvSpPr txBox="1"/>
-          <p:nvPr/>
-        </p:nvSpPr>
-        <p:spPr>
-          <a:xfrm>
-            <a:off x="8060266" y="2771986"/>
-            <a:ext cx="182033" cy="211666"/>
-          </a:xfrm>
-          <a:prstGeom prst="rect">
-            <a:avLst/>
-          </a:prstGeom>
-          <a:noFill/>
-        </p:spPr>
-        <p:txBody>
-          <a:bodyPr wrap="square" lIns="0" rIns="0" tIns="0" bIns="0">
-            <a:spAutoFit/>
-          </a:bodyPr>
-          <a:lstStyle/>
-          <a:p>
-            <a:r>
-              <a:rPr sz="930" b="0" i="0">
-                <a:solidFill>
-                  <a:srgbClr val="6B6B65"/>
-                </a:solidFill>
-                <a:latin typeface="Inter"/>
-              </a:rPr>
-              <a:t>03</a:t>
-            </a:r>
-          </a:p>
-        </p:txBody>
-      </p:sp>
-      <p:sp>
-        <p:nvSpPr>
-          <p:cNvPr id="19" name="TextBox 18"/>
-          <p:cNvSpPr txBox="1"/>
-          <p:nvPr/>
-        </p:nvSpPr>
-        <p:spPr>
-          <a:xfrm>
-            <a:off x="11023600" y="2784686"/>
-            <a:ext cx="186266" cy="186266"/>
-          </a:xfrm>
-          <a:prstGeom prst="rect">
-            <a:avLst/>
-          </a:prstGeom>
-          <a:noFill/>
-        </p:spPr>
-        <p:txBody>
-          <a:bodyPr wrap="square" lIns="0" rIns="0" tIns="0" bIns="0">
-            <a:spAutoFit/>
-          </a:bodyPr>
-          <a:lstStyle/>
-          <a:p>
-            <a:r>
-              <a:rPr sz="1200" b="0" i="0">
-                <a:solidFill>
-                  <a:srgbClr val="6B6B65"/>
-                </a:solidFill>
-                <a:latin typeface="Inter"/>
-              </a:rPr>
-              <a:t>arrow_forward</a:t>
-            </a:r>
-          </a:p>
-        </p:txBody>
-      </p:sp>
-      <p:sp>
-        <p:nvSpPr>
-          <p:cNvPr id="20" name="TextBox 19"/>
-          <p:cNvSpPr txBox="1"/>
-          <p:nvPr/>
-        </p:nvSpPr>
-        <p:spPr>
-          <a:xfrm>
-            <a:off x="8060266" y="3085253"/>
-            <a:ext cx="3149600" cy="270933"/>
-          </a:xfrm>
-          <a:prstGeom prst="rect">
-            <a:avLst/>
-          </a:prstGeom>
-          <a:noFill/>
-        </p:spPr>
-        <p:txBody>
-          <a:bodyPr wrap="square" lIns="0" rIns="0" tIns="0" bIns="0">
-            <a:spAutoFit/>
-          </a:bodyPr>
-          <a:lstStyle/>
-          <a:p>
-            <a:r>
-              <a:rPr sz="1330" b="0" i="0">
-                <a:solidFill>
-                  <a:srgbClr val="1C1C1E"/>
-                </a:solidFill>
-                <a:latin typeface="Inter"/>
-              </a:rPr>
-              <a:t>Dritter Punkt</a:t>
-            </a:r>
-          </a:p>
-        </p:txBody>
-      </p:sp>
-      <p:sp>
-        <p:nvSpPr>
-          <p:cNvPr id="21" name="TextBox 20"/>
-          <p:cNvSpPr txBox="1"/>
-          <p:nvPr/>
-        </p:nvSpPr>
-        <p:spPr>
-          <a:xfrm>
-            <a:off x="8060266" y="3457786"/>
-            <a:ext cx="3149600" cy="250613"/>
-          </a:xfrm>
-          <a:prstGeom prst="rect">
-            <a:avLst/>
-          </a:prstGeom>
-          <a:noFill/>
-        </p:spPr>
-        <p:txBody>
-          <a:bodyPr wrap="square" lIns="0" rIns="0" tIns="0" bIns="0">
-            <a:spAutoFit/>
-          </a:bodyPr>
-          <a:lstStyle/>
-          <a:p>
-            <a:r>
-              <a:rPr sz="1070" b="0" i="0">
-                <a:solidFill>
-                  <a:srgbClr val="3D3D3A"/>
-                </a:solidFill>
-                <a:latin typeface="Inter"/>
-              </a:rPr>
-              <a:t>Zwei bis drei Sätze, die den Punkt tragen.</a:t>
-            </a:r>
-          </a:p>
-        </p:txBody>
-      </p:sp>
-      <p:sp>
-        <p:nvSpPr>
-          <p:cNvPr id="22" name="TextBox 21"/>
-          <p:cNvSpPr txBox="1"/>
-          <p:nvPr/>
-        </p:nvSpPr>
-        <p:spPr>
-          <a:xfrm>
-            <a:off x="1286933" y="4836160"/>
-            <a:ext cx="890693" cy="176106"/>
-          </a:xfrm>
-          <a:prstGeom prst="rect">
-            <a:avLst/>
-          </a:prstGeom>
-          <a:noFill/>
-        </p:spPr>
-        <p:txBody>
-          <a:bodyPr wrap="square" lIns="0" rIns="0" tIns="0" bIns="0">
-            <a:spAutoFit/>
-          </a:bodyPr>
-          <a:lstStyle/>
-          <a:p>
-            <a:r>
-              <a:rPr sz="800" b="0" i="0">
-                <a:solidFill>
-                  <a:srgbClr val="4A2D6B"/>
-                </a:solidFill>
-                <a:latin typeface="Inter"/>
-              </a:rPr>
-              <a:t>DAS ERGEBNIS</a:t>
-            </a:r>
-          </a:p>
-        </p:txBody>
-      </p:sp>
-      <p:sp>
-        <p:nvSpPr>
-          <p:cNvPr id="23" name="TextBox 22"/>
           <p:cNvSpPr txBox="1"/>
           <p:nvPr/>
         </p:nvSpPr>
@@ -15042,7 +14417,7 @@
         </p:spPr>
         <p:txBody>
           <a:bodyPr wrap="square" lIns="0" rIns="0" tIns="0" bIns="0">
-            <a:spAutoFit/>
+            <a:normAutofit/>
           </a:bodyPr>
           <a:lstStyle/>
           <a:p>
@@ -15054,6 +14429,41 @@
                 <a:latin typeface="Inter"/>
               </a:rPr>
               <a:t>Der Satz, der aus den drei Punkten folgt</a:t>
+            </a:r>
+          </a:p>
+        </p:txBody>
+      </p:sp>
+      <p:sp>
+        <p:nvSpPr>
+          <p:cNvPr id="14" name="TextBox 13"/>
+          <p:cNvSpPr txBox="1"/>
+          <p:nvPr/>
+        </p:nvSpPr>
+        <p:spPr>
+          <a:xfrm>
+            <a:off x="10634133" y="6495626"/>
+            <a:ext cx="575733" cy="176106"/>
+          </a:xfrm>
+          <a:prstGeom prst="rect">
+            <a:avLst/>
+          </a:prstGeom>
+          <a:noFill/>
+        </p:spPr>
+        <p:txBody>
+          <a:bodyPr wrap="none" lIns="0" rIns="0" tIns="0" bIns="0">
+            <a:noAutofit/>
+          </a:bodyPr>
+          <a:lstStyle/>
+          <a:p>
+            <a:pPr algn="r"/>
+            <a:r>
+              <a:rPr sz="800" b="0" i="0">
+                <a:solidFill>
+                  <a:srgbClr val="6B6B65"/>
+                </a:solidFill>
+                <a:latin typeface="Inter"/>
+              </a:rPr>
+              <a:t>09</a:t>
             </a:r>
           </a:p>
         </p:txBody>

--- a/langdock/pptx-template/bridgemaker-slides-template.pptx
+++ b/langdock/pptx-template/bridgemaker-slides-template.pptx
@@ -1,6 +1,6 @@
 
 <file path=ppt/presentation.xml><?xml version="1.0" encoding="utf-8"?>
-<p:presentation xmlns:a="http://schemas.openxmlformats.org/drawingml/2006/main" xmlns:r="http://schemas.openxmlformats.org/officeDocument/2006/relationships" xmlns:p="http://schemas.openxmlformats.org/presentationml/2006/main" saveSubsetFonts="1" autoCompressPictures="0">
+<p:presentation xmlns:a="http://schemas.openxmlformats.org/drawingml/2006/main" xmlns:r="http://schemas.openxmlformats.org/officeDocument/2006/relationships" xmlns:p="http://schemas.openxmlformats.org/presentationml/2006/main" embedTrueTypeFonts="1" saveSubsetFonts="1" autoCompressPictures="0">
   <p:sldMasterIdLst>
     <p:sldMasterId id="2147483648" r:id="rId1"/>
   </p:sldMasterIdLst>
@@ -28,6 +28,25 @@
   </p:sldIdLst>
   <p:sldSz cx="12192000" cy="6857999" type="screen4x3"/>
   <p:notesSz cx="6858000" cy="9144000"/>
+  <p:embeddedFontLst>
+    <p:embeddedFont>
+      <p:font typeface="Inter"/>
+      <p:regular r:id="rIdFont1"/>
+      <p:bold r:id="rIdFont2"/>
+    </p:embeddedFont>
+    <p:embeddedFont>
+      <p:font typeface="Inter Light"/>
+      <p:regular r:id="rIdFont3"/>
+    </p:embeddedFont>
+    <p:embeddedFont>
+      <p:font typeface="Inter SemiBold"/>
+      <p:regular r:id="rIdFont4"/>
+    </p:embeddedFont>
+    <p:embeddedFont>
+      <p:font typeface="JetBrains Mono"/>
+      <p:regular r:id="rIdFont5"/>
+    </p:embeddedFont>
+  </p:embeddedFontLst>
   <p:defaultTextStyle>
     <a:defPPr>
       <a:defRPr lang="en-US"/>
@@ -4903,20 +4922,6 @@
           </a:ln>
           <a:effectLst/>
         </p:spPr>
-        <p:style>
-          <a:lnRef idx="1">
-            <a:schemeClr val="accent1"/>
-          </a:lnRef>
-          <a:fillRef idx="3">
-            <a:schemeClr val="accent1"/>
-          </a:fillRef>
-          <a:effectRef idx="2">
-            <a:schemeClr val="accent1"/>
-          </a:effectRef>
-          <a:fontRef idx="minor">
-            <a:schemeClr val="lt1"/>
-          </a:fontRef>
-        </p:style>
         <p:txBody>
           <a:bodyPr rtlCol="0" anchor="ctr"/>
           <a:lstStyle/>
@@ -4958,7 +4963,7 @@
         <p:spPr>
           <a:xfrm>
             <a:off x="1015999" y="2398606"/>
-            <a:ext cx="7508239" cy="176106"/>
+            <a:ext cx="4436533" cy="160866"/>
           </a:xfrm>
           <a:prstGeom prst="rect">
             <a:avLst/>
@@ -4971,12 +4976,17 @@
           </a:bodyPr>
           <a:lstStyle/>
           <a:p>
-            <a:r>
-              <a:rPr sz="800" b="0" i="0">
+            <a:pPr>
+              <a:lnSpc>
+                <a:spcPts val="1120"/>
+              </a:lnSpc>
+            </a:pPr>
+            <a:r>
+              <a:rPr sz="800" b="0" i="0" spc="80">
                 <a:solidFill>
                   <a:srgbClr val="A8A69E"/>
                 </a:solidFill>
-                <a:latin typeface="Inter"/>
+                <a:latin typeface="Inter SemiBold"/>
               </a:rPr>
               <a:t>KUNDE × BRIDGEMAKER — ANLASS</a:t>
             </a:r>
@@ -4991,8 +5001,8 @@
         </p:nvSpPr>
         <p:spPr>
           <a:xfrm>
-            <a:off x="1015999" y="2744046"/>
-            <a:ext cx="7508239" cy="1740746"/>
+            <a:off x="1015999" y="2676313"/>
+            <a:ext cx="7508239" cy="1869440"/>
           </a:xfrm>
           <a:prstGeom prst="rect">
             <a:avLst/>
@@ -5005,23 +5015,33 @@
           </a:bodyPr>
           <a:lstStyle/>
           <a:p>
-            <a:r>
-              <a:rPr sz="6400" b="0" i="0">
+            <a:pPr>
+              <a:lnSpc>
+                <a:spcPts val="6720"/>
+              </a:lnSpc>
+            </a:pPr>
+            <a:r>
+              <a:rPr sz="6400" b="0" i="0" spc="-192">
                 <a:solidFill>
                   <a:srgbClr val="F5F1EB"/>
                 </a:solidFill>
-                <a:latin typeface="Inter"/>
+                <a:latin typeface="Inter SemiBold"/>
               </a:rPr>
               <a:t>Titel des Decks über</a:t>
             </a:r>
           </a:p>
           <a:p>
-            <a:r>
-              <a:rPr sz="6400" b="0" i="0">
+            <a:pPr>
+              <a:lnSpc>
+                <a:spcPts val="6720"/>
+              </a:lnSpc>
+            </a:pPr>
+            <a:r>
+              <a:rPr sz="6400" b="0" i="0" spc="-192">
                 <a:solidFill>
                   <a:srgbClr val="F5F1EB"/>
                 </a:solidFill>
-                <a:latin typeface="Inter"/>
+                <a:latin typeface="Inter SemiBold"/>
               </a:rPr>
               <a:t>maximal zwei Zeilen</a:t>
             </a:r>
@@ -5036,8 +5056,8 @@
         </p:nvSpPr>
         <p:spPr>
           <a:xfrm>
-            <a:off x="1015999" y="5850466"/>
-            <a:ext cx="2309706" cy="211666"/>
+            <a:off x="1015999" y="5867400"/>
+            <a:ext cx="2309706" cy="177800"/>
           </a:xfrm>
           <a:prstGeom prst="rect">
             <a:avLst/>
@@ -5050,6 +5070,11 @@
           </a:bodyPr>
           <a:lstStyle/>
           <a:p>
+            <a:pPr>
+              <a:lnSpc>
+                <a:spcPts val="1400"/>
+              </a:lnSpc>
+            </a:pPr>
             <a:r>
               <a:rPr sz="930" b="0" i="0">
                 <a:solidFill>
@@ -5070,8 +5095,8 @@
         </p:nvSpPr>
         <p:spPr>
           <a:xfrm>
-            <a:off x="10180320" y="838199"/>
-            <a:ext cx="1842346" cy="152400"/>
+            <a:off x="10180320" y="821266"/>
+            <a:ext cx="1842346" cy="186266"/>
           </a:xfrm>
           <a:prstGeom prst="rect">
             <a:avLst/>
@@ -5084,6 +5109,11 @@
           </a:bodyPr>
           <a:lstStyle/>
           <a:p>
+            <a:pPr>
+              <a:lnSpc>
+                <a:spcPts val="930"/>
+              </a:lnSpc>
+            </a:pPr>
             <a:r>
               <a:rPr sz="930" b="0" i="0">
                 <a:solidFill>
@@ -5122,9 +5152,33 @@
         <p:nvPr/>
       </p:nvGrpSpPr>
       <p:grpSpPr/>
-      <p:sp>
-        <p:nvSpPr>
-          <p:cNvPr id="2" name="Rectangle 1"/>
+      <p:pic>
+        <p:nvPicPr>
+          <p:cNvPr id="2" name="Picture 1" descr="pix-09-0.png"/>
+          <p:cNvPicPr>
+            <a:picLocks noChangeAspect="1"/>
+          </p:cNvPicPr>
+          <p:nvPr/>
+        </p:nvPicPr>
+        <p:blipFill>
+          <a:blip r:embed="rId2"/>
+          <a:stretch>
+            <a:fillRect/>
+          </a:stretch>
+        </p:blipFill>
+        <p:spPr>
+          <a:xfrm>
+            <a:off x="7924799" y="2455333"/>
+            <a:ext cx="3251200" cy="2955713"/>
+          </a:xfrm>
+          <a:prstGeom prst="rect">
+            <a:avLst/>
+          </a:prstGeom>
+        </p:spPr>
+      </p:pic>
+      <p:sp>
+        <p:nvSpPr>
+          <p:cNvPr id="3" name="Rectangle 2"/>
           <p:cNvSpPr/>
           <p:nvPr/>
         </p:nvSpPr>
@@ -5144,20 +5198,6 @@
           </a:ln>
           <a:effectLst/>
         </p:spPr>
-        <p:style>
-          <a:lnRef idx="1">
-            <a:schemeClr val="accent1"/>
-          </a:lnRef>
-          <a:fillRef idx="3">
-            <a:schemeClr val="accent1"/>
-          </a:fillRef>
-          <a:effectRef idx="2">
-            <a:schemeClr val="accent1"/>
-          </a:effectRef>
-          <a:fontRef idx="minor">
-            <a:schemeClr val="lt1"/>
-          </a:fontRef>
-        </p:style>
         <p:txBody>
           <a:bodyPr rtlCol="0" anchor="ctr"/>
           <a:lstStyle/>
@@ -5168,7 +5208,7 @@
       </p:sp>
       <p:sp>
         <p:nvSpPr>
-          <p:cNvPr id="3" name="Rectangle 2"/>
+          <p:cNvPr id="4" name="Rectangle 3"/>
           <p:cNvSpPr/>
           <p:nvPr/>
         </p:nvSpPr>
@@ -5188,20 +5228,6 @@
           </a:ln>
           <a:effectLst/>
         </p:spPr>
-        <p:style>
-          <a:lnRef idx="1">
-            <a:schemeClr val="accent1"/>
-          </a:lnRef>
-          <a:fillRef idx="3">
-            <a:schemeClr val="accent1"/>
-          </a:fillRef>
-          <a:effectRef idx="2">
-            <a:schemeClr val="accent1"/>
-          </a:effectRef>
-          <a:fontRef idx="minor">
-            <a:schemeClr val="lt1"/>
-          </a:fontRef>
-        </p:style>
         <p:txBody>
           <a:bodyPr rtlCol="0" anchor="ctr"/>
           <a:lstStyle/>
@@ -5212,7 +5238,7 @@
       </p:sp>
       <p:sp>
         <p:nvSpPr>
-          <p:cNvPr id="4" name="Rectangle 3"/>
+          <p:cNvPr id="5" name="Rectangle 4"/>
           <p:cNvSpPr/>
           <p:nvPr/>
         </p:nvSpPr>
@@ -5232,20 +5258,6 @@
           </a:ln>
           <a:effectLst/>
         </p:spPr>
-        <p:style>
-          <a:lnRef idx="1">
-            <a:schemeClr val="accent1"/>
-          </a:lnRef>
-          <a:fillRef idx="3">
-            <a:schemeClr val="accent1"/>
-          </a:fillRef>
-          <a:effectRef idx="2">
-            <a:schemeClr val="accent1"/>
-          </a:effectRef>
-          <a:fontRef idx="minor">
-            <a:schemeClr val="lt1"/>
-          </a:fontRef>
-        </p:style>
         <p:txBody>
           <a:bodyPr rtlCol="0" anchor="ctr"/>
           <a:lstStyle/>
@@ -5256,7 +5268,7 @@
       </p:sp>
       <p:sp>
         <p:nvSpPr>
-          <p:cNvPr id="5" name="Rectangle 4"/>
+          <p:cNvPr id="6" name="Rectangle 5"/>
           <p:cNvSpPr/>
           <p:nvPr/>
         </p:nvSpPr>
@@ -5276,20 +5288,6 @@
           </a:ln>
           <a:effectLst/>
         </p:spPr>
-        <p:style>
-          <a:lnRef idx="1">
-            <a:schemeClr val="accent1"/>
-          </a:lnRef>
-          <a:fillRef idx="3">
-            <a:schemeClr val="accent1"/>
-          </a:fillRef>
-          <a:effectRef idx="2">
-            <a:schemeClr val="accent1"/>
-          </a:effectRef>
-          <a:fontRef idx="minor">
-            <a:schemeClr val="lt1"/>
-          </a:fontRef>
-        </p:style>
         <p:txBody>
           <a:bodyPr rtlCol="0" anchor="ctr"/>
           <a:lstStyle/>
@@ -5300,14 +5298,14 @@
       </p:sp>
       <p:pic>
         <p:nvPicPr>
-          <p:cNvPr id="6" name="Picture 5" descr="wordmark-black-crop.png"/>
+          <p:cNvPr id="7" name="Picture 6" descr="wordmark-black-crop.png"/>
           <p:cNvPicPr>
             <a:picLocks noChangeAspect="1"/>
           </p:cNvPicPr>
           <p:nvPr/>
         </p:nvPicPr>
         <p:blipFill>
-          <a:blip r:embed="rId2"/>
+          <a:blip r:embed="rId3"/>
           <a:stretch>
             <a:fillRect/>
           </a:stretch>
@@ -5324,14 +5322,14 @@
       </p:pic>
       <p:sp>
         <p:nvSpPr>
-          <p:cNvPr id="7" name="TextBox 6"/>
+          <p:cNvPr id="8" name="TextBox 7"/>
           <p:cNvSpPr txBox="1"/>
           <p:nvPr/>
         </p:nvSpPr>
         <p:spPr>
           <a:xfrm>
             <a:off x="1015999" y="389466"/>
-            <a:ext cx="4775200" cy="176106"/>
+            <a:ext cx="4775200" cy="160866"/>
           </a:xfrm>
           <a:prstGeom prst="rect">
             <a:avLst/>
@@ -5344,12 +5342,17 @@
           </a:bodyPr>
           <a:lstStyle/>
           <a:p>
-            <a:r>
-              <a:rPr sz="800" b="0" i="0">
+            <a:pPr>
+              <a:lnSpc>
+                <a:spcPts val="1120"/>
+              </a:lnSpc>
+            </a:pPr>
+            <a:r>
+              <a:rPr sz="800" b="0" i="0" spc="80">
                 <a:solidFill>
                   <a:srgbClr val="6B6B65"/>
                 </a:solidFill>
-                <a:latin typeface="Inter"/>
+                <a:latin typeface="Inter SemiBold"/>
               </a:rPr>
               <a:t>01 / KAPITEL</a:t>
             </a:r>
@@ -5358,14 +5361,14 @@
       </p:sp>
       <p:sp>
         <p:nvSpPr>
-          <p:cNvPr id="8" name="TextBox 7"/>
-          <p:cNvSpPr txBox="1"/>
-          <p:nvPr/>
-        </p:nvSpPr>
-        <p:spPr>
-          <a:xfrm>
-            <a:off x="1015999" y="795866"/>
-            <a:ext cx="6807199" cy="501226"/>
+          <p:cNvPr id="9" name="TextBox 8"/>
+          <p:cNvSpPr txBox="1"/>
+          <p:nvPr/>
+        </p:nvSpPr>
+        <p:spPr>
+          <a:xfrm>
+            <a:off x="1015999" y="778933"/>
+            <a:ext cx="6350000" cy="533400"/>
           </a:xfrm>
           <a:prstGeom prst="rect">
             <a:avLst/>
@@ -5378,12 +5381,17 @@
           </a:bodyPr>
           <a:lstStyle/>
           <a:p>
-            <a:r>
-              <a:rPr sz="3200" b="1" i="0">
+            <a:pPr>
+              <a:lnSpc>
+                <a:spcPts val="3679"/>
+              </a:lnSpc>
+            </a:pPr>
+            <a:r>
+              <a:rPr sz="3200" b="0" i="0" spc="-80">
                 <a:solidFill>
                   <a:srgbClr val="1C1C1E"/>
                 </a:solidFill>
-                <a:latin typeface="Inter"/>
+                <a:latin typeface="Inter SemiBold"/>
               </a:rPr>
               <a:t>Aussage der Slide als ganzer Satz</a:t>
             </a:r>
@@ -5392,14 +5400,14 @@
       </p:sp>
       <p:sp>
         <p:nvSpPr>
-          <p:cNvPr id="9" name="TextBox 8"/>
-          <p:cNvSpPr txBox="1"/>
-          <p:nvPr/>
-        </p:nvSpPr>
-        <p:spPr>
-          <a:xfrm>
-            <a:off x="1015999" y="2762673"/>
-            <a:ext cx="5723466" cy="506306"/>
+          <p:cNvPr id="10" name="TextBox 9"/>
+          <p:cNvSpPr txBox="1"/>
+          <p:nvPr/>
+        </p:nvSpPr>
+        <p:spPr>
+          <a:xfrm>
+            <a:off x="1015999" y="2788073"/>
+            <a:ext cx="5447453" cy="447886"/>
           </a:xfrm>
           <a:prstGeom prst="rect">
             <a:avLst/>
@@ -5412,6 +5420,11 @@
           </a:bodyPr>
           <a:lstStyle/>
           <a:p>
+            <a:pPr>
+              <a:lnSpc>
+                <a:spcPts val="1860"/>
+              </a:lnSpc>
+            </a:pPr>
             <a:r>
               <a:rPr sz="1200" b="0" i="0">
                 <a:solidFill>
@@ -5419,32 +5432,21 @@
                 </a:solidFill>
                 <a:latin typeface="Inter"/>
               </a:rPr>
-              <a:t>Lead-Absatz: die eine Botschaft dieser Slide, in zwei bis drei Sätzen.</a:t>
-            </a:r>
-          </a:p>
-          <a:p>
-            <a:r>
-              <a:rPr sz="1200" b="0" i="0">
-                <a:solidFill>
-                  <a:srgbClr val="3D3D3A"/>
-                </a:solidFill>
-                <a:latin typeface="Inter"/>
-              </a:rPr>
-              <a:t>              Aktive Verben, belastbare Zahlen oder keine.</a:t>
-            </a:r>
-          </a:p>
-        </p:txBody>
-      </p:sp>
-      <p:sp>
-        <p:nvSpPr>
-          <p:cNvPr id="10" name="TextBox 9"/>
-          <p:cNvSpPr txBox="1"/>
-          <p:nvPr/>
-        </p:nvSpPr>
-        <p:spPr>
-          <a:xfrm>
-            <a:off x="1015999" y="3717713"/>
-            <a:ext cx="1117600" cy="250613"/>
+              <a:t>Lead-Absatz: die eine Botschaft dieser Slide, in zwei bis drei Sätzen. Aktive Verben, belastbare Zahlen oder keine.</a:t>
+            </a:r>
+          </a:p>
+        </p:txBody>
+      </p:sp>
+      <p:sp>
+        <p:nvSpPr>
+          <p:cNvPr id="11" name="TextBox 10"/>
+          <p:cNvSpPr txBox="1"/>
+          <p:nvPr/>
+        </p:nvSpPr>
+        <p:spPr>
+          <a:xfrm>
+            <a:off x="1015999" y="3734646"/>
+            <a:ext cx="1117600" cy="203200"/>
           </a:xfrm>
           <a:prstGeom prst="rect">
             <a:avLst/>
@@ -5457,6 +5459,11 @@
           </a:bodyPr>
           <a:lstStyle/>
           <a:p>
+            <a:pPr>
+              <a:lnSpc>
+                <a:spcPts val="1710"/>
+              </a:lnSpc>
+            </a:pPr>
             <a:r>
               <a:rPr sz="1070" b="0" i="0">
                 <a:solidFill>
@@ -5471,14 +5478,14 @@
       </p:sp>
       <p:sp>
         <p:nvSpPr>
-          <p:cNvPr id="11" name="TextBox 10"/>
-          <p:cNvSpPr txBox="1"/>
-          <p:nvPr/>
-        </p:nvSpPr>
-        <p:spPr>
-          <a:xfrm>
-            <a:off x="1015999" y="4213860"/>
-            <a:ext cx="1219200" cy="250613"/>
+          <p:cNvPr id="12" name="TextBox 11"/>
+          <p:cNvSpPr txBox="1"/>
+          <p:nvPr/>
+        </p:nvSpPr>
+        <p:spPr>
+          <a:xfrm>
+            <a:off x="1015999" y="4230793"/>
+            <a:ext cx="1219200" cy="203200"/>
           </a:xfrm>
           <a:prstGeom prst="rect">
             <a:avLst/>
@@ -5491,6 +5498,11 @@
           </a:bodyPr>
           <a:lstStyle/>
           <a:p>
+            <a:pPr>
+              <a:lnSpc>
+                <a:spcPts val="1710"/>
+              </a:lnSpc>
+            </a:pPr>
             <a:r>
               <a:rPr sz="1070" b="0" i="0">
                 <a:solidFill>
@@ -5505,14 +5517,14 @@
       </p:sp>
       <p:sp>
         <p:nvSpPr>
-          <p:cNvPr id="12" name="TextBox 11"/>
-          <p:cNvSpPr txBox="1"/>
-          <p:nvPr/>
-        </p:nvSpPr>
-        <p:spPr>
-          <a:xfrm>
-            <a:off x="1015999" y="4710006"/>
-            <a:ext cx="1141306" cy="250613"/>
+          <p:cNvPr id="13" name="TextBox 12"/>
+          <p:cNvSpPr txBox="1"/>
+          <p:nvPr/>
+        </p:nvSpPr>
+        <p:spPr>
+          <a:xfrm>
+            <a:off x="1015999" y="4726939"/>
+            <a:ext cx="1141306" cy="203200"/>
           </a:xfrm>
           <a:prstGeom prst="rect">
             <a:avLst/>
@@ -5525,6 +5537,11 @@
           </a:bodyPr>
           <a:lstStyle/>
           <a:p>
+            <a:pPr>
+              <a:lnSpc>
+                <a:spcPts val="1710"/>
+              </a:lnSpc>
+            </a:pPr>
             <a:r>
               <a:rPr sz="1070" b="0" i="0">
                 <a:solidFill>
@@ -5539,14 +5556,14 @@
       </p:sp>
       <p:sp>
         <p:nvSpPr>
-          <p:cNvPr id="13" name="TextBox 12"/>
+          <p:cNvPr id="14" name="TextBox 13"/>
           <p:cNvSpPr txBox="1"/>
           <p:nvPr/>
         </p:nvSpPr>
         <p:spPr>
           <a:xfrm>
             <a:off x="2003213" y="6466839"/>
-            <a:ext cx="3928533" cy="176106"/>
+            <a:ext cx="3928533" cy="160866"/>
           </a:xfrm>
           <a:prstGeom prst="rect">
             <a:avLst/>
@@ -5559,12 +5576,17 @@
           </a:bodyPr>
           <a:lstStyle/>
           <a:p>
-            <a:r>
-              <a:rPr sz="800" b="1" i="0">
+            <a:pPr>
+              <a:lnSpc>
+                <a:spcPts val="1120"/>
+              </a:lnSpc>
+            </a:pPr>
+            <a:r>
+              <a:rPr sz="800" b="0" i="0">
                 <a:solidFill>
                   <a:srgbClr val="1C1C1E"/>
                 </a:solidFill>
-                <a:latin typeface="Inter"/>
+                <a:latin typeface="Inter SemiBold"/>
               </a:rPr>
               <a:t>Kunde Projekttitel</a:t>
             </a:r>
@@ -5573,14 +5595,14 @@
       </p:sp>
       <p:sp>
         <p:nvSpPr>
-          <p:cNvPr id="14" name="TextBox 13"/>
-          <p:cNvSpPr txBox="1"/>
-          <p:nvPr/>
-        </p:nvSpPr>
-        <p:spPr>
-          <a:xfrm>
-            <a:off x="5454226" y="3717713"/>
-            <a:ext cx="336973" cy="250613"/>
+          <p:cNvPr id="15" name="TextBox 14"/>
+          <p:cNvSpPr txBox="1"/>
+          <p:nvPr/>
+        </p:nvSpPr>
+        <p:spPr>
+          <a:xfrm>
+            <a:off x="5454226" y="3734646"/>
+            <a:ext cx="336973" cy="203200"/>
           </a:xfrm>
           <a:prstGeom prst="rect">
             <a:avLst/>
@@ -5593,6 +5615,11 @@
           </a:bodyPr>
           <a:lstStyle/>
           <a:p>
+            <a:pPr>
+              <a:lnSpc>
+                <a:spcPts val="1710"/>
+              </a:lnSpc>
+            </a:pPr>
             <a:r>
               <a:rPr sz="1070" b="0" i="0">
                 <a:solidFill>
@@ -5607,14 +5634,14 @@
       </p:sp>
       <p:sp>
         <p:nvSpPr>
-          <p:cNvPr id="15" name="TextBox 14"/>
-          <p:cNvSpPr txBox="1"/>
-          <p:nvPr/>
-        </p:nvSpPr>
-        <p:spPr>
-          <a:xfrm>
-            <a:off x="5454226" y="4213860"/>
-            <a:ext cx="336973" cy="250613"/>
+          <p:cNvPr id="16" name="TextBox 15"/>
+          <p:cNvSpPr txBox="1"/>
+          <p:nvPr/>
+        </p:nvSpPr>
+        <p:spPr>
+          <a:xfrm>
+            <a:off x="5454226" y="4230793"/>
+            <a:ext cx="336973" cy="203200"/>
           </a:xfrm>
           <a:prstGeom prst="rect">
             <a:avLst/>
@@ -5627,6 +5654,11 @@
           </a:bodyPr>
           <a:lstStyle/>
           <a:p>
+            <a:pPr>
+              <a:lnSpc>
+                <a:spcPts val="1710"/>
+              </a:lnSpc>
+            </a:pPr>
             <a:r>
               <a:rPr sz="1070" b="0" i="0">
                 <a:solidFill>
@@ -5641,14 +5673,14 @@
       </p:sp>
       <p:sp>
         <p:nvSpPr>
-          <p:cNvPr id="16" name="TextBox 15"/>
-          <p:cNvSpPr txBox="1"/>
-          <p:nvPr/>
-        </p:nvSpPr>
-        <p:spPr>
-          <a:xfrm>
-            <a:off x="5454226" y="4710006"/>
-            <a:ext cx="336973" cy="250613"/>
+          <p:cNvPr id="17" name="TextBox 16"/>
+          <p:cNvSpPr txBox="1"/>
+          <p:nvPr/>
+        </p:nvSpPr>
+        <p:spPr>
+          <a:xfrm>
+            <a:off x="5454226" y="4726939"/>
+            <a:ext cx="336973" cy="203200"/>
           </a:xfrm>
           <a:prstGeom prst="rect">
             <a:avLst/>
@@ -5661,6 +5693,11 @@
           </a:bodyPr>
           <a:lstStyle/>
           <a:p>
+            <a:pPr>
+              <a:lnSpc>
+                <a:spcPts val="1710"/>
+              </a:lnSpc>
+            </a:pPr>
             <a:r>
               <a:rPr sz="1070" b="0" i="0">
                 <a:solidFill>
@@ -5675,7 +5712,7 @@
       </p:sp>
       <p:sp>
         <p:nvSpPr>
-          <p:cNvPr id="17" name="TextBox 16"/>
+          <p:cNvPr id="18" name="TextBox 17"/>
           <p:cNvSpPr txBox="1"/>
           <p:nvPr/>
         </p:nvSpPr>
@@ -5695,7 +5732,11 @@
           </a:bodyPr>
           <a:lstStyle/>
           <a:p>
-            <a:pPr algn="r"/>
+            <a:pPr algn="r">
+              <a:lnSpc>
+                <a:spcPts val="1120"/>
+              </a:lnSpc>
+            </a:pPr>
             <a:r>
               <a:rPr sz="800" b="0" i="0">
                 <a:solidFill>
@@ -5736,7 +5777,119 @@
       <p:grpSpPr/>
       <p:sp>
         <p:nvSpPr>
-          <p:cNvPr id="2" name="Rectangle 1"/>
+          <p:cNvPr id="2" name="Rounded Rectangle 1"/>
+          <p:cNvSpPr/>
+          <p:nvPr/>
+        </p:nvSpPr>
+        <p:spPr>
+          <a:xfrm>
+            <a:off x="5808980" y="2129366"/>
+            <a:ext cx="4963160" cy="3211406"/>
+          </a:xfrm>
+          <a:prstGeom prst="roundRect">
+            <a:avLst>
+              <a:gd name="adj" fmla="val 3796"/>
+            </a:avLst>
+          </a:prstGeom>
+          <a:solidFill>
+            <a:srgbClr val="1C1C1E"/>
+          </a:solidFill>
+          <a:ln>
+            <a:noFill/>
+          </a:ln>
+          <a:effectLst/>
+        </p:spPr>
+        <p:txBody>
+          <a:bodyPr rtlCol="0" anchor="ctr"/>
+          <a:lstStyle/>
+          <a:p>
+            <a:pPr algn="ctr"/>
+          </a:p>
+        </p:txBody>
+      </p:sp>
+      <p:sp>
+        <p:nvSpPr>
+          <p:cNvPr id="3" name="Rounded Rectangle 2"/>
+          <p:cNvSpPr/>
+          <p:nvPr/>
+        </p:nvSpPr>
+        <p:spPr>
+          <a:xfrm>
+            <a:off x="5910580" y="2230966"/>
+            <a:ext cx="4759960" cy="2974340"/>
+          </a:xfrm>
+          <a:prstGeom prst="roundRect">
+            <a:avLst>
+              <a:gd name="adj" fmla="val 1537"/>
+            </a:avLst>
+          </a:prstGeom>
+          <a:solidFill>
+            <a:srgbClr val="1C1C1E"/>
+          </a:solidFill>
+          <a:ln>
+            <a:noFill/>
+          </a:ln>
+          <a:effectLst/>
+        </p:spPr>
+        <p:txBody>
+          <a:bodyPr rtlCol="0" anchor="ctr"/>
+          <a:lstStyle/>
+          <a:p>
+            <a:pPr algn="ctr"/>
+          </a:p>
+        </p:txBody>
+      </p:sp>
+      <p:pic>
+        <p:nvPicPr>
+          <p:cNvPr id="4" name="Picture 3" descr="pix-10-2.png"/>
+          <p:cNvPicPr>
+            <a:picLocks noChangeAspect="1"/>
+          </p:cNvPicPr>
+          <p:nvPr/>
+        </p:nvPicPr>
+        <p:blipFill>
+          <a:blip r:embed="rId2"/>
+          <a:stretch>
+            <a:fillRect/>
+          </a:stretch>
+        </p:blipFill>
+        <p:spPr>
+          <a:xfrm>
+            <a:off x="5910580" y="2230966"/>
+            <a:ext cx="4759960" cy="2974340"/>
+          </a:xfrm>
+          <a:prstGeom prst="rect">
+            <a:avLst/>
+          </a:prstGeom>
+        </p:spPr>
+      </p:pic>
+      <p:pic>
+        <p:nvPicPr>
+          <p:cNvPr id="5" name="Picture 4" descr="pix-10-3.png"/>
+          <p:cNvPicPr>
+            <a:picLocks noChangeAspect="1"/>
+          </p:cNvPicPr>
+          <p:nvPr/>
+        </p:nvPicPr>
+        <p:blipFill>
+          <a:blip r:embed="rId3"/>
+          <a:stretch>
+            <a:fillRect/>
+          </a:stretch>
+        </p:blipFill>
+        <p:spPr>
+          <a:xfrm>
+            <a:off x="5536353" y="5341619"/>
+            <a:ext cx="5508413" cy="118533"/>
+          </a:xfrm>
+          <a:prstGeom prst="rect">
+            <a:avLst/>
+          </a:prstGeom>
+        </p:spPr>
+      </p:pic>
+      <p:sp>
+        <p:nvSpPr>
+          <p:cNvPr id="6" name="Rectangle 5"/>
           <p:cNvSpPr/>
           <p:nvPr/>
         </p:nvSpPr>
@@ -5756,20 +5909,6 @@
           </a:ln>
           <a:effectLst/>
         </p:spPr>
-        <p:style>
-          <a:lnRef idx="1">
-            <a:schemeClr val="accent1"/>
-          </a:lnRef>
-          <a:fillRef idx="3">
-            <a:schemeClr val="accent1"/>
-          </a:fillRef>
-          <a:effectRef idx="2">
-            <a:schemeClr val="accent1"/>
-          </a:effectRef>
-          <a:fontRef idx="minor">
-            <a:schemeClr val="lt1"/>
-          </a:fontRef>
-        </p:style>
         <p:txBody>
           <a:bodyPr rtlCol="0" anchor="ctr"/>
           <a:lstStyle/>
@@ -5780,14 +5919,14 @@
       </p:sp>
       <p:pic>
         <p:nvPicPr>
-          <p:cNvPr id="3" name="Picture 2" descr="wordmark-black-crop.png"/>
+          <p:cNvPr id="7" name="Picture 6" descr="wordmark-black-crop.png"/>
           <p:cNvPicPr>
             <a:picLocks noChangeAspect="1"/>
           </p:cNvPicPr>
           <p:nvPr/>
         </p:nvPicPr>
         <p:blipFill>
-          <a:blip r:embed="rId2"/>
+          <a:blip r:embed="rId4"/>
           <a:stretch>
             <a:fillRect/>
           </a:stretch>
@@ -5804,14 +5943,14 @@
       </p:pic>
       <p:pic>
         <p:nvPicPr>
-          <p:cNvPr id="4" name="Picture 3" descr="wordmark-white-crop.png"/>
+          <p:cNvPr id="8" name="Picture 7" descr="wordmark-white-crop.png"/>
           <p:cNvPicPr>
             <a:picLocks noChangeAspect="1"/>
           </p:cNvPicPr>
           <p:nvPr/>
         </p:nvPicPr>
         <p:blipFill>
-          <a:blip r:embed="rId3"/>
+          <a:blip r:embed="rId5"/>
           <a:stretch>
             <a:fillRect/>
           </a:stretch>
@@ -5828,14 +5967,14 @@
       </p:pic>
       <p:sp>
         <p:nvSpPr>
-          <p:cNvPr id="5" name="TextBox 4"/>
+          <p:cNvPr id="9" name="TextBox 8"/>
           <p:cNvSpPr txBox="1"/>
           <p:nvPr/>
         </p:nvSpPr>
         <p:spPr>
           <a:xfrm>
             <a:off x="1015999" y="389466"/>
-            <a:ext cx="4775200" cy="176106"/>
+            <a:ext cx="4775200" cy="160866"/>
           </a:xfrm>
           <a:prstGeom prst="rect">
             <a:avLst/>
@@ -5848,12 +5987,17 @@
           </a:bodyPr>
           <a:lstStyle/>
           <a:p>
-            <a:r>
-              <a:rPr sz="800" b="0" i="0">
+            <a:pPr>
+              <a:lnSpc>
+                <a:spcPts val="1120"/>
+              </a:lnSpc>
+            </a:pPr>
+            <a:r>
+              <a:rPr sz="800" b="0" i="0" spc="80">
                 <a:solidFill>
                   <a:srgbClr val="6B6B65"/>
                 </a:solidFill>
-                <a:latin typeface="Inter"/>
+                <a:latin typeface="Inter SemiBold"/>
               </a:rPr>
               <a:t>01 / KAPITEL</a:t>
             </a:r>
@@ -5862,14 +6006,14 @@
       </p:sp>
       <p:sp>
         <p:nvSpPr>
-          <p:cNvPr id="6" name="TextBox 5"/>
-          <p:cNvSpPr txBox="1"/>
-          <p:nvPr/>
-        </p:nvSpPr>
-        <p:spPr>
-          <a:xfrm>
-            <a:off x="1015999" y="795866"/>
-            <a:ext cx="8331199" cy="501226"/>
+          <p:cNvPr id="10" name="TextBox 9"/>
+          <p:cNvSpPr txBox="1"/>
+          <p:nvPr/>
+        </p:nvSpPr>
+        <p:spPr>
+          <a:xfrm>
+            <a:off x="1015999" y="778933"/>
+            <a:ext cx="6350000" cy="533400"/>
           </a:xfrm>
           <a:prstGeom prst="rect">
             <a:avLst/>
@@ -5882,12 +6026,17 @@
           </a:bodyPr>
           <a:lstStyle/>
           <a:p>
-            <a:r>
-              <a:rPr sz="3200" b="1" i="0">
+            <a:pPr>
+              <a:lnSpc>
+                <a:spcPts val="3679"/>
+              </a:lnSpc>
+            </a:pPr>
+            <a:r>
+              <a:rPr sz="3200" b="0" i="0" spc="-80">
                 <a:solidFill>
                   <a:srgbClr val="1C1C1E"/>
                 </a:solidFill>
-                <a:latin typeface="Inter"/>
+                <a:latin typeface="Inter SemiBold"/>
               </a:rPr>
               <a:t>Aussage der Slide als ganzer Satz</a:t>
             </a:r>
@@ -5896,14 +6045,14 @@
       </p:sp>
       <p:sp>
         <p:nvSpPr>
-          <p:cNvPr id="7" name="TextBox 6"/>
+          <p:cNvPr id="11" name="TextBox 10"/>
           <p:cNvSpPr txBox="1"/>
           <p:nvPr/>
         </p:nvSpPr>
         <p:spPr>
           <a:xfrm>
             <a:off x="1015999" y="3213100"/>
-            <a:ext cx="4436533" cy="176106"/>
+            <a:ext cx="4436533" cy="160866"/>
           </a:xfrm>
           <a:prstGeom prst="rect">
             <a:avLst/>
@@ -5916,12 +6065,17 @@
           </a:bodyPr>
           <a:lstStyle/>
           <a:p>
-            <a:r>
-              <a:rPr sz="800" b="0" i="0">
+            <a:pPr>
+              <a:lnSpc>
+                <a:spcPts val="1120"/>
+              </a:lnSpc>
+            </a:pPr>
+            <a:r>
+              <a:rPr sz="800" b="0" i="0" spc="80">
                 <a:solidFill>
                   <a:srgbClr val="6B6B65"/>
                 </a:solidFill>
-                <a:latin typeface="Inter"/>
+                <a:latin typeface="Inter SemiBold"/>
               </a:rPr>
               <a:t>VIER BAUSTEINE</a:t>
             </a:r>
@@ -5930,14 +6084,14 @@
       </p:sp>
       <p:sp>
         <p:nvSpPr>
-          <p:cNvPr id="8" name="TextBox 7"/>
-          <p:cNvSpPr txBox="1"/>
-          <p:nvPr/>
-        </p:nvSpPr>
-        <p:spPr>
-          <a:xfrm>
-            <a:off x="1015999" y="3490806"/>
-            <a:ext cx="3881119" cy="1307253"/>
+          <p:cNvPr id="12" name="TextBox 11"/>
+          <p:cNvSpPr txBox="1"/>
+          <p:nvPr/>
+        </p:nvSpPr>
+        <p:spPr>
+          <a:xfrm>
+            <a:off x="1015999" y="3507740"/>
+            <a:ext cx="2938780" cy="1259840"/>
           </a:xfrm>
           <a:prstGeom prst="rect">
             <a:avLst/>
@@ -5950,6 +6104,11 @@
           </a:bodyPr>
           <a:lstStyle/>
           <a:p>
+            <a:pPr>
+              <a:lnSpc>
+                <a:spcPts val="1710"/>
+              </a:lnSpc>
+            </a:pPr>
             <a:r>
               <a:rPr sz="1070" b="0" i="0">
                 <a:solidFill>
@@ -5962,8 +6121,11 @@
           </a:p>
           <a:p>
             <a:pPr>
+              <a:lnSpc>
+                <a:spcPts val="1710"/>
+              </a:lnSpc>
               <a:spcBef>
-                <a:spcPts val="1070"/>
+                <a:spcPts val="1440"/>
               </a:spcBef>
             </a:pPr>
             <a:r>
@@ -5978,8 +6140,11 @@
           </a:p>
           <a:p>
             <a:pPr>
+              <a:lnSpc>
+                <a:spcPts val="1710"/>
+              </a:lnSpc>
               <a:spcBef>
-                <a:spcPts val="1070"/>
+                <a:spcPts val="1440"/>
               </a:spcBef>
             </a:pPr>
             <a:r>
@@ -5994,8 +6159,11 @@
           </a:p>
           <a:p>
             <a:pPr>
+              <a:lnSpc>
+                <a:spcPts val="1710"/>
+              </a:lnSpc>
               <a:spcBef>
-                <a:spcPts val="1070"/>
+                <a:spcPts val="1440"/>
               </a:spcBef>
             </a:pPr>
             <a:r>
@@ -6012,14 +6180,14 @@
       </p:sp>
       <p:sp>
         <p:nvSpPr>
-          <p:cNvPr id="9" name="TextBox 8"/>
+          <p:cNvPr id="13" name="TextBox 12"/>
           <p:cNvSpPr txBox="1"/>
           <p:nvPr/>
         </p:nvSpPr>
         <p:spPr>
           <a:xfrm>
             <a:off x="2003213" y="6466839"/>
-            <a:ext cx="3928533" cy="176106"/>
+            <a:ext cx="3928533" cy="160866"/>
           </a:xfrm>
           <a:prstGeom prst="rect">
             <a:avLst/>
@@ -6032,12 +6200,17 @@
           </a:bodyPr>
           <a:lstStyle/>
           <a:p>
-            <a:r>
-              <a:rPr sz="800" b="1" i="0">
+            <a:pPr>
+              <a:lnSpc>
+                <a:spcPts val="1120"/>
+              </a:lnSpc>
+            </a:pPr>
+            <a:r>
+              <a:rPr sz="800" b="0" i="0">
                 <a:solidFill>
                   <a:srgbClr val="1C1C1E"/>
                 </a:solidFill>
-                <a:latin typeface="Inter"/>
+                <a:latin typeface="Inter SemiBold"/>
               </a:rPr>
               <a:t>Kunde Projekttitel</a:t>
             </a:r>
@@ -6046,14 +6219,14 @@
       </p:sp>
       <p:sp>
         <p:nvSpPr>
-          <p:cNvPr id="10" name="TextBox 9"/>
-          <p:cNvSpPr txBox="1"/>
-          <p:nvPr/>
-        </p:nvSpPr>
-        <p:spPr>
-          <a:xfrm>
-            <a:off x="5405119" y="5578686"/>
-            <a:ext cx="5804746" cy="176106"/>
+          <p:cNvPr id="14" name="TextBox 13"/>
+          <p:cNvSpPr txBox="1"/>
+          <p:nvPr/>
+        </p:nvSpPr>
+        <p:spPr>
+          <a:xfrm>
+            <a:off x="7321126" y="5578686"/>
+            <a:ext cx="1971886" cy="160866"/>
           </a:xfrm>
           <a:prstGeom prst="rect">
             <a:avLst/>
@@ -6066,7 +6239,11 @@
           </a:bodyPr>
           <a:lstStyle/>
           <a:p>
-            <a:pPr algn="ctr"/>
+            <a:pPr algn="ctr">
+              <a:lnSpc>
+                <a:spcPts val="1120"/>
+              </a:lnSpc>
+            </a:pPr>
             <a:r>
               <a:rPr sz="800" b="0" i="0">
                 <a:solidFill>
@@ -6081,7 +6258,7 @@
       </p:sp>
       <p:sp>
         <p:nvSpPr>
-          <p:cNvPr id="11" name="TextBox 10"/>
+          <p:cNvPr id="15" name="TextBox 14"/>
           <p:cNvSpPr txBox="1"/>
           <p:nvPr/>
         </p:nvSpPr>
@@ -6101,7 +6278,11 @@
           </a:bodyPr>
           <a:lstStyle/>
           <a:p>
-            <a:pPr algn="r"/>
+            <a:pPr algn="r">
+              <a:lnSpc>
+                <a:spcPts val="1120"/>
+              </a:lnSpc>
+            </a:pPr>
             <a:r>
               <a:rPr sz="800" b="0" i="0">
                 <a:solidFill>
@@ -6162,20 +6343,6 @@
           </a:ln>
           <a:effectLst/>
         </p:spPr>
-        <p:style>
-          <a:lnRef idx="1">
-            <a:schemeClr val="accent1"/>
-          </a:lnRef>
-          <a:fillRef idx="3">
-            <a:schemeClr val="accent1"/>
-          </a:fillRef>
-          <a:effectRef idx="2">
-            <a:schemeClr val="accent1"/>
-          </a:effectRef>
-          <a:fontRef idx="minor">
-            <a:schemeClr val="lt1"/>
-          </a:fontRef>
-        </p:style>
         <p:txBody>
           <a:bodyPr rtlCol="0" anchor="ctr"/>
           <a:lstStyle/>
@@ -6206,20 +6373,6 @@
           </a:ln>
           <a:effectLst/>
         </p:spPr>
-        <p:style>
-          <a:lnRef idx="1">
-            <a:schemeClr val="accent1"/>
-          </a:lnRef>
-          <a:fillRef idx="3">
-            <a:schemeClr val="accent1"/>
-          </a:fillRef>
-          <a:effectRef idx="2">
-            <a:schemeClr val="accent1"/>
-          </a:effectRef>
-          <a:fontRef idx="minor">
-            <a:schemeClr val="lt1"/>
-          </a:fontRef>
-        </p:style>
         <p:txBody>
           <a:bodyPr rtlCol="0" anchor="ctr"/>
           <a:lstStyle/>
@@ -6261,7 +6414,7 @@
         <p:spPr>
           <a:xfrm>
             <a:off x="1015999" y="389466"/>
-            <a:ext cx="4775200" cy="176106"/>
+            <a:ext cx="4775200" cy="160866"/>
           </a:xfrm>
           <a:prstGeom prst="rect">
             <a:avLst/>
@@ -6274,12 +6427,17 @@
           </a:bodyPr>
           <a:lstStyle/>
           <a:p>
-            <a:r>
-              <a:rPr sz="800" b="0" i="0">
+            <a:pPr>
+              <a:lnSpc>
+                <a:spcPts val="1120"/>
+              </a:lnSpc>
+            </a:pPr>
+            <a:r>
+              <a:rPr sz="800" b="0" i="0" spc="80">
                 <a:solidFill>
                   <a:srgbClr val="6B6B65"/>
                 </a:solidFill>
-                <a:latin typeface="Inter"/>
+                <a:latin typeface="Inter SemiBold"/>
               </a:rPr>
               <a:t>01 / KAPITEL</a:t>
             </a:r>
@@ -6294,8 +6452,8 @@
         </p:nvSpPr>
         <p:spPr>
           <a:xfrm>
-            <a:off x="1015999" y="795866"/>
-            <a:ext cx="10193866" cy="501226"/>
+            <a:off x="1015999" y="778933"/>
+            <a:ext cx="4933526" cy="533400"/>
           </a:xfrm>
           <a:prstGeom prst="rect">
             <a:avLst/>
@@ -6308,12 +6466,17 @@
           </a:bodyPr>
           <a:lstStyle/>
           <a:p>
-            <a:r>
-              <a:rPr sz="3200" b="1" i="0">
+            <a:pPr>
+              <a:lnSpc>
+                <a:spcPts val="3679"/>
+              </a:lnSpc>
+            </a:pPr>
+            <a:r>
+              <a:rPr sz="3200" b="0" i="0" spc="-80">
                 <a:solidFill>
                   <a:srgbClr val="1C1C1E"/>
                 </a:solidFill>
-                <a:latin typeface="Inter"/>
+                <a:latin typeface="Inter SemiBold"/>
               </a:rPr>
               <a:t>Die drei Zahlen, die zählen</a:t>
             </a:r>
@@ -6328,8 +6491,8 @@
         </p:nvSpPr>
         <p:spPr>
           <a:xfrm>
-            <a:off x="1015999" y="3046306"/>
-            <a:ext cx="3081866" cy="629920"/>
+            <a:off x="1015999" y="3012440"/>
+            <a:ext cx="2647526" cy="685800"/>
           </a:xfrm>
           <a:prstGeom prst="rect">
             <a:avLst/>
@@ -6342,12 +6505,17 @@
           </a:bodyPr>
           <a:lstStyle/>
           <a:p>
-            <a:r>
-              <a:rPr sz="4270" b="0" i="0">
+            <a:pPr>
+              <a:lnSpc>
+                <a:spcPts val="4690"/>
+              </a:lnSpc>
+            </a:pPr>
+            <a:r>
+              <a:rPr sz="4270" b="0" i="0" spc="-128">
                 <a:solidFill>
                   <a:srgbClr val="1C1C1E"/>
                 </a:solidFill>
-                <a:latin typeface="Inter"/>
+                <a:latin typeface="Inter Light"/>
               </a:rPr>
               <a:t>27,3 Mio. €</a:t>
             </a:r>
@@ -6363,7 +6531,7 @@
         <p:spPr>
           <a:xfrm>
             <a:off x="1015999" y="3777826"/>
-            <a:ext cx="3632199" cy="176106"/>
+            <a:ext cx="3632199" cy="160866"/>
           </a:xfrm>
           <a:prstGeom prst="rect">
             <a:avLst/>
@@ -6376,12 +6544,17 @@
           </a:bodyPr>
           <a:lstStyle/>
           <a:p>
-            <a:r>
-              <a:rPr sz="800" b="0" i="0">
+            <a:pPr>
+              <a:lnSpc>
+                <a:spcPts val="1120"/>
+              </a:lnSpc>
+            </a:pPr>
+            <a:r>
+              <a:rPr sz="800" b="0" i="0" spc="80">
                 <a:solidFill>
                   <a:srgbClr val="6B6B65"/>
                 </a:solidFill>
-                <a:latin typeface="Inter"/>
+                <a:latin typeface="Inter SemiBold"/>
               </a:rPr>
               <a:t>KENNZAHL A</a:t>
             </a:r>
@@ -6396,8 +6569,8 @@
         </p:nvSpPr>
         <p:spPr>
           <a:xfrm>
-            <a:off x="1015999" y="4021666"/>
-            <a:ext cx="3081866" cy="250613"/>
+            <a:off x="1015999" y="4038599"/>
+            <a:ext cx="2068406" cy="203200"/>
           </a:xfrm>
           <a:prstGeom prst="rect">
             <a:avLst/>
@@ -6410,6 +6583,11 @@
           </a:bodyPr>
           <a:lstStyle/>
           <a:p>
+            <a:pPr>
+              <a:lnSpc>
+                <a:spcPts val="1710"/>
+              </a:lnSpc>
+            </a:pPr>
             <a:r>
               <a:rPr sz="1070" b="0" i="0">
                 <a:solidFill>
@@ -6430,8 +6608,47 @@
         </p:nvSpPr>
         <p:spPr>
           <a:xfrm>
-            <a:off x="1015999" y="4712546"/>
-            <a:ext cx="10193866" cy="176106"/>
+            <a:off x="2003213" y="6466839"/>
+            <a:ext cx="3928533" cy="160866"/>
+          </a:xfrm>
+          <a:prstGeom prst="rect">
+            <a:avLst/>
+          </a:prstGeom>
+          <a:noFill/>
+        </p:spPr>
+        <p:txBody>
+          <a:bodyPr wrap="none" lIns="0" rIns="0" tIns="0" bIns="0">
+            <a:noAutofit/>
+          </a:bodyPr>
+          <a:lstStyle/>
+          <a:p>
+            <a:pPr>
+              <a:lnSpc>
+                <a:spcPts val="1120"/>
+              </a:lnSpc>
+            </a:pPr>
+            <a:r>
+              <a:rPr sz="800" b="0" i="0">
+                <a:solidFill>
+                  <a:srgbClr val="1C1C1E"/>
+                </a:solidFill>
+                <a:latin typeface="Inter SemiBold"/>
+              </a:rPr>
+              <a:t>Kunde Projekttitel</a:t>
+            </a:r>
+          </a:p>
+        </p:txBody>
+      </p:sp>
+      <p:sp>
+        <p:nvSpPr>
+          <p:cNvPr id="11" name="TextBox 10"/>
+          <p:cNvSpPr txBox="1"/>
+          <p:nvPr/>
+        </p:nvSpPr>
+        <p:spPr>
+          <a:xfrm>
+            <a:off x="4749800" y="3012440"/>
+            <a:ext cx="1755140" cy="685800"/>
           </a:xfrm>
           <a:prstGeom prst="rect">
             <a:avLst/>
@@ -6444,29 +6661,33 @@
           </a:bodyPr>
           <a:lstStyle/>
           <a:p>
-            <a:pPr algn="r"/>
-            <a:r>
-              <a:rPr sz="800" b="0" i="0">
-                <a:solidFill>
-                  <a:srgbClr val="6B6B65"/>
-                </a:solidFill>
-                <a:latin typeface="Inter"/>
-              </a:rPr>
-              <a:t>Quelle: … in einem Satz</a:t>
-            </a:r>
-          </a:p>
-        </p:txBody>
-      </p:sp>
-      <p:sp>
-        <p:nvSpPr>
-          <p:cNvPr id="11" name="TextBox 10"/>
-          <p:cNvSpPr txBox="1"/>
-          <p:nvPr/>
-        </p:nvSpPr>
-        <p:spPr>
-          <a:xfrm>
-            <a:off x="2003213" y="6466839"/>
-            <a:ext cx="3928533" cy="176106"/>
+            <a:pPr>
+              <a:lnSpc>
+                <a:spcPts val="4690"/>
+              </a:lnSpc>
+            </a:pPr>
+            <a:r>
+              <a:rPr sz="4270" b="0" i="0" spc="-128">
+                <a:solidFill>
+                  <a:srgbClr val="1C1C1E"/>
+                </a:solidFill>
+                <a:latin typeface="Inter Light"/>
+              </a:rPr>
+              <a:t>+8,2 %</a:t>
+            </a:r>
+          </a:p>
+        </p:txBody>
+      </p:sp>
+      <p:sp>
+        <p:nvSpPr>
+          <p:cNvPr id="12" name="TextBox 11"/>
+          <p:cNvSpPr txBox="1"/>
+          <p:nvPr/>
+        </p:nvSpPr>
+        <p:spPr>
+          <a:xfrm>
+            <a:off x="4749800" y="3777826"/>
+            <a:ext cx="3285066" cy="160866"/>
           </a:xfrm>
           <a:prstGeom prst="rect">
             <a:avLst/>
@@ -6479,28 +6700,33 @@
           </a:bodyPr>
           <a:lstStyle/>
           <a:p>
-            <a:r>
-              <a:rPr sz="800" b="1" i="0">
-                <a:solidFill>
-                  <a:srgbClr val="1C1C1E"/>
-                </a:solidFill>
-                <a:latin typeface="Inter"/>
-              </a:rPr>
-              <a:t>Kunde Projekttitel</a:t>
-            </a:r>
-          </a:p>
-        </p:txBody>
-      </p:sp>
-      <p:sp>
-        <p:nvSpPr>
-          <p:cNvPr id="12" name="TextBox 11"/>
-          <p:cNvSpPr txBox="1"/>
-          <p:nvPr/>
-        </p:nvSpPr>
-        <p:spPr>
-          <a:xfrm>
-            <a:off x="4749800" y="3046306"/>
-            <a:ext cx="2734733" cy="629920"/>
+            <a:pPr>
+              <a:lnSpc>
+                <a:spcPts val="1120"/>
+              </a:lnSpc>
+            </a:pPr>
+            <a:r>
+              <a:rPr sz="800" b="0" i="0" spc="80">
+                <a:solidFill>
+                  <a:srgbClr val="6B6B65"/>
+                </a:solidFill>
+                <a:latin typeface="Inter SemiBold"/>
+              </a:rPr>
+              <a:t>KENNZAHL B</a:t>
+            </a:r>
+          </a:p>
+        </p:txBody>
+      </p:sp>
+      <p:sp>
+        <p:nvSpPr>
+          <p:cNvPr id="13" name="TextBox 12"/>
+          <p:cNvSpPr txBox="1"/>
+          <p:nvPr/>
+        </p:nvSpPr>
+        <p:spPr>
+          <a:xfrm>
+            <a:off x="4749800" y="4038599"/>
+            <a:ext cx="2068406" cy="203200"/>
           </a:xfrm>
           <a:prstGeom prst="rect">
             <a:avLst/>
@@ -6513,28 +6739,72 @@
           </a:bodyPr>
           <a:lstStyle/>
           <a:p>
-            <a:r>
-              <a:rPr sz="4270" b="0" i="0">
+            <a:pPr>
+              <a:lnSpc>
+                <a:spcPts val="1710"/>
+              </a:lnSpc>
+            </a:pPr>
+            <a:r>
+              <a:rPr sz="1070" b="0" i="0">
+                <a:solidFill>
+                  <a:srgbClr val="3D3D3A"/>
+                </a:solidFill>
+                <a:latin typeface="Inter"/>
+              </a:rPr>
+              <a:t>Ein Satz, der die Zahl einordnet.</a:t>
+            </a:r>
+          </a:p>
+        </p:txBody>
+      </p:sp>
+      <p:sp>
+        <p:nvSpPr>
+          <p:cNvPr id="14" name="TextBox 13"/>
+          <p:cNvSpPr txBox="1"/>
+          <p:nvPr/>
+        </p:nvSpPr>
+        <p:spPr>
+          <a:xfrm>
+            <a:off x="8136466" y="3012440"/>
+            <a:ext cx="1269153" cy="685800"/>
+          </a:xfrm>
+          <a:prstGeom prst="rect">
+            <a:avLst/>
+          </a:prstGeom>
+          <a:noFill/>
+        </p:spPr>
+        <p:txBody>
+          <a:bodyPr wrap="square" lIns="0" rIns="0" tIns="0" bIns="0">
+            <a:normAutofit/>
+          </a:bodyPr>
+          <a:lstStyle/>
+          <a:p>
+            <a:pPr>
+              <a:lnSpc>
+                <a:spcPts val="4690"/>
+              </a:lnSpc>
+            </a:pPr>
+            <a:r>
+              <a:rPr sz="4270" b="0" i="0" spc="-128">
                 <a:solidFill>
                   <a:srgbClr val="1C1C1E"/>
                 </a:solidFill>
-                <a:latin typeface="Inter"/>
-              </a:rPr>
-              <a:t>+8,2 %</a:t>
-            </a:r>
-          </a:p>
-        </p:txBody>
-      </p:sp>
-      <p:sp>
-        <p:nvSpPr>
-          <p:cNvPr id="13" name="TextBox 12"/>
-          <p:cNvSpPr txBox="1"/>
-          <p:nvPr/>
-        </p:nvSpPr>
-        <p:spPr>
-          <a:xfrm>
-            <a:off x="4749800" y="3777826"/>
-            <a:ext cx="3285066" cy="176106"/>
+                <a:latin typeface="Inter Light"/>
+              </a:rPr>
+              <a:t>56 %</a:t>
+            </a:r>
+          </a:p>
+        </p:txBody>
+      </p:sp>
+      <p:sp>
+        <p:nvSpPr>
+          <p:cNvPr id="15" name="TextBox 14"/>
+          <p:cNvSpPr txBox="1"/>
+          <p:nvPr/>
+        </p:nvSpPr>
+        <p:spPr>
+          <a:xfrm>
+            <a:off x="8136466" y="3777826"/>
+            <a:ext cx="3886199" cy="160866"/>
           </a:xfrm>
           <a:prstGeom prst="rect">
             <a:avLst/>
@@ -6547,28 +6817,33 @@
           </a:bodyPr>
           <a:lstStyle/>
           <a:p>
-            <a:r>
-              <a:rPr sz="800" b="0" i="0">
+            <a:pPr>
+              <a:lnSpc>
+                <a:spcPts val="1120"/>
+              </a:lnSpc>
+            </a:pPr>
+            <a:r>
+              <a:rPr sz="800" b="0" i="0" spc="80">
                 <a:solidFill>
                   <a:srgbClr val="6B6B65"/>
                 </a:solidFill>
-                <a:latin typeface="Inter"/>
-              </a:rPr>
-              <a:t>KENNZAHL B</a:t>
-            </a:r>
-          </a:p>
-        </p:txBody>
-      </p:sp>
-      <p:sp>
-        <p:nvSpPr>
-          <p:cNvPr id="14" name="TextBox 13"/>
-          <p:cNvSpPr txBox="1"/>
-          <p:nvPr/>
-        </p:nvSpPr>
-        <p:spPr>
-          <a:xfrm>
-            <a:off x="4749800" y="4021666"/>
-            <a:ext cx="2734733" cy="250613"/>
+                <a:latin typeface="Inter SemiBold"/>
+              </a:rPr>
+              <a:t>KENNZAHL C</a:t>
+            </a:r>
+          </a:p>
+        </p:txBody>
+      </p:sp>
+      <p:sp>
+        <p:nvSpPr>
+          <p:cNvPr id="16" name="TextBox 15"/>
+          <p:cNvSpPr txBox="1"/>
+          <p:nvPr/>
+        </p:nvSpPr>
+        <p:spPr>
+          <a:xfrm>
+            <a:off x="8136466" y="4038599"/>
+            <a:ext cx="2068406" cy="203200"/>
           </a:xfrm>
           <a:prstGeom prst="rect">
             <a:avLst/>
@@ -6581,6 +6856,11 @@
           </a:bodyPr>
           <a:lstStyle/>
           <a:p>
+            <a:pPr>
+              <a:lnSpc>
+                <a:spcPts val="1710"/>
+              </a:lnSpc>
+            </a:pPr>
             <a:r>
               <a:rPr sz="1070" b="0" i="0">
                 <a:solidFill>
@@ -6595,14 +6875,14 @@
       </p:sp>
       <p:sp>
         <p:nvSpPr>
-          <p:cNvPr id="15" name="TextBox 14"/>
-          <p:cNvSpPr txBox="1"/>
-          <p:nvPr/>
-        </p:nvSpPr>
-        <p:spPr>
-          <a:xfrm>
-            <a:off x="8136466" y="3046306"/>
-            <a:ext cx="2734733" cy="629920"/>
+          <p:cNvPr id="17" name="TextBox 16"/>
+          <p:cNvSpPr txBox="1"/>
+          <p:nvPr/>
+        </p:nvSpPr>
+        <p:spPr>
+          <a:xfrm>
+            <a:off x="10050779" y="4712546"/>
+            <a:ext cx="1159086" cy="160866"/>
           </a:xfrm>
           <a:prstGeom prst="rect">
             <a:avLst/>
@@ -6615,28 +6895,33 @@
           </a:bodyPr>
           <a:lstStyle/>
           <a:p>
-            <a:r>
-              <a:rPr sz="4270" b="0" i="0">
-                <a:solidFill>
-                  <a:srgbClr val="1C1C1E"/>
+            <a:pPr algn="r">
+              <a:lnSpc>
+                <a:spcPts val="1120"/>
+              </a:lnSpc>
+            </a:pPr>
+            <a:r>
+              <a:rPr sz="800" b="0" i="0">
+                <a:solidFill>
+                  <a:srgbClr val="6B6B65"/>
                 </a:solidFill>
                 <a:latin typeface="Inter"/>
               </a:rPr>
-              <a:t>56 %</a:t>
-            </a:r>
-          </a:p>
-        </p:txBody>
-      </p:sp>
-      <p:sp>
-        <p:nvSpPr>
-          <p:cNvPr id="16" name="TextBox 15"/>
-          <p:cNvSpPr txBox="1"/>
-          <p:nvPr/>
-        </p:nvSpPr>
-        <p:spPr>
-          <a:xfrm>
-            <a:off x="8136466" y="3777826"/>
-            <a:ext cx="3886199" cy="176106"/>
+              <a:t>Quelle: … in einem Satz</a:t>
+            </a:r>
+          </a:p>
+        </p:txBody>
+      </p:sp>
+      <p:sp>
+        <p:nvSpPr>
+          <p:cNvPr id="18" name="TextBox 17"/>
+          <p:cNvSpPr txBox="1"/>
+          <p:nvPr/>
+        </p:nvSpPr>
+        <p:spPr>
+          <a:xfrm>
+            <a:off x="10634133" y="6495626"/>
+            <a:ext cx="575733" cy="176106"/>
           </a:xfrm>
           <a:prstGeom prst="rect">
             <a:avLst/>
@@ -6649,75 +6934,11 @@
           </a:bodyPr>
           <a:lstStyle/>
           <a:p>
-            <a:r>
-              <a:rPr sz="800" b="0" i="0">
-                <a:solidFill>
-                  <a:srgbClr val="6B6B65"/>
-                </a:solidFill>
-                <a:latin typeface="Inter"/>
-              </a:rPr>
-              <a:t>KENNZAHL C</a:t>
-            </a:r>
-          </a:p>
-        </p:txBody>
-      </p:sp>
-      <p:sp>
-        <p:nvSpPr>
-          <p:cNvPr id="17" name="TextBox 16"/>
-          <p:cNvSpPr txBox="1"/>
-          <p:nvPr/>
-        </p:nvSpPr>
-        <p:spPr>
-          <a:xfrm>
-            <a:off x="8136466" y="4021666"/>
-            <a:ext cx="2734733" cy="250613"/>
-          </a:xfrm>
-          <a:prstGeom prst="rect">
-            <a:avLst/>
-          </a:prstGeom>
-          <a:noFill/>
-        </p:spPr>
-        <p:txBody>
-          <a:bodyPr wrap="square" lIns="0" rIns="0" tIns="0" bIns="0">
-            <a:normAutofit/>
-          </a:bodyPr>
-          <a:lstStyle/>
-          <a:p>
-            <a:r>
-              <a:rPr sz="1070" b="0" i="0">
-                <a:solidFill>
-                  <a:srgbClr val="3D3D3A"/>
-                </a:solidFill>
-                <a:latin typeface="Inter"/>
-              </a:rPr>
-              <a:t>Ein Satz, der die Zahl einordnet.</a:t>
-            </a:r>
-          </a:p>
-        </p:txBody>
-      </p:sp>
-      <p:sp>
-        <p:nvSpPr>
-          <p:cNvPr id="18" name="TextBox 17"/>
-          <p:cNvSpPr txBox="1"/>
-          <p:nvPr/>
-        </p:nvSpPr>
-        <p:spPr>
-          <a:xfrm>
-            <a:off x="10634133" y="6495626"/>
-            <a:ext cx="575733" cy="176106"/>
-          </a:xfrm>
-          <a:prstGeom prst="rect">
-            <a:avLst/>
-          </a:prstGeom>
-          <a:noFill/>
-        </p:spPr>
-        <p:txBody>
-          <a:bodyPr wrap="none" lIns="0" rIns="0" tIns="0" bIns="0">
-            <a:noAutofit/>
-          </a:bodyPr>
-          <a:lstStyle/>
-          <a:p>
-            <a:pPr algn="r"/>
+            <a:pPr algn="r">
+              <a:lnSpc>
+                <a:spcPts val="1120"/>
+              </a:lnSpc>
+            </a:pPr>
             <a:r>
               <a:rPr sz="800" b="0" i="0">
                 <a:solidFill>
@@ -6778,20 +6999,6 @@
           </a:ln>
           <a:effectLst/>
         </p:spPr>
-        <p:style>
-          <a:lnRef idx="1">
-            <a:schemeClr val="accent1"/>
-          </a:lnRef>
-          <a:fillRef idx="3">
-            <a:schemeClr val="accent1"/>
-          </a:fillRef>
-          <a:effectRef idx="2">
-            <a:schemeClr val="accent1"/>
-          </a:effectRef>
-          <a:fontRef idx="minor">
-            <a:schemeClr val="lt1"/>
-          </a:fontRef>
-        </p:style>
         <p:txBody>
           <a:bodyPr rtlCol="0" anchor="ctr"/>
           <a:lstStyle/>
@@ -6822,20 +7029,6 @@
           </a:ln>
           <a:effectLst/>
         </p:spPr>
-        <p:style>
-          <a:lnRef idx="1">
-            <a:schemeClr val="accent1"/>
-          </a:lnRef>
-          <a:fillRef idx="3">
-            <a:schemeClr val="accent1"/>
-          </a:fillRef>
-          <a:effectRef idx="2">
-            <a:schemeClr val="accent1"/>
-          </a:effectRef>
-          <a:fontRef idx="minor">
-            <a:schemeClr val="lt1"/>
-          </a:fontRef>
-        </p:style>
         <p:txBody>
           <a:bodyPr rtlCol="0" anchor="ctr"/>
           <a:lstStyle/>
@@ -6866,20 +7059,6 @@
           </a:ln>
           <a:effectLst/>
         </p:spPr>
-        <p:style>
-          <a:lnRef idx="1">
-            <a:schemeClr val="accent1"/>
-          </a:lnRef>
-          <a:fillRef idx="3">
-            <a:schemeClr val="accent1"/>
-          </a:fillRef>
-          <a:effectRef idx="2">
-            <a:schemeClr val="accent1"/>
-          </a:effectRef>
-          <a:fontRef idx="minor">
-            <a:schemeClr val="lt1"/>
-          </a:fontRef>
-        </p:style>
         <p:txBody>
           <a:bodyPr rtlCol="0" anchor="ctr"/>
           <a:lstStyle/>
@@ -6910,20 +7089,6 @@
           </a:ln>
           <a:effectLst/>
         </p:spPr>
-        <p:style>
-          <a:lnRef idx="1">
-            <a:schemeClr val="accent1"/>
-          </a:lnRef>
-          <a:fillRef idx="3">
-            <a:schemeClr val="accent1"/>
-          </a:fillRef>
-          <a:effectRef idx="2">
-            <a:schemeClr val="accent1"/>
-          </a:effectRef>
-          <a:fontRef idx="minor">
-            <a:schemeClr val="lt1"/>
-          </a:fontRef>
-        </p:style>
         <p:txBody>
           <a:bodyPr rtlCol="0" anchor="ctr"/>
           <a:lstStyle/>
@@ -6965,7 +7130,7 @@
         <p:spPr>
           <a:xfrm>
             <a:off x="1015999" y="389466"/>
-            <a:ext cx="4775200" cy="176106"/>
+            <a:ext cx="4775200" cy="160866"/>
           </a:xfrm>
           <a:prstGeom prst="rect">
             <a:avLst/>
@@ -6978,12 +7143,17 @@
           </a:bodyPr>
           <a:lstStyle/>
           <a:p>
-            <a:r>
-              <a:rPr sz="800" b="0" i="0">
+            <a:pPr>
+              <a:lnSpc>
+                <a:spcPts val="1120"/>
+              </a:lnSpc>
+            </a:pPr>
+            <a:r>
+              <a:rPr sz="800" b="0" i="0" spc="80">
                 <a:solidFill>
                   <a:srgbClr val="6B6B65"/>
                 </a:solidFill>
-                <a:latin typeface="Inter"/>
+                <a:latin typeface="Inter SemiBold"/>
               </a:rPr>
               <a:t>01 / KAPITEL</a:t>
             </a:r>
@@ -6998,8 +7168,8 @@
         </p:nvSpPr>
         <p:spPr>
           <a:xfrm>
-            <a:off x="1015999" y="795866"/>
-            <a:ext cx="10193866" cy="501226"/>
+            <a:off x="1015999" y="778933"/>
+            <a:ext cx="4711700" cy="533400"/>
           </a:xfrm>
           <a:prstGeom prst="rect">
             <a:avLst/>
@@ -7012,12 +7182,17 @@
           </a:bodyPr>
           <a:lstStyle/>
           <a:p>
-            <a:r>
-              <a:rPr sz="3200" b="1" i="0">
+            <a:pPr>
+              <a:lnSpc>
+                <a:spcPts val="3679"/>
+              </a:lnSpc>
+            </a:pPr>
+            <a:r>
+              <a:rPr sz="3200" b="0" i="0" spc="-80">
                 <a:solidFill>
                   <a:srgbClr val="1C1C1E"/>
                 </a:solidFill>
-                <a:latin typeface="Inter"/>
+                <a:latin typeface="Inter SemiBold"/>
               </a:rPr>
               <a:t>Vier Aspekte, ein System</a:t>
             </a:r>
@@ -7032,8 +7207,8 @@
         </p:nvSpPr>
         <p:spPr>
           <a:xfrm>
-            <a:off x="1015999" y="3496733"/>
-            <a:ext cx="4842933" cy="250613"/>
+            <a:off x="1015999" y="3141133"/>
+            <a:ext cx="2701713" cy="575733"/>
           </a:xfrm>
           <a:prstGeom prst="rect">
             <a:avLst/>
@@ -7046,6 +7221,30 @@
           </a:bodyPr>
           <a:lstStyle/>
           <a:p>
+            <a:pPr>
+              <a:lnSpc>
+                <a:spcPts val="1870"/>
+              </a:lnSpc>
+            </a:pPr>
+            <a:r>
+              <a:rPr sz="1330" b="0" i="0" spc="-20">
+                <a:solidFill>
+                  <a:srgbClr val="1C1C1E"/>
+                </a:solidFill>
+                <a:latin typeface="Inter SemiBold"/>
+              </a:rPr>
+              <a:t>Erster Aspekt</a:t>
+            </a:r>
+          </a:p>
+          <a:p>
+            <a:pPr>
+              <a:lnSpc>
+                <a:spcPts val="1710"/>
+              </a:lnSpc>
+              <a:spcBef>
+                <a:spcPts val="1330"/>
+              </a:spcBef>
+            </a:pPr>
             <a:r>
               <a:rPr sz="1070" b="0" i="0">
                 <a:solidFill>
@@ -7066,8 +7265,8 @@
         </p:nvSpPr>
         <p:spPr>
           <a:xfrm>
-            <a:off x="1015999" y="4636346"/>
-            <a:ext cx="4842933" cy="250613"/>
+            <a:off x="1015999" y="4280746"/>
+            <a:ext cx="2701713" cy="575733"/>
           </a:xfrm>
           <a:prstGeom prst="rect">
             <a:avLst/>
@@ -7080,6 +7279,30 @@
           </a:bodyPr>
           <a:lstStyle/>
           <a:p>
+            <a:pPr>
+              <a:lnSpc>
+                <a:spcPts val="1870"/>
+              </a:lnSpc>
+            </a:pPr>
+            <a:r>
+              <a:rPr sz="1330" b="0" i="0" spc="-20">
+                <a:solidFill>
+                  <a:srgbClr val="1C1C1E"/>
+                </a:solidFill>
+                <a:latin typeface="Inter SemiBold"/>
+              </a:rPr>
+              <a:t>Dritter Aspekt</a:t>
+            </a:r>
+          </a:p>
+          <a:p>
+            <a:pPr>
+              <a:lnSpc>
+                <a:spcPts val="1710"/>
+              </a:lnSpc>
+              <a:spcBef>
+                <a:spcPts val="1330"/>
+              </a:spcBef>
+            </a:pPr>
             <a:r>
               <a:rPr sz="1070" b="0" i="0">
                 <a:solidFill>
@@ -7101,7 +7324,7 @@
         <p:spPr>
           <a:xfrm>
             <a:off x="2003213" y="6466839"/>
-            <a:ext cx="3928533" cy="176106"/>
+            <a:ext cx="3928533" cy="160866"/>
           </a:xfrm>
           <a:prstGeom prst="rect">
             <a:avLst/>
@@ -7114,12 +7337,17 @@
           </a:bodyPr>
           <a:lstStyle/>
           <a:p>
-            <a:r>
-              <a:rPr sz="800" b="1" i="0">
+            <a:pPr>
+              <a:lnSpc>
+                <a:spcPts val="1120"/>
+              </a:lnSpc>
+            </a:pPr>
+            <a:r>
+              <a:rPr sz="800" b="0" i="0">
                 <a:solidFill>
                   <a:srgbClr val="1C1C1E"/>
                 </a:solidFill>
-                <a:latin typeface="Inter"/>
+                <a:latin typeface="Inter SemiBold"/>
               </a:rPr>
               <a:t>Kunde Projekttitel</a:t>
             </a:r>
@@ -7134,8 +7362,8 @@
         </p:nvSpPr>
         <p:spPr>
           <a:xfrm>
-            <a:off x="4738793" y="4263813"/>
-            <a:ext cx="1120140" cy="270933"/>
+            <a:off x="6366933" y="3141133"/>
+            <a:ext cx="2701713" cy="575733"/>
           </a:xfrm>
           <a:prstGeom prst="rect">
             <a:avLst/>
@@ -7148,14 +7376,38 @@
           </a:bodyPr>
           <a:lstStyle/>
           <a:p>
-            <a:r>
-              <a:rPr sz="1330" b="0" i="0">
+            <a:pPr>
+              <a:lnSpc>
+                <a:spcPts val="1870"/>
+              </a:lnSpc>
+            </a:pPr>
+            <a:r>
+              <a:rPr sz="1330" b="0" i="0" spc="-20">
                 <a:solidFill>
                   <a:srgbClr val="1C1C1E"/>
                 </a:solidFill>
+                <a:latin typeface="Inter SemiBold"/>
+              </a:rPr>
+              <a:t>Zweiter Aspekt</a:t>
+            </a:r>
+          </a:p>
+          <a:p>
+            <a:pPr>
+              <a:lnSpc>
+                <a:spcPts val="1710"/>
+              </a:lnSpc>
+              <a:spcBef>
+                <a:spcPts val="1330"/>
+              </a:spcBef>
+            </a:pPr>
+            <a:r>
+              <a:rPr sz="1070" b="0" i="0">
+                <a:solidFill>
+                  <a:srgbClr val="3D3D3A"/>
+                </a:solidFill>
                 <a:latin typeface="Inter"/>
               </a:rPr>
-              <a:t>Dritter Aspekt</a:t>
+              <a:t>Ein bis zwei Sätze, was das konkret heißt.</a:t>
             </a:r>
           </a:p>
         </p:txBody>
@@ -7168,8 +7420,8 @@
         </p:nvSpPr>
         <p:spPr>
           <a:xfrm>
-            <a:off x="4765886" y="3124200"/>
-            <a:ext cx="1093046" cy="270933"/>
+            <a:off x="6366933" y="4280746"/>
+            <a:ext cx="2701713" cy="575733"/>
           </a:xfrm>
           <a:prstGeom prst="rect">
             <a:avLst/>
@@ -7182,14 +7434,38 @@
           </a:bodyPr>
           <a:lstStyle/>
           <a:p>
-            <a:r>
-              <a:rPr sz="1330" b="0" i="0">
+            <a:pPr>
+              <a:lnSpc>
+                <a:spcPts val="1870"/>
+              </a:lnSpc>
+            </a:pPr>
+            <a:r>
+              <a:rPr sz="1330" b="0" i="0" spc="-20">
                 <a:solidFill>
                   <a:srgbClr val="1C1C1E"/>
                 </a:solidFill>
+                <a:latin typeface="Inter SemiBold"/>
+              </a:rPr>
+              <a:t>Vierter Aspekt</a:t>
+            </a:r>
+          </a:p>
+          <a:p>
+            <a:pPr>
+              <a:lnSpc>
+                <a:spcPts val="1710"/>
+              </a:lnSpc>
+              <a:spcBef>
+                <a:spcPts val="1330"/>
+              </a:spcBef>
+            </a:pPr>
+            <a:r>
+              <a:rPr sz="1070" b="0" i="0">
+                <a:solidFill>
+                  <a:srgbClr val="3D3D3A"/>
+                </a:solidFill>
                 <a:latin typeface="Inter"/>
               </a:rPr>
-              <a:t>Erster Aspekt</a:t>
+              <a:t>Ein bis zwei Sätze, was das konkret heißt.</a:t>
             </a:r>
           </a:p>
         </p:txBody>
@@ -7197,142 +7473,6 @@
       <p:sp>
         <p:nvSpPr>
           <p:cNvPr id="14" name="TextBox 13"/>
-          <p:cNvSpPr txBox="1"/>
-          <p:nvPr/>
-        </p:nvSpPr>
-        <p:spPr>
-          <a:xfrm>
-            <a:off x="6366933" y="3496733"/>
-            <a:ext cx="4842933" cy="250613"/>
-          </a:xfrm>
-          <a:prstGeom prst="rect">
-            <a:avLst/>
-          </a:prstGeom>
-          <a:noFill/>
-        </p:spPr>
-        <p:txBody>
-          <a:bodyPr wrap="square" lIns="0" rIns="0" tIns="0" bIns="0">
-            <a:normAutofit/>
-          </a:bodyPr>
-          <a:lstStyle/>
-          <a:p>
-            <a:r>
-              <a:rPr sz="1070" b="0" i="0">
-                <a:solidFill>
-                  <a:srgbClr val="3D3D3A"/>
-                </a:solidFill>
-                <a:latin typeface="Inter"/>
-              </a:rPr>
-              <a:t>Ein bis zwei Sätze, was das konkret heißt.</a:t>
-            </a:r>
-          </a:p>
-        </p:txBody>
-      </p:sp>
-      <p:sp>
-        <p:nvSpPr>
-          <p:cNvPr id="15" name="TextBox 14"/>
-          <p:cNvSpPr txBox="1"/>
-          <p:nvPr/>
-        </p:nvSpPr>
-        <p:spPr>
-          <a:xfrm>
-            <a:off x="6366933" y="4636346"/>
-            <a:ext cx="4842933" cy="250613"/>
-          </a:xfrm>
-          <a:prstGeom prst="rect">
-            <a:avLst/>
-          </a:prstGeom>
-          <a:noFill/>
-        </p:spPr>
-        <p:txBody>
-          <a:bodyPr wrap="square" lIns="0" rIns="0" tIns="0" bIns="0">
-            <a:normAutofit/>
-          </a:bodyPr>
-          <a:lstStyle/>
-          <a:p>
-            <a:r>
-              <a:rPr sz="1070" b="0" i="0">
-                <a:solidFill>
-                  <a:srgbClr val="3D3D3A"/>
-                </a:solidFill>
-                <a:latin typeface="Inter"/>
-              </a:rPr>
-              <a:t>Ein bis zwei Sätze, was das konkret heißt.</a:t>
-            </a:r>
-          </a:p>
-        </p:txBody>
-      </p:sp>
-      <p:sp>
-        <p:nvSpPr>
-          <p:cNvPr id="16" name="TextBox 15"/>
-          <p:cNvSpPr txBox="1"/>
-          <p:nvPr/>
-        </p:nvSpPr>
-        <p:spPr>
-          <a:xfrm>
-            <a:off x="9990666" y="3124200"/>
-            <a:ext cx="1219200" cy="270933"/>
-          </a:xfrm>
-          <a:prstGeom prst="rect">
-            <a:avLst/>
-          </a:prstGeom>
-          <a:noFill/>
-        </p:spPr>
-        <p:txBody>
-          <a:bodyPr wrap="square" lIns="0" rIns="0" tIns="0" bIns="0">
-            <a:normAutofit/>
-          </a:bodyPr>
-          <a:lstStyle/>
-          <a:p>
-            <a:r>
-              <a:rPr sz="1330" b="0" i="0">
-                <a:solidFill>
-                  <a:srgbClr val="1C1C1E"/>
-                </a:solidFill>
-                <a:latin typeface="Inter"/>
-              </a:rPr>
-              <a:t>Zweiter Aspekt</a:t>
-            </a:r>
-          </a:p>
-        </p:txBody>
-      </p:sp>
-      <p:sp>
-        <p:nvSpPr>
-          <p:cNvPr id="17" name="TextBox 16"/>
-          <p:cNvSpPr txBox="1"/>
-          <p:nvPr/>
-        </p:nvSpPr>
-        <p:spPr>
-          <a:xfrm>
-            <a:off x="10048239" y="4263813"/>
-            <a:ext cx="1161626" cy="270933"/>
-          </a:xfrm>
-          <a:prstGeom prst="rect">
-            <a:avLst/>
-          </a:prstGeom>
-          <a:noFill/>
-        </p:spPr>
-        <p:txBody>
-          <a:bodyPr wrap="square" lIns="0" rIns="0" tIns="0" bIns="0">
-            <a:normAutofit/>
-          </a:bodyPr>
-          <a:lstStyle/>
-          <a:p>
-            <a:r>
-              <a:rPr sz="1330" b="0" i="0">
-                <a:solidFill>
-                  <a:srgbClr val="1C1C1E"/>
-                </a:solidFill>
-                <a:latin typeface="Inter"/>
-              </a:rPr>
-              <a:t>Vierter Aspekt</a:t>
-            </a:r>
-          </a:p>
-        </p:txBody>
-      </p:sp>
-      <p:sp>
-        <p:nvSpPr>
-          <p:cNvPr id="18" name="TextBox 17"/>
           <p:cNvSpPr txBox="1"/>
           <p:nvPr/>
         </p:nvSpPr>
@@ -7352,7 +7492,11 @@
           </a:bodyPr>
           <a:lstStyle/>
           <a:p>
-            <a:pPr algn="r"/>
+            <a:pPr algn="r">
+              <a:lnSpc>
+                <a:spcPts val="1120"/>
+              </a:lnSpc>
+            </a:pPr>
             <a:r>
               <a:rPr sz="800" b="0" i="0">
                 <a:solidFill>
@@ -7413,20 +7557,6 @@
           </a:ln>
           <a:effectLst/>
         </p:spPr>
-        <p:style>
-          <a:lnRef idx="1">
-            <a:schemeClr val="accent1"/>
-          </a:lnRef>
-          <a:fillRef idx="3">
-            <a:schemeClr val="accent1"/>
-          </a:fillRef>
-          <a:effectRef idx="2">
-            <a:schemeClr val="accent1"/>
-          </a:effectRef>
-          <a:fontRef idx="minor">
-            <a:schemeClr val="lt1"/>
-          </a:fontRef>
-        </p:style>
         <p:txBody>
           <a:bodyPr rtlCol="0" anchor="ctr"/>
           <a:lstStyle/>
@@ -7457,20 +7587,6 @@
           </a:ln>
           <a:effectLst/>
         </p:spPr>
-        <p:style>
-          <a:lnRef idx="1">
-            <a:schemeClr val="accent1"/>
-          </a:lnRef>
-          <a:fillRef idx="3">
-            <a:schemeClr val="accent1"/>
-          </a:fillRef>
-          <a:effectRef idx="2">
-            <a:schemeClr val="accent1"/>
-          </a:effectRef>
-          <a:fontRef idx="minor">
-            <a:schemeClr val="lt1"/>
-          </a:fontRef>
-        </p:style>
         <p:txBody>
           <a:bodyPr rtlCol="0" anchor="ctr"/>
           <a:lstStyle/>
@@ -7512,7 +7628,7 @@
         <p:spPr>
           <a:xfrm>
             <a:off x="1015999" y="389466"/>
-            <a:ext cx="4775200" cy="176106"/>
+            <a:ext cx="4775200" cy="160866"/>
           </a:xfrm>
           <a:prstGeom prst="rect">
             <a:avLst/>
@@ -7525,12 +7641,17 @@
           </a:bodyPr>
           <a:lstStyle/>
           <a:p>
-            <a:r>
-              <a:rPr sz="800" b="0" i="0">
+            <a:pPr>
+              <a:lnSpc>
+                <a:spcPts val="1120"/>
+              </a:lnSpc>
+            </a:pPr>
+            <a:r>
+              <a:rPr sz="800" b="0" i="0" spc="80">
                 <a:solidFill>
                   <a:srgbClr val="6B6B65"/>
                 </a:solidFill>
-                <a:latin typeface="Inter"/>
+                <a:latin typeface="Inter SemiBold"/>
               </a:rPr>
               <a:t>01 / KAPITEL</a:t>
             </a:r>
@@ -7545,8 +7666,8 @@
         </p:nvSpPr>
         <p:spPr>
           <a:xfrm>
-            <a:off x="1015999" y="795866"/>
-            <a:ext cx="8331199" cy="501226"/>
+            <a:off x="1015999" y="778933"/>
+            <a:ext cx="5444913" cy="533400"/>
           </a:xfrm>
           <a:prstGeom prst="rect">
             <a:avLst/>
@@ -7559,12 +7680,17 @@
           </a:bodyPr>
           <a:lstStyle/>
           <a:p>
-            <a:r>
-              <a:rPr sz="3200" b="1" i="0">
+            <a:pPr>
+              <a:lnSpc>
+                <a:spcPts val="3679"/>
+              </a:lnSpc>
+            </a:pPr>
+            <a:r>
+              <a:rPr sz="3200" b="0" i="0" spc="-80">
                 <a:solidFill>
                   <a:srgbClr val="1C1C1E"/>
                 </a:solidFill>
-                <a:latin typeface="Inter"/>
+                <a:latin typeface="Inter SemiBold"/>
               </a:rPr>
               <a:t>Zwei Seiten derselben Sache</a:t>
             </a:r>
@@ -7580,7 +7706,7 @@
         <p:spPr>
           <a:xfrm>
             <a:off x="1015999" y="3389206"/>
-            <a:ext cx="4436533" cy="176106"/>
+            <a:ext cx="4436533" cy="160866"/>
           </a:xfrm>
           <a:prstGeom prst="rect">
             <a:avLst/>
@@ -7593,12 +7719,17 @@
           </a:bodyPr>
           <a:lstStyle/>
           <a:p>
-            <a:r>
-              <a:rPr sz="800" b="0" i="0">
+            <a:pPr>
+              <a:lnSpc>
+                <a:spcPts val="1120"/>
+              </a:lnSpc>
+            </a:pPr>
+            <a:r>
+              <a:rPr sz="800" b="0" i="0" spc="80">
                 <a:solidFill>
                   <a:srgbClr val="6B6B65"/>
                 </a:solidFill>
-                <a:latin typeface="Inter"/>
+                <a:latin typeface="Inter SemiBold"/>
               </a:rPr>
               <a:t>BLICKWINKEL A</a:t>
             </a:r>
@@ -7613,8 +7744,8 @@
         </p:nvSpPr>
         <p:spPr>
           <a:xfrm>
-            <a:off x="1015999" y="3680459"/>
-            <a:ext cx="4910666" cy="955040"/>
+            <a:off x="1015999" y="3697393"/>
+            <a:ext cx="1973579" cy="907626"/>
           </a:xfrm>
           <a:prstGeom prst="rect">
             <a:avLst/>
@@ -7627,6 +7758,11 @@
           </a:bodyPr>
           <a:lstStyle/>
           <a:p>
+            <a:pPr>
+              <a:lnSpc>
+                <a:spcPts val="1710"/>
+              </a:lnSpc>
+            </a:pPr>
             <a:r>
               <a:rPr sz="1070" b="0" i="0">
                 <a:solidFill>
@@ -7639,8 +7775,11 @@
           </a:p>
           <a:p>
             <a:pPr>
+              <a:lnSpc>
+                <a:spcPts val="1710"/>
+              </a:lnSpc>
               <a:spcBef>
-                <a:spcPts val="1070"/>
+                <a:spcPts val="1440"/>
               </a:spcBef>
             </a:pPr>
             <a:r>
@@ -7655,8 +7794,11 @@
           </a:p>
           <a:p>
             <a:pPr>
+              <a:lnSpc>
+                <a:spcPts val="1710"/>
+              </a:lnSpc>
               <a:spcBef>
-                <a:spcPts val="1070"/>
+                <a:spcPts val="1440"/>
               </a:spcBef>
             </a:pPr>
             <a:r>
@@ -7680,7 +7822,7 @@
         <p:spPr>
           <a:xfrm>
             <a:off x="2003213" y="6466839"/>
-            <a:ext cx="3928533" cy="176106"/>
+            <a:ext cx="3928533" cy="160866"/>
           </a:xfrm>
           <a:prstGeom prst="rect">
             <a:avLst/>
@@ -7693,12 +7835,17 @@
           </a:bodyPr>
           <a:lstStyle/>
           <a:p>
-            <a:r>
-              <a:rPr sz="800" b="1" i="0">
+            <a:pPr>
+              <a:lnSpc>
+                <a:spcPts val="1120"/>
+              </a:lnSpc>
+            </a:pPr>
+            <a:r>
+              <a:rPr sz="800" b="0" i="0">
                 <a:solidFill>
                   <a:srgbClr val="1C1C1E"/>
                 </a:solidFill>
-                <a:latin typeface="Inter"/>
+                <a:latin typeface="Inter SemiBold"/>
               </a:rPr>
               <a:t>Kunde Projekttitel</a:t>
             </a:r>
@@ -7714,7 +7861,7 @@
         <p:spPr>
           <a:xfrm>
             <a:off x="6299200" y="3389206"/>
-            <a:ext cx="4436533" cy="176106"/>
+            <a:ext cx="4436533" cy="160866"/>
           </a:xfrm>
           <a:prstGeom prst="rect">
             <a:avLst/>
@@ -7727,12 +7874,17 @@
           </a:bodyPr>
           <a:lstStyle/>
           <a:p>
-            <a:r>
-              <a:rPr sz="800" b="0" i="0">
+            <a:pPr>
+              <a:lnSpc>
+                <a:spcPts val="1120"/>
+              </a:lnSpc>
+            </a:pPr>
+            <a:r>
+              <a:rPr sz="800" b="0" i="0" spc="80">
                 <a:solidFill>
                   <a:srgbClr val="6B6B65"/>
                 </a:solidFill>
-                <a:latin typeface="Inter"/>
+                <a:latin typeface="Inter SemiBold"/>
               </a:rPr>
               <a:t>BLICKWINKEL B</a:t>
             </a:r>
@@ -7747,8 +7899,8 @@
         </p:nvSpPr>
         <p:spPr>
           <a:xfrm>
-            <a:off x="6299200" y="3680459"/>
-            <a:ext cx="4910666" cy="955040"/>
+            <a:off x="6299200" y="3697393"/>
+            <a:ext cx="1973579" cy="907626"/>
           </a:xfrm>
           <a:prstGeom prst="rect">
             <a:avLst/>
@@ -7761,6 +7913,11 @@
           </a:bodyPr>
           <a:lstStyle/>
           <a:p>
+            <a:pPr>
+              <a:lnSpc>
+                <a:spcPts val="1710"/>
+              </a:lnSpc>
+            </a:pPr>
             <a:r>
               <a:rPr sz="1070" b="0" i="0">
                 <a:solidFill>
@@ -7773,8 +7930,11 @@
           </a:p>
           <a:p>
             <a:pPr>
+              <a:lnSpc>
+                <a:spcPts val="1710"/>
+              </a:lnSpc>
               <a:spcBef>
-                <a:spcPts val="1070"/>
+                <a:spcPts val="1440"/>
               </a:spcBef>
             </a:pPr>
             <a:r>
@@ -7789,8 +7949,11 @@
           </a:p>
           <a:p>
             <a:pPr>
+              <a:lnSpc>
+                <a:spcPts val="1710"/>
+              </a:lnSpc>
               <a:spcBef>
-                <a:spcPts val="1070"/>
+                <a:spcPts val="1440"/>
               </a:spcBef>
             </a:pPr>
             <a:r>
@@ -7827,7 +7990,11 @@
           </a:bodyPr>
           <a:lstStyle/>
           <a:p>
-            <a:pPr algn="r"/>
+            <a:pPr algn="r">
+              <a:lnSpc>
+                <a:spcPts val="1120"/>
+              </a:lnSpc>
+            </a:pPr>
             <a:r>
               <a:rPr sz="800" b="0" i="0">
                 <a:solidFill>
@@ -7866,9 +8033,137 @@
         <p:nvPr/>
       </p:nvGrpSpPr>
       <p:grpSpPr/>
+      <p:sp>
+        <p:nvSpPr>
+          <p:cNvPr id="2" name="Rounded Rectangle 1"/>
+          <p:cNvSpPr/>
+          <p:nvPr/>
+        </p:nvSpPr>
+        <p:spPr>
+          <a:xfrm>
+            <a:off x="1015999" y="2138680"/>
+            <a:ext cx="4978400" cy="1693333"/>
+          </a:xfrm>
+          <a:prstGeom prst="roundRect">
+            <a:avLst>
+              <a:gd name="adj" fmla="val 9000"/>
+            </a:avLst>
+          </a:prstGeom>
+          <a:solidFill>
+            <a:srgbClr val="FFFFFF"/>
+          </a:solidFill>
+          <a:ln>
+            <a:noFill/>
+          </a:ln>
+          <a:effectLst/>
+        </p:spPr>
+        <p:txBody>
+          <a:bodyPr rtlCol="0" anchor="ctr"/>
+          <a:lstStyle/>
+          <a:p>
+            <a:pPr algn="ctr"/>
+          </a:p>
+        </p:txBody>
+      </p:sp>
+      <p:sp>
+        <p:nvSpPr>
+          <p:cNvPr id="3" name="Rounded Rectangle 2"/>
+          <p:cNvSpPr/>
+          <p:nvPr/>
+        </p:nvSpPr>
+        <p:spPr>
+          <a:xfrm>
+            <a:off x="6197600" y="2138680"/>
+            <a:ext cx="4978400" cy="1693333"/>
+          </a:xfrm>
+          <a:prstGeom prst="roundRect">
+            <a:avLst>
+              <a:gd name="adj" fmla="val 9000"/>
+            </a:avLst>
+          </a:prstGeom>
+          <a:solidFill>
+            <a:srgbClr val="FFFFFF"/>
+          </a:solidFill>
+          <a:ln>
+            <a:noFill/>
+          </a:ln>
+          <a:effectLst/>
+        </p:spPr>
+        <p:txBody>
+          <a:bodyPr rtlCol="0" anchor="ctr"/>
+          <a:lstStyle/>
+          <a:p>
+            <a:pPr algn="ctr"/>
+          </a:p>
+        </p:txBody>
+      </p:sp>
+      <p:sp>
+        <p:nvSpPr>
+          <p:cNvPr id="4" name="Rounded Rectangle 3"/>
+          <p:cNvSpPr/>
+          <p:nvPr/>
+        </p:nvSpPr>
+        <p:spPr>
+          <a:xfrm>
+            <a:off x="1015999" y="4035213"/>
+            <a:ext cx="4978400" cy="1693333"/>
+          </a:xfrm>
+          <a:prstGeom prst="roundRect">
+            <a:avLst>
+              <a:gd name="adj" fmla="val 9000"/>
+            </a:avLst>
+          </a:prstGeom>
+          <a:solidFill>
+            <a:srgbClr val="FFFFFF"/>
+          </a:solidFill>
+          <a:ln>
+            <a:noFill/>
+          </a:ln>
+          <a:effectLst/>
+        </p:spPr>
+        <p:txBody>
+          <a:bodyPr rtlCol="0" anchor="ctr"/>
+          <a:lstStyle/>
+          <a:p>
+            <a:pPr algn="ctr"/>
+          </a:p>
+        </p:txBody>
+      </p:sp>
+      <p:sp>
+        <p:nvSpPr>
+          <p:cNvPr id="5" name="Rounded Rectangle 4"/>
+          <p:cNvSpPr/>
+          <p:nvPr/>
+        </p:nvSpPr>
+        <p:spPr>
+          <a:xfrm>
+            <a:off x="6197600" y="4035213"/>
+            <a:ext cx="4978400" cy="1693333"/>
+          </a:xfrm>
+          <a:prstGeom prst="roundRect">
+            <a:avLst>
+              <a:gd name="adj" fmla="val 9000"/>
+            </a:avLst>
+          </a:prstGeom>
+          <a:solidFill>
+            <a:srgbClr val="FFFFFF"/>
+          </a:solidFill>
+          <a:ln>
+            <a:noFill/>
+          </a:ln>
+          <a:effectLst/>
+        </p:spPr>
+        <p:txBody>
+          <a:bodyPr rtlCol="0" anchor="ctr"/>
+          <a:lstStyle/>
+          <a:p>
+            <a:pPr algn="ctr"/>
+          </a:p>
+        </p:txBody>
+      </p:sp>
       <p:pic>
         <p:nvPicPr>
-          <p:cNvPr id="2" name="Picture 1" descr="wordmark-black-crop.png"/>
+          <p:cNvPr id="6" name="Picture 5" descr="wordmark-black-crop.png"/>
           <p:cNvPicPr>
             <a:picLocks noChangeAspect="1"/>
           </p:cNvPicPr>
@@ -7892,14 +8187,14 @@
       </p:pic>
       <p:sp>
         <p:nvSpPr>
-          <p:cNvPr id="3" name="TextBox 2"/>
+          <p:cNvPr id="7" name="TextBox 6"/>
           <p:cNvSpPr txBox="1"/>
           <p:nvPr/>
         </p:nvSpPr>
         <p:spPr>
           <a:xfrm>
             <a:off x="1015999" y="389466"/>
-            <a:ext cx="4775200" cy="176106"/>
+            <a:ext cx="4775200" cy="160866"/>
           </a:xfrm>
           <a:prstGeom prst="rect">
             <a:avLst/>
@@ -7912,12 +8207,17 @@
           </a:bodyPr>
           <a:lstStyle/>
           <a:p>
-            <a:r>
-              <a:rPr sz="800" b="0" i="0">
+            <a:pPr>
+              <a:lnSpc>
+                <a:spcPts val="1120"/>
+              </a:lnSpc>
+            </a:pPr>
+            <a:r>
+              <a:rPr sz="800" b="0" i="0" spc="80">
                 <a:solidFill>
                   <a:srgbClr val="6B6B65"/>
                 </a:solidFill>
-                <a:latin typeface="Inter"/>
+                <a:latin typeface="Inter SemiBold"/>
               </a:rPr>
               <a:t>01 / KAPITEL</a:t>
             </a:r>
@@ -7926,14 +8226,14 @@
       </p:sp>
       <p:sp>
         <p:nvSpPr>
-          <p:cNvPr id="4" name="TextBox 3"/>
-          <p:cNvSpPr txBox="1"/>
-          <p:nvPr/>
-        </p:nvSpPr>
-        <p:spPr>
-          <a:xfrm>
-            <a:off x="1015999" y="795866"/>
-            <a:ext cx="10193866" cy="501226"/>
+          <p:cNvPr id="8" name="TextBox 7"/>
+          <p:cNvSpPr txBox="1"/>
+          <p:nvPr/>
+        </p:nvSpPr>
+        <p:spPr>
+          <a:xfrm>
+            <a:off x="1015999" y="778933"/>
+            <a:ext cx="5309446" cy="533400"/>
           </a:xfrm>
           <a:prstGeom prst="rect">
             <a:avLst/>
@@ -7946,12 +8246,17 @@
           </a:bodyPr>
           <a:lstStyle/>
           <a:p>
-            <a:r>
-              <a:rPr sz="3200" b="1" i="0">
+            <a:pPr>
+              <a:lnSpc>
+                <a:spcPts val="3679"/>
+              </a:lnSpc>
+            </a:pPr>
+            <a:r>
+              <a:rPr sz="3200" b="0" i="0" spc="-80">
                 <a:solidFill>
                   <a:srgbClr val="1C1C1E"/>
                 </a:solidFill>
-                <a:latin typeface="Inter"/>
+                <a:latin typeface="Inter SemiBold"/>
               </a:rPr>
               <a:t>Vier Werkzeuge, ein System</a:t>
             </a:r>
@@ -7960,14 +8265,14 @@
       </p:sp>
       <p:sp>
         <p:nvSpPr>
-          <p:cNvPr id="5" name="TextBox 4"/>
-          <p:cNvSpPr txBox="1"/>
-          <p:nvPr/>
-        </p:nvSpPr>
-        <p:spPr>
-          <a:xfrm>
-            <a:off x="1286933" y="2392680"/>
-            <a:ext cx="3420533" cy="562186"/>
+          <p:cNvPr id="9" name="TextBox 8"/>
+          <p:cNvSpPr txBox="1"/>
+          <p:nvPr/>
+        </p:nvSpPr>
+        <p:spPr>
+          <a:xfrm>
+            <a:off x="1286933" y="2401146"/>
+            <a:ext cx="2821093" cy="543560"/>
           </a:xfrm>
           <a:prstGeom prst="rect">
             <a:avLst/>
@@ -7980,12 +8285,17 @@
           </a:bodyPr>
           <a:lstStyle/>
           <a:p>
-            <a:r>
-              <a:rPr sz="1600" b="0" i="0">
+            <a:pPr>
+              <a:lnSpc>
+                <a:spcPts val="2080"/>
+              </a:lnSpc>
+            </a:pPr>
+            <a:r>
+              <a:rPr sz="1600" b="0" i="0" spc="-33">
                 <a:solidFill>
                   <a:srgbClr val="1C1C1E"/>
                 </a:solidFill>
-                <a:latin typeface="Inter"/>
+                <a:latin typeface="Inter SemiBold"/>
               </a:rPr>
               <a:t>Statement des ersten Dings in einer Zeile.</a:t>
             </a:r>
@@ -7994,14 +8304,14 @@
       </p:sp>
       <p:sp>
         <p:nvSpPr>
-          <p:cNvPr id="6" name="TextBox 5"/>
-          <p:cNvSpPr txBox="1"/>
-          <p:nvPr/>
-        </p:nvSpPr>
-        <p:spPr>
-          <a:xfrm>
-            <a:off x="1286933" y="3366346"/>
-            <a:ext cx="4470400" cy="211666"/>
+          <p:cNvPr id="10" name="TextBox 9"/>
+          <p:cNvSpPr txBox="1"/>
+          <p:nvPr/>
+        </p:nvSpPr>
+        <p:spPr>
+          <a:xfrm>
+            <a:off x="1286933" y="4297680"/>
+            <a:ext cx="2835486" cy="543560"/>
           </a:xfrm>
           <a:prstGeom prst="rect">
             <a:avLst/>
@@ -8014,28 +8324,72 @@
           </a:bodyPr>
           <a:lstStyle/>
           <a:p>
-            <a:r>
-              <a:rPr sz="930" b="0" i="0">
-                <a:solidFill>
-                  <a:srgbClr val="3D3D3A"/>
-                </a:solidFill>
-                <a:latin typeface="Inter"/>
-              </a:rPr>
-              <a:t>Produktname A</a:t>
-            </a:r>
-          </a:p>
-        </p:txBody>
-      </p:sp>
-      <p:sp>
-        <p:nvSpPr>
-          <p:cNvPr id="7" name="TextBox 6"/>
-          <p:cNvSpPr txBox="1"/>
-          <p:nvPr/>
-        </p:nvSpPr>
-        <p:spPr>
-          <a:xfrm>
-            <a:off x="1286933" y="4289213"/>
-            <a:ext cx="3420533" cy="562186"/>
+            <a:pPr>
+              <a:lnSpc>
+                <a:spcPts val="2080"/>
+              </a:lnSpc>
+            </a:pPr>
+            <a:r>
+              <a:rPr sz="1600" b="0" i="0" spc="-33">
+                <a:solidFill>
+                  <a:srgbClr val="1C1C1E"/>
+                </a:solidFill>
+                <a:latin typeface="Inter SemiBold"/>
+              </a:rPr>
+              <a:t>Statement des dritten Dings in einer Zeile.</a:t>
+            </a:r>
+          </a:p>
+        </p:txBody>
+      </p:sp>
+      <p:sp>
+        <p:nvSpPr>
+          <p:cNvPr id="11" name="TextBox 10"/>
+          <p:cNvSpPr txBox="1"/>
+          <p:nvPr/>
+        </p:nvSpPr>
+        <p:spPr>
+          <a:xfrm>
+            <a:off x="2003213" y="6466839"/>
+            <a:ext cx="3928533" cy="160866"/>
+          </a:xfrm>
+          <a:prstGeom prst="rect">
+            <a:avLst/>
+          </a:prstGeom>
+          <a:noFill/>
+        </p:spPr>
+        <p:txBody>
+          <a:bodyPr wrap="none" lIns="0" rIns="0" tIns="0" bIns="0">
+            <a:noAutofit/>
+          </a:bodyPr>
+          <a:lstStyle/>
+          <a:p>
+            <a:pPr>
+              <a:lnSpc>
+                <a:spcPts val="1120"/>
+              </a:lnSpc>
+            </a:pPr>
+            <a:r>
+              <a:rPr sz="800" b="0" i="0">
+                <a:solidFill>
+                  <a:srgbClr val="1C1C1E"/>
+                </a:solidFill>
+                <a:latin typeface="Inter SemiBold"/>
+              </a:rPr>
+              <a:t>Kunde Projekttitel</a:t>
+            </a:r>
+          </a:p>
+        </p:txBody>
+      </p:sp>
+      <p:sp>
+        <p:nvSpPr>
+          <p:cNvPr id="12" name="TextBox 11"/>
+          <p:cNvSpPr txBox="1"/>
+          <p:nvPr/>
+        </p:nvSpPr>
+        <p:spPr>
+          <a:xfrm>
+            <a:off x="4862406" y="3383280"/>
+            <a:ext cx="894926" cy="177800"/>
           </a:xfrm>
           <a:prstGeom prst="rect">
             <a:avLst/>
@@ -8048,28 +8402,33 @@
           </a:bodyPr>
           <a:lstStyle/>
           <a:p>
-            <a:r>
-              <a:rPr sz="1600" b="0" i="0">
-                <a:solidFill>
-                  <a:srgbClr val="1C1C1E"/>
+            <a:pPr>
+              <a:lnSpc>
+                <a:spcPts val="1400"/>
+              </a:lnSpc>
+            </a:pPr>
+            <a:r>
+              <a:rPr sz="930" b="0" i="0">
+                <a:solidFill>
+                  <a:srgbClr val="3D3D3A"/>
                 </a:solidFill>
                 <a:latin typeface="Inter"/>
               </a:rPr>
-              <a:t>Statement des dritten Dings in einer Zeile.</a:t>
-            </a:r>
-          </a:p>
-        </p:txBody>
-      </p:sp>
-      <p:sp>
-        <p:nvSpPr>
-          <p:cNvPr id="8" name="TextBox 7"/>
-          <p:cNvSpPr txBox="1"/>
-          <p:nvPr/>
-        </p:nvSpPr>
-        <p:spPr>
-          <a:xfrm>
-            <a:off x="1286933" y="5262880"/>
-            <a:ext cx="4470400" cy="211666"/>
+              <a:t>Produktname A</a:t>
+            </a:r>
+          </a:p>
+        </p:txBody>
+      </p:sp>
+      <p:sp>
+        <p:nvSpPr>
+          <p:cNvPr id="13" name="TextBox 12"/>
+          <p:cNvSpPr txBox="1"/>
+          <p:nvPr/>
+        </p:nvSpPr>
+        <p:spPr>
+          <a:xfrm>
+            <a:off x="4858173" y="5279813"/>
+            <a:ext cx="899160" cy="177800"/>
           </a:xfrm>
           <a:prstGeom prst="rect">
             <a:avLst/>
@@ -8082,6 +8441,11 @@
           </a:bodyPr>
           <a:lstStyle/>
           <a:p>
+            <a:pPr>
+              <a:lnSpc>
+                <a:spcPts val="1400"/>
+              </a:lnSpc>
+            </a:pPr>
             <a:r>
               <a:rPr sz="930" b="0" i="0">
                 <a:solidFill>
@@ -8096,14 +8460,170 @@
       </p:sp>
       <p:sp>
         <p:nvSpPr>
-          <p:cNvPr id="9" name="TextBox 8"/>
-          <p:cNvSpPr txBox="1"/>
-          <p:nvPr/>
-        </p:nvSpPr>
-        <p:spPr>
-          <a:xfrm>
-            <a:off x="2003213" y="6466839"/>
-            <a:ext cx="3928533" cy="176106"/>
+          <p:cNvPr id="14" name="TextBox 13"/>
+          <p:cNvSpPr txBox="1"/>
+          <p:nvPr/>
+        </p:nvSpPr>
+        <p:spPr>
+          <a:xfrm>
+            <a:off x="6468533" y="2401146"/>
+            <a:ext cx="2959100" cy="543560"/>
+          </a:xfrm>
+          <a:prstGeom prst="rect">
+            <a:avLst/>
+          </a:prstGeom>
+          <a:noFill/>
+        </p:spPr>
+        <p:txBody>
+          <a:bodyPr wrap="square" lIns="0" rIns="0" tIns="0" bIns="0">
+            <a:normAutofit/>
+          </a:bodyPr>
+          <a:lstStyle/>
+          <a:p>
+            <a:pPr>
+              <a:lnSpc>
+                <a:spcPts val="2080"/>
+              </a:lnSpc>
+            </a:pPr>
+            <a:r>
+              <a:rPr sz="1600" b="0" i="0" spc="-33">
+                <a:solidFill>
+                  <a:srgbClr val="1C1C1E"/>
+                </a:solidFill>
+                <a:latin typeface="Inter SemiBold"/>
+              </a:rPr>
+              <a:t>Statement des zweiten Dings in einer Zeile.</a:t>
+            </a:r>
+          </a:p>
+        </p:txBody>
+      </p:sp>
+      <p:sp>
+        <p:nvSpPr>
+          <p:cNvPr id="15" name="TextBox 14"/>
+          <p:cNvSpPr txBox="1"/>
+          <p:nvPr/>
+        </p:nvSpPr>
+        <p:spPr>
+          <a:xfrm>
+            <a:off x="6468533" y="4297680"/>
+            <a:ext cx="2878666" cy="543560"/>
+          </a:xfrm>
+          <a:prstGeom prst="rect">
+            <a:avLst/>
+          </a:prstGeom>
+          <a:noFill/>
+        </p:spPr>
+        <p:txBody>
+          <a:bodyPr wrap="square" lIns="0" rIns="0" tIns="0" bIns="0">
+            <a:normAutofit/>
+          </a:bodyPr>
+          <a:lstStyle/>
+          <a:p>
+            <a:pPr>
+              <a:lnSpc>
+                <a:spcPts val="2080"/>
+              </a:lnSpc>
+            </a:pPr>
+            <a:r>
+              <a:rPr sz="1600" b="0" i="0" spc="-33">
+                <a:solidFill>
+                  <a:srgbClr val="1C1C1E"/>
+                </a:solidFill>
+                <a:latin typeface="Inter SemiBold"/>
+              </a:rPr>
+              <a:t>Statement des vierten Dings in einer Zeile.</a:t>
+            </a:r>
+          </a:p>
+        </p:txBody>
+      </p:sp>
+      <p:sp>
+        <p:nvSpPr>
+          <p:cNvPr id="16" name="TextBox 15"/>
+          <p:cNvSpPr txBox="1"/>
+          <p:nvPr/>
+        </p:nvSpPr>
+        <p:spPr>
+          <a:xfrm>
+            <a:off x="10040620" y="5279813"/>
+            <a:ext cx="898313" cy="177800"/>
+          </a:xfrm>
+          <a:prstGeom prst="rect">
+            <a:avLst/>
+          </a:prstGeom>
+          <a:noFill/>
+        </p:spPr>
+        <p:txBody>
+          <a:bodyPr wrap="square" lIns="0" rIns="0" tIns="0" bIns="0">
+            <a:normAutofit/>
+          </a:bodyPr>
+          <a:lstStyle/>
+          <a:p>
+            <a:pPr>
+              <a:lnSpc>
+                <a:spcPts val="1400"/>
+              </a:lnSpc>
+            </a:pPr>
+            <a:r>
+              <a:rPr sz="930" b="0" i="0">
+                <a:solidFill>
+                  <a:srgbClr val="3D3D3A"/>
+                </a:solidFill>
+                <a:latin typeface="Inter"/>
+              </a:rPr>
+              <a:t>Produktname D</a:t>
+            </a:r>
+          </a:p>
+        </p:txBody>
+      </p:sp>
+      <p:sp>
+        <p:nvSpPr>
+          <p:cNvPr id="17" name="TextBox 16"/>
+          <p:cNvSpPr txBox="1"/>
+          <p:nvPr/>
+        </p:nvSpPr>
+        <p:spPr>
+          <a:xfrm>
+            <a:off x="10048239" y="3383280"/>
+            <a:ext cx="890693" cy="177800"/>
+          </a:xfrm>
+          <a:prstGeom prst="rect">
+            <a:avLst/>
+          </a:prstGeom>
+          <a:noFill/>
+        </p:spPr>
+        <p:txBody>
+          <a:bodyPr wrap="square" lIns="0" rIns="0" tIns="0" bIns="0">
+            <a:normAutofit/>
+          </a:bodyPr>
+          <a:lstStyle/>
+          <a:p>
+            <a:pPr>
+              <a:lnSpc>
+                <a:spcPts val="1400"/>
+              </a:lnSpc>
+            </a:pPr>
+            <a:r>
+              <a:rPr sz="930" b="0" i="0">
+                <a:solidFill>
+                  <a:srgbClr val="3D3D3A"/>
+                </a:solidFill>
+                <a:latin typeface="Inter"/>
+              </a:rPr>
+              <a:t>Produktname B</a:t>
+            </a:r>
+          </a:p>
+        </p:txBody>
+      </p:sp>
+      <p:sp>
+        <p:nvSpPr>
+          <p:cNvPr id="18" name="TextBox 17"/>
+          <p:cNvSpPr txBox="1"/>
+          <p:nvPr/>
+        </p:nvSpPr>
+        <p:spPr>
+          <a:xfrm>
+            <a:off x="10634133" y="6495626"/>
+            <a:ext cx="575733" cy="176106"/>
           </a:xfrm>
           <a:prstGeom prst="rect">
             <a:avLst/>
@@ -8116,177 +8636,11 @@
           </a:bodyPr>
           <a:lstStyle/>
           <a:p>
-            <a:r>
-              <a:rPr sz="800" b="1" i="0">
-                <a:solidFill>
-                  <a:srgbClr val="1C1C1E"/>
-                </a:solidFill>
-                <a:latin typeface="Inter"/>
-              </a:rPr>
-              <a:t>Kunde Projekttitel</a:t>
-            </a:r>
-          </a:p>
-        </p:txBody>
-      </p:sp>
-      <p:sp>
-        <p:nvSpPr>
-          <p:cNvPr id="10" name="TextBox 9"/>
-          <p:cNvSpPr txBox="1"/>
-          <p:nvPr/>
-        </p:nvSpPr>
-        <p:spPr>
-          <a:xfrm>
-            <a:off x="6468533" y="2392680"/>
-            <a:ext cx="3420533" cy="562186"/>
-          </a:xfrm>
-          <a:prstGeom prst="rect">
-            <a:avLst/>
-          </a:prstGeom>
-          <a:noFill/>
-        </p:spPr>
-        <p:txBody>
-          <a:bodyPr wrap="square" lIns="0" rIns="0" tIns="0" bIns="0">
-            <a:normAutofit/>
-          </a:bodyPr>
-          <a:lstStyle/>
-          <a:p>
-            <a:r>
-              <a:rPr sz="1600" b="0" i="0">
-                <a:solidFill>
-                  <a:srgbClr val="1C1C1E"/>
-                </a:solidFill>
-                <a:latin typeface="Inter"/>
-              </a:rPr>
-              <a:t>Statement des zweiten Dings in einer Zeile.</a:t>
-            </a:r>
-          </a:p>
-        </p:txBody>
-      </p:sp>
-      <p:sp>
-        <p:nvSpPr>
-          <p:cNvPr id="11" name="TextBox 10"/>
-          <p:cNvSpPr txBox="1"/>
-          <p:nvPr/>
-        </p:nvSpPr>
-        <p:spPr>
-          <a:xfrm>
-            <a:off x="6468533" y="3366346"/>
-            <a:ext cx="4470400" cy="211666"/>
-          </a:xfrm>
-          <a:prstGeom prst="rect">
-            <a:avLst/>
-          </a:prstGeom>
-          <a:noFill/>
-        </p:spPr>
-        <p:txBody>
-          <a:bodyPr wrap="square" lIns="0" rIns="0" tIns="0" bIns="0">
-            <a:normAutofit/>
-          </a:bodyPr>
-          <a:lstStyle/>
-          <a:p>
-            <a:r>
-              <a:rPr sz="930" b="0" i="0">
-                <a:solidFill>
-                  <a:srgbClr val="3D3D3A"/>
-                </a:solidFill>
-                <a:latin typeface="Inter"/>
-              </a:rPr>
-              <a:t>Produktname B</a:t>
-            </a:r>
-          </a:p>
-        </p:txBody>
-      </p:sp>
-      <p:sp>
-        <p:nvSpPr>
-          <p:cNvPr id="12" name="TextBox 11"/>
-          <p:cNvSpPr txBox="1"/>
-          <p:nvPr/>
-        </p:nvSpPr>
-        <p:spPr>
-          <a:xfrm>
-            <a:off x="6468533" y="4289213"/>
-            <a:ext cx="3420533" cy="562186"/>
-          </a:xfrm>
-          <a:prstGeom prst="rect">
-            <a:avLst/>
-          </a:prstGeom>
-          <a:noFill/>
-        </p:spPr>
-        <p:txBody>
-          <a:bodyPr wrap="square" lIns="0" rIns="0" tIns="0" bIns="0">
-            <a:normAutofit/>
-          </a:bodyPr>
-          <a:lstStyle/>
-          <a:p>
-            <a:r>
-              <a:rPr sz="1600" b="0" i="0">
-                <a:solidFill>
-                  <a:srgbClr val="1C1C1E"/>
-                </a:solidFill>
-                <a:latin typeface="Inter"/>
-              </a:rPr>
-              <a:t>Statement des vierten Dings in einer Zeile.</a:t>
-            </a:r>
-          </a:p>
-        </p:txBody>
-      </p:sp>
-      <p:sp>
-        <p:nvSpPr>
-          <p:cNvPr id="13" name="TextBox 12"/>
-          <p:cNvSpPr txBox="1"/>
-          <p:nvPr/>
-        </p:nvSpPr>
-        <p:spPr>
-          <a:xfrm>
-            <a:off x="6468533" y="5262880"/>
-            <a:ext cx="4470400" cy="211666"/>
-          </a:xfrm>
-          <a:prstGeom prst="rect">
-            <a:avLst/>
-          </a:prstGeom>
-          <a:noFill/>
-        </p:spPr>
-        <p:txBody>
-          <a:bodyPr wrap="square" lIns="0" rIns="0" tIns="0" bIns="0">
-            <a:normAutofit/>
-          </a:bodyPr>
-          <a:lstStyle/>
-          <a:p>
-            <a:r>
-              <a:rPr sz="930" b="0" i="0">
-                <a:solidFill>
-                  <a:srgbClr val="3D3D3A"/>
-                </a:solidFill>
-                <a:latin typeface="Inter"/>
-              </a:rPr>
-              <a:t>Produktname D</a:t>
-            </a:r>
-          </a:p>
-        </p:txBody>
-      </p:sp>
-      <p:sp>
-        <p:nvSpPr>
-          <p:cNvPr id="14" name="TextBox 13"/>
-          <p:cNvSpPr txBox="1"/>
-          <p:nvPr/>
-        </p:nvSpPr>
-        <p:spPr>
-          <a:xfrm>
-            <a:off x="10634133" y="6495626"/>
-            <a:ext cx="575733" cy="176106"/>
-          </a:xfrm>
-          <a:prstGeom prst="rect">
-            <a:avLst/>
-          </a:prstGeom>
-          <a:noFill/>
-        </p:spPr>
-        <p:txBody>
-          <a:bodyPr wrap="none" lIns="0" rIns="0" tIns="0" bIns="0">
-            <a:noAutofit/>
-          </a:bodyPr>
-          <a:lstStyle/>
-          <a:p>
-            <a:pPr algn="r"/>
+            <a:pPr algn="r">
+              <a:lnSpc>
+                <a:spcPts val="1120"/>
+              </a:lnSpc>
+            </a:pPr>
             <a:r>
               <a:rPr sz="800" b="0" i="0">
                 <a:solidFill>
@@ -8325,9 +8679,137 @@
         <p:nvPr/>
       </p:nvGrpSpPr>
       <p:grpSpPr/>
+      <p:sp>
+        <p:nvSpPr>
+          <p:cNvPr id="2" name="Rounded Rectangle 1"/>
+          <p:cNvSpPr/>
+          <p:nvPr/>
+        </p:nvSpPr>
+        <p:spPr>
+          <a:xfrm>
+            <a:off x="1015999" y="2663613"/>
+            <a:ext cx="2387600" cy="2526453"/>
+          </a:xfrm>
+          <a:prstGeom prst="roundRect">
+            <a:avLst>
+              <a:gd name="adj" fmla="val 6382"/>
+            </a:avLst>
+          </a:prstGeom>
+          <a:solidFill>
+            <a:srgbClr val="E3E0E8"/>
+          </a:solidFill>
+          <a:ln>
+            <a:noFill/>
+          </a:ln>
+          <a:effectLst/>
+        </p:spPr>
+        <p:txBody>
+          <a:bodyPr rtlCol="0" anchor="ctr"/>
+          <a:lstStyle/>
+          <a:p>
+            <a:pPr algn="ctr"/>
+          </a:p>
+        </p:txBody>
+      </p:sp>
+      <p:sp>
+        <p:nvSpPr>
+          <p:cNvPr id="3" name="Rounded Rectangle 2"/>
+          <p:cNvSpPr/>
+          <p:nvPr/>
+        </p:nvSpPr>
+        <p:spPr>
+          <a:xfrm>
+            <a:off x="3606799" y="2663613"/>
+            <a:ext cx="2387600" cy="2526453"/>
+          </a:xfrm>
+          <a:prstGeom prst="roundRect">
+            <a:avLst>
+              <a:gd name="adj" fmla="val 6382"/>
+            </a:avLst>
+          </a:prstGeom>
+          <a:solidFill>
+            <a:srgbClr val="DDE4E0"/>
+          </a:solidFill>
+          <a:ln>
+            <a:noFill/>
+          </a:ln>
+          <a:effectLst/>
+        </p:spPr>
+        <p:txBody>
+          <a:bodyPr rtlCol="0" anchor="ctr"/>
+          <a:lstStyle/>
+          <a:p>
+            <a:pPr algn="ctr"/>
+          </a:p>
+        </p:txBody>
+      </p:sp>
+      <p:sp>
+        <p:nvSpPr>
+          <p:cNvPr id="4" name="Rounded Rectangle 3"/>
+          <p:cNvSpPr/>
+          <p:nvPr/>
+        </p:nvSpPr>
+        <p:spPr>
+          <a:xfrm>
+            <a:off x="6197600" y="2663613"/>
+            <a:ext cx="2387600" cy="2526453"/>
+          </a:xfrm>
+          <a:prstGeom prst="roundRect">
+            <a:avLst>
+              <a:gd name="adj" fmla="val 6382"/>
+            </a:avLst>
+          </a:prstGeom>
+          <a:solidFill>
+            <a:srgbClr val="E5E0D8"/>
+          </a:solidFill>
+          <a:ln>
+            <a:noFill/>
+          </a:ln>
+          <a:effectLst/>
+        </p:spPr>
+        <p:txBody>
+          <a:bodyPr rtlCol="0" anchor="ctr"/>
+          <a:lstStyle/>
+          <a:p>
+            <a:pPr algn="ctr"/>
+          </a:p>
+        </p:txBody>
+      </p:sp>
+      <p:sp>
+        <p:nvSpPr>
+          <p:cNvPr id="5" name="Rounded Rectangle 4"/>
+          <p:cNvSpPr/>
+          <p:nvPr/>
+        </p:nvSpPr>
+        <p:spPr>
+          <a:xfrm>
+            <a:off x="8788400" y="2663613"/>
+            <a:ext cx="2387600" cy="2526453"/>
+          </a:xfrm>
+          <a:prstGeom prst="roundRect">
+            <a:avLst>
+              <a:gd name="adj" fmla="val 6382"/>
+            </a:avLst>
+          </a:prstGeom>
+          <a:solidFill>
+            <a:srgbClr val="E8E5DF"/>
+          </a:solidFill>
+          <a:ln>
+            <a:noFill/>
+          </a:ln>
+          <a:effectLst/>
+        </p:spPr>
+        <p:txBody>
+          <a:bodyPr rtlCol="0" anchor="ctr"/>
+          <a:lstStyle/>
+          <a:p>
+            <a:pPr algn="ctr"/>
+          </a:p>
+        </p:txBody>
+      </p:sp>
       <p:pic>
         <p:nvPicPr>
-          <p:cNvPr id="2" name="Picture 1" descr="wordmark-black-crop.png"/>
+          <p:cNvPr id="6" name="Picture 5" descr="wordmark-black-crop.png"/>
           <p:cNvPicPr>
             <a:picLocks noChangeAspect="1"/>
           </p:cNvPicPr>
@@ -8351,14 +8833,14 @@
       </p:pic>
       <p:sp>
         <p:nvSpPr>
-          <p:cNvPr id="3" name="TextBox 2"/>
+          <p:cNvPr id="7" name="TextBox 6"/>
           <p:cNvSpPr txBox="1"/>
           <p:nvPr/>
         </p:nvSpPr>
         <p:spPr>
           <a:xfrm>
             <a:off x="1015999" y="389466"/>
-            <a:ext cx="4775200" cy="176106"/>
+            <a:ext cx="4775200" cy="160866"/>
           </a:xfrm>
           <a:prstGeom prst="rect">
             <a:avLst/>
@@ -8371,12 +8853,17 @@
           </a:bodyPr>
           <a:lstStyle/>
           <a:p>
-            <a:r>
-              <a:rPr sz="800" b="0" i="0">
+            <a:pPr>
+              <a:lnSpc>
+                <a:spcPts val="1120"/>
+              </a:lnSpc>
+            </a:pPr>
+            <a:r>
+              <a:rPr sz="800" b="0" i="0" spc="80">
                 <a:solidFill>
                   <a:srgbClr val="6B6B65"/>
                 </a:solidFill>
-                <a:latin typeface="Inter"/>
+                <a:latin typeface="Inter SemiBold"/>
               </a:rPr>
               <a:t>01 / KAPITEL</a:t>
             </a:r>
@@ -8385,14 +8872,14 @@
       </p:sp>
       <p:sp>
         <p:nvSpPr>
-          <p:cNvPr id="4" name="TextBox 3"/>
-          <p:cNvSpPr txBox="1"/>
-          <p:nvPr/>
-        </p:nvSpPr>
-        <p:spPr>
-          <a:xfrm>
-            <a:off x="1015999" y="795866"/>
-            <a:ext cx="8500533" cy="968586"/>
+          <p:cNvPr id="8" name="TextBox 7"/>
+          <p:cNvSpPr txBox="1"/>
+          <p:nvPr/>
+        </p:nvSpPr>
+        <p:spPr>
+          <a:xfrm>
+            <a:off x="1015999" y="778933"/>
+            <a:ext cx="4925060" cy="1000760"/>
           </a:xfrm>
           <a:prstGeom prst="rect">
             <a:avLst/>
@@ -8405,12 +8892,17 @@
           </a:bodyPr>
           <a:lstStyle/>
           <a:p>
-            <a:r>
-              <a:rPr sz="3200" b="1" i="0">
+            <a:pPr>
+              <a:lnSpc>
+                <a:spcPts val="3679"/>
+              </a:lnSpc>
+            </a:pPr>
+            <a:r>
+              <a:rPr sz="3200" b="0" i="0" spc="-80">
                 <a:solidFill>
                   <a:srgbClr val="1C1C1E"/>
                 </a:solidFill>
-                <a:latin typeface="Inter"/>
+                <a:latin typeface="Inter SemiBold"/>
               </a:rPr>
               <a:t>Vier Punkte, die jetzt aktiv gesteuert werden müssen</a:t>
             </a:r>
@@ -8419,14 +8911,14 @@
       </p:sp>
       <p:sp>
         <p:nvSpPr>
-          <p:cNvPr id="5" name="TextBox 4"/>
-          <p:cNvSpPr txBox="1"/>
-          <p:nvPr/>
-        </p:nvSpPr>
-        <p:spPr>
-          <a:xfrm>
-            <a:off x="1015999" y="5511800"/>
-            <a:ext cx="10193866" cy="176106"/>
+          <p:cNvPr id="9" name="TextBox 8"/>
+          <p:cNvSpPr txBox="1"/>
+          <p:nvPr/>
+        </p:nvSpPr>
+        <p:spPr>
+          <a:xfrm>
+            <a:off x="1219200" y="2816013"/>
+            <a:ext cx="231140" cy="685800"/>
           </a:xfrm>
           <a:prstGeom prst="rect">
             <a:avLst/>
@@ -8439,29 +8931,33 @@
           </a:bodyPr>
           <a:lstStyle/>
           <a:p>
-            <a:pPr algn="r"/>
-            <a:r>
-              <a:rPr sz="800" b="0" i="0">
-                <a:solidFill>
-                  <a:srgbClr val="6B6B65"/>
-                </a:solidFill>
-                <a:latin typeface="Inter"/>
-              </a:rPr>
-              <a:t>Quellen: … in einem Satz</a:t>
-            </a:r>
-          </a:p>
-        </p:txBody>
-      </p:sp>
-      <p:sp>
-        <p:nvSpPr>
-          <p:cNvPr id="6" name="TextBox 5"/>
-          <p:cNvSpPr txBox="1"/>
-          <p:nvPr/>
-        </p:nvSpPr>
-        <p:spPr>
-          <a:xfrm>
-            <a:off x="1219200" y="2849880"/>
-            <a:ext cx="2015066" cy="629920"/>
+            <a:pPr>
+              <a:lnSpc>
+                <a:spcPts val="4690"/>
+              </a:lnSpc>
+            </a:pPr>
+            <a:r>
+              <a:rPr sz="4270" b="0" i="0" spc="-128">
+                <a:solidFill>
+                  <a:srgbClr val="4A2D6B"/>
+                </a:solidFill>
+                <a:latin typeface="Inter Light"/>
+              </a:rPr>
+              <a:t>1</a:t>
+            </a:r>
+          </a:p>
+        </p:txBody>
+      </p:sp>
+      <p:sp>
+        <p:nvSpPr>
+          <p:cNvPr id="10" name="TextBox 9"/>
+          <p:cNvSpPr txBox="1"/>
+          <p:nvPr/>
+        </p:nvSpPr>
+        <p:spPr>
+          <a:xfrm>
+            <a:off x="1219200" y="3598333"/>
+            <a:ext cx="1983740" cy="1210733"/>
           </a:xfrm>
           <a:prstGeom prst="rect">
             <a:avLst/>
@@ -8474,28 +8970,110 @@
           </a:bodyPr>
           <a:lstStyle/>
           <a:p>
-            <a:r>
-              <a:rPr sz="4270" b="0" i="0">
-                <a:solidFill>
-                  <a:srgbClr val="4A2D6B"/>
+            <a:pPr>
+              <a:lnSpc>
+                <a:spcPts val="1870"/>
+              </a:lnSpc>
+            </a:pPr>
+            <a:r>
+              <a:rPr sz="1330" b="0" i="0" spc="-20">
+                <a:solidFill>
+                  <a:srgbClr val="1C1C1E"/>
+                </a:solidFill>
+                <a:latin typeface="Inter SemiBold"/>
+              </a:rPr>
+              <a:t>Erster Punkt als ganzer Satz</a:t>
+            </a:r>
+          </a:p>
+          <a:p>
+            <a:pPr>
+              <a:lnSpc>
+                <a:spcPts val="1400"/>
+              </a:lnSpc>
+              <a:spcBef>
+                <a:spcPts val="1070"/>
+              </a:spcBef>
+            </a:pPr>
+            <a:r>
+              <a:rPr sz="930" b="0" i="0">
+                <a:solidFill>
+                  <a:srgbClr val="3D3D3A"/>
                 </a:solidFill>
                 <a:latin typeface="Inter"/>
               </a:rPr>
-              <a:t>1</a:t>
-            </a:r>
-          </a:p>
-        </p:txBody>
-      </p:sp>
-      <p:sp>
-        <p:nvSpPr>
-          <p:cNvPr id="7" name="TextBox 6"/>
-          <p:cNvSpPr txBox="1"/>
-          <p:nvPr/>
-        </p:nvSpPr>
-        <p:spPr>
-          <a:xfrm>
-            <a:off x="1219200" y="3581399"/>
-            <a:ext cx="2015066" cy="1244600"/>
+              <a:t>Zwei bis drei Sätze, die den Punkt tragen und belegen.</a:t>
+            </a:r>
+          </a:p>
+          <a:p>
+            <a:pPr>
+              <a:lnSpc>
+                <a:spcPts val="1400"/>
+              </a:lnSpc>
+              <a:spcBef>
+                <a:spcPts val="1070"/>
+              </a:spcBef>
+            </a:pPr>
+            <a:r>
+              <a:rPr sz="930" b="0" i="0">
+                <a:solidFill>
+                  <a:srgbClr val="6B6B65"/>
+                </a:solidFill>
+                <a:latin typeface="Inter"/>
+              </a:rPr>
+              <a:t>Indikator oder Beleg in einem Satz.</a:t>
+            </a:r>
+          </a:p>
+        </p:txBody>
+      </p:sp>
+      <p:sp>
+        <p:nvSpPr>
+          <p:cNvPr id="11" name="TextBox 10"/>
+          <p:cNvSpPr txBox="1"/>
+          <p:nvPr/>
+        </p:nvSpPr>
+        <p:spPr>
+          <a:xfrm>
+            <a:off x="2003213" y="6466839"/>
+            <a:ext cx="3928533" cy="160866"/>
+          </a:xfrm>
+          <a:prstGeom prst="rect">
+            <a:avLst/>
+          </a:prstGeom>
+          <a:noFill/>
+        </p:spPr>
+        <p:txBody>
+          <a:bodyPr wrap="none" lIns="0" rIns="0" tIns="0" bIns="0">
+            <a:noAutofit/>
+          </a:bodyPr>
+          <a:lstStyle/>
+          <a:p>
+            <a:pPr>
+              <a:lnSpc>
+                <a:spcPts val="1120"/>
+              </a:lnSpc>
+            </a:pPr>
+            <a:r>
+              <a:rPr sz="800" b="0" i="0">
+                <a:solidFill>
+                  <a:srgbClr val="1C1C1E"/>
+                </a:solidFill>
+                <a:latin typeface="Inter SemiBold"/>
+              </a:rPr>
+              <a:t>Kunde Projekttitel</a:t>
+            </a:r>
+          </a:p>
+        </p:txBody>
+      </p:sp>
+      <p:sp>
+        <p:nvSpPr>
+          <p:cNvPr id="12" name="TextBox 11"/>
+          <p:cNvSpPr txBox="1"/>
+          <p:nvPr/>
+        </p:nvSpPr>
+        <p:spPr>
+          <a:xfrm>
+            <a:off x="3809999" y="2816013"/>
+            <a:ext cx="350519" cy="685800"/>
           </a:xfrm>
           <a:prstGeom prst="rect">
             <a:avLst/>
@@ -8508,60 +9086,343 @@
           </a:bodyPr>
           <a:lstStyle/>
           <a:p>
-            <a:r>
-              <a:rPr sz="1330" b="0" i="0">
+            <a:pPr>
+              <a:lnSpc>
+                <a:spcPts val="4690"/>
+              </a:lnSpc>
+            </a:pPr>
+            <a:r>
+              <a:rPr sz="4270" b="0" i="0" spc="-128">
+                <a:solidFill>
+                  <a:srgbClr val="1D6B66"/>
+                </a:solidFill>
+                <a:latin typeface="Inter Light"/>
+              </a:rPr>
+              <a:t>2</a:t>
+            </a:r>
+          </a:p>
+        </p:txBody>
+      </p:sp>
+      <p:sp>
+        <p:nvSpPr>
+          <p:cNvPr id="13" name="TextBox 12"/>
+          <p:cNvSpPr txBox="1"/>
+          <p:nvPr/>
+        </p:nvSpPr>
+        <p:spPr>
+          <a:xfrm>
+            <a:off x="3809999" y="3598333"/>
+            <a:ext cx="1724659" cy="1388533"/>
+          </a:xfrm>
+          <a:prstGeom prst="rect">
+            <a:avLst/>
+          </a:prstGeom>
+          <a:noFill/>
+        </p:spPr>
+        <p:txBody>
+          <a:bodyPr wrap="square" lIns="0" rIns="0" tIns="0" bIns="0">
+            <a:normAutofit/>
+          </a:bodyPr>
+          <a:lstStyle/>
+          <a:p>
+            <a:pPr>
+              <a:lnSpc>
+                <a:spcPts val="1870"/>
+              </a:lnSpc>
+            </a:pPr>
+            <a:r>
+              <a:rPr sz="1330" b="0" i="0" spc="-20">
                 <a:solidFill>
                   <a:srgbClr val="1C1C1E"/>
                 </a:solidFill>
+                <a:latin typeface="Inter SemiBold"/>
+              </a:rPr>
+              <a:t>Zweiter Punkt als ganzer Satz</a:t>
+            </a:r>
+          </a:p>
+          <a:p>
+            <a:pPr>
+              <a:lnSpc>
+                <a:spcPts val="1400"/>
+              </a:lnSpc>
+              <a:spcBef>
+                <a:spcPts val="1070"/>
+              </a:spcBef>
+            </a:pPr>
+            <a:r>
+              <a:rPr sz="930" b="0" i="0">
+                <a:solidFill>
+                  <a:srgbClr val="3D3D3A"/>
+                </a:solidFill>
                 <a:latin typeface="Inter"/>
               </a:rPr>
-              <a:t>Erster Punkt als ganzer Satz</a:t>
-            </a:r>
-          </a:p>
-          <a:p>
-            <a:pPr>
+              <a:t>Zwei bis drei Sätze, die den Punkt tragen.</a:t>
+            </a:r>
+          </a:p>
+          <a:p>
+            <a:pPr>
+              <a:lnSpc>
+                <a:spcPts val="1400"/>
+              </a:lnSpc>
               <a:spcBef>
-                <a:spcPts val="800"/>
+                <a:spcPts val="1070"/>
               </a:spcBef>
             </a:pPr>
             <a:r>
+              <a:rPr sz="930" b="0" i="1">
+                <a:solidFill>
+                  <a:srgbClr val="3D3D3A"/>
+                </a:solidFill>
+                <a:latin typeface="Inter"/>
+              </a:rPr>
+              <a:t>„Wörtliches Zitat als Beleg." — Rolle, Kontext</a:t>
+            </a:r>
+          </a:p>
+        </p:txBody>
+      </p:sp>
+      <p:sp>
+        <p:nvSpPr>
+          <p:cNvPr id="14" name="TextBox 13"/>
+          <p:cNvSpPr txBox="1"/>
+          <p:nvPr/>
+        </p:nvSpPr>
+        <p:spPr>
+          <a:xfrm>
+            <a:off x="6400800" y="2816013"/>
+            <a:ext cx="346286" cy="685800"/>
+          </a:xfrm>
+          <a:prstGeom prst="rect">
+            <a:avLst/>
+          </a:prstGeom>
+          <a:noFill/>
+        </p:spPr>
+        <p:txBody>
+          <a:bodyPr wrap="square" lIns="0" rIns="0" tIns="0" bIns="0">
+            <a:normAutofit/>
+          </a:bodyPr>
+          <a:lstStyle/>
+          <a:p>
+            <a:pPr>
+              <a:lnSpc>
+                <a:spcPts val="4690"/>
+              </a:lnSpc>
+            </a:pPr>
+            <a:r>
+              <a:rPr sz="4270" b="0" i="0" spc="-128">
+                <a:solidFill>
+                  <a:srgbClr val="1C1C1E"/>
+                </a:solidFill>
+                <a:latin typeface="Inter Light"/>
+              </a:rPr>
+              <a:t>3</a:t>
+            </a:r>
+          </a:p>
+        </p:txBody>
+      </p:sp>
+      <p:sp>
+        <p:nvSpPr>
+          <p:cNvPr id="15" name="TextBox 14"/>
+          <p:cNvSpPr txBox="1"/>
+          <p:nvPr/>
+        </p:nvSpPr>
+        <p:spPr>
+          <a:xfrm>
+            <a:off x="6400800" y="3598333"/>
+            <a:ext cx="1574800" cy="931333"/>
+          </a:xfrm>
+          <a:prstGeom prst="rect">
+            <a:avLst/>
+          </a:prstGeom>
+          <a:noFill/>
+        </p:spPr>
+        <p:txBody>
+          <a:bodyPr wrap="square" lIns="0" rIns="0" tIns="0" bIns="0">
+            <a:normAutofit/>
+          </a:bodyPr>
+          <a:lstStyle/>
+          <a:p>
+            <a:pPr>
+              <a:lnSpc>
+                <a:spcPts val="1870"/>
+              </a:lnSpc>
+            </a:pPr>
+            <a:r>
+              <a:rPr sz="1330" b="0" i="0" spc="-20">
+                <a:solidFill>
+                  <a:srgbClr val="1C1C1E"/>
+                </a:solidFill>
+                <a:latin typeface="Inter SemiBold"/>
+              </a:rPr>
+              <a:t>Dritter Punkt als ganzer Satz</a:t>
+            </a:r>
+          </a:p>
+          <a:p>
+            <a:pPr>
+              <a:lnSpc>
+                <a:spcPts val="1400"/>
+              </a:lnSpc>
+              <a:spcBef>
+                <a:spcPts val="1070"/>
+              </a:spcBef>
+            </a:pPr>
+            <a:r>
               <a:rPr sz="930" b="0" i="0">
                 <a:solidFill>
                   <a:srgbClr val="3D3D3A"/>
                 </a:solidFill>
                 <a:latin typeface="Inter"/>
               </a:rPr>
-              <a:t>Zwei bis drei Sätze, die den Punkt tragen und belegen.</a:t>
-            </a:r>
-          </a:p>
-          <a:p>
-            <a:pPr>
+              <a:t>Zwei bis drei Sätze, die den Punkt tragen.</a:t>
+            </a:r>
+          </a:p>
+        </p:txBody>
+      </p:sp>
+      <p:sp>
+        <p:nvSpPr>
+          <p:cNvPr id="16" name="TextBox 15"/>
+          <p:cNvSpPr txBox="1"/>
+          <p:nvPr/>
+        </p:nvSpPr>
+        <p:spPr>
+          <a:xfrm>
+            <a:off x="8991600" y="2816013"/>
+            <a:ext cx="358139" cy="685800"/>
+          </a:xfrm>
+          <a:prstGeom prst="rect">
+            <a:avLst/>
+          </a:prstGeom>
+          <a:noFill/>
+        </p:spPr>
+        <p:txBody>
+          <a:bodyPr wrap="square" lIns="0" rIns="0" tIns="0" bIns="0">
+            <a:normAutofit/>
+          </a:bodyPr>
+          <a:lstStyle/>
+          <a:p>
+            <a:pPr>
+              <a:lnSpc>
+                <a:spcPts val="4690"/>
+              </a:lnSpc>
+            </a:pPr>
+            <a:r>
+              <a:rPr sz="4270" b="0" i="0" spc="-128">
+                <a:solidFill>
+                  <a:srgbClr val="1C1C1E"/>
+                </a:solidFill>
+                <a:latin typeface="Inter Light"/>
+              </a:rPr>
+              <a:t>4</a:t>
+            </a:r>
+          </a:p>
+        </p:txBody>
+      </p:sp>
+      <p:sp>
+        <p:nvSpPr>
+          <p:cNvPr id="17" name="TextBox 16"/>
+          <p:cNvSpPr txBox="1"/>
+          <p:nvPr/>
+        </p:nvSpPr>
+        <p:spPr>
+          <a:xfrm>
+            <a:off x="8991600" y="3598333"/>
+            <a:ext cx="1574800" cy="931333"/>
+          </a:xfrm>
+          <a:prstGeom prst="rect">
+            <a:avLst/>
+          </a:prstGeom>
+          <a:noFill/>
+        </p:spPr>
+        <p:txBody>
+          <a:bodyPr wrap="square" lIns="0" rIns="0" tIns="0" bIns="0">
+            <a:normAutofit/>
+          </a:bodyPr>
+          <a:lstStyle/>
+          <a:p>
+            <a:pPr>
+              <a:lnSpc>
+                <a:spcPts val="1870"/>
+              </a:lnSpc>
+            </a:pPr>
+            <a:r>
+              <a:rPr sz="1330" b="0" i="0" spc="-20">
+                <a:solidFill>
+                  <a:srgbClr val="1C1C1E"/>
+                </a:solidFill>
+                <a:latin typeface="Inter SemiBold"/>
+              </a:rPr>
+              <a:t>Vierter Punkt als ganzer Satz</a:t>
+            </a:r>
+          </a:p>
+          <a:p>
+            <a:pPr>
+              <a:lnSpc>
+                <a:spcPts val="1400"/>
+              </a:lnSpc>
               <a:spcBef>
-                <a:spcPts val="800"/>
+                <a:spcPts val="1070"/>
               </a:spcBef>
             </a:pPr>
             <a:r>
               <a:rPr sz="930" b="0" i="0">
                 <a:solidFill>
+                  <a:srgbClr val="3D3D3A"/>
+                </a:solidFill>
+                <a:latin typeface="Inter"/>
+              </a:rPr>
+              <a:t>Zwei bis drei Sätze, die den Punkt tragen.</a:t>
+            </a:r>
+          </a:p>
+        </p:txBody>
+      </p:sp>
+      <p:sp>
+        <p:nvSpPr>
+          <p:cNvPr id="18" name="TextBox 17"/>
+          <p:cNvSpPr txBox="1"/>
+          <p:nvPr/>
+        </p:nvSpPr>
+        <p:spPr>
+          <a:xfrm>
+            <a:off x="9990666" y="5511800"/>
+            <a:ext cx="1219200" cy="160866"/>
+          </a:xfrm>
+          <a:prstGeom prst="rect">
+            <a:avLst/>
+          </a:prstGeom>
+          <a:noFill/>
+        </p:spPr>
+        <p:txBody>
+          <a:bodyPr wrap="square" lIns="0" rIns="0" tIns="0" bIns="0">
+            <a:normAutofit/>
+          </a:bodyPr>
+          <a:lstStyle/>
+          <a:p>
+            <a:pPr algn="r">
+              <a:lnSpc>
+                <a:spcPts val="1120"/>
+              </a:lnSpc>
+            </a:pPr>
+            <a:r>
+              <a:rPr sz="800" b="0" i="0">
+                <a:solidFill>
                   <a:srgbClr val="6B6B65"/>
                 </a:solidFill>
                 <a:latin typeface="Inter"/>
               </a:rPr>
-              <a:t>Indikator oder Beleg in einem Satz.</a:t>
-            </a:r>
-          </a:p>
-        </p:txBody>
-      </p:sp>
-      <p:sp>
-        <p:nvSpPr>
-          <p:cNvPr id="8" name="TextBox 7"/>
-          <p:cNvSpPr txBox="1"/>
-          <p:nvPr/>
-        </p:nvSpPr>
-        <p:spPr>
-          <a:xfrm>
-            <a:off x="2003213" y="6466839"/>
-            <a:ext cx="3928533" cy="176106"/>
+              <a:t>Quellen: … in einem Satz</a:t>
+            </a:r>
+          </a:p>
+        </p:txBody>
+      </p:sp>
+      <p:sp>
+        <p:nvSpPr>
+          <p:cNvPr id="19" name="TextBox 18"/>
+          <p:cNvSpPr txBox="1"/>
+          <p:nvPr/>
+        </p:nvSpPr>
+        <p:spPr>
+          <a:xfrm>
+            <a:off x="10634133" y="6495626"/>
+            <a:ext cx="575733" cy="176106"/>
           </a:xfrm>
           <a:prstGeom prst="rect">
             <a:avLst/>
@@ -8574,309 +9435,11 @@
           </a:bodyPr>
           <a:lstStyle/>
           <a:p>
-            <a:r>
-              <a:rPr sz="800" b="1" i="0">
-                <a:solidFill>
-                  <a:srgbClr val="1C1C1E"/>
-                </a:solidFill>
-                <a:latin typeface="Inter"/>
-              </a:rPr>
-              <a:t>Kunde Projekttitel</a:t>
-            </a:r>
-          </a:p>
-        </p:txBody>
-      </p:sp>
-      <p:sp>
-        <p:nvSpPr>
-          <p:cNvPr id="9" name="TextBox 8"/>
-          <p:cNvSpPr txBox="1"/>
-          <p:nvPr/>
-        </p:nvSpPr>
-        <p:spPr>
-          <a:xfrm>
-            <a:off x="3809999" y="2849880"/>
-            <a:ext cx="2015066" cy="629920"/>
-          </a:xfrm>
-          <a:prstGeom prst="rect">
-            <a:avLst/>
-          </a:prstGeom>
-          <a:noFill/>
-        </p:spPr>
-        <p:txBody>
-          <a:bodyPr wrap="square" lIns="0" rIns="0" tIns="0" bIns="0">
-            <a:normAutofit/>
-          </a:bodyPr>
-          <a:lstStyle/>
-          <a:p>
-            <a:r>
-              <a:rPr sz="4270" b="0" i="0">
-                <a:solidFill>
-                  <a:srgbClr val="1D6B66"/>
-                </a:solidFill>
-                <a:latin typeface="Inter"/>
-              </a:rPr>
-              <a:t>2</a:t>
-            </a:r>
-          </a:p>
-        </p:txBody>
-      </p:sp>
-      <p:sp>
-        <p:nvSpPr>
-          <p:cNvPr id="10" name="TextBox 9"/>
-          <p:cNvSpPr txBox="1"/>
-          <p:nvPr/>
-        </p:nvSpPr>
-        <p:spPr>
-          <a:xfrm>
-            <a:off x="3809999" y="3581399"/>
-            <a:ext cx="2015066" cy="1422400"/>
-          </a:xfrm>
-          <a:prstGeom prst="rect">
-            <a:avLst/>
-          </a:prstGeom>
-          <a:noFill/>
-        </p:spPr>
-        <p:txBody>
-          <a:bodyPr wrap="square" lIns="0" rIns="0" tIns="0" bIns="0">
-            <a:normAutofit/>
-          </a:bodyPr>
-          <a:lstStyle/>
-          <a:p>
-            <a:r>
-              <a:rPr sz="1330" b="0" i="0">
-                <a:solidFill>
-                  <a:srgbClr val="1C1C1E"/>
-                </a:solidFill>
-                <a:latin typeface="Inter"/>
-              </a:rPr>
-              <a:t>Zweiter Punkt als ganzer Satz</a:t>
-            </a:r>
-          </a:p>
-          <a:p>
-            <a:pPr>
-              <a:spcBef>
-                <a:spcPts val="800"/>
-              </a:spcBef>
-            </a:pPr>
-            <a:r>
-              <a:rPr sz="930" b="0" i="0">
-                <a:solidFill>
-                  <a:srgbClr val="3D3D3A"/>
-                </a:solidFill>
-                <a:latin typeface="Inter"/>
-              </a:rPr>
-              <a:t>Zwei bis drei Sätze, die den Punkt tragen.</a:t>
-            </a:r>
-          </a:p>
-          <a:p>
-            <a:pPr>
-              <a:spcBef>
-                <a:spcPts val="800"/>
-              </a:spcBef>
-            </a:pPr>
-            <a:r>
-              <a:rPr sz="930" b="0" i="1">
-                <a:solidFill>
-                  <a:srgbClr val="3D3D3A"/>
-                </a:solidFill>
-                <a:latin typeface="Inter"/>
-              </a:rPr>
-              <a:t>„Wörtliches Zitat als Beleg." — Rolle, Kontext</a:t>
-            </a:r>
-          </a:p>
-        </p:txBody>
-      </p:sp>
-      <p:sp>
-        <p:nvSpPr>
-          <p:cNvPr id="11" name="TextBox 10"/>
-          <p:cNvSpPr txBox="1"/>
-          <p:nvPr/>
-        </p:nvSpPr>
-        <p:spPr>
-          <a:xfrm>
-            <a:off x="6400800" y="2849880"/>
-            <a:ext cx="2015066" cy="629920"/>
-          </a:xfrm>
-          <a:prstGeom prst="rect">
-            <a:avLst/>
-          </a:prstGeom>
-          <a:noFill/>
-        </p:spPr>
-        <p:txBody>
-          <a:bodyPr wrap="square" lIns="0" rIns="0" tIns="0" bIns="0">
-            <a:normAutofit/>
-          </a:bodyPr>
-          <a:lstStyle/>
-          <a:p>
-            <a:r>
-              <a:rPr sz="4270" b="0" i="0">
-                <a:solidFill>
-                  <a:srgbClr val="1C1C1E"/>
-                </a:solidFill>
-                <a:latin typeface="Inter"/>
-              </a:rPr>
-              <a:t>3</a:t>
-            </a:r>
-          </a:p>
-        </p:txBody>
-      </p:sp>
-      <p:sp>
-        <p:nvSpPr>
-          <p:cNvPr id="12" name="TextBox 11"/>
-          <p:cNvSpPr txBox="1"/>
-          <p:nvPr/>
-        </p:nvSpPr>
-        <p:spPr>
-          <a:xfrm>
-            <a:off x="6400800" y="3581399"/>
-            <a:ext cx="2015066" cy="965199"/>
-          </a:xfrm>
-          <a:prstGeom prst="rect">
-            <a:avLst/>
-          </a:prstGeom>
-          <a:noFill/>
-        </p:spPr>
-        <p:txBody>
-          <a:bodyPr wrap="square" lIns="0" rIns="0" tIns="0" bIns="0">
-            <a:normAutofit/>
-          </a:bodyPr>
-          <a:lstStyle/>
-          <a:p>
-            <a:r>
-              <a:rPr sz="1330" b="0" i="0">
-                <a:solidFill>
-                  <a:srgbClr val="1C1C1E"/>
-                </a:solidFill>
-                <a:latin typeface="Inter"/>
-              </a:rPr>
-              <a:t>Dritter Punkt als ganzer Satz</a:t>
-            </a:r>
-          </a:p>
-          <a:p>
-            <a:pPr>
-              <a:spcBef>
-                <a:spcPts val="800"/>
-              </a:spcBef>
-            </a:pPr>
-            <a:r>
-              <a:rPr sz="930" b="0" i="0">
-                <a:solidFill>
-                  <a:srgbClr val="3D3D3A"/>
-                </a:solidFill>
-                <a:latin typeface="Inter"/>
-              </a:rPr>
-              <a:t>Zwei bis drei Sätze, die den Punkt tragen.</a:t>
-            </a:r>
-          </a:p>
-        </p:txBody>
-      </p:sp>
-      <p:sp>
-        <p:nvSpPr>
-          <p:cNvPr id="13" name="TextBox 12"/>
-          <p:cNvSpPr txBox="1"/>
-          <p:nvPr/>
-        </p:nvSpPr>
-        <p:spPr>
-          <a:xfrm>
-            <a:off x="8991600" y="2849880"/>
-            <a:ext cx="2015066" cy="629920"/>
-          </a:xfrm>
-          <a:prstGeom prst="rect">
-            <a:avLst/>
-          </a:prstGeom>
-          <a:noFill/>
-        </p:spPr>
-        <p:txBody>
-          <a:bodyPr wrap="square" lIns="0" rIns="0" tIns="0" bIns="0">
-            <a:normAutofit/>
-          </a:bodyPr>
-          <a:lstStyle/>
-          <a:p>
-            <a:r>
-              <a:rPr sz="4270" b="0" i="0">
-                <a:solidFill>
-                  <a:srgbClr val="1C1C1E"/>
-                </a:solidFill>
-                <a:latin typeface="Inter"/>
-              </a:rPr>
-              <a:t>4</a:t>
-            </a:r>
-          </a:p>
-        </p:txBody>
-      </p:sp>
-      <p:sp>
-        <p:nvSpPr>
-          <p:cNvPr id="14" name="TextBox 13"/>
-          <p:cNvSpPr txBox="1"/>
-          <p:nvPr/>
-        </p:nvSpPr>
-        <p:spPr>
-          <a:xfrm>
-            <a:off x="8991600" y="3581399"/>
-            <a:ext cx="2015066" cy="965199"/>
-          </a:xfrm>
-          <a:prstGeom prst="rect">
-            <a:avLst/>
-          </a:prstGeom>
-          <a:noFill/>
-        </p:spPr>
-        <p:txBody>
-          <a:bodyPr wrap="square" lIns="0" rIns="0" tIns="0" bIns="0">
-            <a:normAutofit/>
-          </a:bodyPr>
-          <a:lstStyle/>
-          <a:p>
-            <a:r>
-              <a:rPr sz="1330" b="0" i="0">
-                <a:solidFill>
-                  <a:srgbClr val="1C1C1E"/>
-                </a:solidFill>
-                <a:latin typeface="Inter"/>
-              </a:rPr>
-              <a:t>Vierter Punkt als ganzer Satz</a:t>
-            </a:r>
-          </a:p>
-          <a:p>
-            <a:pPr>
-              <a:spcBef>
-                <a:spcPts val="800"/>
-              </a:spcBef>
-            </a:pPr>
-            <a:r>
-              <a:rPr sz="930" b="0" i="0">
-                <a:solidFill>
-                  <a:srgbClr val="3D3D3A"/>
-                </a:solidFill>
-                <a:latin typeface="Inter"/>
-              </a:rPr>
-              <a:t>Zwei bis drei Sätze, die den Punkt tragen.</a:t>
-            </a:r>
-          </a:p>
-        </p:txBody>
-      </p:sp>
-      <p:sp>
-        <p:nvSpPr>
-          <p:cNvPr id="15" name="TextBox 14"/>
-          <p:cNvSpPr txBox="1"/>
-          <p:nvPr/>
-        </p:nvSpPr>
-        <p:spPr>
-          <a:xfrm>
-            <a:off x="10634133" y="6495626"/>
-            <a:ext cx="575733" cy="176106"/>
-          </a:xfrm>
-          <a:prstGeom prst="rect">
-            <a:avLst/>
-          </a:prstGeom>
-          <a:noFill/>
-        </p:spPr>
-        <p:txBody>
-          <a:bodyPr wrap="none" lIns="0" rIns="0" tIns="0" bIns="0">
-            <a:noAutofit/>
-          </a:bodyPr>
-          <a:lstStyle/>
-          <a:p>
-            <a:pPr algn="r"/>
+            <a:pPr algn="r">
+              <a:lnSpc>
+                <a:spcPts val="1120"/>
+              </a:lnSpc>
+            </a:pPr>
             <a:r>
               <a:rPr sz="800" b="0" i="0">
                 <a:solidFill>
@@ -8937,20 +9500,6 @@
           </a:ln>
           <a:effectLst/>
         </p:spPr>
-        <p:style>
-          <a:lnRef idx="1">
-            <a:schemeClr val="accent1"/>
-          </a:lnRef>
-          <a:fillRef idx="3">
-            <a:schemeClr val="accent1"/>
-          </a:fillRef>
-          <a:effectRef idx="2">
-            <a:schemeClr val="accent1"/>
-          </a:effectRef>
-          <a:fontRef idx="minor">
-            <a:schemeClr val="lt1"/>
-          </a:fontRef>
-        </p:style>
         <p:txBody>
           <a:bodyPr rtlCol="0" anchor="ctr"/>
           <a:lstStyle/>
@@ -8981,20 +9530,6 @@
           </a:ln>
           <a:effectLst/>
         </p:spPr>
-        <p:style>
-          <a:lnRef idx="1">
-            <a:schemeClr val="accent1"/>
-          </a:lnRef>
-          <a:fillRef idx="3">
-            <a:schemeClr val="accent1"/>
-          </a:fillRef>
-          <a:effectRef idx="2">
-            <a:schemeClr val="accent1"/>
-          </a:effectRef>
-          <a:fontRef idx="minor">
-            <a:schemeClr val="lt1"/>
-          </a:fontRef>
-        </p:style>
         <p:txBody>
           <a:bodyPr rtlCol="0" anchor="ctr"/>
           <a:lstStyle/>
@@ -9025,20 +9560,6 @@
           </a:ln>
           <a:effectLst/>
         </p:spPr>
-        <p:style>
-          <a:lnRef idx="1">
-            <a:schemeClr val="accent1"/>
-          </a:lnRef>
-          <a:fillRef idx="3">
-            <a:schemeClr val="accent1"/>
-          </a:fillRef>
-          <a:effectRef idx="2">
-            <a:schemeClr val="accent1"/>
-          </a:effectRef>
-          <a:fontRef idx="minor">
-            <a:schemeClr val="lt1"/>
-          </a:fontRef>
-        </p:style>
         <p:txBody>
           <a:bodyPr rtlCol="0" anchor="ctr"/>
           <a:lstStyle/>
@@ -9069,20 +9590,6 @@
           </a:ln>
           <a:effectLst/>
         </p:spPr>
-        <p:style>
-          <a:lnRef idx="1">
-            <a:schemeClr val="accent1"/>
-          </a:lnRef>
-          <a:fillRef idx="3">
-            <a:schemeClr val="accent1"/>
-          </a:fillRef>
-          <a:effectRef idx="2">
-            <a:schemeClr val="accent1"/>
-          </a:effectRef>
-          <a:fontRef idx="minor">
-            <a:schemeClr val="lt1"/>
-          </a:fontRef>
-        </p:style>
         <p:txBody>
           <a:bodyPr rtlCol="0" anchor="ctr"/>
           <a:lstStyle/>
@@ -9113,20 +9620,6 @@
           </a:ln>
           <a:effectLst/>
         </p:spPr>
-        <p:style>
-          <a:lnRef idx="1">
-            <a:schemeClr val="accent1"/>
-          </a:lnRef>
-          <a:fillRef idx="3">
-            <a:schemeClr val="accent1"/>
-          </a:fillRef>
-          <a:effectRef idx="2">
-            <a:schemeClr val="accent1"/>
-          </a:effectRef>
-          <a:fontRef idx="minor">
-            <a:schemeClr val="lt1"/>
-          </a:fontRef>
-        </p:style>
         <p:txBody>
           <a:bodyPr rtlCol="0" anchor="ctr"/>
           <a:lstStyle/>
@@ -9157,20 +9650,6 @@
           </a:ln>
           <a:effectLst/>
         </p:spPr>
-        <p:style>
-          <a:lnRef idx="1">
-            <a:schemeClr val="accent1"/>
-          </a:lnRef>
-          <a:fillRef idx="3">
-            <a:schemeClr val="accent1"/>
-          </a:fillRef>
-          <a:effectRef idx="2">
-            <a:schemeClr val="accent1"/>
-          </a:effectRef>
-          <a:fontRef idx="minor">
-            <a:schemeClr val="lt1"/>
-          </a:fontRef>
-        </p:style>
         <p:txBody>
           <a:bodyPr rtlCol="0" anchor="ctr"/>
           <a:lstStyle/>
@@ -9201,20 +9680,6 @@
           </a:ln>
           <a:effectLst/>
         </p:spPr>
-        <p:style>
-          <a:lnRef idx="1">
-            <a:schemeClr val="accent1"/>
-          </a:lnRef>
-          <a:fillRef idx="3">
-            <a:schemeClr val="accent1"/>
-          </a:fillRef>
-          <a:effectRef idx="2">
-            <a:schemeClr val="accent1"/>
-          </a:effectRef>
-          <a:fontRef idx="minor">
-            <a:schemeClr val="lt1"/>
-          </a:fontRef>
-        </p:style>
         <p:txBody>
           <a:bodyPr rtlCol="0" anchor="ctr"/>
           <a:lstStyle/>
@@ -9245,20 +9710,6 @@
           </a:ln>
           <a:effectLst/>
         </p:spPr>
-        <p:style>
-          <a:lnRef idx="1">
-            <a:schemeClr val="accent1"/>
-          </a:lnRef>
-          <a:fillRef idx="3">
-            <a:schemeClr val="accent1"/>
-          </a:fillRef>
-          <a:effectRef idx="2">
-            <a:schemeClr val="accent1"/>
-          </a:effectRef>
-          <a:fontRef idx="minor">
-            <a:schemeClr val="lt1"/>
-          </a:fontRef>
-        </p:style>
         <p:txBody>
           <a:bodyPr rtlCol="0" anchor="ctr"/>
           <a:lstStyle/>
@@ -9289,20 +9740,6 @@
           </a:ln>
           <a:effectLst/>
         </p:spPr>
-        <p:style>
-          <a:lnRef idx="1">
-            <a:schemeClr val="accent1"/>
-          </a:lnRef>
-          <a:fillRef idx="3">
-            <a:schemeClr val="accent1"/>
-          </a:fillRef>
-          <a:effectRef idx="2">
-            <a:schemeClr val="accent1"/>
-          </a:effectRef>
-          <a:fontRef idx="minor">
-            <a:schemeClr val="lt1"/>
-          </a:fontRef>
-        </p:style>
         <p:txBody>
           <a:bodyPr rtlCol="0" anchor="ctr"/>
           <a:lstStyle/>
@@ -9333,20 +9770,6 @@
           </a:ln>
           <a:effectLst/>
         </p:spPr>
-        <p:style>
-          <a:lnRef idx="1">
-            <a:schemeClr val="accent1"/>
-          </a:lnRef>
-          <a:fillRef idx="3">
-            <a:schemeClr val="accent1"/>
-          </a:fillRef>
-          <a:effectRef idx="2">
-            <a:schemeClr val="accent1"/>
-          </a:effectRef>
-          <a:fontRef idx="minor">
-            <a:schemeClr val="lt1"/>
-          </a:fontRef>
-        </p:style>
         <p:txBody>
           <a:bodyPr rtlCol="0" anchor="ctr"/>
           <a:lstStyle/>
@@ -9377,20 +9800,6 @@
           </a:ln>
           <a:effectLst/>
         </p:spPr>
-        <p:style>
-          <a:lnRef idx="1">
-            <a:schemeClr val="accent1"/>
-          </a:lnRef>
-          <a:fillRef idx="3">
-            <a:schemeClr val="accent1"/>
-          </a:fillRef>
-          <a:effectRef idx="2">
-            <a:schemeClr val="accent1"/>
-          </a:effectRef>
-          <a:fontRef idx="minor">
-            <a:schemeClr val="lt1"/>
-          </a:fontRef>
-        </p:style>
         <p:txBody>
           <a:bodyPr rtlCol="0" anchor="ctr"/>
           <a:lstStyle/>
@@ -9421,20 +9830,6 @@
           </a:ln>
           <a:effectLst/>
         </p:spPr>
-        <p:style>
-          <a:lnRef idx="1">
-            <a:schemeClr val="accent1"/>
-          </a:lnRef>
-          <a:fillRef idx="3">
-            <a:schemeClr val="accent1"/>
-          </a:fillRef>
-          <a:effectRef idx="2">
-            <a:schemeClr val="accent1"/>
-          </a:effectRef>
-          <a:fontRef idx="minor">
-            <a:schemeClr val="lt1"/>
-          </a:fontRef>
-        </p:style>
         <p:txBody>
           <a:bodyPr rtlCol="0" anchor="ctr"/>
           <a:lstStyle/>
@@ -9465,20 +9860,6 @@
           </a:ln>
           <a:effectLst/>
         </p:spPr>
-        <p:style>
-          <a:lnRef idx="1">
-            <a:schemeClr val="accent1"/>
-          </a:lnRef>
-          <a:fillRef idx="3">
-            <a:schemeClr val="accent1"/>
-          </a:fillRef>
-          <a:effectRef idx="2">
-            <a:schemeClr val="accent1"/>
-          </a:effectRef>
-          <a:fontRef idx="minor">
-            <a:schemeClr val="lt1"/>
-          </a:fontRef>
-        </p:style>
         <p:txBody>
           <a:bodyPr rtlCol="0" anchor="ctr"/>
           <a:lstStyle/>
@@ -9509,20 +9890,6 @@
           </a:ln>
           <a:effectLst/>
         </p:spPr>
-        <p:style>
-          <a:lnRef idx="1">
-            <a:schemeClr val="accent1"/>
-          </a:lnRef>
-          <a:fillRef idx="3">
-            <a:schemeClr val="accent1"/>
-          </a:fillRef>
-          <a:effectRef idx="2">
-            <a:schemeClr val="accent1"/>
-          </a:effectRef>
-          <a:fontRef idx="minor">
-            <a:schemeClr val="lt1"/>
-          </a:fontRef>
-        </p:style>
         <p:txBody>
           <a:bodyPr rtlCol="0" anchor="ctr"/>
           <a:lstStyle/>
@@ -9553,20 +9920,6 @@
           </a:ln>
           <a:effectLst/>
         </p:spPr>
-        <p:style>
-          <a:lnRef idx="1">
-            <a:schemeClr val="accent1"/>
-          </a:lnRef>
-          <a:fillRef idx="3">
-            <a:schemeClr val="accent1"/>
-          </a:fillRef>
-          <a:effectRef idx="2">
-            <a:schemeClr val="accent1"/>
-          </a:effectRef>
-          <a:fontRef idx="minor">
-            <a:schemeClr val="lt1"/>
-          </a:fontRef>
-        </p:style>
         <p:txBody>
           <a:bodyPr rtlCol="0" anchor="ctr"/>
           <a:lstStyle/>
@@ -9597,20 +9950,6 @@
           </a:ln>
           <a:effectLst/>
         </p:spPr>
-        <p:style>
-          <a:lnRef idx="1">
-            <a:schemeClr val="accent1"/>
-          </a:lnRef>
-          <a:fillRef idx="3">
-            <a:schemeClr val="accent1"/>
-          </a:fillRef>
-          <a:effectRef idx="2">
-            <a:schemeClr val="accent1"/>
-          </a:effectRef>
-          <a:fontRef idx="minor">
-            <a:schemeClr val="lt1"/>
-          </a:fontRef>
-        </p:style>
         <p:txBody>
           <a:bodyPr rtlCol="0" anchor="ctr"/>
           <a:lstStyle/>
@@ -9652,7 +9991,7 @@
         <p:spPr>
           <a:xfrm>
             <a:off x="1015999" y="389466"/>
-            <a:ext cx="4775200" cy="176106"/>
+            <a:ext cx="4775200" cy="160866"/>
           </a:xfrm>
           <a:prstGeom prst="rect">
             <a:avLst/>
@@ -9665,12 +10004,17 @@
           </a:bodyPr>
           <a:lstStyle/>
           <a:p>
-            <a:r>
-              <a:rPr sz="800" b="0" i="0">
+            <a:pPr>
+              <a:lnSpc>
+                <a:spcPts val="1120"/>
+              </a:lnSpc>
+            </a:pPr>
+            <a:r>
+              <a:rPr sz="800" b="0" i="0" spc="80">
                 <a:solidFill>
                   <a:srgbClr val="6B6B65"/>
                 </a:solidFill>
-                <a:latin typeface="Inter"/>
+                <a:latin typeface="Inter SemiBold"/>
               </a:rPr>
               <a:t>02 / KPIS</a:t>
             </a:r>
@@ -9685,8 +10029,8 @@
         </p:nvSpPr>
         <p:spPr>
           <a:xfrm>
-            <a:off x="1015999" y="795866"/>
-            <a:ext cx="10193866" cy="501226"/>
+            <a:off x="1015999" y="778933"/>
+            <a:ext cx="3862493" cy="533400"/>
           </a:xfrm>
           <a:prstGeom prst="rect">
             <a:avLst/>
@@ -9699,12 +10043,17 @@
           </a:bodyPr>
           <a:lstStyle/>
           <a:p>
-            <a:r>
-              <a:rPr sz="3200" b="1" i="0">
+            <a:pPr>
+              <a:lnSpc>
+                <a:spcPts val="3679"/>
+              </a:lnSpc>
+            </a:pPr>
+            <a:r>
+              <a:rPr sz="3200" b="0" i="0" spc="-80">
                 <a:solidFill>
                   <a:srgbClr val="1C1C1E"/>
                 </a:solidFill>
-                <a:latin typeface="Inter"/>
+                <a:latin typeface="Inter SemiBold"/>
               </a:rPr>
               <a:t>Woran ihr uns messt</a:t>
             </a:r>
@@ -9719,8 +10068,8 @@
         </p:nvSpPr>
         <p:spPr>
           <a:xfrm>
-            <a:off x="1015999" y="2788919"/>
-            <a:ext cx="2013373" cy="383539"/>
+            <a:off x="1015999" y="2890519"/>
+            <a:ext cx="1877906" cy="160866"/>
           </a:xfrm>
           <a:prstGeom prst="rect">
             <a:avLst/>
@@ -9733,12 +10082,17 @@
           </a:bodyPr>
           <a:lstStyle/>
           <a:p>
-            <a:r>
-              <a:rPr sz="800" b="0" i="0">
+            <a:pPr>
+              <a:lnSpc>
+                <a:spcPts val="1120"/>
+              </a:lnSpc>
+            </a:pPr>
+            <a:r>
+              <a:rPr sz="800" b="0" i="0" spc="80">
                 <a:solidFill>
                   <a:srgbClr val="6B6B65"/>
                 </a:solidFill>
-                <a:latin typeface="Inter"/>
+                <a:latin typeface="Inter SemiBold"/>
               </a:rPr>
               <a:t>DIMENSION</a:t>
             </a:r>
@@ -9753,8 +10107,8 @@
         </p:nvSpPr>
         <p:spPr>
           <a:xfrm>
-            <a:off x="1015999" y="3138593"/>
-            <a:ext cx="2013373" cy="1522306"/>
+            <a:off x="1015999" y="3295226"/>
+            <a:ext cx="839046" cy="203200"/>
           </a:xfrm>
           <a:prstGeom prst="rect">
             <a:avLst/>
@@ -9767,6 +10121,11 @@
           </a:bodyPr>
           <a:lstStyle/>
           <a:p>
+            <a:pPr>
+              <a:lnSpc>
+                <a:spcPts val="1710"/>
+              </a:lnSpc>
+            </a:pPr>
             <a:r>
               <a:rPr sz="1070" b="0" i="0">
                 <a:solidFill>
@@ -9777,28 +10136,6 @@
               <a:t>Dimension A</a:t>
             </a:r>
           </a:p>
-          <a:p>
-            <a:r>
-              <a:rPr sz="1070" b="0" i="0">
-                <a:solidFill>
-                  <a:srgbClr val="6B6B65"/>
-                </a:solidFill>
-                <a:latin typeface="Inter"/>
-              </a:rPr>
-              <a:t>Dimension B</a:t>
-            </a:r>
-          </a:p>
-          <a:p>
-            <a:r>
-              <a:rPr sz="1070" b="0" i="0">
-                <a:solidFill>
-                  <a:srgbClr val="6B6B65"/>
-                </a:solidFill>
-                <a:latin typeface="Inter"/>
-              </a:rPr>
-              <a:t>Dimension C</a:t>
-            </a:r>
-          </a:p>
         </p:txBody>
       </p:sp>
       <p:sp>
@@ -9809,8 +10146,8 @@
         </p:nvSpPr>
         <p:spPr>
           <a:xfrm>
-            <a:off x="1015999" y="4902200"/>
-            <a:ext cx="10193866" cy="176106"/>
+            <a:off x="1015999" y="3791373"/>
+            <a:ext cx="834813" cy="203200"/>
           </a:xfrm>
           <a:prstGeom prst="rect">
             <a:avLst/>
@@ -9823,15 +10160,19 @@
           </a:bodyPr>
           <a:lstStyle/>
           <a:p>
-            <a:pPr algn="r"/>
-            <a:r>
-              <a:rPr sz="800" b="0" i="0">
+            <a:pPr>
+              <a:lnSpc>
+                <a:spcPts val="1710"/>
+              </a:lnSpc>
+            </a:pPr>
+            <a:r>
+              <a:rPr sz="1070" b="0" i="0">
                 <a:solidFill>
                   <a:srgbClr val="6B6B65"/>
                 </a:solidFill>
                 <a:latin typeface="Inter"/>
               </a:rPr>
-              <a:t>Quelle: … in einem Satz</a:t>
+              <a:t>Dimension B</a:t>
             </a:r>
           </a:p>
         </p:txBody>
@@ -9844,8 +10185,47 @@
         </p:nvSpPr>
         <p:spPr>
           <a:xfrm>
+            <a:off x="1015999" y="4287519"/>
+            <a:ext cx="844973" cy="203200"/>
+          </a:xfrm>
+          <a:prstGeom prst="rect">
+            <a:avLst/>
+          </a:prstGeom>
+          <a:noFill/>
+        </p:spPr>
+        <p:txBody>
+          <a:bodyPr wrap="square" lIns="0" rIns="0" tIns="0" bIns="0">
+            <a:normAutofit/>
+          </a:bodyPr>
+          <a:lstStyle/>
+          <a:p>
+            <a:pPr>
+              <a:lnSpc>
+                <a:spcPts val="1710"/>
+              </a:lnSpc>
+            </a:pPr>
+            <a:r>
+              <a:rPr sz="1070" b="0" i="0">
+                <a:solidFill>
+                  <a:srgbClr val="6B6B65"/>
+                </a:solidFill>
+                <a:latin typeface="Inter"/>
+              </a:rPr>
+              <a:t>Dimension C</a:t>
+            </a:r>
+          </a:p>
+        </p:txBody>
+      </p:sp>
+      <p:sp>
+        <p:nvSpPr>
+          <p:cNvPr id="25" name="TextBox 24"/>
+          <p:cNvSpPr txBox="1"/>
+          <p:nvPr/>
+        </p:nvSpPr>
+        <p:spPr>
+          <a:xfrm>
             <a:off x="2003213" y="6466839"/>
-            <a:ext cx="3928533" cy="176106"/>
+            <a:ext cx="3928533" cy="160866"/>
           </a:xfrm>
           <a:prstGeom prst="rect">
             <a:avLst/>
@@ -9858,12 +10238,17 @@
           </a:bodyPr>
           <a:lstStyle/>
           <a:p>
-            <a:r>
-              <a:rPr sz="800" b="1" i="0">
+            <a:pPr>
+              <a:lnSpc>
+                <a:spcPts val="1120"/>
+              </a:lnSpc>
+            </a:pPr>
+            <a:r>
+              <a:rPr sz="800" b="0" i="0">
                 <a:solidFill>
                   <a:srgbClr val="1C1C1E"/>
                 </a:solidFill>
-                <a:latin typeface="Inter"/>
+                <a:latin typeface="Inter SemiBold"/>
               </a:rPr>
               <a:t>Kunde Projekttitel</a:t>
             </a:r>
@@ -9872,14 +10257,14 @@
       </p:sp>
       <p:sp>
         <p:nvSpPr>
-          <p:cNvPr id="25" name="TextBox 24"/>
-          <p:cNvSpPr txBox="1"/>
-          <p:nvPr/>
-        </p:nvSpPr>
-        <p:spPr>
-          <a:xfrm>
-            <a:off x="2995506" y="2788919"/>
-            <a:ext cx="4640580" cy="383539"/>
+          <p:cNvPr id="26" name="TextBox 25"/>
+          <p:cNvSpPr txBox="1"/>
+          <p:nvPr/>
+        </p:nvSpPr>
+        <p:spPr>
+          <a:xfrm>
+            <a:off x="2995506" y="2890519"/>
+            <a:ext cx="4436533" cy="160866"/>
           </a:xfrm>
           <a:prstGeom prst="rect">
             <a:avLst/>
@@ -9892,12 +10277,17 @@
           </a:bodyPr>
           <a:lstStyle/>
           <a:p>
-            <a:r>
-              <a:rPr sz="800" b="0" i="0">
+            <a:pPr>
+              <a:lnSpc>
+                <a:spcPts val="1120"/>
+              </a:lnSpc>
+            </a:pPr>
+            <a:r>
+              <a:rPr sz="800" b="0" i="0" spc="80">
                 <a:solidFill>
                   <a:srgbClr val="6B6B65"/>
                 </a:solidFill>
-                <a:latin typeface="Inter"/>
+                <a:latin typeface="Inter SemiBold"/>
               </a:rPr>
               <a:t>MESSGRÖSSE</a:t>
             </a:r>
@@ -9906,14 +10296,14 @@
       </p:sp>
       <p:sp>
         <p:nvSpPr>
-          <p:cNvPr id="26" name="TextBox 25"/>
-          <p:cNvSpPr txBox="1"/>
-          <p:nvPr/>
-        </p:nvSpPr>
-        <p:spPr>
-          <a:xfrm>
-            <a:off x="2995506" y="3138593"/>
-            <a:ext cx="4640580" cy="1522306"/>
+          <p:cNvPr id="27" name="TextBox 26"/>
+          <p:cNvSpPr txBox="1"/>
+          <p:nvPr/>
+        </p:nvSpPr>
+        <p:spPr>
+          <a:xfrm>
+            <a:off x="2995506" y="3295226"/>
+            <a:ext cx="2101426" cy="203200"/>
           </a:xfrm>
           <a:prstGeom prst="rect">
             <a:avLst/>
@@ -9926,6 +10316,11 @@
           </a:bodyPr>
           <a:lstStyle/>
           <a:p>
+            <a:pPr>
+              <a:lnSpc>
+                <a:spcPts val="1710"/>
+              </a:lnSpc>
+            </a:pPr>
             <a:r>
               <a:rPr sz="1070" b="0" i="0">
                 <a:solidFill>
@@ -9936,7 +10331,35 @@
               <a:t>Messgröße als ganzer Ausdruck</a:t>
             </a:r>
           </a:p>
-          <a:p>
+        </p:txBody>
+      </p:sp>
+      <p:sp>
+        <p:nvSpPr>
+          <p:cNvPr id="28" name="TextBox 27"/>
+          <p:cNvSpPr txBox="1"/>
+          <p:nvPr/>
+        </p:nvSpPr>
+        <p:spPr>
+          <a:xfrm>
+            <a:off x="2995506" y="3791373"/>
+            <a:ext cx="753533" cy="203200"/>
+          </a:xfrm>
+          <a:prstGeom prst="rect">
+            <a:avLst/>
+          </a:prstGeom>
+          <a:noFill/>
+        </p:spPr>
+        <p:txBody>
+          <a:bodyPr wrap="square" lIns="0" rIns="0" tIns="0" bIns="0">
+            <a:normAutofit/>
+          </a:bodyPr>
+          <a:lstStyle/>
+          <a:p>
+            <a:pPr>
+              <a:lnSpc>
+                <a:spcPts val="1710"/>
+              </a:lnSpc>
+            </a:pPr>
             <a:r>
               <a:rPr sz="1070" b="0" i="0">
                 <a:solidFill>
@@ -9947,7 +10370,35 @@
               <a:t>Messgröße</a:t>
             </a:r>
           </a:p>
-          <a:p>
+        </p:txBody>
+      </p:sp>
+      <p:sp>
+        <p:nvSpPr>
+          <p:cNvPr id="29" name="TextBox 28"/>
+          <p:cNvSpPr txBox="1"/>
+          <p:nvPr/>
+        </p:nvSpPr>
+        <p:spPr>
+          <a:xfrm>
+            <a:off x="2995506" y="4287519"/>
+            <a:ext cx="753533" cy="203200"/>
+          </a:xfrm>
+          <a:prstGeom prst="rect">
+            <a:avLst/>
+          </a:prstGeom>
+          <a:noFill/>
+        </p:spPr>
+        <p:txBody>
+          <a:bodyPr wrap="square" lIns="0" rIns="0" tIns="0" bIns="0">
+            <a:normAutofit/>
+          </a:bodyPr>
+          <a:lstStyle/>
+          <a:p>
+            <a:pPr>
+              <a:lnSpc>
+                <a:spcPts val="1710"/>
+              </a:lnSpc>
+            </a:pPr>
             <a:r>
               <a:rPr sz="1070" b="0" i="0">
                 <a:solidFill>
@@ -9962,14 +10413,14 @@
       </p:sp>
       <p:sp>
         <p:nvSpPr>
-          <p:cNvPr id="27" name="TextBox 26"/>
-          <p:cNvSpPr txBox="1"/>
-          <p:nvPr/>
-        </p:nvSpPr>
-        <p:spPr>
-          <a:xfrm>
-            <a:off x="7601373" y="2788919"/>
-            <a:ext cx="2248746" cy="383539"/>
+          <p:cNvPr id="30" name="TextBox 29"/>
+          <p:cNvSpPr txBox="1"/>
+          <p:nvPr/>
+        </p:nvSpPr>
+        <p:spPr>
+          <a:xfrm>
+            <a:off x="7601373" y="2890519"/>
+            <a:ext cx="2113280" cy="160866"/>
           </a:xfrm>
           <a:prstGeom prst="rect">
             <a:avLst/>
@@ -9982,12 +10433,17 @@
           </a:bodyPr>
           <a:lstStyle/>
           <a:p>
-            <a:r>
-              <a:rPr sz="800" b="0" i="0">
+            <a:pPr>
+              <a:lnSpc>
+                <a:spcPts val="1120"/>
+              </a:lnSpc>
+            </a:pPr>
+            <a:r>
+              <a:rPr sz="800" b="0" i="0" spc="80">
                 <a:solidFill>
                   <a:srgbClr val="6B6B65"/>
                 </a:solidFill>
-                <a:latin typeface="Inter"/>
+                <a:latin typeface="Inter SemiBold"/>
               </a:rPr>
               <a:t>HEUTE</a:t>
             </a:r>
@@ -9996,14 +10452,14 @@
       </p:sp>
       <p:sp>
         <p:nvSpPr>
-          <p:cNvPr id="28" name="TextBox 27"/>
-          <p:cNvSpPr txBox="1"/>
-          <p:nvPr/>
-        </p:nvSpPr>
-        <p:spPr>
-          <a:xfrm>
-            <a:off x="7601373" y="3138593"/>
-            <a:ext cx="2248746" cy="1522306"/>
+          <p:cNvPr id="31" name="TextBox 30"/>
+          <p:cNvSpPr txBox="1"/>
+          <p:nvPr/>
+        </p:nvSpPr>
+        <p:spPr>
+          <a:xfrm>
+            <a:off x="7601373" y="3295226"/>
+            <a:ext cx="957579" cy="203200"/>
           </a:xfrm>
           <a:prstGeom prst="rect">
             <a:avLst/>
@@ -10016,6 +10472,11 @@
           </a:bodyPr>
           <a:lstStyle/>
           <a:p>
+            <a:pPr>
+              <a:lnSpc>
+                <a:spcPts val="1710"/>
+              </a:lnSpc>
+            </a:pPr>
             <a:r>
               <a:rPr sz="1070" b="0" i="0">
                 <a:solidFill>
@@ -10026,7 +10487,35 @@
               <a:t>Ausgangswert</a:t>
             </a:r>
           </a:p>
-          <a:p>
+        </p:txBody>
+      </p:sp>
+      <p:sp>
+        <p:nvSpPr>
+          <p:cNvPr id="32" name="TextBox 31"/>
+          <p:cNvSpPr txBox="1"/>
+          <p:nvPr/>
+        </p:nvSpPr>
+        <p:spPr>
+          <a:xfrm>
+            <a:off x="7601373" y="3791373"/>
+            <a:ext cx="957579" cy="203200"/>
+          </a:xfrm>
+          <a:prstGeom prst="rect">
+            <a:avLst/>
+          </a:prstGeom>
+          <a:noFill/>
+        </p:spPr>
+        <p:txBody>
+          <a:bodyPr wrap="square" lIns="0" rIns="0" tIns="0" bIns="0">
+            <a:normAutofit/>
+          </a:bodyPr>
+          <a:lstStyle/>
+          <a:p>
+            <a:pPr>
+              <a:lnSpc>
+                <a:spcPts val="1710"/>
+              </a:lnSpc>
+            </a:pPr>
             <a:r>
               <a:rPr sz="1070" b="0" i="0">
                 <a:solidFill>
@@ -10037,7 +10526,35 @@
               <a:t>Ausgangswert</a:t>
             </a:r>
           </a:p>
-          <a:p>
+        </p:txBody>
+      </p:sp>
+      <p:sp>
+        <p:nvSpPr>
+          <p:cNvPr id="33" name="TextBox 32"/>
+          <p:cNvSpPr txBox="1"/>
+          <p:nvPr/>
+        </p:nvSpPr>
+        <p:spPr>
+          <a:xfrm>
+            <a:off x="7601373" y="4287519"/>
+            <a:ext cx="957579" cy="203200"/>
+          </a:xfrm>
+          <a:prstGeom prst="rect">
+            <a:avLst/>
+          </a:prstGeom>
+          <a:noFill/>
+        </p:spPr>
+        <p:txBody>
+          <a:bodyPr wrap="square" lIns="0" rIns="0" tIns="0" bIns="0">
+            <a:normAutofit/>
+          </a:bodyPr>
+          <a:lstStyle/>
+          <a:p>
+            <a:pPr>
+              <a:lnSpc>
+                <a:spcPts val="1710"/>
+              </a:lnSpc>
+            </a:pPr>
             <a:r>
               <a:rPr sz="1070" b="0" i="0">
                 <a:solidFill>
@@ -10052,14 +10569,14 @@
       </p:sp>
       <p:sp>
         <p:nvSpPr>
-          <p:cNvPr id="29" name="TextBox 28"/>
-          <p:cNvSpPr txBox="1"/>
-          <p:nvPr/>
-        </p:nvSpPr>
-        <p:spPr>
-          <a:xfrm>
-            <a:off x="9816253" y="2788919"/>
-            <a:ext cx="2206413" cy="383539"/>
+          <p:cNvPr id="34" name="TextBox 33"/>
+          <p:cNvSpPr txBox="1"/>
+          <p:nvPr/>
+        </p:nvSpPr>
+        <p:spPr>
+          <a:xfrm>
+            <a:off x="9816253" y="2890519"/>
+            <a:ext cx="2206413" cy="160866"/>
           </a:xfrm>
           <a:prstGeom prst="rect">
             <a:avLst/>
@@ -10072,12 +10589,17 @@
           </a:bodyPr>
           <a:lstStyle/>
           <a:p>
-            <a:r>
-              <a:rPr sz="800" b="0" i="0">
+            <a:pPr>
+              <a:lnSpc>
+                <a:spcPts val="1120"/>
+              </a:lnSpc>
+            </a:pPr>
+            <a:r>
+              <a:rPr sz="800" b="0" i="0" spc="80">
                 <a:solidFill>
                   <a:srgbClr val="6B6B65"/>
                 </a:solidFill>
-                <a:latin typeface="Inter"/>
+                <a:latin typeface="Inter SemiBold"/>
               </a:rPr>
               <a:t>ZIEL</a:t>
             </a:r>
@@ -10086,14 +10608,14 @@
       </p:sp>
       <p:sp>
         <p:nvSpPr>
-          <p:cNvPr id="30" name="TextBox 29"/>
-          <p:cNvSpPr txBox="1"/>
-          <p:nvPr/>
-        </p:nvSpPr>
-        <p:spPr>
-          <a:xfrm>
-            <a:off x="9816253" y="3138593"/>
-            <a:ext cx="1393613" cy="1522306"/>
+          <p:cNvPr id="35" name="TextBox 34"/>
+          <p:cNvSpPr txBox="1"/>
+          <p:nvPr/>
+        </p:nvSpPr>
+        <p:spPr>
+          <a:xfrm>
+            <a:off x="9816253" y="3295226"/>
+            <a:ext cx="548639" cy="203200"/>
           </a:xfrm>
           <a:prstGeom prst="rect">
             <a:avLst/>
@@ -10106,6 +10628,11 @@
           </a:bodyPr>
           <a:lstStyle/>
           <a:p>
+            <a:pPr>
+              <a:lnSpc>
+                <a:spcPts val="1710"/>
+              </a:lnSpc>
+            </a:pPr>
             <a:r>
               <a:rPr sz="1070" b="0" i="0">
                 <a:solidFill>
@@ -10116,7 +10643,35 @@
               <a:t>Zielwert</a:t>
             </a:r>
           </a:p>
-          <a:p>
+        </p:txBody>
+      </p:sp>
+      <p:sp>
+        <p:nvSpPr>
+          <p:cNvPr id="36" name="TextBox 35"/>
+          <p:cNvSpPr txBox="1"/>
+          <p:nvPr/>
+        </p:nvSpPr>
+        <p:spPr>
+          <a:xfrm>
+            <a:off x="9816253" y="3791373"/>
+            <a:ext cx="548639" cy="203200"/>
+          </a:xfrm>
+          <a:prstGeom prst="rect">
+            <a:avLst/>
+          </a:prstGeom>
+          <a:noFill/>
+        </p:spPr>
+        <p:txBody>
+          <a:bodyPr wrap="square" lIns="0" rIns="0" tIns="0" bIns="0">
+            <a:normAutofit/>
+          </a:bodyPr>
+          <a:lstStyle/>
+          <a:p>
+            <a:pPr>
+              <a:lnSpc>
+                <a:spcPts val="1710"/>
+              </a:lnSpc>
+            </a:pPr>
             <a:r>
               <a:rPr sz="1070" b="0" i="0">
                 <a:solidFill>
@@ -10127,7 +10682,35 @@
               <a:t>Zielwert</a:t>
             </a:r>
           </a:p>
-          <a:p>
+        </p:txBody>
+      </p:sp>
+      <p:sp>
+        <p:nvSpPr>
+          <p:cNvPr id="37" name="TextBox 36"/>
+          <p:cNvSpPr txBox="1"/>
+          <p:nvPr/>
+        </p:nvSpPr>
+        <p:spPr>
+          <a:xfrm>
+            <a:off x="9816253" y="4287519"/>
+            <a:ext cx="548639" cy="203200"/>
+          </a:xfrm>
+          <a:prstGeom prst="rect">
+            <a:avLst/>
+          </a:prstGeom>
+          <a:noFill/>
+        </p:spPr>
+        <p:txBody>
+          <a:bodyPr wrap="square" lIns="0" rIns="0" tIns="0" bIns="0">
+            <a:normAutofit/>
+          </a:bodyPr>
+          <a:lstStyle/>
+          <a:p>
+            <a:pPr>
+              <a:lnSpc>
+                <a:spcPts val="1710"/>
+              </a:lnSpc>
+            </a:pPr>
             <a:r>
               <a:rPr sz="1070" b="0" i="0">
                 <a:solidFill>
@@ -10142,7 +10725,46 @@
       </p:sp>
       <p:sp>
         <p:nvSpPr>
-          <p:cNvPr id="31" name="TextBox 30"/>
+          <p:cNvPr id="38" name="TextBox 37"/>
+          <p:cNvSpPr txBox="1"/>
+          <p:nvPr/>
+        </p:nvSpPr>
+        <p:spPr>
+          <a:xfrm>
+            <a:off x="10050779" y="4902200"/>
+            <a:ext cx="1159086" cy="160866"/>
+          </a:xfrm>
+          <a:prstGeom prst="rect">
+            <a:avLst/>
+          </a:prstGeom>
+          <a:noFill/>
+        </p:spPr>
+        <p:txBody>
+          <a:bodyPr wrap="square" lIns="0" rIns="0" tIns="0" bIns="0">
+            <a:normAutofit/>
+          </a:bodyPr>
+          <a:lstStyle/>
+          <a:p>
+            <a:pPr algn="r">
+              <a:lnSpc>
+                <a:spcPts val="1120"/>
+              </a:lnSpc>
+            </a:pPr>
+            <a:r>
+              <a:rPr sz="800" b="0" i="0">
+                <a:solidFill>
+                  <a:srgbClr val="6B6B65"/>
+                </a:solidFill>
+                <a:latin typeface="Inter"/>
+              </a:rPr>
+              <a:t>Quelle: … in einem Satz</a:t>
+            </a:r>
+          </a:p>
+        </p:txBody>
+      </p:sp>
+      <p:sp>
+        <p:nvSpPr>
+          <p:cNvPr id="39" name="TextBox 38"/>
           <p:cNvSpPr txBox="1"/>
           <p:nvPr/>
         </p:nvSpPr>
@@ -10162,7 +10784,11 @@
           </a:bodyPr>
           <a:lstStyle/>
           <a:p>
-            <a:pPr algn="r"/>
+            <a:pPr algn="r">
+              <a:lnSpc>
+                <a:spcPts val="1120"/>
+              </a:lnSpc>
+            </a:pPr>
             <a:r>
               <a:rPr sz="800" b="0" i="0">
                 <a:solidFill>
@@ -10203,7 +10829,7 @@
       <p:grpSpPr/>
       <p:pic>
         <p:nvPicPr>
-          <p:cNvPr id="2" name="Picture 1" descr="wordmark-black-crop.png"/>
+          <p:cNvPr id="2" name="Picture 1" descr="pix-17-0.png"/>
           <p:cNvPicPr>
             <a:picLocks noChangeAspect="1"/>
           </p:cNvPicPr>
@@ -10217,6 +10843,30 @@
         </p:blipFill>
         <p:spPr>
           <a:xfrm>
+            <a:off x="1015999" y="2770293"/>
+            <a:ext cx="10160000" cy="2794000"/>
+          </a:xfrm>
+          <a:prstGeom prst="rect">
+            <a:avLst/>
+          </a:prstGeom>
+        </p:spPr>
+      </p:pic>
+      <p:pic>
+        <p:nvPicPr>
+          <p:cNvPr id="3" name="Picture 2" descr="wordmark-black-crop.png"/>
+          <p:cNvPicPr>
+            <a:picLocks noChangeAspect="1"/>
+          </p:cNvPicPr>
+          <p:nvPr/>
+        </p:nvPicPr>
+        <p:blipFill>
+          <a:blip r:embed="rId3"/>
+          <a:stretch>
+            <a:fillRect/>
+          </a:stretch>
+        </p:blipFill>
+        <p:spPr>
+          <a:xfrm>
             <a:off x="1015999" y="6495626"/>
             <a:ext cx="953346" cy="118533"/>
           </a:xfrm>
@@ -10227,14 +10877,14 @@
       </p:pic>
       <p:sp>
         <p:nvSpPr>
-          <p:cNvPr id="3" name="TextBox 2"/>
+          <p:cNvPr id="4" name="TextBox 3"/>
           <p:cNvSpPr txBox="1"/>
           <p:nvPr/>
         </p:nvSpPr>
         <p:spPr>
           <a:xfrm>
             <a:off x="1015999" y="389466"/>
-            <a:ext cx="4775200" cy="176106"/>
+            <a:ext cx="4775200" cy="160866"/>
           </a:xfrm>
           <a:prstGeom prst="rect">
             <a:avLst/>
@@ -10247,12 +10897,17 @@
           </a:bodyPr>
           <a:lstStyle/>
           <a:p>
-            <a:r>
-              <a:rPr sz="800" b="0" i="0">
+            <a:pPr>
+              <a:lnSpc>
+                <a:spcPts val="1120"/>
+              </a:lnSpc>
+            </a:pPr>
+            <a:r>
+              <a:rPr sz="800" b="0" i="0" spc="80">
                 <a:solidFill>
                   <a:srgbClr val="6B6B65"/>
                 </a:solidFill>
-                <a:latin typeface="Inter"/>
+                <a:latin typeface="Inter SemiBold"/>
               </a:rPr>
               <a:t>01 / KAPITEL</a:t>
             </a:r>
@@ -10261,14 +10916,14 @@
       </p:sp>
       <p:sp>
         <p:nvSpPr>
-          <p:cNvPr id="4" name="TextBox 3"/>
-          <p:cNvSpPr txBox="1"/>
-          <p:nvPr/>
-        </p:nvSpPr>
-        <p:spPr>
-          <a:xfrm>
-            <a:off x="1015999" y="795866"/>
-            <a:ext cx="8500533" cy="968586"/>
+          <p:cNvPr id="5" name="TextBox 4"/>
+          <p:cNvSpPr txBox="1"/>
+          <p:nvPr/>
+        </p:nvSpPr>
+        <p:spPr>
+          <a:xfrm>
+            <a:off x="1015999" y="778933"/>
+            <a:ext cx="5104553" cy="1000760"/>
           </a:xfrm>
           <a:prstGeom prst="rect">
             <a:avLst/>
@@ -10281,12 +10936,17 @@
           </a:bodyPr>
           <a:lstStyle/>
           <a:p>
-            <a:r>
-              <a:rPr sz="3200" b="1" i="0">
+            <a:pPr>
+              <a:lnSpc>
+                <a:spcPts val="3679"/>
+              </a:lnSpc>
+            </a:pPr>
+            <a:r>
+              <a:rPr sz="3200" b="0" i="0" spc="-80">
                 <a:solidFill>
                   <a:srgbClr val="1C1C1E"/>
                 </a:solidFill>
-                <a:latin typeface="Inter"/>
+                <a:latin typeface="Inter SemiBold"/>
               </a:rPr>
               <a:t>Erst die Setup-Phase, dann die priorisierten Wellen</a:t>
             </a:r>
@@ -10295,14 +10955,14 @@
       </p:sp>
       <p:sp>
         <p:nvSpPr>
-          <p:cNvPr id="5" name="TextBox 4"/>
+          <p:cNvPr id="6" name="TextBox 5"/>
           <p:cNvSpPr txBox="1"/>
           <p:nvPr/>
         </p:nvSpPr>
         <p:spPr>
           <a:xfrm>
             <a:off x="2003213" y="6466839"/>
-            <a:ext cx="3928533" cy="176106"/>
+            <a:ext cx="3928533" cy="160866"/>
           </a:xfrm>
           <a:prstGeom prst="rect">
             <a:avLst/>
@@ -10315,12 +10975,17 @@
           </a:bodyPr>
           <a:lstStyle/>
           <a:p>
-            <a:r>
-              <a:rPr sz="800" b="1" i="0">
+            <a:pPr>
+              <a:lnSpc>
+                <a:spcPts val="1120"/>
+              </a:lnSpc>
+            </a:pPr>
+            <a:r>
+              <a:rPr sz="800" b="0" i="0">
                 <a:solidFill>
                   <a:srgbClr val="1C1C1E"/>
                 </a:solidFill>
-                <a:latin typeface="Inter"/>
+                <a:latin typeface="Inter SemiBold"/>
               </a:rPr>
               <a:t>Kunde Projekttitel</a:t>
             </a:r>
@@ -10329,7 +10994,7 @@
       </p:sp>
       <p:sp>
         <p:nvSpPr>
-          <p:cNvPr id="6" name="TextBox 5"/>
+          <p:cNvPr id="7" name="TextBox 6"/>
           <p:cNvSpPr txBox="1"/>
           <p:nvPr/>
         </p:nvSpPr>
@@ -10349,7 +11014,11 @@
           </a:bodyPr>
           <a:lstStyle/>
           <a:p>
-            <a:pPr algn="r"/>
+            <a:pPr algn="r">
+              <a:lnSpc>
+                <a:spcPts val="1120"/>
+              </a:lnSpc>
+            </a:pPr>
             <a:r>
               <a:rPr sz="800" b="0" i="0">
                 <a:solidFill>
@@ -10412,8 +11081,8 @@
         </p:nvSpPr>
         <p:spPr>
           <a:xfrm>
-            <a:off x="1015999" y="2277533"/>
-            <a:ext cx="9177866" cy="1822026"/>
+            <a:off x="1015999" y="2243666"/>
+            <a:ext cx="7603913" cy="1877906"/>
           </a:xfrm>
           <a:prstGeom prst="rect">
             <a:avLst/>
@@ -10426,12 +11095,17 @@
           </a:bodyPr>
           <a:lstStyle/>
           <a:p>
-            <a:r>
-              <a:rPr sz="4270" b="0" i="1">
+            <a:pPr>
+              <a:lnSpc>
+                <a:spcPts val="4690"/>
+              </a:lnSpc>
+            </a:pPr>
+            <a:r>
+              <a:rPr sz="4270" b="0" i="1" spc="-128">
                 <a:solidFill>
                   <a:srgbClr val="F5F1EB"/>
                 </a:solidFill>
-                <a:latin typeface="Inter"/>
+                <a:latin typeface="Inter SemiBold"/>
               </a:rPr>
               <a:t>„Ein Satz aus einem echten Gespräch, der die Slide trägt — wörtlich, nicht geglättet."</a:t>
             </a:r>
@@ -10447,7 +11121,7 @@
         <p:spPr>
           <a:xfrm>
             <a:off x="1015999" y="4404360"/>
-            <a:ext cx="9177866" cy="176106"/>
+            <a:ext cx="4436533" cy="160866"/>
           </a:xfrm>
           <a:prstGeom prst="rect">
             <a:avLst/>
@@ -10460,12 +11134,17 @@
           </a:bodyPr>
           <a:lstStyle/>
           <a:p>
-            <a:r>
-              <a:rPr sz="800" b="0" i="0">
+            <a:pPr>
+              <a:lnSpc>
+                <a:spcPts val="1120"/>
+              </a:lnSpc>
+            </a:pPr>
+            <a:r>
+              <a:rPr sz="800" b="0" i="0" spc="80">
                 <a:solidFill>
                   <a:srgbClr val="A8A69E"/>
                 </a:solidFill>
-                <a:latin typeface="Inter"/>
+                <a:latin typeface="Inter SemiBold"/>
               </a:rPr>
               <a:t>VORNAME, ROLLE — KONTEXT</a:t>
             </a:r>
@@ -10506,7 +11185,7 @@
         </p:nvSpPr>
         <p:spPr>
           <a:xfrm>
-            <a:off x="1015999" y="2739813"/>
+            <a:off x="1015999" y="2714413"/>
             <a:ext cx="4809066" cy="8466"/>
           </a:xfrm>
           <a:prstGeom prst="rect">
@@ -10520,20 +11199,6 @@
           </a:ln>
           <a:effectLst/>
         </p:spPr>
-        <p:style>
-          <a:lnRef idx="1">
-            <a:schemeClr val="accent1"/>
-          </a:lnRef>
-          <a:fillRef idx="3">
-            <a:schemeClr val="accent1"/>
-          </a:fillRef>
-          <a:effectRef idx="2">
-            <a:schemeClr val="accent1"/>
-          </a:effectRef>
-          <a:fontRef idx="minor">
-            <a:schemeClr val="lt1"/>
-          </a:fontRef>
-        </p:style>
         <p:txBody>
           <a:bodyPr rtlCol="0" anchor="ctr"/>
           <a:lstStyle/>
@@ -10550,7 +11215,7 @@
         </p:nvSpPr>
         <p:spPr>
           <a:xfrm>
-            <a:off x="6366933" y="2739813"/>
+            <a:off x="6366933" y="2714413"/>
             <a:ext cx="4809066" cy="8466"/>
           </a:xfrm>
           <a:prstGeom prst="rect">
@@ -10564,20 +11229,6 @@
           </a:ln>
           <a:effectLst/>
         </p:spPr>
-        <p:style>
-          <a:lnRef idx="1">
-            <a:schemeClr val="accent1"/>
-          </a:lnRef>
-          <a:fillRef idx="3">
-            <a:schemeClr val="accent1"/>
-          </a:fillRef>
-          <a:effectRef idx="2">
-            <a:schemeClr val="accent1"/>
-          </a:effectRef>
-          <a:fontRef idx="minor">
-            <a:schemeClr val="lt1"/>
-          </a:fontRef>
-        </p:style>
         <p:txBody>
           <a:bodyPr rtlCol="0" anchor="ctr"/>
           <a:lstStyle/>
@@ -10594,7 +11245,7 @@
         </p:nvSpPr>
         <p:spPr>
           <a:xfrm>
-            <a:off x="1015999" y="3535680"/>
+            <a:off x="1015999" y="3527213"/>
             <a:ext cx="4809066" cy="8466"/>
           </a:xfrm>
           <a:prstGeom prst="rect">
@@ -10608,20 +11259,6 @@
           </a:ln>
           <a:effectLst/>
         </p:spPr>
-        <p:style>
-          <a:lnRef idx="1">
-            <a:schemeClr val="accent1"/>
-          </a:lnRef>
-          <a:fillRef idx="3">
-            <a:schemeClr val="accent1"/>
-          </a:fillRef>
-          <a:effectRef idx="2">
-            <a:schemeClr val="accent1"/>
-          </a:effectRef>
-          <a:fontRef idx="minor">
-            <a:schemeClr val="lt1"/>
-          </a:fontRef>
-        </p:style>
         <p:txBody>
           <a:bodyPr rtlCol="0" anchor="ctr"/>
           <a:lstStyle/>
@@ -10638,7 +11275,7 @@
         </p:nvSpPr>
         <p:spPr>
           <a:xfrm>
-            <a:off x="6366933" y="3535680"/>
+            <a:off x="6366933" y="3527213"/>
             <a:ext cx="4809066" cy="8466"/>
           </a:xfrm>
           <a:prstGeom prst="rect">
@@ -10652,20 +11289,6 @@
           </a:ln>
           <a:effectLst/>
         </p:spPr>
-        <p:style>
-          <a:lnRef idx="1">
-            <a:schemeClr val="accent1"/>
-          </a:lnRef>
-          <a:fillRef idx="3">
-            <a:schemeClr val="accent1"/>
-          </a:fillRef>
-          <a:effectRef idx="2">
-            <a:schemeClr val="accent1"/>
-          </a:effectRef>
-          <a:fontRef idx="minor">
-            <a:schemeClr val="lt1"/>
-          </a:fontRef>
-        </p:style>
         <p:txBody>
           <a:bodyPr rtlCol="0" anchor="ctr"/>
           <a:lstStyle/>
@@ -10682,7 +11305,7 @@
         </p:nvSpPr>
         <p:spPr>
           <a:xfrm>
-            <a:off x="1015999" y="4331546"/>
+            <a:off x="1015999" y="4340013"/>
             <a:ext cx="4809066" cy="8466"/>
           </a:xfrm>
           <a:prstGeom prst="rect">
@@ -10696,20 +11319,6 @@
           </a:ln>
           <a:effectLst/>
         </p:spPr>
-        <p:style>
-          <a:lnRef idx="1">
-            <a:schemeClr val="accent1"/>
-          </a:lnRef>
-          <a:fillRef idx="3">
-            <a:schemeClr val="accent1"/>
-          </a:fillRef>
-          <a:effectRef idx="2">
-            <a:schemeClr val="accent1"/>
-          </a:effectRef>
-          <a:fontRef idx="minor">
-            <a:schemeClr val="lt1"/>
-          </a:fontRef>
-        </p:style>
         <p:txBody>
           <a:bodyPr rtlCol="0" anchor="ctr"/>
           <a:lstStyle/>
@@ -10726,7 +11335,7 @@
         </p:nvSpPr>
         <p:spPr>
           <a:xfrm>
-            <a:off x="6366933" y="4331546"/>
+            <a:off x="6366933" y="4340013"/>
             <a:ext cx="4809066" cy="8466"/>
           </a:xfrm>
           <a:prstGeom prst="rect">
@@ -10740,20 +11349,6 @@
           </a:ln>
           <a:effectLst/>
         </p:spPr>
-        <p:style>
-          <a:lnRef idx="1">
-            <a:schemeClr val="accent1"/>
-          </a:lnRef>
-          <a:fillRef idx="3">
-            <a:schemeClr val="accent1"/>
-          </a:fillRef>
-          <a:effectRef idx="2">
-            <a:schemeClr val="accent1"/>
-          </a:effectRef>
-          <a:fontRef idx="minor">
-            <a:schemeClr val="lt1"/>
-          </a:fontRef>
-        </p:style>
         <p:txBody>
           <a:bodyPr rtlCol="0" anchor="ctr"/>
           <a:lstStyle/>
@@ -10795,7 +11390,7 @@
         <p:spPr>
           <a:xfrm>
             <a:off x="1015999" y="389466"/>
-            <a:ext cx="4775200" cy="176106"/>
+            <a:ext cx="4775200" cy="160866"/>
           </a:xfrm>
           <a:prstGeom prst="rect">
             <a:avLst/>
@@ -10808,12 +11403,17 @@
           </a:bodyPr>
           <a:lstStyle/>
           <a:p>
-            <a:r>
-              <a:rPr sz="800" b="0" i="0">
+            <a:pPr>
+              <a:lnSpc>
+                <a:spcPts val="1120"/>
+              </a:lnSpc>
+            </a:pPr>
+            <a:r>
+              <a:rPr sz="800" b="0" i="0" spc="80">
                 <a:solidFill>
                   <a:srgbClr val="6B6B65"/>
                 </a:solidFill>
-                <a:latin typeface="Inter"/>
+                <a:latin typeface="Inter SemiBold"/>
               </a:rPr>
               <a:t>AGENDA</a:t>
             </a:r>
@@ -10828,8 +11428,8 @@
         </p:nvSpPr>
         <p:spPr>
           <a:xfrm>
-            <a:off x="1015999" y="795866"/>
-            <a:ext cx="10193866" cy="501226"/>
+            <a:off x="1015999" y="778933"/>
+            <a:ext cx="3815080" cy="533400"/>
           </a:xfrm>
           <a:prstGeom prst="rect">
             <a:avLst/>
@@ -10842,12 +11442,17 @@
           </a:bodyPr>
           <a:lstStyle/>
           <a:p>
-            <a:r>
-              <a:rPr sz="3200" b="1" i="0">
+            <a:pPr>
+              <a:lnSpc>
+                <a:spcPts val="3679"/>
+              </a:lnSpc>
+            </a:pPr>
+            <a:r>
+              <a:rPr sz="3200" b="0" i="0" spc="-80">
                 <a:solidFill>
                   <a:srgbClr val="1C1C1E"/>
                 </a:solidFill>
-                <a:latin typeface="Inter"/>
+                <a:latin typeface="Inter SemiBold"/>
               </a:rPr>
               <a:t>Der Ablauf für heute</a:t>
             </a:r>
@@ -10862,8 +11467,8 @@
         </p:nvSpPr>
         <p:spPr>
           <a:xfrm>
-            <a:off x="1015999" y="2926080"/>
-            <a:ext cx="372533" cy="250613"/>
+            <a:off x="1015999" y="3016673"/>
+            <a:ext cx="174413" cy="203200"/>
           </a:xfrm>
           <a:prstGeom prst="rect">
             <a:avLst/>
@@ -10876,6 +11481,11 @@
           </a:bodyPr>
           <a:lstStyle/>
           <a:p>
+            <a:pPr>
+              <a:lnSpc>
+                <a:spcPts val="1710"/>
+              </a:lnSpc>
+            </a:pPr>
             <a:r>
               <a:rPr sz="1070" b="0" i="0">
                 <a:solidFill>
@@ -10896,8 +11506,8 @@
         </p:nvSpPr>
         <p:spPr>
           <a:xfrm>
-            <a:off x="1015999" y="3721946"/>
-            <a:ext cx="372533" cy="250613"/>
+            <a:off x="1015999" y="3829473"/>
+            <a:ext cx="202353" cy="203200"/>
           </a:xfrm>
           <a:prstGeom prst="rect">
             <a:avLst/>
@@ -10910,6 +11520,11 @@
           </a:bodyPr>
           <a:lstStyle/>
           <a:p>
+            <a:pPr>
+              <a:lnSpc>
+                <a:spcPts val="1710"/>
+              </a:lnSpc>
+            </a:pPr>
             <a:r>
               <a:rPr sz="1070" b="0" i="0">
                 <a:solidFill>
@@ -10930,8 +11545,8 @@
         </p:nvSpPr>
         <p:spPr>
           <a:xfrm>
-            <a:off x="1015999" y="4517813"/>
-            <a:ext cx="372533" cy="250613"/>
+            <a:off x="1015999" y="4642273"/>
+            <a:ext cx="203200" cy="203200"/>
           </a:xfrm>
           <a:prstGeom prst="rect">
             <a:avLst/>
@@ -10944,6 +11559,11 @@
           </a:bodyPr>
           <a:lstStyle/>
           <a:p>
+            <a:pPr>
+              <a:lnSpc>
+                <a:spcPts val="1710"/>
+              </a:lnSpc>
+            </a:pPr>
             <a:r>
               <a:rPr sz="1070" b="0" i="0">
                 <a:solidFill>
@@ -10965,7 +11585,7 @@
         <p:spPr>
           <a:xfrm>
             <a:off x="1557866" y="2900680"/>
-            <a:ext cx="1176866" cy="482599"/>
+            <a:ext cx="1176866" cy="448733"/>
           </a:xfrm>
           <a:prstGeom prst="rect">
             <a:avLst/>
@@ -10978,29 +11598,37 @@
           </a:bodyPr>
           <a:lstStyle/>
           <a:p>
-            <a:r>
-              <a:rPr sz="1330" b="0" i="0">
+            <a:pPr>
+              <a:lnSpc>
+                <a:spcPts val="1870"/>
+              </a:lnSpc>
+            </a:pPr>
+            <a:r>
+              <a:rPr sz="1330" b="0" i="0" spc="-20">
                 <a:solidFill>
                   <a:srgbClr val="1C1C1E"/>
                 </a:solidFill>
+                <a:latin typeface="Inter SemiBold"/>
+              </a:rPr>
+              <a:t>Erster Punkt</a:t>
+            </a:r>
+          </a:p>
+          <a:p>
+            <a:pPr>
+              <a:lnSpc>
+                <a:spcPts val="1400"/>
+              </a:lnSpc>
+              <a:spcBef>
+                <a:spcPts val="530"/>
+              </a:spcBef>
+            </a:pPr>
+            <a:r>
+              <a:rPr sz="930" b="0" i="0">
+                <a:solidFill>
+                  <a:srgbClr val="3D3D3A"/>
+                </a:solidFill>
                 <a:latin typeface="Inter"/>
               </a:rPr>
-              <a:t>Erster Punkt</a:t>
-            </a:r>
-          </a:p>
-          <a:p>
-            <a:pPr>
-              <a:spcBef>
-                <a:spcPts val="270"/>
-              </a:spcBef>
-            </a:pPr>
-            <a:r>
-              <a:rPr sz="930" b="0" i="0">
-                <a:solidFill>
-                  <a:srgbClr val="3D3D3A"/>
-                </a:solidFill>
-                <a:latin typeface="Inter"/>
-              </a:rPr>
               <a:t>Ein halber Satz dazu</a:t>
             </a:r>
           </a:p>
@@ -11014,8 +11642,8 @@
         </p:nvSpPr>
         <p:spPr>
           <a:xfrm>
-            <a:off x="1557866" y="3696546"/>
-            <a:ext cx="1176866" cy="482599"/>
+            <a:off x="1557866" y="3713480"/>
+            <a:ext cx="1176866" cy="448733"/>
           </a:xfrm>
           <a:prstGeom prst="rect">
             <a:avLst/>
@@ -11028,29 +11656,37 @@
           </a:bodyPr>
           <a:lstStyle/>
           <a:p>
-            <a:r>
-              <a:rPr sz="1330" b="0" i="0">
+            <a:pPr>
+              <a:lnSpc>
+                <a:spcPts val="1870"/>
+              </a:lnSpc>
+            </a:pPr>
+            <a:r>
+              <a:rPr sz="1330" b="0" i="0" spc="-20">
                 <a:solidFill>
                   <a:srgbClr val="1C1C1E"/>
                 </a:solidFill>
+                <a:latin typeface="Inter SemiBold"/>
+              </a:rPr>
+              <a:t>Zweiter Punkt</a:t>
+            </a:r>
+          </a:p>
+          <a:p>
+            <a:pPr>
+              <a:lnSpc>
+                <a:spcPts val="1400"/>
+              </a:lnSpc>
+              <a:spcBef>
+                <a:spcPts val="530"/>
+              </a:spcBef>
+            </a:pPr>
+            <a:r>
+              <a:rPr sz="930" b="0" i="0">
+                <a:solidFill>
+                  <a:srgbClr val="3D3D3A"/>
+                </a:solidFill>
                 <a:latin typeface="Inter"/>
               </a:rPr>
-              <a:t>Zweiter Punkt</a:t>
-            </a:r>
-          </a:p>
-          <a:p>
-            <a:pPr>
-              <a:spcBef>
-                <a:spcPts val="270"/>
-              </a:spcBef>
-            </a:pPr>
-            <a:r>
-              <a:rPr sz="930" b="0" i="0">
-                <a:solidFill>
-                  <a:srgbClr val="3D3D3A"/>
-                </a:solidFill>
-                <a:latin typeface="Inter"/>
-              </a:rPr>
               <a:t>Ein halber Satz dazu</a:t>
             </a:r>
           </a:p>
@@ -11064,8 +11700,8 @@
         </p:nvSpPr>
         <p:spPr>
           <a:xfrm>
-            <a:off x="1557866" y="4492413"/>
-            <a:ext cx="1176866" cy="482599"/>
+            <a:off x="1557866" y="4526280"/>
+            <a:ext cx="1176866" cy="448733"/>
           </a:xfrm>
           <a:prstGeom prst="rect">
             <a:avLst/>
@@ -11078,29 +11714,37 @@
           </a:bodyPr>
           <a:lstStyle/>
           <a:p>
-            <a:r>
-              <a:rPr sz="1330" b="0" i="0">
+            <a:pPr>
+              <a:lnSpc>
+                <a:spcPts val="1870"/>
+              </a:lnSpc>
+            </a:pPr>
+            <a:r>
+              <a:rPr sz="1330" b="0" i="0" spc="-20">
                 <a:solidFill>
                   <a:srgbClr val="1C1C1E"/>
                 </a:solidFill>
+                <a:latin typeface="Inter SemiBold"/>
+              </a:rPr>
+              <a:t>Dritter Punkt</a:t>
+            </a:r>
+          </a:p>
+          <a:p>
+            <a:pPr>
+              <a:lnSpc>
+                <a:spcPts val="1400"/>
+              </a:lnSpc>
+              <a:spcBef>
+                <a:spcPts val="530"/>
+              </a:spcBef>
+            </a:pPr>
+            <a:r>
+              <a:rPr sz="930" b="0" i="0">
+                <a:solidFill>
+                  <a:srgbClr val="3D3D3A"/>
+                </a:solidFill>
                 <a:latin typeface="Inter"/>
               </a:rPr>
-              <a:t>Dritter Punkt</a:t>
-            </a:r>
-          </a:p>
-          <a:p>
-            <a:pPr>
-              <a:spcBef>
-                <a:spcPts val="270"/>
-              </a:spcBef>
-            </a:pPr>
-            <a:r>
-              <a:rPr sz="930" b="0" i="0">
-                <a:solidFill>
-                  <a:srgbClr val="3D3D3A"/>
-                </a:solidFill>
-                <a:latin typeface="Inter"/>
-              </a:rPr>
               <a:t>Ein halber Satz dazu</a:t>
             </a:r>
           </a:p>
@@ -11115,7 +11759,7 @@
         <p:spPr>
           <a:xfrm>
             <a:off x="2003213" y="6466839"/>
-            <a:ext cx="3928533" cy="176106"/>
+            <a:ext cx="3928533" cy="160866"/>
           </a:xfrm>
           <a:prstGeom prst="rect">
             <a:avLst/>
@@ -11128,12 +11772,17 @@
           </a:bodyPr>
           <a:lstStyle/>
           <a:p>
-            <a:r>
-              <a:rPr sz="800" b="1" i="0">
+            <a:pPr>
+              <a:lnSpc>
+                <a:spcPts val="1120"/>
+              </a:lnSpc>
+            </a:pPr>
+            <a:r>
+              <a:rPr sz="800" b="0" i="0">
                 <a:solidFill>
                   <a:srgbClr val="1C1C1E"/>
                 </a:solidFill>
-                <a:latin typeface="Inter"/>
+                <a:latin typeface="Inter SemiBold"/>
               </a:rPr>
               <a:t>Kunde Projekttitel</a:t>
             </a:r>
@@ -11148,8 +11797,8 @@
         </p:nvSpPr>
         <p:spPr>
           <a:xfrm>
-            <a:off x="6366933" y="2926080"/>
-            <a:ext cx="372533" cy="250613"/>
+            <a:off x="6366933" y="3016673"/>
+            <a:ext cx="206586" cy="203200"/>
           </a:xfrm>
           <a:prstGeom prst="rect">
             <a:avLst/>
@@ -11162,6 +11811,11 @@
           </a:bodyPr>
           <a:lstStyle/>
           <a:p>
+            <a:pPr>
+              <a:lnSpc>
+                <a:spcPts val="1710"/>
+              </a:lnSpc>
+            </a:pPr>
             <a:r>
               <a:rPr sz="1070" b="0" i="0">
                 <a:solidFill>
@@ -11182,8 +11836,8 @@
         </p:nvSpPr>
         <p:spPr>
           <a:xfrm>
-            <a:off x="6366933" y="3721946"/>
-            <a:ext cx="372533" cy="250613"/>
+            <a:off x="6366933" y="3829473"/>
+            <a:ext cx="199813" cy="203200"/>
           </a:xfrm>
           <a:prstGeom prst="rect">
             <a:avLst/>
@@ -11196,6 +11850,11 @@
           </a:bodyPr>
           <a:lstStyle/>
           <a:p>
+            <a:pPr>
+              <a:lnSpc>
+                <a:spcPts val="1710"/>
+              </a:lnSpc>
+            </a:pPr>
             <a:r>
               <a:rPr sz="1070" b="0" i="0">
                 <a:solidFill>
@@ -11216,8 +11875,8 @@
         </p:nvSpPr>
         <p:spPr>
           <a:xfrm>
-            <a:off x="6366933" y="4517813"/>
-            <a:ext cx="372533" cy="250613"/>
+            <a:off x="6366933" y="4642273"/>
+            <a:ext cx="203200" cy="203200"/>
           </a:xfrm>
           <a:prstGeom prst="rect">
             <a:avLst/>
@@ -11230,6 +11889,11 @@
           </a:bodyPr>
           <a:lstStyle/>
           <a:p>
+            <a:pPr>
+              <a:lnSpc>
+                <a:spcPts val="1710"/>
+              </a:lnSpc>
+            </a:pPr>
             <a:r>
               <a:rPr sz="1070" b="0" i="0">
                 <a:solidFill>
@@ -11251,7 +11915,7 @@
         <p:spPr>
           <a:xfrm>
             <a:off x="6908799" y="2900680"/>
-            <a:ext cx="1176866" cy="482599"/>
+            <a:ext cx="1176866" cy="448733"/>
           </a:xfrm>
           <a:prstGeom prst="rect">
             <a:avLst/>
@@ -11264,29 +11928,37 @@
           </a:bodyPr>
           <a:lstStyle/>
           <a:p>
-            <a:r>
-              <a:rPr sz="1330" b="0" i="0">
+            <a:pPr>
+              <a:lnSpc>
+                <a:spcPts val="1870"/>
+              </a:lnSpc>
+            </a:pPr>
+            <a:r>
+              <a:rPr sz="1330" b="0" i="0" spc="-20">
                 <a:solidFill>
                   <a:srgbClr val="1C1C1E"/>
                 </a:solidFill>
+                <a:latin typeface="Inter SemiBold"/>
+              </a:rPr>
+              <a:t>Vierter Punkt</a:t>
+            </a:r>
+          </a:p>
+          <a:p>
+            <a:pPr>
+              <a:lnSpc>
+                <a:spcPts val="1400"/>
+              </a:lnSpc>
+              <a:spcBef>
+                <a:spcPts val="530"/>
+              </a:spcBef>
+            </a:pPr>
+            <a:r>
+              <a:rPr sz="930" b="0" i="0">
+                <a:solidFill>
+                  <a:srgbClr val="3D3D3A"/>
+                </a:solidFill>
                 <a:latin typeface="Inter"/>
               </a:rPr>
-              <a:t>Vierter Punkt</a:t>
-            </a:r>
-          </a:p>
-          <a:p>
-            <a:pPr>
-              <a:spcBef>
-                <a:spcPts val="270"/>
-              </a:spcBef>
-            </a:pPr>
-            <a:r>
-              <a:rPr sz="930" b="0" i="0">
-                <a:solidFill>
-                  <a:srgbClr val="3D3D3A"/>
-                </a:solidFill>
-                <a:latin typeface="Inter"/>
-              </a:rPr>
               <a:t>Ein halber Satz dazu</a:t>
             </a:r>
           </a:p>
@@ -11300,8 +11972,8 @@
         </p:nvSpPr>
         <p:spPr>
           <a:xfrm>
-            <a:off x="6908799" y="3696546"/>
-            <a:ext cx="1176866" cy="482599"/>
+            <a:off x="6908799" y="3713480"/>
+            <a:ext cx="1176866" cy="448733"/>
           </a:xfrm>
           <a:prstGeom prst="rect">
             <a:avLst/>
@@ -11314,29 +11986,37 @@
           </a:bodyPr>
           <a:lstStyle/>
           <a:p>
-            <a:r>
-              <a:rPr sz="1330" b="0" i="0">
+            <a:pPr>
+              <a:lnSpc>
+                <a:spcPts val="1870"/>
+              </a:lnSpc>
+            </a:pPr>
+            <a:r>
+              <a:rPr sz="1330" b="0" i="0" spc="-20">
                 <a:solidFill>
                   <a:srgbClr val="1C1C1E"/>
                 </a:solidFill>
+                <a:latin typeface="Inter SemiBold"/>
+              </a:rPr>
+              <a:t>Fünfter Punkt</a:t>
+            </a:r>
+          </a:p>
+          <a:p>
+            <a:pPr>
+              <a:lnSpc>
+                <a:spcPts val="1400"/>
+              </a:lnSpc>
+              <a:spcBef>
+                <a:spcPts val="530"/>
+              </a:spcBef>
+            </a:pPr>
+            <a:r>
+              <a:rPr sz="930" b="0" i="0">
+                <a:solidFill>
+                  <a:srgbClr val="3D3D3A"/>
+                </a:solidFill>
                 <a:latin typeface="Inter"/>
               </a:rPr>
-              <a:t>Fünfter Punkt</a:t>
-            </a:r>
-          </a:p>
-          <a:p>
-            <a:pPr>
-              <a:spcBef>
-                <a:spcPts val="270"/>
-              </a:spcBef>
-            </a:pPr>
-            <a:r>
-              <a:rPr sz="930" b="0" i="0">
-                <a:solidFill>
-                  <a:srgbClr val="3D3D3A"/>
-                </a:solidFill>
-                <a:latin typeface="Inter"/>
-              </a:rPr>
               <a:t>Ein halber Satz dazu</a:t>
             </a:r>
           </a:p>
@@ -11350,8 +12030,8 @@
         </p:nvSpPr>
         <p:spPr>
           <a:xfrm>
-            <a:off x="6908799" y="4492413"/>
-            <a:ext cx="1228513" cy="482599"/>
+            <a:off x="6908799" y="4526280"/>
+            <a:ext cx="1228513" cy="448733"/>
           </a:xfrm>
           <a:prstGeom prst="rect">
             <a:avLst/>
@@ -11364,20 +12044,28 @@
           </a:bodyPr>
           <a:lstStyle/>
           <a:p>
-            <a:r>
-              <a:rPr sz="1330" b="0" i="0">
+            <a:pPr>
+              <a:lnSpc>
+                <a:spcPts val="1870"/>
+              </a:lnSpc>
+            </a:pPr>
+            <a:r>
+              <a:rPr sz="1330" b="0" i="0" spc="-20">
                 <a:solidFill>
                   <a:srgbClr val="1C1C1E"/>
                 </a:solidFill>
-                <a:latin typeface="Inter"/>
+                <a:latin typeface="Inter SemiBold"/>
               </a:rPr>
               <a:t>Sechster Punkt</a:t>
             </a:r>
           </a:p>
           <a:p>
             <a:pPr>
+              <a:lnSpc>
+                <a:spcPts val="1400"/>
+              </a:lnSpc>
               <a:spcBef>
-                <a:spcPts val="270"/>
+                <a:spcPts val="530"/>
               </a:spcBef>
             </a:pPr>
             <a:r>
@@ -11414,7 +12102,11 @@
           </a:bodyPr>
           <a:lstStyle/>
           <a:p>
-            <a:pPr algn="r"/>
+            <a:pPr algn="r">
+              <a:lnSpc>
+                <a:spcPts val="1120"/>
+              </a:lnSpc>
+            </a:pPr>
             <a:r>
               <a:rPr sz="800" b="0" i="0">
                 <a:solidFill>
@@ -11501,8 +12193,8 @@
         </p:nvSpPr>
         <p:spPr>
           <a:xfrm>
-            <a:off x="2171700" y="3109806"/>
-            <a:ext cx="7881619" cy="629920"/>
+            <a:off x="2171700" y="3075940"/>
+            <a:ext cx="7881619" cy="685800"/>
           </a:xfrm>
           <a:prstGeom prst="rect">
             <a:avLst/>
@@ -11515,13 +12207,17 @@
           </a:bodyPr>
           <a:lstStyle/>
           <a:p>
-            <a:pPr algn="ctr"/>
-            <a:r>
-              <a:rPr sz="4270" b="1" i="0">
+            <a:pPr algn="ctr">
+              <a:lnSpc>
+                <a:spcPts val="4690"/>
+              </a:lnSpc>
+            </a:pPr>
+            <a:r>
+              <a:rPr sz="4270" b="0" i="0" spc="-128">
                 <a:solidFill>
                   <a:srgbClr val="F5F1EB"/>
                 </a:solidFill>
-                <a:latin typeface="Inter"/>
+                <a:latin typeface="Inter SemiBold"/>
               </a:rPr>
               <a:t>Startklar, sobald ihr das Go gebt</a:t>
             </a:r>
@@ -11536,8 +12232,8 @@
         </p:nvSpPr>
         <p:spPr>
           <a:xfrm>
-            <a:off x="4995333" y="4247726"/>
-            <a:ext cx="2235200" cy="462279"/>
+            <a:off x="4995333" y="4515273"/>
+            <a:ext cx="2235200" cy="177800"/>
           </a:xfrm>
           <a:prstGeom prst="rect">
             <a:avLst/>
@@ -11550,7 +12246,50 @@
           </a:bodyPr>
           <a:lstStyle/>
           <a:p>
-            <a:pPr algn="ctr"/>
+            <a:pPr algn="ctr">
+              <a:lnSpc>
+                <a:spcPts val="1400"/>
+              </a:lnSpc>
+            </a:pPr>
+            <a:r>
+              <a:rPr sz="930" b="0" i="0">
+                <a:solidFill>
+                  <a:srgbClr val="AF94D2"/>
+                </a:solidFill>
+                <a:latin typeface="Inter"/>
+              </a:rPr>
+              <a:t>vorname.nachname@bridgemaker.com</a:t>
+            </a:r>
+          </a:p>
+        </p:txBody>
+      </p:sp>
+      <p:sp>
+        <p:nvSpPr>
+          <p:cNvPr id="6" name="TextBox 5"/>
+          <p:cNvSpPr txBox="1"/>
+          <p:nvPr/>
+        </p:nvSpPr>
+        <p:spPr>
+          <a:xfrm>
+            <a:off x="5251026" y="4264660"/>
+            <a:ext cx="1723813" cy="203200"/>
+          </a:xfrm>
+          <a:prstGeom prst="rect">
+            <a:avLst/>
+          </a:prstGeom>
+          <a:noFill/>
+        </p:spPr>
+        <p:txBody>
+          <a:bodyPr wrap="square" lIns="0" rIns="0" tIns="0" bIns="0">
+            <a:normAutofit/>
+          </a:bodyPr>
+          <a:lstStyle/>
+          <a:p>
+            <a:pPr algn="ctr">
+              <a:lnSpc>
+                <a:spcPts val="1710"/>
+              </a:lnSpc>
+            </a:pPr>
             <a:r>
               <a:rPr sz="1070" b="0" i="0">
                 <a:solidFill>
@@ -11559,22 +12298,6 @@
                 <a:latin typeface="Inter"/>
               </a:rPr>
               <a:t>Vorname Nachname, Rolle</a:t>
-            </a:r>
-          </a:p>
-          <a:p>
-            <a:pPr algn="ctr">
-              <a:spcBef>
-                <a:spcPts val="270"/>
-              </a:spcBef>
-            </a:pPr>
-            <a:r>
-              <a:rPr sz="930" b="0" i="0">
-                <a:solidFill>
-                  <a:srgbClr val="AF94D2"/>
-                </a:solidFill>
-                <a:latin typeface="Inter"/>
-              </a:rPr>
-              <a:t>vorname.nachname@bridgemaker.com</a:t>
             </a:r>
           </a:p>
         </p:txBody>
@@ -11613,7 +12336,7 @@
         </p:nvSpPr>
         <p:spPr>
           <a:xfrm>
-            <a:off x="1015999" y="2714413"/>
+            <a:off x="1015999" y="2680546"/>
             <a:ext cx="4809066" cy="8466"/>
           </a:xfrm>
           <a:prstGeom prst="rect">
@@ -11627,20 +12350,6 @@
           </a:ln>
           <a:effectLst/>
         </p:spPr>
-        <p:style>
-          <a:lnRef idx="1">
-            <a:schemeClr val="accent1"/>
-          </a:lnRef>
-          <a:fillRef idx="3">
-            <a:schemeClr val="accent1"/>
-          </a:fillRef>
-          <a:effectRef idx="2">
-            <a:schemeClr val="accent1"/>
-          </a:effectRef>
-          <a:fontRef idx="minor">
-            <a:schemeClr val="lt1"/>
-          </a:fontRef>
-        </p:style>
         <p:txBody>
           <a:bodyPr rtlCol="0" anchor="ctr"/>
           <a:lstStyle/>
@@ -11657,7 +12366,7 @@
         </p:nvSpPr>
         <p:spPr>
           <a:xfrm>
-            <a:off x="1015999" y="3303693"/>
+            <a:off x="1015999" y="3493346"/>
             <a:ext cx="4809066" cy="8466"/>
           </a:xfrm>
           <a:prstGeom prst="rect">
@@ -11671,20 +12380,6 @@
           </a:ln>
           <a:effectLst/>
         </p:spPr>
-        <p:style>
-          <a:lnRef idx="1">
-            <a:schemeClr val="accent1"/>
-          </a:lnRef>
-          <a:fillRef idx="3">
-            <a:schemeClr val="accent1"/>
-          </a:fillRef>
-          <a:effectRef idx="2">
-            <a:schemeClr val="accent1"/>
-          </a:effectRef>
-          <a:fontRef idx="minor">
-            <a:schemeClr val="lt1"/>
-          </a:fontRef>
-        </p:style>
         <p:txBody>
           <a:bodyPr rtlCol="0" anchor="ctr"/>
           <a:lstStyle/>
@@ -11701,7 +12396,7 @@
         </p:nvSpPr>
         <p:spPr>
           <a:xfrm>
-            <a:off x="1015999" y="3892973"/>
+            <a:off x="1015999" y="4306146"/>
             <a:ext cx="4809066" cy="8466"/>
           </a:xfrm>
           <a:prstGeom prst="rect">
@@ -11715,20 +12410,6 @@
           </a:ln>
           <a:effectLst/>
         </p:spPr>
-        <p:style>
-          <a:lnRef idx="1">
-            <a:schemeClr val="accent1"/>
-          </a:lnRef>
-          <a:fillRef idx="3">
-            <a:schemeClr val="accent1"/>
-          </a:fillRef>
-          <a:effectRef idx="2">
-            <a:schemeClr val="accent1"/>
-          </a:effectRef>
-          <a:fontRef idx="minor">
-            <a:schemeClr val="lt1"/>
-          </a:fontRef>
-        </p:style>
         <p:txBody>
           <a:bodyPr rtlCol="0" anchor="ctr"/>
           <a:lstStyle/>
@@ -11745,7 +12426,7 @@
         </p:nvSpPr>
         <p:spPr>
           <a:xfrm>
-            <a:off x="6366933" y="2714413"/>
+            <a:off x="6366933" y="2680546"/>
             <a:ext cx="4809066" cy="8466"/>
           </a:xfrm>
           <a:prstGeom prst="rect">
@@ -11759,20 +12440,6 @@
           </a:ln>
           <a:effectLst/>
         </p:spPr>
-        <p:style>
-          <a:lnRef idx="1">
-            <a:schemeClr val="accent1"/>
-          </a:lnRef>
-          <a:fillRef idx="3">
-            <a:schemeClr val="accent1"/>
-          </a:fillRef>
-          <a:effectRef idx="2">
-            <a:schemeClr val="accent1"/>
-          </a:effectRef>
-          <a:fontRef idx="minor">
-            <a:schemeClr val="lt1"/>
-          </a:fontRef>
-        </p:style>
         <p:txBody>
           <a:bodyPr rtlCol="0" anchor="ctr"/>
           <a:lstStyle/>
@@ -11789,7 +12456,7 @@
         </p:nvSpPr>
         <p:spPr>
           <a:xfrm>
-            <a:off x="6366933" y="3510280"/>
+            <a:off x="6366933" y="3493346"/>
             <a:ext cx="4809066" cy="8466"/>
           </a:xfrm>
           <a:prstGeom prst="rect">
@@ -11803,20 +12470,6 @@
           </a:ln>
           <a:effectLst/>
         </p:spPr>
-        <p:style>
-          <a:lnRef idx="1">
-            <a:schemeClr val="accent1"/>
-          </a:lnRef>
-          <a:fillRef idx="3">
-            <a:schemeClr val="accent1"/>
-          </a:fillRef>
-          <a:effectRef idx="2">
-            <a:schemeClr val="accent1"/>
-          </a:effectRef>
-          <a:fontRef idx="minor">
-            <a:schemeClr val="lt1"/>
-          </a:fontRef>
-        </p:style>
         <p:txBody>
           <a:bodyPr rtlCol="0" anchor="ctr"/>
           <a:lstStyle/>
@@ -11847,20 +12500,6 @@
           </a:ln>
           <a:effectLst/>
         </p:spPr>
-        <p:style>
-          <a:lnRef idx="1">
-            <a:schemeClr val="accent1"/>
-          </a:lnRef>
-          <a:fillRef idx="3">
-            <a:schemeClr val="accent1"/>
-          </a:fillRef>
-          <a:effectRef idx="2">
-            <a:schemeClr val="accent1"/>
-          </a:effectRef>
-          <a:fontRef idx="minor">
-            <a:schemeClr val="lt1"/>
-          </a:fontRef>
-        </p:style>
         <p:txBody>
           <a:bodyPr rtlCol="0" anchor="ctr"/>
           <a:lstStyle/>
@@ -11877,7 +12516,7 @@
         </p:nvSpPr>
         <p:spPr>
           <a:xfrm>
-            <a:off x="6366933" y="5102013"/>
+            <a:off x="6366933" y="5118946"/>
             <a:ext cx="4809066" cy="8466"/>
           </a:xfrm>
           <a:prstGeom prst="rect">
@@ -11891,20 +12530,6 @@
           </a:ln>
           <a:effectLst/>
         </p:spPr>
-        <p:style>
-          <a:lnRef idx="1">
-            <a:schemeClr val="accent1"/>
-          </a:lnRef>
-          <a:fillRef idx="3">
-            <a:schemeClr val="accent1"/>
-          </a:fillRef>
-          <a:effectRef idx="2">
-            <a:schemeClr val="accent1"/>
-          </a:effectRef>
-          <a:fontRef idx="minor">
-            <a:schemeClr val="lt1"/>
-          </a:fontRef>
-        </p:style>
         <p:txBody>
           <a:bodyPr rtlCol="0" anchor="ctr"/>
           <a:lstStyle/>
@@ -11946,7 +12571,7 @@
         <p:spPr>
           <a:xfrm>
             <a:off x="1015999" y="389466"/>
-            <a:ext cx="4775200" cy="176106"/>
+            <a:ext cx="4775200" cy="160866"/>
           </a:xfrm>
           <a:prstGeom prst="rect">
             <a:avLst/>
@@ -11959,12 +12584,17 @@
           </a:bodyPr>
           <a:lstStyle/>
           <a:p>
-            <a:r>
-              <a:rPr sz="800" b="0" i="0">
+            <a:pPr>
+              <a:lnSpc>
+                <a:spcPts val="1120"/>
+              </a:lnSpc>
+            </a:pPr>
+            <a:r>
+              <a:rPr sz="800" b="0" i="0" spc="80">
                 <a:solidFill>
                   <a:srgbClr val="6B6B65"/>
                 </a:solidFill>
-                <a:latin typeface="Inter"/>
+                <a:latin typeface="Inter SemiBold"/>
               </a:rPr>
               <a:t>ZIEL UND AGENDA</a:t>
             </a:r>
@@ -11979,8 +12609,8 @@
         </p:nvSpPr>
         <p:spPr>
           <a:xfrm>
-            <a:off x="1015999" y="795866"/>
-            <a:ext cx="8500533" cy="968586"/>
+            <a:off x="1015999" y="778933"/>
+            <a:ext cx="4467860" cy="1000760"/>
           </a:xfrm>
           <a:prstGeom prst="rect">
             <a:avLst/>
@@ -11993,12 +12623,17 @@
           </a:bodyPr>
           <a:lstStyle/>
           <a:p>
-            <a:r>
-              <a:rPr sz="3200" b="1" i="0">
+            <a:pPr>
+              <a:lnSpc>
+                <a:spcPts val="3679"/>
+              </a:lnSpc>
+            </a:pPr>
+            <a:r>
+              <a:rPr sz="3200" b="0" i="0" spc="-80">
                 <a:solidFill>
                   <a:srgbClr val="1C1C1E"/>
                 </a:solidFill>
-                <a:latin typeface="Inter"/>
+                <a:latin typeface="Inter SemiBold"/>
               </a:rPr>
               <a:t>Heute priorisieren wir A und entscheiden über B</a:t>
             </a:r>
@@ -12013,8 +12648,8 @@
         </p:nvSpPr>
         <p:spPr>
           <a:xfrm>
-            <a:off x="1015999" y="2419773"/>
-            <a:ext cx="4842933" cy="176106"/>
+            <a:off x="1015999" y="2385906"/>
+            <a:ext cx="4436533" cy="160866"/>
           </a:xfrm>
           <a:prstGeom prst="rect">
             <a:avLst/>
@@ -12027,12 +12662,17 @@
           </a:bodyPr>
           <a:lstStyle/>
           <a:p>
-            <a:r>
-              <a:rPr sz="800" b="0" i="0">
+            <a:pPr>
+              <a:lnSpc>
+                <a:spcPts val="1120"/>
+              </a:lnSpc>
+            </a:pPr>
+            <a:r>
+              <a:rPr sz="800" b="0" i="0" spc="80">
                 <a:solidFill>
                   <a:srgbClr val="6B6B65"/>
                 </a:solidFill>
-                <a:latin typeface="Inter"/>
+                <a:latin typeface="Inter SemiBold"/>
               </a:rPr>
               <a:t>IHR ENTSCHEIDET HEUTE ÜBER DREI PUNKTE</a:t>
             </a:r>
@@ -12047,8 +12687,8 @@
         </p:nvSpPr>
         <p:spPr>
           <a:xfrm>
-            <a:off x="1015999" y="2900680"/>
-            <a:ext cx="372533" cy="250613"/>
+            <a:off x="1015999" y="2982806"/>
+            <a:ext cx="174413" cy="203200"/>
           </a:xfrm>
           <a:prstGeom prst="rect">
             <a:avLst/>
@@ -12061,6 +12701,11 @@
           </a:bodyPr>
           <a:lstStyle/>
           <a:p>
+            <a:pPr>
+              <a:lnSpc>
+                <a:spcPts val="1710"/>
+              </a:lnSpc>
+            </a:pPr>
             <a:r>
               <a:rPr sz="1070" b="0" i="0">
                 <a:solidFill>
@@ -12081,8 +12726,8 @@
         </p:nvSpPr>
         <p:spPr>
           <a:xfrm>
-            <a:off x="1015999" y="3489959"/>
-            <a:ext cx="372533" cy="250613"/>
+            <a:off x="1015999" y="3795606"/>
+            <a:ext cx="202353" cy="203200"/>
           </a:xfrm>
           <a:prstGeom prst="rect">
             <a:avLst/>
@@ -12095,6 +12740,11 @@
           </a:bodyPr>
           <a:lstStyle/>
           <a:p>
+            <a:pPr>
+              <a:lnSpc>
+                <a:spcPts val="1710"/>
+              </a:lnSpc>
+            </a:pPr>
             <a:r>
               <a:rPr sz="1070" b="0" i="0">
                 <a:solidFill>
@@ -12115,8 +12765,8 @@
         </p:nvSpPr>
         <p:spPr>
           <a:xfrm>
-            <a:off x="1015999" y="4079240"/>
-            <a:ext cx="372533" cy="250613"/>
+            <a:off x="1015999" y="4608406"/>
+            <a:ext cx="203200" cy="203200"/>
           </a:xfrm>
           <a:prstGeom prst="rect">
             <a:avLst/>
@@ -12129,6 +12779,11 @@
           </a:bodyPr>
           <a:lstStyle/>
           <a:p>
+            <a:pPr>
+              <a:lnSpc>
+                <a:spcPts val="1710"/>
+              </a:lnSpc>
+            </a:pPr>
             <a:r>
               <a:rPr sz="1070" b="0" i="0">
                 <a:solidFill>
@@ -12149,8 +12804,8 @@
         </p:nvSpPr>
         <p:spPr>
           <a:xfrm>
-            <a:off x="1557866" y="2875280"/>
-            <a:ext cx="2153073" cy="270933"/>
+            <a:off x="1557866" y="2972646"/>
+            <a:ext cx="2153073" cy="237066"/>
           </a:xfrm>
           <a:prstGeom prst="rect">
             <a:avLst/>
@@ -12163,12 +12818,17 @@
           </a:bodyPr>
           <a:lstStyle/>
           <a:p>
-            <a:r>
-              <a:rPr sz="1330" b="0" i="0">
+            <a:pPr>
+              <a:lnSpc>
+                <a:spcPts val="1870"/>
+              </a:lnSpc>
+            </a:pPr>
+            <a:r>
+              <a:rPr sz="1330" b="0" i="0" spc="-20">
                 <a:solidFill>
                   <a:srgbClr val="1C1C1E"/>
                 </a:solidFill>
-                <a:latin typeface="Inter"/>
+                <a:latin typeface="Inter SemiBold"/>
               </a:rPr>
               <a:t>Erster Entscheidungspunkt</a:t>
             </a:r>
@@ -12183,8 +12843,8 @@
         </p:nvSpPr>
         <p:spPr>
           <a:xfrm>
-            <a:off x="1557866" y="3464559"/>
-            <a:ext cx="2280073" cy="270933"/>
+            <a:off x="1557866" y="3785446"/>
+            <a:ext cx="2280073" cy="237066"/>
           </a:xfrm>
           <a:prstGeom prst="rect">
             <a:avLst/>
@@ -12197,12 +12857,17 @@
           </a:bodyPr>
           <a:lstStyle/>
           <a:p>
-            <a:r>
-              <a:rPr sz="1330" b="0" i="0">
+            <a:pPr>
+              <a:lnSpc>
+                <a:spcPts val="1870"/>
+              </a:lnSpc>
+            </a:pPr>
+            <a:r>
+              <a:rPr sz="1330" b="0" i="0" spc="-20">
                 <a:solidFill>
                   <a:srgbClr val="1C1C1E"/>
                 </a:solidFill>
-                <a:latin typeface="Inter"/>
+                <a:latin typeface="Inter SemiBold"/>
               </a:rPr>
               <a:t>Zweiter Entscheidungspunkt</a:t>
             </a:r>
@@ -12217,8 +12882,8 @@
         </p:nvSpPr>
         <p:spPr>
           <a:xfrm>
-            <a:off x="1557866" y="4053840"/>
-            <a:ext cx="2181013" cy="270933"/>
+            <a:off x="1557866" y="4598246"/>
+            <a:ext cx="2181013" cy="237066"/>
           </a:xfrm>
           <a:prstGeom prst="rect">
             <a:avLst/>
@@ -12231,12 +12896,17 @@
           </a:bodyPr>
           <a:lstStyle/>
           <a:p>
-            <a:r>
-              <a:rPr sz="1330" b="0" i="0">
+            <a:pPr>
+              <a:lnSpc>
+                <a:spcPts val="1870"/>
+              </a:lnSpc>
+            </a:pPr>
+            <a:r>
+              <a:rPr sz="1330" b="0" i="0" spc="-20">
                 <a:solidFill>
                   <a:srgbClr val="1C1C1E"/>
                 </a:solidFill>
-                <a:latin typeface="Inter"/>
+                <a:latin typeface="Inter SemiBold"/>
               </a:rPr>
               <a:t>Dritter Entscheidungspunkt</a:t>
             </a:r>
@@ -12252,7 +12922,7 @@
         <p:spPr>
           <a:xfrm>
             <a:off x="2003213" y="6466839"/>
-            <a:ext cx="3928533" cy="176106"/>
+            <a:ext cx="3928533" cy="160866"/>
           </a:xfrm>
           <a:prstGeom prst="rect">
             <a:avLst/>
@@ -12265,12 +12935,17 @@
           </a:bodyPr>
           <a:lstStyle/>
           <a:p>
-            <a:r>
-              <a:rPr sz="800" b="1" i="0">
+            <a:pPr>
+              <a:lnSpc>
+                <a:spcPts val="1120"/>
+              </a:lnSpc>
+            </a:pPr>
+            <a:r>
+              <a:rPr sz="800" b="0" i="0">
                 <a:solidFill>
                   <a:srgbClr val="1C1C1E"/>
                 </a:solidFill>
-                <a:latin typeface="Inter"/>
+                <a:latin typeface="Inter SemiBold"/>
               </a:rPr>
               <a:t>Kunde Projekttitel</a:t>
             </a:r>
@@ -12285,8 +12960,8 @@
         </p:nvSpPr>
         <p:spPr>
           <a:xfrm>
-            <a:off x="6366933" y="2419773"/>
-            <a:ext cx="4842933" cy="176106"/>
+            <a:off x="6366933" y="2385906"/>
+            <a:ext cx="4436533" cy="160866"/>
           </a:xfrm>
           <a:prstGeom prst="rect">
             <a:avLst/>
@@ -12299,12 +12974,17 @@
           </a:bodyPr>
           <a:lstStyle/>
           <a:p>
-            <a:r>
-              <a:rPr sz="800" b="0" i="0">
+            <a:pPr>
+              <a:lnSpc>
+                <a:spcPts val="1120"/>
+              </a:lnSpc>
+            </a:pPr>
+            <a:r>
+              <a:rPr sz="800" b="0" i="0" spc="80">
                 <a:solidFill>
                   <a:srgbClr val="6B6B65"/>
                 </a:solidFill>
-                <a:latin typeface="Inter"/>
+                <a:latin typeface="Inter SemiBold"/>
               </a:rPr>
               <a:t>ABLAUF IN VIER KAPITELN</a:t>
             </a:r>
@@ -12319,8 +12999,8 @@
         </p:nvSpPr>
         <p:spPr>
           <a:xfrm>
-            <a:off x="6366933" y="2900680"/>
-            <a:ext cx="372533" cy="250613"/>
+            <a:off x="6366933" y="2982806"/>
+            <a:ext cx="174413" cy="203200"/>
           </a:xfrm>
           <a:prstGeom prst="rect">
             <a:avLst/>
@@ -12333,6 +13013,11 @@
           </a:bodyPr>
           <a:lstStyle/>
           <a:p>
+            <a:pPr>
+              <a:lnSpc>
+                <a:spcPts val="1710"/>
+              </a:lnSpc>
+            </a:pPr>
             <a:r>
               <a:rPr sz="1070" b="0" i="0">
                 <a:solidFill>
@@ -12353,8 +13038,8 @@
         </p:nvSpPr>
         <p:spPr>
           <a:xfrm>
-            <a:off x="6366933" y="3696546"/>
-            <a:ext cx="372533" cy="250613"/>
+            <a:off x="6366933" y="3795606"/>
+            <a:ext cx="202353" cy="203200"/>
           </a:xfrm>
           <a:prstGeom prst="rect">
             <a:avLst/>
@@ -12367,6 +13052,11 @@
           </a:bodyPr>
           <a:lstStyle/>
           <a:p>
+            <a:pPr>
+              <a:lnSpc>
+                <a:spcPts val="1710"/>
+              </a:lnSpc>
+            </a:pPr>
             <a:r>
               <a:rPr sz="1070" b="0" i="0">
                 <a:solidFill>
@@ -12387,8 +13077,8 @@
         </p:nvSpPr>
         <p:spPr>
           <a:xfrm>
-            <a:off x="6366933" y="4492413"/>
-            <a:ext cx="372533" cy="250613"/>
+            <a:off x="6366933" y="4608406"/>
+            <a:ext cx="203200" cy="203200"/>
           </a:xfrm>
           <a:prstGeom prst="rect">
             <a:avLst/>
@@ -12401,6 +13091,11 @@
           </a:bodyPr>
           <a:lstStyle/>
           <a:p>
+            <a:pPr>
+              <a:lnSpc>
+                <a:spcPts val="1710"/>
+              </a:lnSpc>
+            </a:pPr>
             <a:r>
               <a:rPr sz="1070" b="0" i="0">
                 <a:solidFill>
@@ -12421,8 +13116,8 @@
         </p:nvSpPr>
         <p:spPr>
           <a:xfrm>
-            <a:off x="6366933" y="5288280"/>
-            <a:ext cx="372533" cy="250613"/>
+            <a:off x="6366933" y="5421206"/>
+            <a:ext cx="206586" cy="203200"/>
           </a:xfrm>
           <a:prstGeom prst="rect">
             <a:avLst/>
@@ -12435,6 +13130,11 @@
           </a:bodyPr>
           <a:lstStyle/>
           <a:p>
+            <a:pPr>
+              <a:lnSpc>
+                <a:spcPts val="1710"/>
+              </a:lnSpc>
+            </a:pPr>
             <a:r>
               <a:rPr sz="1070" b="0" i="0">
                 <a:solidFill>
@@ -12455,8 +13155,8 @@
         </p:nvSpPr>
         <p:spPr>
           <a:xfrm>
-            <a:off x="6908799" y="2875280"/>
-            <a:ext cx="1705186" cy="482599"/>
+            <a:off x="6908799" y="2866813"/>
+            <a:ext cx="1705186" cy="448733"/>
           </a:xfrm>
           <a:prstGeom prst="rect">
             <a:avLst/>
@@ -12469,29 +13169,37 @@
           </a:bodyPr>
           <a:lstStyle/>
           <a:p>
-            <a:r>
-              <a:rPr sz="1330" b="0" i="0">
+            <a:pPr>
+              <a:lnSpc>
+                <a:spcPts val="1870"/>
+              </a:lnSpc>
+            </a:pPr>
+            <a:r>
+              <a:rPr sz="1330" b="0" i="0" spc="-20">
                 <a:solidFill>
                   <a:srgbClr val="1C1C1E"/>
                 </a:solidFill>
+                <a:latin typeface="Inter SemiBold"/>
+              </a:rPr>
+              <a:t>Erstes Kapitel</a:t>
+            </a:r>
+          </a:p>
+          <a:p>
+            <a:pPr>
+              <a:lnSpc>
+                <a:spcPts val="1400"/>
+              </a:lnSpc>
+              <a:spcBef>
+                <a:spcPts val="530"/>
+              </a:spcBef>
+            </a:pPr>
+            <a:r>
+              <a:rPr sz="930" b="0" i="0">
+                <a:solidFill>
+                  <a:srgbClr val="6B6B65"/>
+                </a:solidFill>
                 <a:latin typeface="Inter"/>
               </a:rPr>
-              <a:t>Erstes Kapitel</a:t>
-            </a:r>
-          </a:p>
-          <a:p>
-            <a:pPr>
-              <a:spcBef>
-                <a:spcPts val="270"/>
-              </a:spcBef>
-            </a:pPr>
-            <a:r>
-              <a:rPr sz="930" b="0" i="0">
-                <a:solidFill>
-                  <a:srgbClr val="6B6B65"/>
-                </a:solidFill>
-                <a:latin typeface="Inter"/>
-              </a:rPr>
               <a:t>Halber Satz, was hier passiert</a:t>
             </a:r>
           </a:p>
@@ -12505,8 +13213,8 @@
         </p:nvSpPr>
         <p:spPr>
           <a:xfrm>
-            <a:off x="6908799" y="3671146"/>
-            <a:ext cx="1705186" cy="482599"/>
+            <a:off x="6908799" y="3679613"/>
+            <a:ext cx="1705186" cy="448733"/>
           </a:xfrm>
           <a:prstGeom prst="rect">
             <a:avLst/>
@@ -12519,29 +13227,37 @@
           </a:bodyPr>
           <a:lstStyle/>
           <a:p>
-            <a:r>
-              <a:rPr sz="1330" b="0" i="0">
+            <a:pPr>
+              <a:lnSpc>
+                <a:spcPts val="1870"/>
+              </a:lnSpc>
+            </a:pPr>
+            <a:r>
+              <a:rPr sz="1330" b="0" i="0" spc="-20">
                 <a:solidFill>
                   <a:srgbClr val="1C1C1E"/>
                 </a:solidFill>
+                <a:latin typeface="Inter SemiBold"/>
+              </a:rPr>
+              <a:t>Zweites Kapitel</a:t>
+            </a:r>
+          </a:p>
+          <a:p>
+            <a:pPr>
+              <a:lnSpc>
+                <a:spcPts val="1400"/>
+              </a:lnSpc>
+              <a:spcBef>
+                <a:spcPts val="530"/>
+              </a:spcBef>
+            </a:pPr>
+            <a:r>
+              <a:rPr sz="930" b="0" i="0">
+                <a:solidFill>
+                  <a:srgbClr val="6B6B65"/>
+                </a:solidFill>
                 <a:latin typeface="Inter"/>
               </a:rPr>
-              <a:t>Zweites Kapitel</a:t>
-            </a:r>
-          </a:p>
-          <a:p>
-            <a:pPr>
-              <a:spcBef>
-                <a:spcPts val="270"/>
-              </a:spcBef>
-            </a:pPr>
-            <a:r>
-              <a:rPr sz="930" b="0" i="0">
-                <a:solidFill>
-                  <a:srgbClr val="6B6B65"/>
-                </a:solidFill>
-                <a:latin typeface="Inter"/>
-              </a:rPr>
               <a:t>Halber Satz, was hier passiert</a:t>
             </a:r>
           </a:p>
@@ -12555,8 +13271,8 @@
         </p:nvSpPr>
         <p:spPr>
           <a:xfrm>
-            <a:off x="6908799" y="4467013"/>
-            <a:ext cx="1705186" cy="482599"/>
+            <a:off x="6908799" y="4492413"/>
+            <a:ext cx="1705186" cy="448733"/>
           </a:xfrm>
           <a:prstGeom prst="rect">
             <a:avLst/>
@@ -12569,29 +13285,37 @@
           </a:bodyPr>
           <a:lstStyle/>
           <a:p>
-            <a:r>
-              <a:rPr sz="1330" b="0" i="0">
+            <a:pPr>
+              <a:lnSpc>
+                <a:spcPts val="1870"/>
+              </a:lnSpc>
+            </a:pPr>
+            <a:r>
+              <a:rPr sz="1330" b="0" i="0" spc="-20">
                 <a:solidFill>
                   <a:srgbClr val="1C1C1E"/>
                 </a:solidFill>
+                <a:latin typeface="Inter SemiBold"/>
+              </a:rPr>
+              <a:t>Drittes Kapitel</a:t>
+            </a:r>
+          </a:p>
+          <a:p>
+            <a:pPr>
+              <a:lnSpc>
+                <a:spcPts val="1400"/>
+              </a:lnSpc>
+              <a:spcBef>
+                <a:spcPts val="530"/>
+              </a:spcBef>
+            </a:pPr>
+            <a:r>
+              <a:rPr sz="930" b="0" i="0">
+                <a:solidFill>
+                  <a:srgbClr val="6B6B65"/>
+                </a:solidFill>
                 <a:latin typeface="Inter"/>
               </a:rPr>
-              <a:t>Drittes Kapitel</a:t>
-            </a:r>
-          </a:p>
-          <a:p>
-            <a:pPr>
-              <a:spcBef>
-                <a:spcPts val="270"/>
-              </a:spcBef>
-            </a:pPr>
-            <a:r>
-              <a:rPr sz="930" b="0" i="0">
-                <a:solidFill>
-                  <a:srgbClr val="6B6B65"/>
-                </a:solidFill>
-                <a:latin typeface="Inter"/>
-              </a:rPr>
               <a:t>Halber Satz, was hier passiert</a:t>
             </a:r>
           </a:p>
@@ -12605,8 +13329,8 @@
         </p:nvSpPr>
         <p:spPr>
           <a:xfrm>
-            <a:off x="6908799" y="5262880"/>
-            <a:ext cx="1705186" cy="482599"/>
+            <a:off x="6908799" y="5305213"/>
+            <a:ext cx="1705186" cy="448733"/>
           </a:xfrm>
           <a:prstGeom prst="rect">
             <a:avLst/>
@@ -12619,20 +13343,28 @@
           </a:bodyPr>
           <a:lstStyle/>
           <a:p>
-            <a:r>
-              <a:rPr sz="1330" b="0" i="0">
+            <a:pPr>
+              <a:lnSpc>
+                <a:spcPts val="1870"/>
+              </a:lnSpc>
+            </a:pPr>
+            <a:r>
+              <a:rPr sz="1330" b="0" i="0" spc="-20">
                 <a:solidFill>
                   <a:srgbClr val="1C1C1E"/>
                 </a:solidFill>
-                <a:latin typeface="Inter"/>
+                <a:latin typeface="Inter SemiBold"/>
               </a:rPr>
               <a:t>Viertes Kapitel</a:t>
             </a:r>
           </a:p>
           <a:p>
             <a:pPr>
+              <a:lnSpc>
+                <a:spcPts val="1400"/>
+              </a:lnSpc>
               <a:spcBef>
-                <a:spcPts val="270"/>
+                <a:spcPts val="530"/>
               </a:spcBef>
             </a:pPr>
             <a:r>
@@ -12669,7 +13401,11 @@
           </a:bodyPr>
           <a:lstStyle/>
           <a:p>
-            <a:pPr algn="r"/>
+            <a:pPr algn="r">
+              <a:lnSpc>
+                <a:spcPts val="1120"/>
+              </a:lnSpc>
+            </a:pPr>
             <a:r>
               <a:rPr sz="800" b="0" i="0">
                 <a:solidFill>
@@ -12757,7 +13493,7 @@
         <p:spPr>
           <a:xfrm>
             <a:off x="1015999" y="4355253"/>
-            <a:ext cx="7484533" cy="176106"/>
+            <a:ext cx="4436533" cy="160866"/>
           </a:xfrm>
           <a:prstGeom prst="rect">
             <a:avLst/>
@@ -12770,12 +13506,17 @@
           </a:bodyPr>
           <a:lstStyle/>
           <a:p>
-            <a:r>
-              <a:rPr sz="800" b="0" i="0">
+            <a:pPr>
+              <a:lnSpc>
+                <a:spcPts val="1120"/>
+              </a:lnSpc>
+            </a:pPr>
+            <a:r>
+              <a:rPr sz="800" b="0" i="0" spc="80">
                 <a:solidFill>
                   <a:srgbClr val="3D3D3A"/>
                 </a:solidFill>
-                <a:latin typeface="Inter"/>
+                <a:latin typeface="Inter SemiBold"/>
               </a:rPr>
               <a:t>KAPITEL 01</a:t>
             </a:r>
@@ -12790,8 +13531,8 @@
         </p:nvSpPr>
         <p:spPr>
           <a:xfrm>
-            <a:off x="1015999" y="4700693"/>
-            <a:ext cx="7484533" cy="1225973"/>
+            <a:off x="1015999" y="4666826"/>
+            <a:ext cx="4041140" cy="1281853"/>
           </a:xfrm>
           <a:prstGeom prst="rect">
             <a:avLst/>
@@ -12804,12 +13545,17 @@
           </a:bodyPr>
           <a:lstStyle/>
           <a:p>
-            <a:r>
-              <a:rPr sz="4270" b="1" i="0">
+            <a:pPr>
+              <a:lnSpc>
+                <a:spcPts val="4690"/>
+              </a:lnSpc>
+            </a:pPr>
+            <a:r>
+              <a:rPr sz="4270" b="0" i="0" spc="-128">
                 <a:solidFill>
                   <a:srgbClr val="1C1C1E"/>
                 </a:solidFill>
-                <a:latin typeface="Inter"/>
+                <a:latin typeface="Inter SemiBold"/>
               </a:rPr>
               <a:t>Eine Zeile, die das Kapitel trägt</a:t>
             </a:r>
@@ -12825,7 +13571,7 @@
         <p:spPr>
           <a:xfrm>
             <a:off x="2003213" y="6466839"/>
-            <a:ext cx="3928533" cy="176106"/>
+            <a:ext cx="3928533" cy="160866"/>
           </a:xfrm>
           <a:prstGeom prst="rect">
             <a:avLst/>
@@ -12838,12 +13584,17 @@
           </a:bodyPr>
           <a:lstStyle/>
           <a:p>
-            <a:r>
-              <a:rPr sz="800" b="1" i="0">
+            <a:pPr>
+              <a:lnSpc>
+                <a:spcPts val="1120"/>
+              </a:lnSpc>
+            </a:pPr>
+            <a:r>
+              <a:rPr sz="800" b="0" i="0">
                 <a:solidFill>
                   <a:srgbClr val="1C1C1E"/>
                 </a:solidFill>
-                <a:latin typeface="Inter"/>
+                <a:latin typeface="Inter SemiBold"/>
               </a:rPr>
               <a:t>Kunde Projekttitel</a:t>
             </a:r>
@@ -12858,8 +13609,8 @@
         </p:nvSpPr>
         <p:spPr>
           <a:xfrm>
-            <a:off x="9599506" y="4588933"/>
-            <a:ext cx="1610359" cy="1473200"/>
+            <a:off x="9599506" y="4284133"/>
+            <a:ext cx="1610359" cy="2082799"/>
           </a:xfrm>
           <a:prstGeom prst="rect">
             <a:avLst/>
@@ -12872,12 +13623,17 @@
           </a:bodyPr>
           <a:lstStyle/>
           <a:p>
-            <a:r>
-              <a:rPr sz="13330" b="0" i="0">
+            <a:pPr>
+              <a:lnSpc>
+                <a:spcPts val="11330"/>
+              </a:lnSpc>
+            </a:pPr>
+            <a:r>
+              <a:rPr sz="13330" b="0" i="0" spc="-533">
                 <a:solidFill>
                   <a:srgbClr val="C5C0B8"/>
                 </a:solidFill>
-                <a:latin typeface="Inter"/>
+                <a:latin typeface="Inter Light"/>
               </a:rPr>
               <a:t>01</a:t>
             </a:r>
@@ -12906,7 +13662,11 @@
           </a:bodyPr>
           <a:lstStyle/>
           <a:p>
-            <a:pPr algn="r"/>
+            <a:pPr algn="r">
+              <a:lnSpc>
+                <a:spcPts val="1120"/>
+              </a:lnSpc>
+            </a:pPr>
             <a:r>
               <a:rPr sz="800" b="0" i="0">
                 <a:solidFill>
@@ -12994,7 +13754,7 @@
         <p:spPr>
           <a:xfrm>
             <a:off x="1015999" y="4355253"/>
-            <a:ext cx="7484533" cy="176106"/>
+            <a:ext cx="4436533" cy="160866"/>
           </a:xfrm>
           <a:prstGeom prst="rect">
             <a:avLst/>
@@ -13007,12 +13767,17 @@
           </a:bodyPr>
           <a:lstStyle/>
           <a:p>
-            <a:r>
-              <a:rPr sz="800" b="0" i="0">
+            <a:pPr>
+              <a:lnSpc>
+                <a:spcPts val="1120"/>
+              </a:lnSpc>
+            </a:pPr>
+            <a:r>
+              <a:rPr sz="800" b="0" i="0" spc="80">
                 <a:solidFill>
                   <a:srgbClr val="3D3D3A"/>
                 </a:solidFill>
-                <a:latin typeface="Inter"/>
+                <a:latin typeface="Inter SemiBold"/>
               </a:rPr>
               <a:t>KAPITEL 02</a:t>
             </a:r>
@@ -13027,8 +13792,8 @@
         </p:nvSpPr>
         <p:spPr>
           <a:xfrm>
-            <a:off x="1015999" y="4700693"/>
-            <a:ext cx="7484533" cy="1225973"/>
+            <a:off x="1015999" y="4666826"/>
+            <a:ext cx="4041140" cy="1281853"/>
           </a:xfrm>
           <a:prstGeom prst="rect">
             <a:avLst/>
@@ -13041,12 +13806,17 @@
           </a:bodyPr>
           <a:lstStyle/>
           <a:p>
-            <a:r>
-              <a:rPr sz="4270" b="1" i="0">
+            <a:pPr>
+              <a:lnSpc>
+                <a:spcPts val="4690"/>
+              </a:lnSpc>
+            </a:pPr>
+            <a:r>
+              <a:rPr sz="4270" b="0" i="0" spc="-128">
                 <a:solidFill>
                   <a:srgbClr val="1C1C1E"/>
                 </a:solidFill>
-                <a:latin typeface="Inter"/>
+                <a:latin typeface="Inter SemiBold"/>
               </a:rPr>
               <a:t>Eine Zeile, die das Kapitel trägt</a:t>
             </a:r>
@@ -13062,7 +13832,7 @@
         <p:spPr>
           <a:xfrm>
             <a:off x="2003213" y="6466839"/>
-            <a:ext cx="3928533" cy="176106"/>
+            <a:ext cx="3928533" cy="160866"/>
           </a:xfrm>
           <a:prstGeom prst="rect">
             <a:avLst/>
@@ -13075,12 +13845,17 @@
           </a:bodyPr>
           <a:lstStyle/>
           <a:p>
-            <a:r>
-              <a:rPr sz="800" b="1" i="0">
+            <a:pPr>
+              <a:lnSpc>
+                <a:spcPts val="1120"/>
+              </a:lnSpc>
+            </a:pPr>
+            <a:r>
+              <a:rPr sz="800" b="0" i="0">
                 <a:solidFill>
                   <a:srgbClr val="1C1C1E"/>
                 </a:solidFill>
-                <a:latin typeface="Inter"/>
+                <a:latin typeface="Inter SemiBold"/>
               </a:rPr>
               <a:t>Kunde Projekttitel</a:t>
             </a:r>
@@ -13095,8 +13870,8 @@
         </p:nvSpPr>
         <p:spPr>
           <a:xfrm>
-            <a:off x="9226973" y="4588933"/>
-            <a:ext cx="1982893" cy="1473200"/>
+            <a:off x="9226973" y="4284133"/>
+            <a:ext cx="1982893" cy="2082799"/>
           </a:xfrm>
           <a:prstGeom prst="rect">
             <a:avLst/>
@@ -13109,12 +13884,17 @@
           </a:bodyPr>
           <a:lstStyle/>
           <a:p>
-            <a:r>
-              <a:rPr sz="13330" b="0" i="0">
+            <a:pPr>
+              <a:lnSpc>
+                <a:spcPts val="11330"/>
+              </a:lnSpc>
+            </a:pPr>
+            <a:r>
+              <a:rPr sz="13330" b="0" i="0" spc="-533">
                 <a:solidFill>
                   <a:srgbClr val="C5C0B8"/>
                 </a:solidFill>
-                <a:latin typeface="Inter"/>
+                <a:latin typeface="Inter Light"/>
               </a:rPr>
               <a:t>02</a:t>
             </a:r>
@@ -13143,7 +13923,11 @@
           </a:bodyPr>
           <a:lstStyle/>
           <a:p>
-            <a:pPr algn="r"/>
+            <a:pPr algn="r">
+              <a:lnSpc>
+                <a:spcPts val="1120"/>
+              </a:lnSpc>
+            </a:pPr>
             <a:r>
               <a:rPr sz="800" b="0" i="0">
                 <a:solidFill>
@@ -13231,7 +14015,7 @@
         <p:spPr>
           <a:xfrm>
             <a:off x="1015999" y="4355253"/>
-            <a:ext cx="7484533" cy="176106"/>
+            <a:ext cx="4436533" cy="160866"/>
           </a:xfrm>
           <a:prstGeom prst="rect">
             <a:avLst/>
@@ -13244,12 +14028,17 @@
           </a:bodyPr>
           <a:lstStyle/>
           <a:p>
-            <a:r>
-              <a:rPr sz="800" b="0" i="0">
+            <a:pPr>
+              <a:lnSpc>
+                <a:spcPts val="1120"/>
+              </a:lnSpc>
+            </a:pPr>
+            <a:r>
+              <a:rPr sz="800" b="0" i="0" spc="80">
                 <a:solidFill>
                   <a:srgbClr val="3D3D3A"/>
                 </a:solidFill>
-                <a:latin typeface="Inter"/>
+                <a:latin typeface="Inter SemiBold"/>
               </a:rPr>
               <a:t>KAPITEL 03</a:t>
             </a:r>
@@ -13264,8 +14053,8 @@
         </p:nvSpPr>
         <p:spPr>
           <a:xfrm>
-            <a:off x="1015999" y="4700693"/>
-            <a:ext cx="7484533" cy="1225973"/>
+            <a:off x="1015999" y="4666826"/>
+            <a:ext cx="4041140" cy="1281853"/>
           </a:xfrm>
           <a:prstGeom prst="rect">
             <a:avLst/>
@@ -13278,12 +14067,17 @@
           </a:bodyPr>
           <a:lstStyle/>
           <a:p>
-            <a:r>
-              <a:rPr sz="4270" b="1" i="0">
+            <a:pPr>
+              <a:lnSpc>
+                <a:spcPts val="4690"/>
+              </a:lnSpc>
+            </a:pPr>
+            <a:r>
+              <a:rPr sz="4270" b="0" i="0" spc="-128">
                 <a:solidFill>
                   <a:srgbClr val="1C1C1E"/>
                 </a:solidFill>
-                <a:latin typeface="Inter"/>
+                <a:latin typeface="Inter SemiBold"/>
               </a:rPr>
               <a:t>Eine Zeile, die das Kapitel trägt</a:t>
             </a:r>
@@ -13299,7 +14093,7 @@
         <p:spPr>
           <a:xfrm>
             <a:off x="2003213" y="6466839"/>
-            <a:ext cx="3928533" cy="176106"/>
+            <a:ext cx="3928533" cy="160866"/>
           </a:xfrm>
           <a:prstGeom prst="rect">
             <a:avLst/>
@@ -13312,12 +14106,17 @@
           </a:bodyPr>
           <a:lstStyle/>
           <a:p>
-            <a:r>
-              <a:rPr sz="800" b="1" i="0">
+            <a:pPr>
+              <a:lnSpc>
+                <a:spcPts val="1120"/>
+              </a:lnSpc>
+            </a:pPr>
+            <a:r>
+              <a:rPr sz="800" b="0" i="0">
                 <a:solidFill>
                   <a:srgbClr val="1C1C1E"/>
                 </a:solidFill>
-                <a:latin typeface="Inter"/>
+                <a:latin typeface="Inter SemiBold"/>
               </a:rPr>
               <a:t>Kunde Projekttitel</a:t>
             </a:r>
@@ -13332,8 +14131,8 @@
         </p:nvSpPr>
         <p:spPr>
           <a:xfrm>
-            <a:off x="9239673" y="4588933"/>
-            <a:ext cx="1970193" cy="1473200"/>
+            <a:off x="9239673" y="4284133"/>
+            <a:ext cx="1970193" cy="2082799"/>
           </a:xfrm>
           <a:prstGeom prst="rect">
             <a:avLst/>
@@ -13346,12 +14145,17 @@
           </a:bodyPr>
           <a:lstStyle/>
           <a:p>
-            <a:r>
-              <a:rPr sz="13330" b="0" i="0">
+            <a:pPr>
+              <a:lnSpc>
+                <a:spcPts val="11330"/>
+              </a:lnSpc>
+            </a:pPr>
+            <a:r>
+              <a:rPr sz="13330" b="0" i="0" spc="-533">
                 <a:solidFill>
                   <a:srgbClr val="C5C0B8"/>
                 </a:solidFill>
-                <a:latin typeface="Inter"/>
+                <a:latin typeface="Inter Light"/>
               </a:rPr>
               <a:t>03</a:t>
             </a:r>
@@ -13380,7 +14184,11 @@
           </a:bodyPr>
           <a:lstStyle/>
           <a:p>
-            <a:pPr algn="r"/>
+            <a:pPr algn="r">
+              <a:lnSpc>
+                <a:spcPts val="1120"/>
+              </a:lnSpc>
+            </a:pPr>
             <a:r>
               <a:rPr sz="800" b="0" i="0">
                 <a:solidFill>
@@ -13468,7 +14276,7 @@
         <p:spPr>
           <a:xfrm>
             <a:off x="1015999" y="4355253"/>
-            <a:ext cx="7484533" cy="176106"/>
+            <a:ext cx="4436533" cy="160866"/>
           </a:xfrm>
           <a:prstGeom prst="rect">
             <a:avLst/>
@@ -13481,12 +14289,17 @@
           </a:bodyPr>
           <a:lstStyle/>
           <a:p>
-            <a:r>
-              <a:rPr sz="800" b="0" i="0">
+            <a:pPr>
+              <a:lnSpc>
+                <a:spcPts val="1120"/>
+              </a:lnSpc>
+            </a:pPr>
+            <a:r>
+              <a:rPr sz="800" b="0" i="0" spc="80">
                 <a:solidFill>
                   <a:srgbClr val="3D3D3A"/>
                 </a:solidFill>
-                <a:latin typeface="Inter"/>
+                <a:latin typeface="Inter SemiBold"/>
               </a:rPr>
               <a:t>KAPITEL 04</a:t>
             </a:r>
@@ -13501,8 +14314,8 @@
         </p:nvSpPr>
         <p:spPr>
           <a:xfrm>
-            <a:off x="1015999" y="4700693"/>
-            <a:ext cx="7484533" cy="1225973"/>
+            <a:off x="1015999" y="4666826"/>
+            <a:ext cx="4041140" cy="1281853"/>
           </a:xfrm>
           <a:prstGeom prst="rect">
             <a:avLst/>
@@ -13515,12 +14328,17 @@
           </a:bodyPr>
           <a:lstStyle/>
           <a:p>
-            <a:r>
-              <a:rPr sz="4270" b="1" i="0">
+            <a:pPr>
+              <a:lnSpc>
+                <a:spcPts val="4690"/>
+              </a:lnSpc>
+            </a:pPr>
+            <a:r>
+              <a:rPr sz="4270" b="0" i="0" spc="-128">
                 <a:solidFill>
                   <a:srgbClr val="1C1C1E"/>
                 </a:solidFill>
-                <a:latin typeface="Inter"/>
+                <a:latin typeface="Inter SemiBold"/>
               </a:rPr>
               <a:t>Eine Zeile, die das Kapitel trägt</a:t>
             </a:r>
@@ -13536,7 +14354,7 @@
         <p:spPr>
           <a:xfrm>
             <a:off x="2003213" y="6466839"/>
-            <a:ext cx="3928533" cy="176106"/>
+            <a:ext cx="3928533" cy="160866"/>
           </a:xfrm>
           <a:prstGeom prst="rect">
             <a:avLst/>
@@ -13549,12 +14367,17 @@
           </a:bodyPr>
           <a:lstStyle/>
           <a:p>
-            <a:r>
-              <a:rPr sz="800" b="1" i="0">
+            <a:pPr>
+              <a:lnSpc>
+                <a:spcPts val="1120"/>
+              </a:lnSpc>
+            </a:pPr>
+            <a:r>
+              <a:rPr sz="800" b="0" i="0">
                 <a:solidFill>
                   <a:srgbClr val="1C1C1E"/>
                 </a:solidFill>
-                <a:latin typeface="Inter"/>
+                <a:latin typeface="Inter SemiBold"/>
               </a:rPr>
               <a:t>Kunde Projekttitel</a:t>
             </a:r>
@@ -13569,8 +14392,8 @@
         </p:nvSpPr>
         <p:spPr>
           <a:xfrm>
-            <a:off x="9200726" y="4588933"/>
-            <a:ext cx="2009140" cy="1473200"/>
+            <a:off x="9200726" y="4284133"/>
+            <a:ext cx="2009140" cy="2082799"/>
           </a:xfrm>
           <a:prstGeom prst="rect">
             <a:avLst/>
@@ -13583,12 +14406,17 @@
           </a:bodyPr>
           <a:lstStyle/>
           <a:p>
-            <a:r>
-              <a:rPr sz="13330" b="0" i="0">
+            <a:pPr>
+              <a:lnSpc>
+                <a:spcPts val="11330"/>
+              </a:lnSpc>
+            </a:pPr>
+            <a:r>
+              <a:rPr sz="13330" b="0" i="0" spc="-533">
                 <a:solidFill>
                   <a:srgbClr val="C5C0B8"/>
                 </a:solidFill>
-                <a:latin typeface="Inter"/>
+                <a:latin typeface="Inter Light"/>
               </a:rPr>
               <a:t>04</a:t>
             </a:r>
@@ -13617,7 +14445,11 @@
           </a:bodyPr>
           <a:lstStyle/>
           <a:p>
-            <a:pPr algn="r"/>
+            <a:pPr algn="r">
+              <a:lnSpc>
+                <a:spcPts val="1120"/>
+              </a:lnSpc>
+            </a:pPr>
             <a:r>
               <a:rPr sz="800" b="0" i="0">
                 <a:solidFill>
@@ -13705,7 +14537,7 @@
         <p:spPr>
           <a:xfrm>
             <a:off x="1015999" y="4355253"/>
-            <a:ext cx="7484533" cy="176106"/>
+            <a:ext cx="4436533" cy="160866"/>
           </a:xfrm>
           <a:prstGeom prst="rect">
             <a:avLst/>
@@ -13718,12 +14550,17 @@
           </a:bodyPr>
           <a:lstStyle/>
           <a:p>
-            <a:r>
-              <a:rPr sz="800" b="0" i="0">
+            <a:pPr>
+              <a:lnSpc>
+                <a:spcPts val="1120"/>
+              </a:lnSpc>
+            </a:pPr>
+            <a:r>
+              <a:rPr sz="800" b="0" i="0" spc="80">
                 <a:solidFill>
                   <a:srgbClr val="3D3D3A"/>
                 </a:solidFill>
-                <a:latin typeface="Inter"/>
+                <a:latin typeface="Inter SemiBold"/>
               </a:rPr>
               <a:t>KAPITEL 05</a:t>
             </a:r>
@@ -13738,8 +14575,8 @@
         </p:nvSpPr>
         <p:spPr>
           <a:xfrm>
-            <a:off x="1015999" y="4700693"/>
-            <a:ext cx="7484533" cy="1225973"/>
+            <a:off x="1015999" y="4666826"/>
+            <a:ext cx="4041140" cy="1281853"/>
           </a:xfrm>
           <a:prstGeom prst="rect">
             <a:avLst/>
@@ -13752,12 +14589,17 @@
           </a:bodyPr>
           <a:lstStyle/>
           <a:p>
-            <a:r>
-              <a:rPr sz="4270" b="1" i="0">
+            <a:pPr>
+              <a:lnSpc>
+                <a:spcPts val="4690"/>
+              </a:lnSpc>
+            </a:pPr>
+            <a:r>
+              <a:rPr sz="4270" b="0" i="0" spc="-128">
                 <a:solidFill>
                   <a:srgbClr val="1C1C1E"/>
                 </a:solidFill>
-                <a:latin typeface="Inter"/>
+                <a:latin typeface="Inter SemiBold"/>
               </a:rPr>
               <a:t>Eine Zeile, die das Kapitel trägt</a:t>
             </a:r>
@@ -13773,7 +14615,7 @@
         <p:spPr>
           <a:xfrm>
             <a:off x="2003213" y="6466839"/>
-            <a:ext cx="3928533" cy="176106"/>
+            <a:ext cx="3928533" cy="160866"/>
           </a:xfrm>
           <a:prstGeom prst="rect">
             <a:avLst/>
@@ -13786,12 +14628,17 @@
           </a:bodyPr>
           <a:lstStyle/>
           <a:p>
-            <a:r>
-              <a:rPr sz="800" b="1" i="0">
+            <a:pPr>
+              <a:lnSpc>
+                <a:spcPts val="1120"/>
+              </a:lnSpc>
+            </a:pPr>
+            <a:r>
+              <a:rPr sz="800" b="0" i="0">
                 <a:solidFill>
                   <a:srgbClr val="1C1C1E"/>
                 </a:solidFill>
-                <a:latin typeface="Inter"/>
+                <a:latin typeface="Inter SemiBold"/>
               </a:rPr>
               <a:t>Kunde Projekttitel</a:t>
             </a:r>
@@ -13806,8 +14653,8 @@
         </p:nvSpPr>
         <p:spPr>
           <a:xfrm>
-            <a:off x="9284546" y="4588933"/>
-            <a:ext cx="1925320" cy="1473200"/>
+            <a:off x="9284546" y="4284133"/>
+            <a:ext cx="1925320" cy="2082799"/>
           </a:xfrm>
           <a:prstGeom prst="rect">
             <a:avLst/>
@@ -13820,12 +14667,17 @@
           </a:bodyPr>
           <a:lstStyle/>
           <a:p>
-            <a:r>
-              <a:rPr sz="13330" b="0" i="0">
+            <a:pPr>
+              <a:lnSpc>
+                <a:spcPts val="11330"/>
+              </a:lnSpc>
+            </a:pPr>
+            <a:r>
+              <a:rPr sz="13330" b="0" i="0" spc="-533">
                 <a:solidFill>
                   <a:srgbClr val="C5C0B8"/>
                 </a:solidFill>
-                <a:latin typeface="Inter"/>
+                <a:latin typeface="Inter Light"/>
               </a:rPr>
               <a:t>05</a:t>
             </a:r>
@@ -13854,7 +14706,11 @@
           </a:bodyPr>
           <a:lstStyle/>
           <a:p>
-            <a:pPr algn="r"/>
+            <a:pPr algn="r">
+              <a:lnSpc>
+                <a:spcPts val="1120"/>
+              </a:lnSpc>
+            </a:pPr>
             <a:r>
               <a:rPr sz="800" b="0" i="0">
                 <a:solidFill>
@@ -13895,7 +14751,39 @@
       <p:grpSpPr/>
       <p:sp>
         <p:nvSpPr>
-          <p:cNvPr id="2" name="Rectangle 1"/>
+          <p:cNvPr id="2" name="Rounded Rectangle 1"/>
+          <p:cNvSpPr/>
+          <p:nvPr/>
+        </p:nvSpPr>
+        <p:spPr>
+          <a:xfrm>
+            <a:off x="1015999" y="4599093"/>
+            <a:ext cx="10160000" cy="623146"/>
+          </a:xfrm>
+          <a:prstGeom prst="roundRect">
+            <a:avLst>
+              <a:gd name="adj" fmla="val 24456"/>
+            </a:avLst>
+          </a:prstGeom>
+          <a:solidFill>
+            <a:srgbClr val="E3E0E8"/>
+          </a:solidFill>
+          <a:ln>
+            <a:noFill/>
+          </a:ln>
+          <a:effectLst/>
+        </p:spPr>
+        <p:txBody>
+          <a:bodyPr rtlCol="0" anchor="ctr"/>
+          <a:lstStyle/>
+          <a:p>
+            <a:pPr algn="ctr"/>
+          </a:p>
+        </p:txBody>
+      </p:sp>
+      <p:sp>
+        <p:nvSpPr>
+          <p:cNvPr id="3" name="Rectangle 2"/>
           <p:cNvSpPr/>
           <p:nvPr/>
         </p:nvSpPr>
@@ -13915,20 +14803,6 @@
           </a:ln>
           <a:effectLst/>
         </p:spPr>
-        <p:style>
-          <a:lnRef idx="1">
-            <a:schemeClr val="accent1"/>
-          </a:lnRef>
-          <a:fillRef idx="3">
-            <a:schemeClr val="accent1"/>
-          </a:fillRef>
-          <a:effectRef idx="2">
-            <a:schemeClr val="accent1"/>
-          </a:effectRef>
-          <a:fontRef idx="minor">
-            <a:schemeClr val="lt1"/>
-          </a:fontRef>
-        </p:style>
         <p:txBody>
           <a:bodyPr rtlCol="0" anchor="ctr"/>
           <a:lstStyle/>
@@ -13939,7 +14813,7 @@
       </p:sp>
       <p:sp>
         <p:nvSpPr>
-          <p:cNvPr id="3" name="Rectangle 2"/>
+          <p:cNvPr id="4" name="Rectangle 3"/>
           <p:cNvSpPr/>
           <p:nvPr/>
         </p:nvSpPr>
@@ -13959,20 +14833,6 @@
           </a:ln>
           <a:effectLst/>
         </p:spPr>
-        <p:style>
-          <a:lnRef idx="1">
-            <a:schemeClr val="accent1"/>
-          </a:lnRef>
-          <a:fillRef idx="3">
-            <a:schemeClr val="accent1"/>
-          </a:fillRef>
-          <a:effectRef idx="2">
-            <a:schemeClr val="accent1"/>
-          </a:effectRef>
-          <a:fontRef idx="minor">
-            <a:schemeClr val="lt1"/>
-          </a:fontRef>
-        </p:style>
         <p:txBody>
           <a:bodyPr rtlCol="0" anchor="ctr"/>
           <a:lstStyle/>
@@ -13983,7 +14843,7 @@
       </p:sp>
       <p:sp>
         <p:nvSpPr>
-          <p:cNvPr id="4" name="Rectangle 3"/>
+          <p:cNvPr id="5" name="Rectangle 4"/>
           <p:cNvSpPr/>
           <p:nvPr/>
         </p:nvSpPr>
@@ -14003,20 +14863,6 @@
           </a:ln>
           <a:effectLst/>
         </p:spPr>
-        <p:style>
-          <a:lnRef idx="1">
-            <a:schemeClr val="accent1"/>
-          </a:lnRef>
-          <a:fillRef idx="3">
-            <a:schemeClr val="accent1"/>
-          </a:fillRef>
-          <a:effectRef idx="2">
-            <a:schemeClr val="accent1"/>
-          </a:effectRef>
-          <a:fontRef idx="minor">
-            <a:schemeClr val="lt1"/>
-          </a:fontRef>
-        </p:style>
         <p:txBody>
           <a:bodyPr rtlCol="0" anchor="ctr"/>
           <a:lstStyle/>
@@ -14027,7 +14873,7 @@
       </p:sp>
       <p:pic>
         <p:nvPicPr>
-          <p:cNvPr id="5" name="Picture 4" descr="wordmark-black-crop.png"/>
+          <p:cNvPr id="6" name="Picture 5" descr="wordmark-black-crop.png"/>
           <p:cNvPicPr>
             <a:picLocks noChangeAspect="1"/>
           </p:cNvPicPr>
@@ -14051,14 +14897,14 @@
       </p:pic>
       <p:sp>
         <p:nvSpPr>
-          <p:cNvPr id="6" name="TextBox 5"/>
+          <p:cNvPr id="7" name="TextBox 6"/>
           <p:cNvSpPr txBox="1"/>
           <p:nvPr/>
         </p:nvSpPr>
         <p:spPr>
           <a:xfrm>
             <a:off x="1015999" y="389466"/>
-            <a:ext cx="4775200" cy="176106"/>
+            <a:ext cx="4775200" cy="160866"/>
           </a:xfrm>
           <a:prstGeom prst="rect">
             <a:avLst/>
@@ -14071,12 +14917,17 @@
           </a:bodyPr>
           <a:lstStyle/>
           <a:p>
-            <a:r>
-              <a:rPr sz="800" b="0" i="0">
+            <a:pPr>
+              <a:lnSpc>
+                <a:spcPts val="1120"/>
+              </a:lnSpc>
+            </a:pPr>
+            <a:r>
+              <a:rPr sz="800" b="0" i="0" spc="80">
                 <a:solidFill>
                   <a:srgbClr val="6B6B65"/>
                 </a:solidFill>
-                <a:latin typeface="Inter"/>
+                <a:latin typeface="Inter SemiBold"/>
               </a:rPr>
               <a:t>01 / KAPITEL</a:t>
             </a:r>
@@ -14085,14 +14936,14 @@
       </p:sp>
       <p:sp>
         <p:nvSpPr>
-          <p:cNvPr id="7" name="TextBox 6"/>
-          <p:cNvSpPr txBox="1"/>
-          <p:nvPr/>
-        </p:nvSpPr>
-        <p:spPr>
-          <a:xfrm>
-            <a:off x="1015999" y="795866"/>
-            <a:ext cx="8331199" cy="501226"/>
+          <p:cNvPr id="8" name="TextBox 7"/>
+          <p:cNvSpPr txBox="1"/>
+          <p:nvPr/>
+        </p:nvSpPr>
+        <p:spPr>
+          <a:xfrm>
+            <a:off x="1015999" y="778933"/>
+            <a:ext cx="6350000" cy="533400"/>
           </a:xfrm>
           <a:prstGeom prst="rect">
             <a:avLst/>
@@ -14105,12 +14956,17 @@
           </a:bodyPr>
           <a:lstStyle/>
           <a:p>
-            <a:r>
-              <a:rPr sz="3200" b="1" i="0">
+            <a:pPr>
+              <a:lnSpc>
+                <a:spcPts val="3679"/>
+              </a:lnSpc>
+            </a:pPr>
+            <a:r>
+              <a:rPr sz="3200" b="0" i="0" spc="-80">
                 <a:solidFill>
                   <a:srgbClr val="1C1C1E"/>
                 </a:solidFill>
-                <a:latin typeface="Inter"/>
+                <a:latin typeface="Inter SemiBold"/>
               </a:rPr>
               <a:t>Aussage der Slide als ganzer Satz</a:t>
             </a:r>
@@ -14119,14 +14975,14 @@
       </p:sp>
       <p:sp>
         <p:nvSpPr>
-          <p:cNvPr id="8" name="TextBox 7"/>
-          <p:cNvSpPr txBox="1"/>
-          <p:nvPr/>
-        </p:nvSpPr>
-        <p:spPr>
-          <a:xfrm>
-            <a:off x="1015999" y="2771986"/>
-            <a:ext cx="3149600" cy="1505373"/>
+          <p:cNvPr id="9" name="TextBox 8"/>
+          <p:cNvSpPr txBox="1"/>
+          <p:nvPr/>
+        </p:nvSpPr>
+        <p:spPr>
+          <a:xfrm>
+            <a:off x="1015999" y="2788919"/>
+            <a:ext cx="3111500" cy="1457960"/>
           </a:xfrm>
           <a:prstGeom prst="rect">
             <a:avLst/>
@@ -14139,6 +14995,11 @@
           </a:bodyPr>
           <a:lstStyle/>
           <a:p>
+            <a:pPr>
+              <a:lnSpc>
+                <a:spcPts val="1400"/>
+              </a:lnSpc>
+            </a:pPr>
             <a:r>
               <a:rPr sz="930" b="0" i="0">
                 <a:solidFill>
@@ -14151,24 +15012,49 @@
           </a:p>
           <a:p>
             <a:pPr>
+              <a:lnSpc>
+                <a:spcPts val="1870"/>
+              </a:lnSpc>
               <a:spcBef>
-                <a:spcPts val="1070"/>
+                <a:spcPts val="1330"/>
               </a:spcBef>
             </a:pPr>
             <a:r>
-              <a:rPr sz="1330" b="0" i="0">
+              <a:rPr sz="1330" b="0" i="0" spc="-20">
                 <a:solidFill>
                   <a:srgbClr val="1C1C1E"/>
                 </a:solidFill>
+                <a:latin typeface="Inter SemiBold"/>
+              </a:rPr>
+              <a:t>Erster Punkt</a:t>
+            </a:r>
+          </a:p>
+          <a:p>
+            <a:pPr>
+              <a:lnSpc>
+                <a:spcPts val="1710"/>
+              </a:lnSpc>
+              <a:spcBef>
+                <a:spcPts val="1330"/>
+              </a:spcBef>
+            </a:pPr>
+            <a:r>
+              <a:rPr sz="1070" b="0" i="0">
+                <a:solidFill>
+                  <a:srgbClr val="3D3D3A"/>
+                </a:solidFill>
                 <a:latin typeface="Inter"/>
               </a:rPr>
-              <a:t>Erster Punkt</a:t>
-            </a:r>
-          </a:p>
-          <a:p>
-            <a:pPr>
+              <a:t>Zwei bis drei Sätze, die den Punkt tragen: als Fließtext, nicht als Halbzeilen.</a:t>
+            </a:r>
+          </a:p>
+          <a:p>
+            <a:pPr>
+              <a:lnSpc>
+                <a:spcPts val="1710"/>
+              </a:lnSpc>
               <a:spcBef>
-                <a:spcPts val="1070"/>
+                <a:spcPts val="1440"/>
               </a:spcBef>
             </a:pPr>
             <a:r>
@@ -14178,22 +15064,6 @@
                 </a:solidFill>
                 <a:latin typeface="Inter"/>
               </a:rPr>
-              <a:t>Zwei bis drei Sätze, die den Punkt tragen: als Fließtext, nicht als Halbzeilen.</a:t>
-            </a:r>
-          </a:p>
-          <a:p>
-            <a:pPr>
-              <a:spcBef>
-                <a:spcPts val="1070"/>
-              </a:spcBef>
-            </a:pPr>
-            <a:r>
-              <a:rPr sz="1070" b="0" i="0">
-                <a:solidFill>
-                  <a:srgbClr val="3D3D3A"/>
-                </a:solidFill>
-                <a:latin typeface="Inter"/>
-              </a:rPr>
               <a:t>Weiterer Absatz nur, wenn er etwas Neues sagt.</a:t>
             </a:r>
           </a:p>
@@ -14201,14 +15071,14 @@
       </p:sp>
       <p:sp>
         <p:nvSpPr>
-          <p:cNvPr id="9" name="TextBox 8"/>
+          <p:cNvPr id="10" name="TextBox 9"/>
           <p:cNvSpPr txBox="1"/>
           <p:nvPr/>
         </p:nvSpPr>
         <p:spPr>
           <a:xfrm>
             <a:off x="1286933" y="4836160"/>
-            <a:ext cx="4436533" cy="176106"/>
+            <a:ext cx="4436533" cy="160866"/>
           </a:xfrm>
           <a:prstGeom prst="rect">
             <a:avLst/>
@@ -14221,12 +15091,17 @@
           </a:bodyPr>
           <a:lstStyle/>
           <a:p>
-            <a:r>
-              <a:rPr sz="800" b="0" i="0">
+            <a:pPr>
+              <a:lnSpc>
+                <a:spcPts val="1120"/>
+              </a:lnSpc>
+            </a:pPr>
+            <a:r>
+              <a:rPr sz="800" b="0" i="0" spc="80">
                 <a:solidFill>
                   <a:srgbClr val="4A2D6B"/>
                 </a:solidFill>
-                <a:latin typeface="Inter"/>
+                <a:latin typeface="Inter SemiBold"/>
               </a:rPr>
               <a:t>DAS ERGEBNIS</a:t>
             </a:r>
@@ -14235,14 +15110,14 @@
       </p:sp>
       <p:sp>
         <p:nvSpPr>
-          <p:cNvPr id="10" name="TextBox 9"/>
+          <p:cNvPr id="11" name="TextBox 10"/>
           <p:cNvSpPr txBox="1"/>
           <p:nvPr/>
         </p:nvSpPr>
         <p:spPr>
           <a:xfrm>
             <a:off x="2003213" y="6466839"/>
-            <a:ext cx="3928533" cy="176106"/>
+            <a:ext cx="3928533" cy="160866"/>
           </a:xfrm>
           <a:prstGeom prst="rect">
             <a:avLst/>
@@ -14255,12 +15130,17 @@
           </a:bodyPr>
           <a:lstStyle/>
           <a:p>
-            <a:r>
-              <a:rPr sz="800" b="1" i="0">
+            <a:pPr>
+              <a:lnSpc>
+                <a:spcPts val="1120"/>
+              </a:lnSpc>
+            </a:pPr>
+            <a:r>
+              <a:rPr sz="800" b="0" i="0">
                 <a:solidFill>
                   <a:srgbClr val="1C1C1E"/>
                 </a:solidFill>
-                <a:latin typeface="Inter"/>
+                <a:latin typeface="Inter SemiBold"/>
               </a:rPr>
               <a:t>Kunde Projekttitel</a:t>
             </a:r>
@@ -14269,14 +15149,14 @@
       </p:sp>
       <p:sp>
         <p:nvSpPr>
-          <p:cNvPr id="11" name="TextBox 10"/>
-          <p:cNvSpPr txBox="1"/>
-          <p:nvPr/>
-        </p:nvSpPr>
-        <p:spPr>
-          <a:xfrm>
-            <a:off x="4538133" y="2771986"/>
-            <a:ext cx="3149600" cy="936413"/>
+          <p:cNvPr id="12" name="TextBox 11"/>
+          <p:cNvSpPr txBox="1"/>
+          <p:nvPr/>
+        </p:nvSpPr>
+        <p:spPr>
+          <a:xfrm>
+            <a:off x="4538133" y="2788919"/>
+            <a:ext cx="2689013" cy="888999"/>
           </a:xfrm>
           <a:prstGeom prst="rect">
             <a:avLst/>
@@ -14289,6 +15169,11 @@
           </a:bodyPr>
           <a:lstStyle/>
           <a:p>
+            <a:pPr>
+              <a:lnSpc>
+                <a:spcPts val="1400"/>
+              </a:lnSpc>
+            </a:pPr>
             <a:r>
               <a:rPr sz="930" b="0" i="0">
                 <a:solidFill>
@@ -14301,33 +15186,39 @@
           </a:p>
           <a:p>
             <a:pPr>
+              <a:lnSpc>
+                <a:spcPts val="1870"/>
+              </a:lnSpc>
               <a:spcBef>
-                <a:spcPts val="1070"/>
+                <a:spcPts val="1330"/>
               </a:spcBef>
             </a:pPr>
             <a:r>
-              <a:rPr sz="1330" b="0" i="0">
+              <a:rPr sz="1330" b="0" i="0" spc="-20">
                 <a:solidFill>
                   <a:srgbClr val="1C1C1E"/>
                 </a:solidFill>
+                <a:latin typeface="Inter SemiBold"/>
+              </a:rPr>
+              <a:t>Zweiter Punkt</a:t>
+            </a:r>
+          </a:p>
+          <a:p>
+            <a:pPr>
+              <a:lnSpc>
+                <a:spcPts val="1710"/>
+              </a:lnSpc>
+              <a:spcBef>
+                <a:spcPts val="1330"/>
+              </a:spcBef>
+            </a:pPr>
+            <a:r>
+              <a:rPr sz="1070" b="0" i="0">
+                <a:solidFill>
+                  <a:srgbClr val="3D3D3A"/>
+                </a:solidFill>
                 <a:latin typeface="Inter"/>
               </a:rPr>
-              <a:t>Zweiter Punkt</a:t>
-            </a:r>
-          </a:p>
-          <a:p>
-            <a:pPr>
-              <a:spcBef>
-                <a:spcPts val="1070"/>
-              </a:spcBef>
-            </a:pPr>
-            <a:r>
-              <a:rPr sz="1070" b="0" i="0">
-                <a:solidFill>
-                  <a:srgbClr val="3D3D3A"/>
-                </a:solidFill>
-                <a:latin typeface="Inter"/>
-              </a:rPr>
               <a:t>Zwei bis drei Sätze, die den Punkt tragen.</a:t>
             </a:r>
           </a:p>
@@ -14335,14 +15226,14 @@
       </p:sp>
       <p:sp>
         <p:nvSpPr>
-          <p:cNvPr id="12" name="TextBox 11"/>
-          <p:cNvSpPr txBox="1"/>
-          <p:nvPr/>
-        </p:nvSpPr>
-        <p:spPr>
-          <a:xfrm>
-            <a:off x="8060266" y="2771986"/>
-            <a:ext cx="3149600" cy="936413"/>
+          <p:cNvPr id="13" name="TextBox 12"/>
+          <p:cNvSpPr txBox="1"/>
+          <p:nvPr/>
+        </p:nvSpPr>
+        <p:spPr>
+          <a:xfrm>
+            <a:off x="8060266" y="2788919"/>
+            <a:ext cx="2689013" cy="888999"/>
           </a:xfrm>
           <a:prstGeom prst="rect">
             <a:avLst/>
@@ -14355,6 +15246,11 @@
           </a:bodyPr>
           <a:lstStyle/>
           <a:p>
+            <a:pPr>
+              <a:lnSpc>
+                <a:spcPts val="1400"/>
+              </a:lnSpc>
+            </a:pPr>
             <a:r>
               <a:rPr sz="930" b="0" i="0">
                 <a:solidFill>
@@ -14367,33 +15263,39 @@
           </a:p>
           <a:p>
             <a:pPr>
+              <a:lnSpc>
+                <a:spcPts val="1870"/>
+              </a:lnSpc>
               <a:spcBef>
-                <a:spcPts val="1070"/>
+                <a:spcPts val="1330"/>
               </a:spcBef>
             </a:pPr>
             <a:r>
-              <a:rPr sz="1330" b="0" i="0">
+              <a:rPr sz="1330" b="0" i="0" spc="-20">
                 <a:solidFill>
                   <a:srgbClr val="1C1C1E"/>
                 </a:solidFill>
+                <a:latin typeface="Inter SemiBold"/>
+              </a:rPr>
+              <a:t>Dritter Punkt</a:t>
+            </a:r>
+          </a:p>
+          <a:p>
+            <a:pPr>
+              <a:lnSpc>
+                <a:spcPts val="1710"/>
+              </a:lnSpc>
+              <a:spcBef>
+                <a:spcPts val="1330"/>
+              </a:spcBef>
+            </a:pPr>
+            <a:r>
+              <a:rPr sz="1070" b="0" i="0">
+                <a:solidFill>
+                  <a:srgbClr val="3D3D3A"/>
+                </a:solidFill>
                 <a:latin typeface="Inter"/>
               </a:rPr>
-              <a:t>Dritter Punkt</a:t>
-            </a:r>
-          </a:p>
-          <a:p>
-            <a:pPr>
-              <a:spcBef>
-                <a:spcPts val="1070"/>
-              </a:spcBef>
-            </a:pPr>
-            <a:r>
-              <a:rPr sz="1070" b="0" i="0">
-                <a:solidFill>
-                  <a:srgbClr val="3D3D3A"/>
-                </a:solidFill>
-                <a:latin typeface="Inter"/>
-              </a:rPr>
               <a:t>Zwei bis drei Sätze, die den Punkt tragen.</a:t>
             </a:r>
           </a:p>
@@ -14401,14 +15303,14 @@
       </p:sp>
       <p:sp>
         <p:nvSpPr>
-          <p:cNvPr id="13" name="TextBox 12"/>
-          <p:cNvSpPr txBox="1"/>
-          <p:nvPr/>
-        </p:nvSpPr>
-        <p:spPr>
-          <a:xfrm>
-            <a:off x="8311726" y="4785360"/>
-            <a:ext cx="2627206" cy="250613"/>
+          <p:cNvPr id="14" name="TextBox 13"/>
+          <p:cNvSpPr txBox="1"/>
+          <p:nvPr/>
+        </p:nvSpPr>
+        <p:spPr>
+          <a:xfrm>
+            <a:off x="8311726" y="4802293"/>
+            <a:ext cx="2627206" cy="203200"/>
           </a:xfrm>
           <a:prstGeom prst="rect">
             <a:avLst/>
@@ -14421,12 +15323,17 @@
           </a:bodyPr>
           <a:lstStyle/>
           <a:p>
-            <a:r>
-              <a:rPr sz="1070" b="1" i="0">
+            <a:pPr>
+              <a:lnSpc>
+                <a:spcPts val="1710"/>
+              </a:lnSpc>
+            </a:pPr>
+            <a:r>
+              <a:rPr sz="1070" b="0" i="0">
                 <a:solidFill>
                   <a:srgbClr val="4A2D6B"/>
                 </a:solidFill>
-                <a:latin typeface="Inter"/>
+                <a:latin typeface="Inter SemiBold"/>
               </a:rPr>
               <a:t>Der Satz, der aus den drei Punkten folgt</a:t>
             </a:r>
@@ -14435,7 +15342,7 @@
       </p:sp>
       <p:sp>
         <p:nvSpPr>
-          <p:cNvPr id="14" name="TextBox 13"/>
+          <p:cNvPr id="15" name="TextBox 14"/>
           <p:cNvSpPr txBox="1"/>
           <p:nvPr/>
         </p:nvSpPr>
@@ -14455,7 +15362,11 @@
           </a:bodyPr>
           <a:lstStyle/>
           <a:p>
-            <a:pPr algn="r"/>
+            <a:pPr algn="r">
+              <a:lnSpc>
+                <a:spcPts val="1120"/>
+              </a:lnSpc>
+            </a:pPr>
             <a:r>
               <a:rPr sz="800" b="0" i="0">
                 <a:solidFill>

--- a/langdock/pptx-template/bridgemaker-slides-template.pptx
+++ b/langdock/pptx-template/bridgemaker-slides-template.pptx
@@ -4878,7 +4878,7 @@
       <p:grpSpPr/>
       <p:pic>
         <p:nvPicPr>
-          <p:cNvPr id="2" name="Picture 1" descr="bg-00.png"/>
+          <p:cNvPr id="2" name="Picture 1" descr="bg-00.jpg"/>
           <p:cNvPicPr>
             <a:picLocks noChangeAspect="1"/>
           </p:cNvPicPr>
@@ -4900,39 +4900,9 @@
           </a:prstGeom>
         </p:spPr>
       </p:pic>
-      <p:sp>
-        <p:nvSpPr>
-          <p:cNvPr id="3" name="Rectangle 2"/>
-          <p:cNvSpPr/>
-          <p:nvPr/>
-        </p:nvSpPr>
-        <p:spPr>
-          <a:xfrm>
-            <a:off x="2641600" y="905933"/>
-            <a:ext cx="7335519" cy="22013"/>
-          </a:xfrm>
-          <a:prstGeom prst="rect">
-            <a:avLst/>
-          </a:prstGeom>
-          <a:solidFill>
-            <a:srgbClr val="FFFFFF"/>
-          </a:solidFill>
-          <a:ln>
-            <a:noFill/>
-          </a:ln>
-          <a:effectLst/>
-        </p:spPr>
-        <p:txBody>
-          <a:bodyPr rtlCol="0" anchor="ctr"/>
-          <a:lstStyle/>
-          <a:p>
-            <a:pPr algn="ctr"/>
-          </a:p>
-        </p:txBody>
-      </p:sp>
       <p:pic>
         <p:nvPicPr>
-          <p:cNvPr id="4" name="Picture 3" descr="wordmark-white-crop.png"/>
+          <p:cNvPr id="3" name="Picture 2" descr="wordmark-white-crop.png"/>
           <p:cNvPicPr>
             <a:picLocks noChangeAspect="1"/>
           </p:cNvPicPr>
@@ -4956,53 +4926,53 @@
       </p:pic>
       <p:sp>
         <p:nvSpPr>
+          <p:cNvPr id="4" name="TextBox 3"/>
+          <p:cNvSpPr txBox="1"/>
+          <p:nvPr/>
+        </p:nvSpPr>
+        <p:spPr>
+          <a:xfrm>
+            <a:off x="1015999" y="2381673"/>
+            <a:ext cx="4436533" cy="194733"/>
+          </a:xfrm>
+          <a:prstGeom prst="rect">
+            <a:avLst/>
+          </a:prstGeom>
+          <a:noFill/>
+        </p:spPr>
+        <p:txBody>
+          <a:bodyPr wrap="none" lIns="0" rIns="0" tIns="0" bIns="0" anchor="ctr">
+            <a:noAutofit/>
+          </a:bodyPr>
+          <a:lstStyle/>
+          <a:p>
+            <a:pPr>
+              <a:lnSpc>
+                <a:spcPts val="1120"/>
+              </a:lnSpc>
+            </a:pPr>
+            <a:r>
+              <a:rPr sz="800" b="0" i="0" spc="80">
+                <a:solidFill>
+                  <a:srgbClr val="A8A69E"/>
+                </a:solidFill>
+                <a:latin typeface="Inter SemiBold"/>
+              </a:rPr>
+              <a:t>KUNDE × BRIDGEMAKER — ANLASS</a:t>
+            </a:r>
+          </a:p>
+        </p:txBody>
+      </p:sp>
+      <p:sp>
+        <p:nvSpPr>
           <p:cNvPr id="5" name="TextBox 4"/>
           <p:cNvSpPr txBox="1"/>
           <p:nvPr/>
         </p:nvSpPr>
         <p:spPr>
           <a:xfrm>
-            <a:off x="1015999" y="2398606"/>
-            <a:ext cx="4436533" cy="160866"/>
-          </a:xfrm>
-          <a:prstGeom prst="rect">
-            <a:avLst/>
-          </a:prstGeom>
-          <a:noFill/>
-        </p:spPr>
-        <p:txBody>
-          <a:bodyPr wrap="none" lIns="0" rIns="0" tIns="0" bIns="0">
-            <a:noAutofit/>
-          </a:bodyPr>
-          <a:lstStyle/>
-          <a:p>
-            <a:pPr>
-              <a:lnSpc>
-                <a:spcPts val="1120"/>
-              </a:lnSpc>
-            </a:pPr>
-            <a:r>
-              <a:rPr sz="800" b="0" i="0" spc="80">
-                <a:solidFill>
-                  <a:srgbClr val="A8A69E"/>
-                </a:solidFill>
-                <a:latin typeface="Inter SemiBold"/>
-              </a:rPr>
-              <a:t>KUNDE × BRIDGEMAKER — ANLASS</a:t>
-            </a:r>
-          </a:p>
-        </p:txBody>
-      </p:sp>
-      <p:sp>
-        <p:nvSpPr>
-          <p:cNvPr id="6" name="TextBox 5"/>
-          <p:cNvSpPr txBox="1"/>
-          <p:nvPr/>
-        </p:nvSpPr>
-        <p:spPr>
-          <a:xfrm>
             <a:off x="1015999" y="2676313"/>
-            <a:ext cx="7508239" cy="1869440"/>
+            <a:ext cx="10193866" cy="1869440"/>
           </a:xfrm>
           <a:prstGeom prst="rect">
             <a:avLst/>
@@ -5050,14 +5020,14 @@
       </p:sp>
       <p:sp>
         <p:nvSpPr>
-          <p:cNvPr id="7" name="TextBox 6"/>
+          <p:cNvPr id="6" name="TextBox 5"/>
           <p:cNvSpPr txBox="1"/>
           <p:nvPr/>
         </p:nvSpPr>
         <p:spPr>
           <a:xfrm>
             <a:off x="1015999" y="5867400"/>
-            <a:ext cx="2309706" cy="177800"/>
+            <a:ext cx="10193866" cy="177800"/>
           </a:xfrm>
           <a:prstGeom prst="rect">
             <a:avLst/>
@@ -5089,22 +5059,22 @@
       </p:sp>
       <p:sp>
         <p:nvSpPr>
-          <p:cNvPr id="8" name="TextBox 7"/>
-          <p:cNvSpPr txBox="1"/>
-          <p:nvPr/>
-        </p:nvSpPr>
-        <p:spPr>
-          <a:xfrm>
-            <a:off x="10180320" y="821266"/>
-            <a:ext cx="1842346" cy="186266"/>
-          </a:xfrm>
-          <a:prstGeom prst="rect">
-            <a:avLst/>
-          </a:prstGeom>
-          <a:noFill/>
-        </p:spPr>
-        <p:txBody>
-          <a:bodyPr wrap="none" lIns="0" rIns="0" tIns="0" bIns="0">
+          <p:cNvPr id="7" name="TextBox 6"/>
+          <p:cNvSpPr txBox="1"/>
+          <p:nvPr/>
+        </p:nvSpPr>
+        <p:spPr>
+          <a:xfrm>
+            <a:off x="10180320" y="804333"/>
+            <a:ext cx="1842346" cy="220133"/>
+          </a:xfrm>
+          <a:prstGeom prst="rect">
+            <a:avLst/>
+          </a:prstGeom>
+          <a:noFill/>
+        </p:spPr>
+        <p:txBody>
+          <a:bodyPr wrap="none" lIns="0" rIns="0" tIns="0" bIns="0" anchor="ctr">
             <a:noAutofit/>
           </a:bodyPr>
           <a:lstStyle/>
@@ -5328,16 +5298,16 @@
         </p:nvSpPr>
         <p:spPr>
           <a:xfrm>
-            <a:off x="1015999" y="389466"/>
-            <a:ext cx="4775200" cy="160866"/>
-          </a:xfrm>
-          <a:prstGeom prst="rect">
-            <a:avLst/>
-          </a:prstGeom>
-          <a:noFill/>
-        </p:spPr>
-        <p:txBody>
-          <a:bodyPr wrap="none" lIns="0" rIns="0" tIns="0" bIns="0">
+            <a:off x="1015999" y="372533"/>
+            <a:ext cx="4775200" cy="194733"/>
+          </a:xfrm>
+          <a:prstGeom prst="rect">
+            <a:avLst/>
+          </a:prstGeom>
+          <a:noFill/>
+        </p:spPr>
+        <p:txBody>
+          <a:bodyPr wrap="none" lIns="0" rIns="0" tIns="0" bIns="0" anchor="ctr">
             <a:noAutofit/>
           </a:bodyPr>
           <a:lstStyle/>
@@ -5368,7 +5338,7 @@
         <p:spPr>
           <a:xfrm>
             <a:off x="1015999" y="778933"/>
-            <a:ext cx="6350000" cy="533400"/>
+            <a:ext cx="10193866" cy="533400"/>
           </a:xfrm>
           <a:prstGeom prst="rect">
             <a:avLst/>
@@ -5407,7 +5377,7 @@
         <p:spPr>
           <a:xfrm>
             <a:off x="1015999" y="2788073"/>
-            <a:ext cx="5447453" cy="447886"/>
+            <a:ext cx="6807199" cy="447886"/>
           </a:xfrm>
           <a:prstGeom prst="rect">
             <a:avLst/>
@@ -5446,7 +5416,7 @@
         <p:spPr>
           <a:xfrm>
             <a:off x="1015999" y="3734646"/>
-            <a:ext cx="1117600" cy="203200"/>
+            <a:ext cx="4336626" cy="203200"/>
           </a:xfrm>
           <a:prstGeom prst="rect">
             <a:avLst/>
@@ -5485,7 +5455,7 @@
         <p:spPr>
           <a:xfrm>
             <a:off x="1015999" y="4230793"/>
-            <a:ext cx="1219200" cy="203200"/>
+            <a:ext cx="4336626" cy="203200"/>
           </a:xfrm>
           <a:prstGeom prst="rect">
             <a:avLst/>
@@ -5524,7 +5494,7 @@
         <p:spPr>
           <a:xfrm>
             <a:off x="1015999" y="4726939"/>
-            <a:ext cx="1141306" cy="203200"/>
+            <a:ext cx="4336626" cy="203200"/>
           </a:xfrm>
           <a:prstGeom prst="rect">
             <a:avLst/>
@@ -5562,16 +5532,16 @@
         </p:nvSpPr>
         <p:spPr>
           <a:xfrm>
-            <a:off x="2003213" y="6466839"/>
-            <a:ext cx="3928533" cy="160866"/>
-          </a:xfrm>
-          <a:prstGeom prst="rect">
-            <a:avLst/>
-          </a:prstGeom>
-          <a:noFill/>
-        </p:spPr>
-        <p:txBody>
-          <a:bodyPr wrap="none" lIns="0" rIns="0" tIns="0" bIns="0">
+            <a:off x="2003213" y="6449906"/>
+            <a:ext cx="3928533" cy="194733"/>
+          </a:xfrm>
+          <a:prstGeom prst="rect">
+            <a:avLst/>
+          </a:prstGeom>
+          <a:noFill/>
+        </p:spPr>
+        <p:txBody>
+          <a:bodyPr wrap="none" lIns="0" rIns="0" tIns="0" bIns="0" anchor="ctr">
             <a:noAutofit/>
           </a:bodyPr>
           <a:lstStyle/>
@@ -5602,7 +5572,7 @@
         <p:spPr>
           <a:xfrm>
             <a:off x="5454226" y="3734646"/>
-            <a:ext cx="336973" cy="203200"/>
+            <a:ext cx="2368973" cy="203200"/>
           </a:xfrm>
           <a:prstGeom prst="rect">
             <a:avLst/>
@@ -5641,7 +5611,7 @@
         <p:spPr>
           <a:xfrm>
             <a:off x="5454226" y="4230793"/>
-            <a:ext cx="336973" cy="203200"/>
+            <a:ext cx="2368973" cy="203200"/>
           </a:xfrm>
           <a:prstGeom prst="rect">
             <a:avLst/>
@@ -5680,7 +5650,7 @@
         <p:spPr>
           <a:xfrm>
             <a:off x="5454226" y="4726939"/>
-            <a:ext cx="336973" cy="203200"/>
+            <a:ext cx="2368973" cy="203200"/>
           </a:xfrm>
           <a:prstGeom prst="rect">
             <a:avLst/>
@@ -5718,16 +5688,16 @@
         </p:nvSpPr>
         <p:spPr>
           <a:xfrm>
-            <a:off x="10634133" y="6495626"/>
-            <a:ext cx="575733" cy="176106"/>
-          </a:xfrm>
-          <a:prstGeom prst="rect">
-            <a:avLst/>
-          </a:prstGeom>
-          <a:noFill/>
-        </p:spPr>
-        <p:txBody>
-          <a:bodyPr wrap="none" lIns="0" rIns="0" tIns="0" bIns="0">
+            <a:off x="10634133" y="6478693"/>
+            <a:ext cx="575733" cy="209973"/>
+          </a:xfrm>
+          <a:prstGeom prst="rect">
+            <a:avLst/>
+          </a:prstGeom>
+          <a:noFill/>
+        </p:spPr>
+        <p:txBody>
+          <a:bodyPr wrap="none" lIns="0" rIns="0" tIns="0" bIns="0" anchor="ctr">
             <a:noAutofit/>
           </a:bodyPr>
           <a:lstStyle/>
@@ -5973,16 +5943,16 @@
         </p:nvSpPr>
         <p:spPr>
           <a:xfrm>
-            <a:off x="1015999" y="389466"/>
-            <a:ext cx="4775200" cy="160866"/>
-          </a:xfrm>
-          <a:prstGeom prst="rect">
-            <a:avLst/>
-          </a:prstGeom>
-          <a:noFill/>
-        </p:spPr>
-        <p:txBody>
-          <a:bodyPr wrap="none" lIns="0" rIns="0" tIns="0" bIns="0">
+            <a:off x="1015999" y="372533"/>
+            <a:ext cx="4775200" cy="194733"/>
+          </a:xfrm>
+          <a:prstGeom prst="rect">
+            <a:avLst/>
+          </a:prstGeom>
+          <a:noFill/>
+        </p:spPr>
+        <p:txBody>
+          <a:bodyPr wrap="none" lIns="0" rIns="0" tIns="0" bIns="0" anchor="ctr">
             <a:noAutofit/>
           </a:bodyPr>
           <a:lstStyle/>
@@ -6013,7 +5983,7 @@
         <p:spPr>
           <a:xfrm>
             <a:off x="1015999" y="778933"/>
-            <a:ext cx="6350000" cy="533400"/>
+            <a:ext cx="10193866" cy="533400"/>
           </a:xfrm>
           <a:prstGeom prst="rect">
             <a:avLst/>
@@ -6051,16 +6021,16 @@
         </p:nvSpPr>
         <p:spPr>
           <a:xfrm>
-            <a:off x="1015999" y="3213100"/>
-            <a:ext cx="4436533" cy="160866"/>
-          </a:xfrm>
-          <a:prstGeom prst="rect">
-            <a:avLst/>
-          </a:prstGeom>
-          <a:noFill/>
-        </p:spPr>
-        <p:txBody>
-          <a:bodyPr wrap="none" lIns="0" rIns="0" tIns="0" bIns="0">
+            <a:off x="1015999" y="3196166"/>
+            <a:ext cx="4436533" cy="194733"/>
+          </a:xfrm>
+          <a:prstGeom prst="rect">
+            <a:avLst/>
+          </a:prstGeom>
+          <a:noFill/>
+        </p:spPr>
+        <p:txBody>
+          <a:bodyPr wrap="none" lIns="0" rIns="0" tIns="0" bIns="0" anchor="ctr">
             <a:noAutofit/>
           </a:bodyPr>
           <a:lstStyle/>
@@ -6091,7 +6061,7 @@
         <p:spPr>
           <a:xfrm>
             <a:off x="1015999" y="3507740"/>
-            <a:ext cx="2938780" cy="1259840"/>
+            <a:ext cx="4792980" cy="1259840"/>
           </a:xfrm>
           <a:prstGeom prst="rect">
             <a:avLst/>
@@ -6186,16 +6156,16 @@
         </p:nvSpPr>
         <p:spPr>
           <a:xfrm>
-            <a:off x="2003213" y="6466839"/>
-            <a:ext cx="3928533" cy="160866"/>
-          </a:xfrm>
-          <a:prstGeom prst="rect">
-            <a:avLst/>
-          </a:prstGeom>
-          <a:noFill/>
-        </p:spPr>
-        <p:txBody>
-          <a:bodyPr wrap="none" lIns="0" rIns="0" tIns="0" bIns="0">
+            <a:off x="2003213" y="6449906"/>
+            <a:ext cx="3928533" cy="194733"/>
+          </a:xfrm>
+          <a:prstGeom prst="rect">
+            <a:avLst/>
+          </a:prstGeom>
+          <a:noFill/>
+        </p:spPr>
+        <p:txBody>
+          <a:bodyPr wrap="none" lIns="0" rIns="0" tIns="0" bIns="0" anchor="ctr">
             <a:noAutofit/>
           </a:bodyPr>
           <a:lstStyle/>
@@ -6225,8 +6195,8 @@
         </p:nvSpPr>
         <p:spPr>
           <a:xfrm>
-            <a:off x="7321126" y="5578686"/>
-            <a:ext cx="1971886" cy="160866"/>
+            <a:off x="5404273" y="5578686"/>
+            <a:ext cx="5805593" cy="160866"/>
           </a:xfrm>
           <a:prstGeom prst="rect">
             <a:avLst/>
@@ -6264,16 +6234,16 @@
         </p:nvSpPr>
         <p:spPr>
           <a:xfrm>
-            <a:off x="10634133" y="6495626"/>
-            <a:ext cx="575733" cy="176106"/>
-          </a:xfrm>
-          <a:prstGeom prst="rect">
-            <a:avLst/>
-          </a:prstGeom>
-          <a:noFill/>
-        </p:spPr>
-        <p:txBody>
-          <a:bodyPr wrap="none" lIns="0" rIns="0" tIns="0" bIns="0">
+            <a:off x="10634133" y="6478693"/>
+            <a:ext cx="575733" cy="209973"/>
+          </a:xfrm>
+          <a:prstGeom prst="rect">
+            <a:avLst/>
+          </a:prstGeom>
+          <a:noFill/>
+        </p:spPr>
+        <p:txBody>
+          <a:bodyPr wrap="none" lIns="0" rIns="0" tIns="0" bIns="0" anchor="ctr">
             <a:noAutofit/>
           </a:bodyPr>
           <a:lstStyle/>
@@ -6413,16 +6383,16 @@
         </p:nvSpPr>
         <p:spPr>
           <a:xfrm>
-            <a:off x="1015999" y="389466"/>
-            <a:ext cx="4775200" cy="160866"/>
-          </a:xfrm>
-          <a:prstGeom prst="rect">
-            <a:avLst/>
-          </a:prstGeom>
-          <a:noFill/>
-        </p:spPr>
-        <p:txBody>
-          <a:bodyPr wrap="none" lIns="0" rIns="0" tIns="0" bIns="0">
+            <a:off x="1015999" y="372533"/>
+            <a:ext cx="4775200" cy="194733"/>
+          </a:xfrm>
+          <a:prstGeom prst="rect">
+            <a:avLst/>
+          </a:prstGeom>
+          <a:noFill/>
+        </p:spPr>
+        <p:txBody>
+          <a:bodyPr wrap="none" lIns="0" rIns="0" tIns="0" bIns="0" anchor="ctr">
             <a:noAutofit/>
           </a:bodyPr>
           <a:lstStyle/>
@@ -6453,7 +6423,7 @@
         <p:spPr>
           <a:xfrm>
             <a:off x="1015999" y="778933"/>
-            <a:ext cx="4933526" cy="533400"/>
+            <a:ext cx="10193866" cy="533400"/>
           </a:xfrm>
           <a:prstGeom prst="rect">
             <a:avLst/>
@@ -6492,7 +6462,7 @@
         <p:spPr>
           <a:xfrm>
             <a:off x="1015999" y="3012440"/>
-            <a:ext cx="2647526" cy="685800"/>
+            <a:ext cx="3632199" cy="685800"/>
           </a:xfrm>
           <a:prstGeom prst="rect">
             <a:avLst/>
@@ -6530,16 +6500,16 @@
         </p:nvSpPr>
         <p:spPr>
           <a:xfrm>
-            <a:off x="1015999" y="3777826"/>
-            <a:ext cx="3632199" cy="160866"/>
-          </a:xfrm>
-          <a:prstGeom prst="rect">
-            <a:avLst/>
-          </a:prstGeom>
-          <a:noFill/>
-        </p:spPr>
-        <p:txBody>
-          <a:bodyPr wrap="none" lIns="0" rIns="0" tIns="0" bIns="0">
+            <a:off x="1015999" y="3760893"/>
+            <a:ext cx="3632199" cy="194733"/>
+          </a:xfrm>
+          <a:prstGeom prst="rect">
+            <a:avLst/>
+          </a:prstGeom>
+          <a:noFill/>
+        </p:spPr>
+        <p:txBody>
+          <a:bodyPr wrap="none" lIns="0" rIns="0" tIns="0" bIns="0" anchor="ctr">
             <a:noAutofit/>
           </a:bodyPr>
           <a:lstStyle/>
@@ -6570,7 +6540,7 @@
         <p:spPr>
           <a:xfrm>
             <a:off x="1015999" y="4038599"/>
-            <a:ext cx="2068406" cy="203200"/>
+            <a:ext cx="3632199" cy="203200"/>
           </a:xfrm>
           <a:prstGeom prst="rect">
             <a:avLst/>
@@ -6608,16 +6578,16 @@
         </p:nvSpPr>
         <p:spPr>
           <a:xfrm>
-            <a:off x="2003213" y="6466839"/>
-            <a:ext cx="3928533" cy="160866"/>
-          </a:xfrm>
-          <a:prstGeom prst="rect">
-            <a:avLst/>
-          </a:prstGeom>
-          <a:noFill/>
-        </p:spPr>
-        <p:txBody>
-          <a:bodyPr wrap="none" lIns="0" rIns="0" tIns="0" bIns="0">
+            <a:off x="2003213" y="6449906"/>
+            <a:ext cx="3928533" cy="194733"/>
+          </a:xfrm>
+          <a:prstGeom prst="rect">
+            <a:avLst/>
+          </a:prstGeom>
+          <a:noFill/>
+        </p:spPr>
+        <p:txBody>
+          <a:bodyPr wrap="none" lIns="0" rIns="0" tIns="0" bIns="0" anchor="ctr">
             <a:noAutofit/>
           </a:bodyPr>
           <a:lstStyle/>
@@ -6648,7 +6618,7 @@
         <p:spPr>
           <a:xfrm>
             <a:off x="4749800" y="3012440"/>
-            <a:ext cx="1755140" cy="685800"/>
+            <a:ext cx="3285066" cy="685800"/>
           </a:xfrm>
           <a:prstGeom prst="rect">
             <a:avLst/>
@@ -6686,16 +6656,16 @@
         </p:nvSpPr>
         <p:spPr>
           <a:xfrm>
-            <a:off x="4749800" y="3777826"/>
-            <a:ext cx="3285066" cy="160866"/>
-          </a:xfrm>
-          <a:prstGeom prst="rect">
-            <a:avLst/>
-          </a:prstGeom>
-          <a:noFill/>
-        </p:spPr>
-        <p:txBody>
-          <a:bodyPr wrap="none" lIns="0" rIns="0" tIns="0" bIns="0">
+            <a:off x="4749800" y="3760893"/>
+            <a:ext cx="3285066" cy="194733"/>
+          </a:xfrm>
+          <a:prstGeom prst="rect">
+            <a:avLst/>
+          </a:prstGeom>
+          <a:noFill/>
+        </p:spPr>
+        <p:txBody>
+          <a:bodyPr wrap="none" lIns="0" rIns="0" tIns="0" bIns="0" anchor="ctr">
             <a:noAutofit/>
           </a:bodyPr>
           <a:lstStyle/>
@@ -6726,7 +6696,7 @@
         <p:spPr>
           <a:xfrm>
             <a:off x="4749800" y="4038599"/>
-            <a:ext cx="2068406" cy="203200"/>
+            <a:ext cx="3285066" cy="203200"/>
           </a:xfrm>
           <a:prstGeom prst="rect">
             <a:avLst/>
@@ -6765,7 +6735,7 @@
         <p:spPr>
           <a:xfrm>
             <a:off x="8136466" y="3012440"/>
-            <a:ext cx="1269153" cy="685800"/>
+            <a:ext cx="3073400" cy="685800"/>
           </a:xfrm>
           <a:prstGeom prst="rect">
             <a:avLst/>
@@ -6803,16 +6773,16 @@
         </p:nvSpPr>
         <p:spPr>
           <a:xfrm>
-            <a:off x="8136466" y="3777826"/>
-            <a:ext cx="3886199" cy="160866"/>
-          </a:xfrm>
-          <a:prstGeom prst="rect">
-            <a:avLst/>
-          </a:prstGeom>
-          <a:noFill/>
-        </p:spPr>
-        <p:txBody>
-          <a:bodyPr wrap="none" lIns="0" rIns="0" tIns="0" bIns="0">
+            <a:off x="8136466" y="3760893"/>
+            <a:ext cx="3886199" cy="194733"/>
+          </a:xfrm>
+          <a:prstGeom prst="rect">
+            <a:avLst/>
+          </a:prstGeom>
+          <a:noFill/>
+        </p:spPr>
+        <p:txBody>
+          <a:bodyPr wrap="none" lIns="0" rIns="0" tIns="0" bIns="0" anchor="ctr">
             <a:noAutofit/>
           </a:bodyPr>
           <a:lstStyle/>
@@ -6843,7 +6813,7 @@
         <p:spPr>
           <a:xfrm>
             <a:off x="8136466" y="4038599"/>
-            <a:ext cx="2068406" cy="203200"/>
+            <a:ext cx="3073400" cy="203200"/>
           </a:xfrm>
           <a:prstGeom prst="rect">
             <a:avLst/>
@@ -6881,8 +6851,8 @@
         </p:nvSpPr>
         <p:spPr>
           <a:xfrm>
-            <a:off x="10050779" y="4712546"/>
-            <a:ext cx="1159086" cy="160866"/>
+            <a:off x="203200" y="4712546"/>
+            <a:ext cx="11006666" cy="160866"/>
           </a:xfrm>
           <a:prstGeom prst="rect">
             <a:avLst/>
@@ -6920,16 +6890,16 @@
         </p:nvSpPr>
         <p:spPr>
           <a:xfrm>
-            <a:off x="10634133" y="6495626"/>
-            <a:ext cx="575733" cy="176106"/>
-          </a:xfrm>
-          <a:prstGeom prst="rect">
-            <a:avLst/>
-          </a:prstGeom>
-          <a:noFill/>
-        </p:spPr>
-        <p:txBody>
-          <a:bodyPr wrap="none" lIns="0" rIns="0" tIns="0" bIns="0">
+            <a:off x="10634133" y="6478693"/>
+            <a:ext cx="575733" cy="209973"/>
+          </a:xfrm>
+          <a:prstGeom prst="rect">
+            <a:avLst/>
+          </a:prstGeom>
+          <a:noFill/>
+        </p:spPr>
+        <p:txBody>
+          <a:bodyPr wrap="none" lIns="0" rIns="0" tIns="0" bIns="0" anchor="ctr">
             <a:noAutofit/>
           </a:bodyPr>
           <a:lstStyle/>
@@ -6977,9 +6947,105 @@
         <p:nvPr/>
       </p:nvGrpSpPr>
       <p:grpSpPr/>
-      <p:sp>
-        <p:nvSpPr>
-          <p:cNvPr id="2" name="Rectangle 1"/>
+      <p:pic>
+        <p:nvPicPr>
+          <p:cNvPr id="2" name="Picture 1" descr="pix-12-0.png"/>
+          <p:cNvPicPr>
+            <a:picLocks noChangeAspect="1"/>
+          </p:cNvPicPr>
+          <p:nvPr/>
+        </p:nvPicPr>
+        <p:blipFill>
+          <a:blip r:embed="rId2"/>
+          <a:stretch>
+            <a:fillRect/>
+          </a:stretch>
+        </p:blipFill>
+        <p:spPr>
+          <a:xfrm>
+            <a:off x="5621866" y="3158066"/>
+            <a:ext cx="203200" cy="203200"/>
+          </a:xfrm>
+          <a:prstGeom prst="rect">
+            <a:avLst/>
+          </a:prstGeom>
+        </p:spPr>
+      </p:pic>
+      <p:pic>
+        <p:nvPicPr>
+          <p:cNvPr id="3" name="Picture 2" descr="pix-12-1.png"/>
+          <p:cNvPicPr>
+            <a:picLocks noChangeAspect="1"/>
+          </p:cNvPicPr>
+          <p:nvPr/>
+        </p:nvPicPr>
+        <p:blipFill>
+          <a:blip r:embed="rId3"/>
+          <a:stretch>
+            <a:fillRect/>
+          </a:stretch>
+        </p:blipFill>
+        <p:spPr>
+          <a:xfrm>
+            <a:off x="10972800" y="3158066"/>
+            <a:ext cx="203200" cy="203200"/>
+          </a:xfrm>
+          <a:prstGeom prst="rect">
+            <a:avLst/>
+          </a:prstGeom>
+        </p:spPr>
+      </p:pic>
+      <p:pic>
+        <p:nvPicPr>
+          <p:cNvPr id="4" name="Picture 3" descr="pix-12-2.png"/>
+          <p:cNvPicPr>
+            <a:picLocks noChangeAspect="1"/>
+          </p:cNvPicPr>
+          <p:nvPr/>
+        </p:nvPicPr>
+        <p:blipFill>
+          <a:blip r:embed="rId4"/>
+          <a:stretch>
+            <a:fillRect/>
+          </a:stretch>
+        </p:blipFill>
+        <p:spPr>
+          <a:xfrm>
+            <a:off x="5621866" y="4297680"/>
+            <a:ext cx="203200" cy="203200"/>
+          </a:xfrm>
+          <a:prstGeom prst="rect">
+            <a:avLst/>
+          </a:prstGeom>
+        </p:spPr>
+      </p:pic>
+      <p:pic>
+        <p:nvPicPr>
+          <p:cNvPr id="5" name="Picture 4" descr="pix-12-3.png"/>
+          <p:cNvPicPr>
+            <a:picLocks noChangeAspect="1"/>
+          </p:cNvPicPr>
+          <p:nvPr/>
+        </p:nvPicPr>
+        <p:blipFill>
+          <a:blip r:embed="rId5"/>
+          <a:stretch>
+            <a:fillRect/>
+          </a:stretch>
+        </p:blipFill>
+        <p:spPr>
+          <a:xfrm>
+            <a:off x="10972800" y="4297680"/>
+            <a:ext cx="203200" cy="203200"/>
+          </a:xfrm>
+          <a:prstGeom prst="rect">
+            <a:avLst/>
+          </a:prstGeom>
+        </p:spPr>
+      </p:pic>
+      <p:sp>
+        <p:nvSpPr>
+          <p:cNvPr id="6" name="Rectangle 5"/>
           <p:cNvSpPr/>
           <p:nvPr/>
         </p:nvSpPr>
@@ -7009,7 +7075,7 @@
       </p:sp>
       <p:sp>
         <p:nvSpPr>
-          <p:cNvPr id="3" name="Rectangle 2"/>
+          <p:cNvPr id="7" name="Rectangle 6"/>
           <p:cNvSpPr/>
           <p:nvPr/>
         </p:nvSpPr>
@@ -7039,7 +7105,7 @@
       </p:sp>
       <p:sp>
         <p:nvSpPr>
-          <p:cNvPr id="4" name="Rectangle 3"/>
+          <p:cNvPr id="8" name="Rectangle 7"/>
           <p:cNvSpPr/>
           <p:nvPr/>
         </p:nvSpPr>
@@ -7069,7 +7135,7 @@
       </p:sp>
       <p:sp>
         <p:nvSpPr>
-          <p:cNvPr id="5" name="Rectangle 4"/>
+          <p:cNvPr id="9" name="Rectangle 8"/>
           <p:cNvSpPr/>
           <p:nvPr/>
         </p:nvSpPr>
@@ -7099,14 +7165,14 @@
       </p:sp>
       <p:pic>
         <p:nvPicPr>
-          <p:cNvPr id="6" name="Picture 5" descr="wordmark-black-crop.png"/>
+          <p:cNvPr id="10" name="Picture 9" descr="wordmark-black-crop.png"/>
           <p:cNvPicPr>
             <a:picLocks noChangeAspect="1"/>
           </p:cNvPicPr>
           <p:nvPr/>
         </p:nvPicPr>
         <p:blipFill>
-          <a:blip r:embed="rId2"/>
+          <a:blip r:embed="rId6"/>
           <a:stretch>
             <a:fillRect/>
           </a:stretch>
@@ -7123,22 +7189,22 @@
       </p:pic>
       <p:sp>
         <p:nvSpPr>
-          <p:cNvPr id="7" name="TextBox 6"/>
-          <p:cNvSpPr txBox="1"/>
-          <p:nvPr/>
-        </p:nvSpPr>
-        <p:spPr>
-          <a:xfrm>
-            <a:off x="1015999" y="389466"/>
-            <a:ext cx="4775200" cy="160866"/>
-          </a:xfrm>
-          <a:prstGeom prst="rect">
-            <a:avLst/>
-          </a:prstGeom>
-          <a:noFill/>
-        </p:spPr>
-        <p:txBody>
-          <a:bodyPr wrap="none" lIns="0" rIns="0" tIns="0" bIns="0">
+          <p:cNvPr id="11" name="TextBox 10"/>
+          <p:cNvSpPr txBox="1"/>
+          <p:nvPr/>
+        </p:nvSpPr>
+        <p:spPr>
+          <a:xfrm>
+            <a:off x="1015999" y="372533"/>
+            <a:ext cx="4775200" cy="194733"/>
+          </a:xfrm>
+          <a:prstGeom prst="rect">
+            <a:avLst/>
+          </a:prstGeom>
+          <a:noFill/>
+        </p:spPr>
+        <p:txBody>
+          <a:bodyPr wrap="none" lIns="0" rIns="0" tIns="0" bIns="0" anchor="ctr">
             <a:noAutofit/>
           </a:bodyPr>
           <a:lstStyle/>
@@ -7162,14 +7228,14 @@
       </p:sp>
       <p:sp>
         <p:nvSpPr>
-          <p:cNvPr id="8" name="TextBox 7"/>
+          <p:cNvPr id="12" name="TextBox 11"/>
           <p:cNvSpPr txBox="1"/>
           <p:nvPr/>
         </p:nvSpPr>
         <p:spPr>
           <a:xfrm>
             <a:off x="1015999" y="778933"/>
-            <a:ext cx="4711700" cy="533400"/>
+            <a:ext cx="10193866" cy="533400"/>
           </a:xfrm>
           <a:prstGeom prst="rect">
             <a:avLst/>
@@ -7201,14 +7267,14 @@
       </p:sp>
       <p:sp>
         <p:nvSpPr>
-          <p:cNvPr id="9" name="TextBox 8"/>
+          <p:cNvPr id="13" name="TextBox 12"/>
           <p:cNvSpPr txBox="1"/>
           <p:nvPr/>
         </p:nvSpPr>
         <p:spPr>
           <a:xfrm>
             <a:off x="1015999" y="3141133"/>
-            <a:ext cx="2701713" cy="575733"/>
+            <a:ext cx="4504266" cy="575733"/>
           </a:xfrm>
           <a:prstGeom prst="rect">
             <a:avLst/>
@@ -7259,14 +7325,14 @@
       </p:sp>
       <p:sp>
         <p:nvSpPr>
-          <p:cNvPr id="10" name="TextBox 9"/>
+          <p:cNvPr id="14" name="TextBox 13"/>
           <p:cNvSpPr txBox="1"/>
           <p:nvPr/>
         </p:nvSpPr>
         <p:spPr>
           <a:xfrm>
             <a:off x="1015999" y="4280746"/>
-            <a:ext cx="2701713" cy="575733"/>
+            <a:ext cx="4504266" cy="575733"/>
           </a:xfrm>
           <a:prstGeom prst="rect">
             <a:avLst/>
@@ -7317,22 +7383,22 @@
       </p:sp>
       <p:sp>
         <p:nvSpPr>
-          <p:cNvPr id="11" name="TextBox 10"/>
-          <p:cNvSpPr txBox="1"/>
-          <p:nvPr/>
-        </p:nvSpPr>
-        <p:spPr>
-          <a:xfrm>
-            <a:off x="2003213" y="6466839"/>
-            <a:ext cx="3928533" cy="160866"/>
-          </a:xfrm>
-          <a:prstGeom prst="rect">
-            <a:avLst/>
-          </a:prstGeom>
-          <a:noFill/>
-        </p:spPr>
-        <p:txBody>
-          <a:bodyPr wrap="none" lIns="0" rIns="0" tIns="0" bIns="0">
+          <p:cNvPr id="15" name="TextBox 14"/>
+          <p:cNvSpPr txBox="1"/>
+          <p:nvPr/>
+        </p:nvSpPr>
+        <p:spPr>
+          <a:xfrm>
+            <a:off x="2003213" y="6449906"/>
+            <a:ext cx="3928533" cy="194733"/>
+          </a:xfrm>
+          <a:prstGeom prst="rect">
+            <a:avLst/>
+          </a:prstGeom>
+          <a:noFill/>
+        </p:spPr>
+        <p:txBody>
+          <a:bodyPr wrap="none" lIns="0" rIns="0" tIns="0" bIns="0" anchor="ctr">
             <a:noAutofit/>
           </a:bodyPr>
           <a:lstStyle/>
@@ -7356,14 +7422,14 @@
       </p:sp>
       <p:sp>
         <p:nvSpPr>
-          <p:cNvPr id="12" name="TextBox 11"/>
+          <p:cNvPr id="16" name="TextBox 15"/>
           <p:cNvSpPr txBox="1"/>
           <p:nvPr/>
         </p:nvSpPr>
         <p:spPr>
           <a:xfrm>
             <a:off x="6366933" y="3141133"/>
-            <a:ext cx="2701713" cy="575733"/>
+            <a:ext cx="4504266" cy="575733"/>
           </a:xfrm>
           <a:prstGeom prst="rect">
             <a:avLst/>
@@ -7414,14 +7480,14 @@
       </p:sp>
       <p:sp>
         <p:nvSpPr>
-          <p:cNvPr id="13" name="TextBox 12"/>
+          <p:cNvPr id="17" name="TextBox 16"/>
           <p:cNvSpPr txBox="1"/>
           <p:nvPr/>
         </p:nvSpPr>
         <p:spPr>
           <a:xfrm>
             <a:off x="6366933" y="4280746"/>
-            <a:ext cx="2701713" cy="575733"/>
+            <a:ext cx="4504266" cy="575733"/>
           </a:xfrm>
           <a:prstGeom prst="rect">
             <a:avLst/>
@@ -7472,22 +7538,22 @@
       </p:sp>
       <p:sp>
         <p:nvSpPr>
-          <p:cNvPr id="14" name="TextBox 13"/>
-          <p:cNvSpPr txBox="1"/>
-          <p:nvPr/>
-        </p:nvSpPr>
-        <p:spPr>
-          <a:xfrm>
-            <a:off x="10634133" y="6495626"/>
-            <a:ext cx="575733" cy="176106"/>
-          </a:xfrm>
-          <a:prstGeom prst="rect">
-            <a:avLst/>
-          </a:prstGeom>
-          <a:noFill/>
-        </p:spPr>
-        <p:txBody>
-          <a:bodyPr wrap="none" lIns="0" rIns="0" tIns="0" bIns="0">
+          <p:cNvPr id="18" name="TextBox 17"/>
+          <p:cNvSpPr txBox="1"/>
+          <p:nvPr/>
+        </p:nvSpPr>
+        <p:spPr>
+          <a:xfrm>
+            <a:off x="10634133" y="6478693"/>
+            <a:ext cx="575733" cy="209973"/>
+          </a:xfrm>
+          <a:prstGeom prst="rect">
+            <a:avLst/>
+          </a:prstGeom>
+          <a:noFill/>
+        </p:spPr>
+        <p:txBody>
+          <a:bodyPr wrap="none" lIns="0" rIns="0" tIns="0" bIns="0" anchor="ctr">
             <a:noAutofit/>
           </a:bodyPr>
           <a:lstStyle/>
@@ -7535,9 +7601,57 @@
         <p:nvPr/>
       </p:nvGrpSpPr>
       <p:grpSpPr/>
-      <p:sp>
-        <p:nvSpPr>
-          <p:cNvPr id="2" name="Rectangle 1"/>
+      <p:pic>
+        <p:nvPicPr>
+          <p:cNvPr id="2" name="Picture 1" descr="pix-13-0.png"/>
+          <p:cNvPicPr>
+            <a:picLocks noChangeAspect="1"/>
+          </p:cNvPicPr>
+          <p:nvPr/>
+        </p:nvPicPr>
+        <p:blipFill>
+          <a:blip r:embed="rId2"/>
+          <a:stretch>
+            <a:fillRect/>
+          </a:stretch>
+        </p:blipFill>
+        <p:spPr>
+          <a:xfrm>
+            <a:off x="5723466" y="3392593"/>
+            <a:ext cx="169333" cy="169333"/>
+          </a:xfrm>
+          <a:prstGeom prst="rect">
+            <a:avLst/>
+          </a:prstGeom>
+        </p:spPr>
+      </p:pic>
+      <p:pic>
+        <p:nvPicPr>
+          <p:cNvPr id="3" name="Picture 2" descr="pix-13-1.png"/>
+          <p:cNvPicPr>
+            <a:picLocks noChangeAspect="1"/>
+          </p:cNvPicPr>
+          <p:nvPr/>
+        </p:nvPicPr>
+        <p:blipFill>
+          <a:blip r:embed="rId3"/>
+          <a:stretch>
+            <a:fillRect/>
+          </a:stretch>
+        </p:blipFill>
+        <p:spPr>
+          <a:xfrm>
+            <a:off x="11006666" y="3392593"/>
+            <a:ext cx="169333" cy="169333"/>
+          </a:xfrm>
+          <a:prstGeom prst="rect">
+            <a:avLst/>
+          </a:prstGeom>
+        </p:spPr>
+      </p:pic>
+      <p:sp>
+        <p:nvSpPr>
+          <p:cNvPr id="4" name="Rectangle 3"/>
           <p:cNvSpPr/>
           <p:nvPr/>
         </p:nvSpPr>
@@ -7567,7 +7681,7 @@
       </p:sp>
       <p:sp>
         <p:nvSpPr>
-          <p:cNvPr id="3" name="Rectangle 2"/>
+          <p:cNvPr id="5" name="Rectangle 4"/>
           <p:cNvSpPr/>
           <p:nvPr/>
         </p:nvSpPr>
@@ -7597,14 +7711,14 @@
       </p:sp>
       <p:pic>
         <p:nvPicPr>
-          <p:cNvPr id="4" name="Picture 3" descr="wordmark-black-crop.png"/>
+          <p:cNvPr id="6" name="Picture 5" descr="wordmark-black-crop.png"/>
           <p:cNvPicPr>
             <a:picLocks noChangeAspect="1"/>
           </p:cNvPicPr>
           <p:nvPr/>
         </p:nvPicPr>
         <p:blipFill>
-          <a:blip r:embed="rId2"/>
+          <a:blip r:embed="rId4"/>
           <a:stretch>
             <a:fillRect/>
           </a:stretch>
@@ -7621,22 +7735,22 @@
       </p:pic>
       <p:sp>
         <p:nvSpPr>
-          <p:cNvPr id="5" name="TextBox 4"/>
-          <p:cNvSpPr txBox="1"/>
-          <p:nvPr/>
-        </p:nvSpPr>
-        <p:spPr>
-          <a:xfrm>
-            <a:off x="1015999" y="389466"/>
-            <a:ext cx="4775200" cy="160866"/>
-          </a:xfrm>
-          <a:prstGeom prst="rect">
-            <a:avLst/>
-          </a:prstGeom>
-          <a:noFill/>
-        </p:spPr>
-        <p:txBody>
-          <a:bodyPr wrap="none" lIns="0" rIns="0" tIns="0" bIns="0">
+          <p:cNvPr id="7" name="TextBox 6"/>
+          <p:cNvSpPr txBox="1"/>
+          <p:nvPr/>
+        </p:nvSpPr>
+        <p:spPr>
+          <a:xfrm>
+            <a:off x="1015999" y="372533"/>
+            <a:ext cx="4775200" cy="194733"/>
+          </a:xfrm>
+          <a:prstGeom prst="rect">
+            <a:avLst/>
+          </a:prstGeom>
+          <a:noFill/>
+        </p:spPr>
+        <p:txBody>
+          <a:bodyPr wrap="none" lIns="0" rIns="0" tIns="0" bIns="0" anchor="ctr">
             <a:noAutofit/>
           </a:bodyPr>
           <a:lstStyle/>
@@ -7660,14 +7774,14 @@
       </p:sp>
       <p:sp>
         <p:nvSpPr>
-          <p:cNvPr id="6" name="TextBox 5"/>
+          <p:cNvPr id="8" name="TextBox 7"/>
           <p:cNvSpPr txBox="1"/>
           <p:nvPr/>
         </p:nvSpPr>
         <p:spPr>
           <a:xfrm>
             <a:off x="1015999" y="778933"/>
-            <a:ext cx="5444913" cy="533400"/>
+            <a:ext cx="10193866" cy="533400"/>
           </a:xfrm>
           <a:prstGeom prst="rect">
             <a:avLst/>
@@ -7699,22 +7813,22 @@
       </p:sp>
       <p:sp>
         <p:nvSpPr>
-          <p:cNvPr id="7" name="TextBox 6"/>
-          <p:cNvSpPr txBox="1"/>
-          <p:nvPr/>
-        </p:nvSpPr>
-        <p:spPr>
-          <a:xfrm>
-            <a:off x="1015999" y="3389206"/>
-            <a:ext cx="4436533" cy="160866"/>
-          </a:xfrm>
-          <a:prstGeom prst="rect">
-            <a:avLst/>
-          </a:prstGeom>
-          <a:noFill/>
-        </p:spPr>
-        <p:txBody>
-          <a:bodyPr wrap="none" lIns="0" rIns="0" tIns="0" bIns="0">
+          <p:cNvPr id="9" name="TextBox 8"/>
+          <p:cNvSpPr txBox="1"/>
+          <p:nvPr/>
+        </p:nvSpPr>
+        <p:spPr>
+          <a:xfrm>
+            <a:off x="1015999" y="3372273"/>
+            <a:ext cx="4436533" cy="194733"/>
+          </a:xfrm>
+          <a:prstGeom prst="rect">
+            <a:avLst/>
+          </a:prstGeom>
+          <a:noFill/>
+        </p:spPr>
+        <p:txBody>
+          <a:bodyPr wrap="none" lIns="0" rIns="0" tIns="0" bIns="0" anchor="ctr">
             <a:noAutofit/>
           </a:bodyPr>
           <a:lstStyle/>
@@ -7738,14 +7852,14 @@
       </p:sp>
       <p:sp>
         <p:nvSpPr>
-          <p:cNvPr id="8" name="TextBox 7"/>
+          <p:cNvPr id="10" name="TextBox 9"/>
           <p:cNvSpPr txBox="1"/>
           <p:nvPr/>
         </p:nvSpPr>
         <p:spPr>
           <a:xfrm>
             <a:off x="1015999" y="3697393"/>
-            <a:ext cx="1973579" cy="907626"/>
+            <a:ext cx="5181600" cy="907626"/>
           </a:xfrm>
           <a:prstGeom prst="rect">
             <a:avLst/>
@@ -7815,22 +7929,22 @@
       </p:sp>
       <p:sp>
         <p:nvSpPr>
-          <p:cNvPr id="9" name="TextBox 8"/>
-          <p:cNvSpPr txBox="1"/>
-          <p:nvPr/>
-        </p:nvSpPr>
-        <p:spPr>
-          <a:xfrm>
-            <a:off x="2003213" y="6466839"/>
-            <a:ext cx="3928533" cy="160866"/>
-          </a:xfrm>
-          <a:prstGeom prst="rect">
-            <a:avLst/>
-          </a:prstGeom>
-          <a:noFill/>
-        </p:spPr>
-        <p:txBody>
-          <a:bodyPr wrap="none" lIns="0" rIns="0" tIns="0" bIns="0">
+          <p:cNvPr id="11" name="TextBox 10"/>
+          <p:cNvSpPr txBox="1"/>
+          <p:nvPr/>
+        </p:nvSpPr>
+        <p:spPr>
+          <a:xfrm>
+            <a:off x="2003213" y="6449906"/>
+            <a:ext cx="3928533" cy="194733"/>
+          </a:xfrm>
+          <a:prstGeom prst="rect">
+            <a:avLst/>
+          </a:prstGeom>
+          <a:noFill/>
+        </p:spPr>
+        <p:txBody>
+          <a:bodyPr wrap="none" lIns="0" rIns="0" tIns="0" bIns="0" anchor="ctr">
             <a:noAutofit/>
           </a:bodyPr>
           <a:lstStyle/>
@@ -7854,22 +7968,22 @@
       </p:sp>
       <p:sp>
         <p:nvSpPr>
-          <p:cNvPr id="10" name="TextBox 9"/>
-          <p:cNvSpPr txBox="1"/>
-          <p:nvPr/>
-        </p:nvSpPr>
-        <p:spPr>
-          <a:xfrm>
-            <a:off x="6299200" y="3389206"/>
-            <a:ext cx="4436533" cy="160866"/>
-          </a:xfrm>
-          <a:prstGeom prst="rect">
-            <a:avLst/>
-          </a:prstGeom>
-          <a:noFill/>
-        </p:spPr>
-        <p:txBody>
-          <a:bodyPr wrap="none" lIns="0" rIns="0" tIns="0" bIns="0">
+          <p:cNvPr id="12" name="TextBox 11"/>
+          <p:cNvSpPr txBox="1"/>
+          <p:nvPr/>
+        </p:nvSpPr>
+        <p:spPr>
+          <a:xfrm>
+            <a:off x="6299200" y="3372273"/>
+            <a:ext cx="4436533" cy="194733"/>
+          </a:xfrm>
+          <a:prstGeom prst="rect">
+            <a:avLst/>
+          </a:prstGeom>
+          <a:noFill/>
+        </p:spPr>
+        <p:txBody>
+          <a:bodyPr wrap="none" lIns="0" rIns="0" tIns="0" bIns="0" anchor="ctr">
             <a:noAutofit/>
           </a:bodyPr>
           <a:lstStyle/>
@@ -7893,14 +8007,14 @@
       </p:sp>
       <p:sp>
         <p:nvSpPr>
-          <p:cNvPr id="11" name="TextBox 10"/>
+          <p:cNvPr id="13" name="TextBox 12"/>
           <p:cNvSpPr txBox="1"/>
           <p:nvPr/>
         </p:nvSpPr>
         <p:spPr>
           <a:xfrm>
             <a:off x="6299200" y="3697393"/>
-            <a:ext cx="1973579" cy="907626"/>
+            <a:ext cx="4910666" cy="907626"/>
           </a:xfrm>
           <a:prstGeom prst="rect">
             <a:avLst/>
@@ -7970,22 +8084,22 @@
       </p:sp>
       <p:sp>
         <p:nvSpPr>
-          <p:cNvPr id="12" name="TextBox 11"/>
-          <p:cNvSpPr txBox="1"/>
-          <p:nvPr/>
-        </p:nvSpPr>
-        <p:spPr>
-          <a:xfrm>
-            <a:off x="10634133" y="6495626"/>
-            <a:ext cx="575733" cy="176106"/>
-          </a:xfrm>
-          <a:prstGeom prst="rect">
-            <a:avLst/>
-          </a:prstGeom>
-          <a:noFill/>
-        </p:spPr>
-        <p:txBody>
-          <a:bodyPr wrap="none" lIns="0" rIns="0" tIns="0" bIns="0">
+          <p:cNvPr id="14" name="TextBox 13"/>
+          <p:cNvSpPr txBox="1"/>
+          <p:nvPr/>
+        </p:nvSpPr>
+        <p:spPr>
+          <a:xfrm>
+            <a:off x="10634133" y="6478693"/>
+            <a:ext cx="575733" cy="209973"/>
+          </a:xfrm>
+          <a:prstGeom prst="rect">
+            <a:avLst/>
+          </a:prstGeom>
+          <a:noFill/>
+        </p:spPr>
+        <p:txBody>
+          <a:bodyPr wrap="none" lIns="0" rIns="0" tIns="0" bIns="0" anchor="ctr">
             <a:noAutofit/>
           </a:bodyPr>
           <a:lstStyle/>
@@ -8193,16 +8307,16 @@
         </p:nvSpPr>
         <p:spPr>
           <a:xfrm>
-            <a:off x="1015999" y="389466"/>
-            <a:ext cx="4775200" cy="160866"/>
-          </a:xfrm>
-          <a:prstGeom prst="rect">
-            <a:avLst/>
-          </a:prstGeom>
-          <a:noFill/>
-        </p:spPr>
-        <p:txBody>
-          <a:bodyPr wrap="none" lIns="0" rIns="0" tIns="0" bIns="0">
+            <a:off x="1015999" y="372533"/>
+            <a:ext cx="4775200" cy="194733"/>
+          </a:xfrm>
+          <a:prstGeom prst="rect">
+            <a:avLst/>
+          </a:prstGeom>
+          <a:noFill/>
+        </p:spPr>
+        <p:txBody>
+          <a:bodyPr wrap="none" lIns="0" rIns="0" tIns="0" bIns="0" anchor="ctr">
             <a:noAutofit/>
           </a:bodyPr>
           <a:lstStyle/>
@@ -8233,7 +8347,7 @@
         <p:spPr>
           <a:xfrm>
             <a:off x="1015999" y="778933"/>
-            <a:ext cx="5309446" cy="533400"/>
+            <a:ext cx="10193866" cy="533400"/>
           </a:xfrm>
           <a:prstGeom prst="rect">
             <a:avLst/>
@@ -8272,7 +8386,7 @@
         <p:spPr>
           <a:xfrm>
             <a:off x="1286933" y="2401146"/>
-            <a:ext cx="2821093" cy="543560"/>
+            <a:ext cx="4572000" cy="543560"/>
           </a:xfrm>
           <a:prstGeom prst="rect">
             <a:avLst/>
@@ -8311,7 +8425,7 @@
         <p:spPr>
           <a:xfrm>
             <a:off x="1286933" y="4297680"/>
-            <a:ext cx="2835486" cy="543560"/>
+            <a:ext cx="4572000" cy="543560"/>
           </a:xfrm>
           <a:prstGeom prst="rect">
             <a:avLst/>
@@ -8349,16 +8463,16 @@
         </p:nvSpPr>
         <p:spPr>
           <a:xfrm>
-            <a:off x="2003213" y="6466839"/>
-            <a:ext cx="3928533" cy="160866"/>
-          </a:xfrm>
-          <a:prstGeom prst="rect">
-            <a:avLst/>
-          </a:prstGeom>
-          <a:noFill/>
-        </p:spPr>
-        <p:txBody>
-          <a:bodyPr wrap="none" lIns="0" rIns="0" tIns="0" bIns="0">
+            <a:off x="2003213" y="6449906"/>
+            <a:ext cx="3928533" cy="194733"/>
+          </a:xfrm>
+          <a:prstGeom prst="rect">
+            <a:avLst/>
+          </a:prstGeom>
+          <a:noFill/>
+        </p:spPr>
+        <p:txBody>
+          <a:bodyPr wrap="none" lIns="0" rIns="0" tIns="0" bIns="0" anchor="ctr">
             <a:noAutofit/>
           </a:bodyPr>
           <a:lstStyle/>
@@ -8389,7 +8503,7 @@
         <p:spPr>
           <a:xfrm>
             <a:off x="4862406" y="3383280"/>
-            <a:ext cx="894926" cy="177800"/>
+            <a:ext cx="996526" cy="177800"/>
           </a:xfrm>
           <a:prstGeom prst="rect">
             <a:avLst/>
@@ -8428,7 +8542,7 @@
         <p:spPr>
           <a:xfrm>
             <a:off x="4858173" y="5279813"/>
-            <a:ext cx="899160" cy="177800"/>
+            <a:ext cx="1000760" cy="177800"/>
           </a:xfrm>
           <a:prstGeom prst="rect">
             <a:avLst/>
@@ -8467,7 +8581,7 @@
         <p:spPr>
           <a:xfrm>
             <a:off x="6468533" y="2401146"/>
-            <a:ext cx="2959100" cy="543560"/>
+            <a:ext cx="4572000" cy="543560"/>
           </a:xfrm>
           <a:prstGeom prst="rect">
             <a:avLst/>
@@ -8506,7 +8620,7 @@
         <p:spPr>
           <a:xfrm>
             <a:off x="6468533" y="4297680"/>
-            <a:ext cx="2878666" cy="543560"/>
+            <a:ext cx="4572000" cy="543560"/>
           </a:xfrm>
           <a:prstGeom prst="rect">
             <a:avLst/>
@@ -8545,7 +8659,7 @@
         <p:spPr>
           <a:xfrm>
             <a:off x="10040620" y="5279813"/>
-            <a:ext cx="898313" cy="177800"/>
+            <a:ext cx="999913" cy="177800"/>
           </a:xfrm>
           <a:prstGeom prst="rect">
             <a:avLst/>
@@ -8584,7 +8698,7 @@
         <p:spPr>
           <a:xfrm>
             <a:off x="10048239" y="3383280"/>
-            <a:ext cx="890693" cy="177800"/>
+            <a:ext cx="992293" cy="177800"/>
           </a:xfrm>
           <a:prstGeom prst="rect">
             <a:avLst/>
@@ -8622,16 +8736,16 @@
         </p:nvSpPr>
         <p:spPr>
           <a:xfrm>
-            <a:off x="10634133" y="6495626"/>
-            <a:ext cx="575733" cy="176106"/>
-          </a:xfrm>
-          <a:prstGeom prst="rect">
-            <a:avLst/>
-          </a:prstGeom>
-          <a:noFill/>
-        </p:spPr>
-        <p:txBody>
-          <a:bodyPr wrap="none" lIns="0" rIns="0" tIns="0" bIns="0">
+            <a:off x="10634133" y="6478693"/>
+            <a:ext cx="575733" cy="209973"/>
+          </a:xfrm>
+          <a:prstGeom prst="rect">
+            <a:avLst/>
+          </a:prstGeom>
+          <a:noFill/>
+        </p:spPr>
+        <p:txBody>
+          <a:bodyPr wrap="none" lIns="0" rIns="0" tIns="0" bIns="0" anchor="ctr">
             <a:noAutofit/>
           </a:bodyPr>
           <a:lstStyle/>
@@ -8839,16 +8953,16 @@
         </p:nvSpPr>
         <p:spPr>
           <a:xfrm>
-            <a:off x="1015999" y="389466"/>
-            <a:ext cx="4775200" cy="160866"/>
-          </a:xfrm>
-          <a:prstGeom prst="rect">
-            <a:avLst/>
-          </a:prstGeom>
-          <a:noFill/>
-        </p:spPr>
-        <p:txBody>
-          <a:bodyPr wrap="none" lIns="0" rIns="0" tIns="0" bIns="0">
+            <a:off x="1015999" y="372533"/>
+            <a:ext cx="4775200" cy="194733"/>
+          </a:xfrm>
+          <a:prstGeom prst="rect">
+            <a:avLst/>
+          </a:prstGeom>
+          <a:noFill/>
+        </p:spPr>
+        <p:txBody>
+          <a:bodyPr wrap="none" lIns="0" rIns="0" tIns="0" bIns="0" anchor="ctr">
             <a:noAutofit/>
           </a:bodyPr>
           <a:lstStyle/>
@@ -8879,7 +8993,7 @@
         <p:spPr>
           <a:xfrm>
             <a:off x="1015999" y="778933"/>
-            <a:ext cx="4925060" cy="1000760"/>
+            <a:ext cx="10193866" cy="1000760"/>
           </a:xfrm>
           <a:prstGeom prst="rect">
             <a:avLst/>
@@ -8918,7 +9032,7 @@
         <p:spPr>
           <a:xfrm>
             <a:off x="1219200" y="2816013"/>
-            <a:ext cx="231140" cy="685800"/>
+            <a:ext cx="2048933" cy="685800"/>
           </a:xfrm>
           <a:prstGeom prst="rect">
             <a:avLst/>
@@ -8957,7 +9071,7 @@
         <p:spPr>
           <a:xfrm>
             <a:off x="1219200" y="3598333"/>
-            <a:ext cx="1983740" cy="1210733"/>
+            <a:ext cx="2048933" cy="1210733"/>
           </a:xfrm>
           <a:prstGeom prst="rect">
             <a:avLst/>
@@ -9033,16 +9147,16 @@
         </p:nvSpPr>
         <p:spPr>
           <a:xfrm>
-            <a:off x="2003213" y="6466839"/>
-            <a:ext cx="3928533" cy="160866"/>
-          </a:xfrm>
-          <a:prstGeom prst="rect">
-            <a:avLst/>
-          </a:prstGeom>
-          <a:noFill/>
-        </p:spPr>
-        <p:txBody>
-          <a:bodyPr wrap="none" lIns="0" rIns="0" tIns="0" bIns="0">
+            <a:off x="2003213" y="6449906"/>
+            <a:ext cx="3928533" cy="194733"/>
+          </a:xfrm>
+          <a:prstGeom prst="rect">
+            <a:avLst/>
+          </a:prstGeom>
+          <a:noFill/>
+        </p:spPr>
+        <p:txBody>
+          <a:bodyPr wrap="none" lIns="0" rIns="0" tIns="0" bIns="0" anchor="ctr">
             <a:noAutofit/>
           </a:bodyPr>
           <a:lstStyle/>
@@ -9073,7 +9187,7 @@
         <p:spPr>
           <a:xfrm>
             <a:off x="3809999" y="2816013"/>
-            <a:ext cx="350519" cy="685800"/>
+            <a:ext cx="2048933" cy="685800"/>
           </a:xfrm>
           <a:prstGeom prst="rect">
             <a:avLst/>
@@ -9112,7 +9226,7 @@
         <p:spPr>
           <a:xfrm>
             <a:off x="3809999" y="3598333"/>
-            <a:ext cx="1724659" cy="1388533"/>
+            <a:ext cx="2048933" cy="1388533"/>
           </a:xfrm>
           <a:prstGeom prst="rect">
             <a:avLst/>
@@ -9189,7 +9303,7 @@
         <p:spPr>
           <a:xfrm>
             <a:off x="6400800" y="2816013"/>
-            <a:ext cx="346286" cy="685800"/>
+            <a:ext cx="2048933" cy="685800"/>
           </a:xfrm>
           <a:prstGeom prst="rect">
             <a:avLst/>
@@ -9228,7 +9342,7 @@
         <p:spPr>
           <a:xfrm>
             <a:off x="6400800" y="3598333"/>
-            <a:ext cx="1574800" cy="931333"/>
+            <a:ext cx="2048933" cy="931333"/>
           </a:xfrm>
           <a:prstGeom prst="rect">
             <a:avLst/>
@@ -9286,7 +9400,7 @@
         <p:spPr>
           <a:xfrm>
             <a:off x="8991600" y="2816013"/>
-            <a:ext cx="358139" cy="685800"/>
+            <a:ext cx="2048933" cy="685800"/>
           </a:xfrm>
           <a:prstGeom prst="rect">
             <a:avLst/>
@@ -9325,7 +9439,7 @@
         <p:spPr>
           <a:xfrm>
             <a:off x="8991600" y="3598333"/>
-            <a:ext cx="1574800" cy="931333"/>
+            <a:ext cx="2048933" cy="931333"/>
           </a:xfrm>
           <a:prstGeom prst="rect">
             <a:avLst/>
@@ -9382,8 +9496,8 @@
         </p:nvSpPr>
         <p:spPr>
           <a:xfrm>
-            <a:off x="9990666" y="5511800"/>
-            <a:ext cx="1219200" cy="160866"/>
+            <a:off x="203200" y="5511800"/>
+            <a:ext cx="11006666" cy="160866"/>
           </a:xfrm>
           <a:prstGeom prst="rect">
             <a:avLst/>
@@ -9421,16 +9535,16 @@
         </p:nvSpPr>
         <p:spPr>
           <a:xfrm>
-            <a:off x="10634133" y="6495626"/>
-            <a:ext cx="575733" cy="176106"/>
-          </a:xfrm>
-          <a:prstGeom prst="rect">
-            <a:avLst/>
-          </a:prstGeom>
-          <a:noFill/>
-        </p:spPr>
-        <p:txBody>
-          <a:bodyPr wrap="none" lIns="0" rIns="0" tIns="0" bIns="0">
+            <a:off x="10634133" y="6478693"/>
+            <a:ext cx="575733" cy="209973"/>
+          </a:xfrm>
+          <a:prstGeom prst="rect">
+            <a:avLst/>
+          </a:prstGeom>
+          <a:noFill/>
+        </p:spPr>
+        <p:txBody>
+          <a:bodyPr wrap="none" lIns="0" rIns="0" tIns="0" bIns="0" anchor="ctr">
             <a:noAutofit/>
           </a:bodyPr>
           <a:lstStyle/>
@@ -9487,7 +9601,7 @@
         <p:spPr>
           <a:xfrm>
             <a:off x="1015999" y="3155526"/>
-            <a:ext cx="1979506" cy="8466"/>
+            <a:ext cx="1693333" cy="8466"/>
           </a:xfrm>
           <a:prstGeom prst="rect">
             <a:avLst/>
@@ -9516,8 +9630,8 @@
         </p:nvSpPr>
         <p:spPr>
           <a:xfrm>
-            <a:off x="2995506" y="3155526"/>
-            <a:ext cx="4606713" cy="8466"/>
+            <a:off x="2709333" y="3155526"/>
+            <a:ext cx="5418666" cy="8466"/>
           </a:xfrm>
           <a:prstGeom prst="rect">
             <a:avLst/>
@@ -9546,8 +9660,8 @@
         </p:nvSpPr>
         <p:spPr>
           <a:xfrm>
-            <a:off x="7601373" y="3155526"/>
-            <a:ext cx="2214880" cy="8466"/>
+            <a:off x="8127999" y="3155526"/>
+            <a:ext cx="1524000" cy="8466"/>
           </a:xfrm>
           <a:prstGeom prst="rect">
             <a:avLst/>
@@ -9576,8 +9690,8 @@
         </p:nvSpPr>
         <p:spPr>
           <a:xfrm>
-            <a:off x="9816253" y="3155526"/>
-            <a:ext cx="1359746" cy="8466"/>
+            <a:off x="9652000" y="3155526"/>
+            <a:ext cx="1524000" cy="8466"/>
           </a:xfrm>
           <a:prstGeom prst="rect">
             <a:avLst/>
@@ -9607,7 +9721,7 @@
         <p:spPr>
           <a:xfrm>
             <a:off x="1015999" y="3651673"/>
-            <a:ext cx="1979506" cy="8466"/>
+            <a:ext cx="1693333" cy="8466"/>
           </a:xfrm>
           <a:prstGeom prst="rect">
             <a:avLst/>
@@ -9636,8 +9750,8 @@
         </p:nvSpPr>
         <p:spPr>
           <a:xfrm>
-            <a:off x="2995506" y="3651673"/>
-            <a:ext cx="4606713" cy="8466"/>
+            <a:off x="2709333" y="3651673"/>
+            <a:ext cx="5418666" cy="8466"/>
           </a:xfrm>
           <a:prstGeom prst="rect">
             <a:avLst/>
@@ -9666,8 +9780,8 @@
         </p:nvSpPr>
         <p:spPr>
           <a:xfrm>
-            <a:off x="7601373" y="3651673"/>
-            <a:ext cx="2214880" cy="8466"/>
+            <a:off x="8127999" y="3651673"/>
+            <a:ext cx="1524000" cy="8466"/>
           </a:xfrm>
           <a:prstGeom prst="rect">
             <a:avLst/>
@@ -9696,8 +9810,8 @@
         </p:nvSpPr>
         <p:spPr>
           <a:xfrm>
-            <a:off x="9816253" y="3651673"/>
-            <a:ext cx="1359746" cy="8466"/>
+            <a:off x="9652000" y="3651673"/>
+            <a:ext cx="1524000" cy="8466"/>
           </a:xfrm>
           <a:prstGeom prst="rect">
             <a:avLst/>
@@ -9727,7 +9841,7 @@
         <p:spPr>
           <a:xfrm>
             <a:off x="1015999" y="4147820"/>
-            <a:ext cx="1979506" cy="8466"/>
+            <a:ext cx="1693333" cy="8466"/>
           </a:xfrm>
           <a:prstGeom prst="rect">
             <a:avLst/>
@@ -9756,8 +9870,8 @@
         </p:nvSpPr>
         <p:spPr>
           <a:xfrm>
-            <a:off x="2995506" y="4147820"/>
-            <a:ext cx="4606713" cy="8466"/>
+            <a:off x="2709333" y="4147820"/>
+            <a:ext cx="5418666" cy="8466"/>
           </a:xfrm>
           <a:prstGeom prst="rect">
             <a:avLst/>
@@ -9786,8 +9900,8 @@
         </p:nvSpPr>
         <p:spPr>
           <a:xfrm>
-            <a:off x="7601373" y="4147820"/>
-            <a:ext cx="2214880" cy="8466"/>
+            <a:off x="8127999" y="4147820"/>
+            <a:ext cx="1524000" cy="8466"/>
           </a:xfrm>
           <a:prstGeom prst="rect">
             <a:avLst/>
@@ -9816,8 +9930,8 @@
         </p:nvSpPr>
         <p:spPr>
           <a:xfrm>
-            <a:off x="9816253" y="4147820"/>
-            <a:ext cx="1359746" cy="8466"/>
+            <a:off x="9652000" y="4147820"/>
+            <a:ext cx="1524000" cy="8466"/>
           </a:xfrm>
           <a:prstGeom prst="rect">
             <a:avLst/>
@@ -9847,7 +9961,7 @@
         <p:spPr>
           <a:xfrm>
             <a:off x="1015999" y="4643966"/>
-            <a:ext cx="1979506" cy="8466"/>
+            <a:ext cx="1693333" cy="8466"/>
           </a:xfrm>
           <a:prstGeom prst="rect">
             <a:avLst/>
@@ -9876,8 +9990,8 @@
         </p:nvSpPr>
         <p:spPr>
           <a:xfrm>
-            <a:off x="2995506" y="4643966"/>
-            <a:ext cx="4606713" cy="8466"/>
+            <a:off x="2709333" y="4643966"/>
+            <a:ext cx="5418666" cy="8466"/>
           </a:xfrm>
           <a:prstGeom prst="rect">
             <a:avLst/>
@@ -9906,8 +10020,8 @@
         </p:nvSpPr>
         <p:spPr>
           <a:xfrm>
-            <a:off x="7601373" y="4643966"/>
-            <a:ext cx="2214880" cy="8466"/>
+            <a:off x="8127999" y="4643966"/>
+            <a:ext cx="1524000" cy="8466"/>
           </a:xfrm>
           <a:prstGeom prst="rect">
             <a:avLst/>
@@ -9936,8 +10050,8 @@
         </p:nvSpPr>
         <p:spPr>
           <a:xfrm>
-            <a:off x="9816253" y="4643966"/>
-            <a:ext cx="1359746" cy="8466"/>
+            <a:off x="9652000" y="4643966"/>
+            <a:ext cx="1524000" cy="8466"/>
           </a:xfrm>
           <a:prstGeom prst="rect">
             <a:avLst/>
@@ -9990,16 +10104,16 @@
         </p:nvSpPr>
         <p:spPr>
           <a:xfrm>
-            <a:off x="1015999" y="389466"/>
-            <a:ext cx="4775200" cy="160866"/>
-          </a:xfrm>
-          <a:prstGeom prst="rect">
-            <a:avLst/>
-          </a:prstGeom>
-          <a:noFill/>
-        </p:spPr>
-        <p:txBody>
-          <a:bodyPr wrap="none" lIns="0" rIns="0" tIns="0" bIns="0">
+            <a:off x="1015999" y="372533"/>
+            <a:ext cx="4775200" cy="194733"/>
+          </a:xfrm>
+          <a:prstGeom prst="rect">
+            <a:avLst/>
+          </a:prstGeom>
+          <a:noFill/>
+        </p:spPr>
+        <p:txBody>
+          <a:bodyPr wrap="none" lIns="0" rIns="0" tIns="0" bIns="0" anchor="ctr">
             <a:noAutofit/>
           </a:bodyPr>
           <a:lstStyle/>
@@ -10030,7 +10144,7 @@
         <p:spPr>
           <a:xfrm>
             <a:off x="1015999" y="778933"/>
-            <a:ext cx="3862493" cy="533400"/>
+            <a:ext cx="10193866" cy="533400"/>
           </a:xfrm>
           <a:prstGeom prst="rect">
             <a:avLst/>
@@ -10068,16 +10182,16 @@
         </p:nvSpPr>
         <p:spPr>
           <a:xfrm>
-            <a:off x="1015999" y="2890519"/>
-            <a:ext cx="1877906" cy="160866"/>
-          </a:xfrm>
-          <a:prstGeom prst="rect">
-            <a:avLst/>
-          </a:prstGeom>
-          <a:noFill/>
-        </p:spPr>
-        <p:txBody>
-          <a:bodyPr wrap="none" lIns="0" rIns="0" tIns="0" bIns="0">
+            <a:off x="1015999" y="2873586"/>
+            <a:ext cx="1591733" cy="194733"/>
+          </a:xfrm>
+          <a:prstGeom prst="rect">
+            <a:avLst/>
+          </a:prstGeom>
+          <a:noFill/>
+        </p:spPr>
+        <p:txBody>
+          <a:bodyPr wrap="none" lIns="0" rIns="0" tIns="0" bIns="0" anchor="ctr">
             <a:noAutofit/>
           </a:bodyPr>
           <a:lstStyle/>
@@ -10108,7 +10222,7 @@
         <p:spPr>
           <a:xfrm>
             <a:off x="1015999" y="3295226"/>
-            <a:ext cx="839046" cy="203200"/>
+            <a:ext cx="1591733" cy="203200"/>
           </a:xfrm>
           <a:prstGeom prst="rect">
             <a:avLst/>
@@ -10147,7 +10261,7 @@
         <p:spPr>
           <a:xfrm>
             <a:off x="1015999" y="3791373"/>
-            <a:ext cx="834813" cy="203200"/>
+            <a:ext cx="1591733" cy="203200"/>
           </a:xfrm>
           <a:prstGeom prst="rect">
             <a:avLst/>
@@ -10186,7 +10300,7 @@
         <p:spPr>
           <a:xfrm>
             <a:off x="1015999" y="4287519"/>
-            <a:ext cx="844973" cy="203200"/>
+            <a:ext cx="1591733" cy="203200"/>
           </a:xfrm>
           <a:prstGeom prst="rect">
             <a:avLst/>
@@ -10224,16 +10338,16 @@
         </p:nvSpPr>
         <p:spPr>
           <a:xfrm>
-            <a:off x="2003213" y="6466839"/>
-            <a:ext cx="3928533" cy="160866"/>
-          </a:xfrm>
-          <a:prstGeom prst="rect">
-            <a:avLst/>
-          </a:prstGeom>
-          <a:noFill/>
-        </p:spPr>
-        <p:txBody>
-          <a:bodyPr wrap="none" lIns="0" rIns="0" tIns="0" bIns="0">
+            <a:off x="2003213" y="6449906"/>
+            <a:ext cx="3928533" cy="194733"/>
+          </a:xfrm>
+          <a:prstGeom prst="rect">
+            <a:avLst/>
+          </a:prstGeom>
+          <a:noFill/>
+        </p:spPr>
+        <p:txBody>
+          <a:bodyPr wrap="none" lIns="0" rIns="0" tIns="0" bIns="0" anchor="ctr">
             <a:noAutofit/>
           </a:bodyPr>
           <a:lstStyle/>
@@ -10263,16 +10377,16 @@
         </p:nvSpPr>
         <p:spPr>
           <a:xfrm>
-            <a:off x="2995506" y="2890519"/>
-            <a:ext cx="4436533" cy="160866"/>
-          </a:xfrm>
-          <a:prstGeom prst="rect">
-            <a:avLst/>
-          </a:prstGeom>
-          <a:noFill/>
-        </p:spPr>
-        <p:txBody>
-          <a:bodyPr wrap="none" lIns="0" rIns="0" tIns="0" bIns="0">
+            <a:off x="2709333" y="2873586"/>
+            <a:ext cx="4436533" cy="194733"/>
+          </a:xfrm>
+          <a:prstGeom prst="rect">
+            <a:avLst/>
+          </a:prstGeom>
+          <a:noFill/>
+        </p:spPr>
+        <p:txBody>
+          <a:bodyPr wrap="none" lIns="0" rIns="0" tIns="0" bIns="0" anchor="ctr">
             <a:noAutofit/>
           </a:bodyPr>
           <a:lstStyle/>
@@ -10302,8 +10416,8 @@
         </p:nvSpPr>
         <p:spPr>
           <a:xfrm>
-            <a:off x="2995506" y="3295226"/>
-            <a:ext cx="2101426" cy="203200"/>
+            <a:off x="2709333" y="3295226"/>
+            <a:ext cx="5317066" cy="203200"/>
           </a:xfrm>
           <a:prstGeom prst="rect">
             <a:avLst/>
@@ -10341,8 +10455,8 @@
         </p:nvSpPr>
         <p:spPr>
           <a:xfrm>
-            <a:off x="2995506" y="3791373"/>
-            <a:ext cx="753533" cy="203200"/>
+            <a:off x="2709333" y="3791373"/>
+            <a:ext cx="5317066" cy="203200"/>
           </a:xfrm>
           <a:prstGeom prst="rect">
             <a:avLst/>
@@ -10380,8 +10494,8 @@
         </p:nvSpPr>
         <p:spPr>
           <a:xfrm>
-            <a:off x="2995506" y="4287519"/>
-            <a:ext cx="753533" cy="203200"/>
+            <a:off x="2709333" y="4287519"/>
+            <a:ext cx="5317066" cy="203200"/>
           </a:xfrm>
           <a:prstGeom prst="rect">
             <a:avLst/>
@@ -10419,16 +10533,16 @@
         </p:nvSpPr>
         <p:spPr>
           <a:xfrm>
-            <a:off x="7601373" y="2890519"/>
-            <a:ext cx="2113280" cy="160866"/>
-          </a:xfrm>
-          <a:prstGeom prst="rect">
-            <a:avLst/>
-          </a:prstGeom>
-          <a:noFill/>
-        </p:spPr>
-        <p:txBody>
-          <a:bodyPr wrap="none" lIns="0" rIns="0" tIns="0" bIns="0">
+            <a:off x="8127999" y="2873586"/>
+            <a:ext cx="1422400" cy="194733"/>
+          </a:xfrm>
+          <a:prstGeom prst="rect">
+            <a:avLst/>
+          </a:prstGeom>
+          <a:noFill/>
+        </p:spPr>
+        <p:txBody>
+          <a:bodyPr wrap="none" lIns="0" rIns="0" tIns="0" bIns="0" anchor="ctr">
             <a:noAutofit/>
           </a:bodyPr>
           <a:lstStyle/>
@@ -10458,8 +10572,8 @@
         </p:nvSpPr>
         <p:spPr>
           <a:xfrm>
-            <a:off x="7601373" y="3295226"/>
-            <a:ext cx="957579" cy="203200"/>
+            <a:off x="8127999" y="3295226"/>
+            <a:ext cx="1422400" cy="203200"/>
           </a:xfrm>
           <a:prstGeom prst="rect">
             <a:avLst/>
@@ -10497,8 +10611,8 @@
         </p:nvSpPr>
         <p:spPr>
           <a:xfrm>
-            <a:off x="7601373" y="3791373"/>
-            <a:ext cx="957579" cy="203200"/>
+            <a:off x="8127999" y="3791373"/>
+            <a:ext cx="1422400" cy="203200"/>
           </a:xfrm>
           <a:prstGeom prst="rect">
             <a:avLst/>
@@ -10536,8 +10650,8 @@
         </p:nvSpPr>
         <p:spPr>
           <a:xfrm>
-            <a:off x="7601373" y="4287519"/>
-            <a:ext cx="957579" cy="203200"/>
+            <a:off x="8127999" y="4287519"/>
+            <a:ext cx="1422400" cy="203200"/>
           </a:xfrm>
           <a:prstGeom prst="rect">
             <a:avLst/>
@@ -10575,16 +10689,16 @@
         </p:nvSpPr>
         <p:spPr>
           <a:xfrm>
-            <a:off x="9816253" y="2890519"/>
-            <a:ext cx="2206413" cy="160866"/>
-          </a:xfrm>
-          <a:prstGeom prst="rect">
-            <a:avLst/>
-          </a:prstGeom>
-          <a:noFill/>
-        </p:spPr>
-        <p:txBody>
-          <a:bodyPr wrap="none" lIns="0" rIns="0" tIns="0" bIns="0">
+            <a:off x="9652000" y="2873586"/>
+            <a:ext cx="2370666" cy="194733"/>
+          </a:xfrm>
+          <a:prstGeom prst="rect">
+            <a:avLst/>
+          </a:prstGeom>
+          <a:noFill/>
+        </p:spPr>
+        <p:txBody>
+          <a:bodyPr wrap="none" lIns="0" rIns="0" tIns="0" bIns="0" anchor="ctr">
             <a:noAutofit/>
           </a:bodyPr>
           <a:lstStyle/>
@@ -10614,8 +10728,8 @@
         </p:nvSpPr>
         <p:spPr>
           <a:xfrm>
-            <a:off x="9816253" y="3295226"/>
-            <a:ext cx="548639" cy="203200"/>
+            <a:off x="9652000" y="3295226"/>
+            <a:ext cx="1557866" cy="203200"/>
           </a:xfrm>
           <a:prstGeom prst="rect">
             <a:avLst/>
@@ -10653,8 +10767,8 @@
         </p:nvSpPr>
         <p:spPr>
           <a:xfrm>
-            <a:off x="9816253" y="3791373"/>
-            <a:ext cx="548639" cy="203200"/>
+            <a:off x="9652000" y="3791373"/>
+            <a:ext cx="1557866" cy="203200"/>
           </a:xfrm>
           <a:prstGeom prst="rect">
             <a:avLst/>
@@ -10692,8 +10806,8 @@
         </p:nvSpPr>
         <p:spPr>
           <a:xfrm>
-            <a:off x="9816253" y="4287519"/>
-            <a:ext cx="548639" cy="203200"/>
+            <a:off x="9652000" y="4287519"/>
+            <a:ext cx="1557866" cy="203200"/>
           </a:xfrm>
           <a:prstGeom prst="rect">
             <a:avLst/>
@@ -10731,8 +10845,8 @@
         </p:nvSpPr>
         <p:spPr>
           <a:xfrm>
-            <a:off x="10050779" y="4902200"/>
-            <a:ext cx="1159086" cy="160866"/>
+            <a:off x="203200" y="4902200"/>
+            <a:ext cx="11006666" cy="160866"/>
           </a:xfrm>
           <a:prstGeom prst="rect">
             <a:avLst/>
@@ -10770,16 +10884,16 @@
         </p:nvSpPr>
         <p:spPr>
           <a:xfrm>
-            <a:off x="10634133" y="6495626"/>
-            <a:ext cx="575733" cy="176106"/>
-          </a:xfrm>
-          <a:prstGeom prst="rect">
-            <a:avLst/>
-          </a:prstGeom>
-          <a:noFill/>
-        </p:spPr>
-        <p:txBody>
-          <a:bodyPr wrap="none" lIns="0" rIns="0" tIns="0" bIns="0">
+            <a:off x="10634133" y="6478693"/>
+            <a:ext cx="575733" cy="209973"/>
+          </a:xfrm>
+          <a:prstGeom prst="rect">
+            <a:avLst/>
+          </a:prstGeom>
+          <a:noFill/>
+        </p:spPr>
+        <p:txBody>
+          <a:bodyPr wrap="none" lIns="0" rIns="0" tIns="0" bIns="0" anchor="ctr">
             <a:noAutofit/>
           </a:bodyPr>
           <a:lstStyle/>
@@ -10883,16 +10997,16 @@
         </p:nvSpPr>
         <p:spPr>
           <a:xfrm>
-            <a:off x="1015999" y="389466"/>
-            <a:ext cx="4775200" cy="160866"/>
-          </a:xfrm>
-          <a:prstGeom prst="rect">
-            <a:avLst/>
-          </a:prstGeom>
-          <a:noFill/>
-        </p:spPr>
-        <p:txBody>
-          <a:bodyPr wrap="none" lIns="0" rIns="0" tIns="0" bIns="0">
+            <a:off x="1015999" y="372533"/>
+            <a:ext cx="4775200" cy="194733"/>
+          </a:xfrm>
+          <a:prstGeom prst="rect">
+            <a:avLst/>
+          </a:prstGeom>
+          <a:noFill/>
+        </p:spPr>
+        <p:txBody>
+          <a:bodyPr wrap="none" lIns="0" rIns="0" tIns="0" bIns="0" anchor="ctr">
             <a:noAutofit/>
           </a:bodyPr>
           <a:lstStyle/>
@@ -10923,7 +11037,7 @@
         <p:spPr>
           <a:xfrm>
             <a:off x="1015999" y="778933"/>
-            <a:ext cx="5104553" cy="1000760"/>
+            <a:ext cx="10193866" cy="1000760"/>
           </a:xfrm>
           <a:prstGeom prst="rect">
             <a:avLst/>
@@ -10961,16 +11075,16 @@
         </p:nvSpPr>
         <p:spPr>
           <a:xfrm>
-            <a:off x="2003213" y="6466839"/>
-            <a:ext cx="3928533" cy="160866"/>
-          </a:xfrm>
-          <a:prstGeom prst="rect">
-            <a:avLst/>
-          </a:prstGeom>
-          <a:noFill/>
-        </p:spPr>
-        <p:txBody>
-          <a:bodyPr wrap="none" lIns="0" rIns="0" tIns="0" bIns="0">
+            <a:off x="2003213" y="6449906"/>
+            <a:ext cx="3928533" cy="194733"/>
+          </a:xfrm>
+          <a:prstGeom prst="rect">
+            <a:avLst/>
+          </a:prstGeom>
+          <a:noFill/>
+        </p:spPr>
+        <p:txBody>
+          <a:bodyPr wrap="none" lIns="0" rIns="0" tIns="0" bIns="0" anchor="ctr">
             <a:noAutofit/>
           </a:bodyPr>
           <a:lstStyle/>
@@ -11000,16 +11114,16 @@
         </p:nvSpPr>
         <p:spPr>
           <a:xfrm>
-            <a:off x="10634133" y="6495626"/>
-            <a:ext cx="575733" cy="176106"/>
-          </a:xfrm>
-          <a:prstGeom prst="rect">
-            <a:avLst/>
-          </a:prstGeom>
-          <a:noFill/>
-        </p:spPr>
-        <p:txBody>
-          <a:bodyPr wrap="none" lIns="0" rIns="0" tIns="0" bIns="0">
+            <a:off x="10634133" y="6478693"/>
+            <a:ext cx="575733" cy="209973"/>
+          </a:xfrm>
+          <a:prstGeom prst="rect">
+            <a:avLst/>
+          </a:prstGeom>
+          <a:noFill/>
+        </p:spPr>
+        <p:txBody>
+          <a:bodyPr wrap="none" lIns="0" rIns="0" tIns="0" bIns="0" anchor="ctr">
             <a:noAutofit/>
           </a:bodyPr>
           <a:lstStyle/>
@@ -11051,7 +11165,7 @@
       <p:grpSpPr/>
       <p:pic>
         <p:nvPicPr>
-          <p:cNvPr id="2" name="Picture 1" descr="bg-18.png"/>
+          <p:cNvPr id="2" name="Picture 1" descr="bg-18.jpg"/>
           <p:cNvPicPr>
             <a:picLocks noChangeAspect="1"/>
           </p:cNvPicPr>
@@ -11082,7 +11196,7 @@
         <p:spPr>
           <a:xfrm>
             <a:off x="1015999" y="2243666"/>
-            <a:ext cx="7603913" cy="1877906"/>
+            <a:ext cx="10193866" cy="1877906"/>
           </a:xfrm>
           <a:prstGeom prst="rect">
             <a:avLst/>
@@ -11120,16 +11234,16 @@
         </p:nvSpPr>
         <p:spPr>
           <a:xfrm>
-            <a:off x="1015999" y="4404360"/>
-            <a:ext cx="4436533" cy="160866"/>
-          </a:xfrm>
-          <a:prstGeom prst="rect">
-            <a:avLst/>
-          </a:prstGeom>
-          <a:noFill/>
-        </p:spPr>
-        <p:txBody>
-          <a:bodyPr wrap="none" lIns="0" rIns="0" tIns="0" bIns="0">
+            <a:off x="1015999" y="4387426"/>
+            <a:ext cx="4436533" cy="194733"/>
+          </a:xfrm>
+          <a:prstGeom prst="rect">
+            <a:avLst/>
+          </a:prstGeom>
+          <a:noFill/>
+        </p:spPr>
+        <p:txBody>
+          <a:bodyPr wrap="none" lIns="0" rIns="0" tIns="0" bIns="0" anchor="ctr">
             <a:noAutofit/>
           </a:bodyPr>
           <a:lstStyle/>
@@ -11389,16 +11503,16 @@
         </p:nvSpPr>
         <p:spPr>
           <a:xfrm>
-            <a:off x="1015999" y="389466"/>
-            <a:ext cx="4775200" cy="160866"/>
-          </a:xfrm>
-          <a:prstGeom prst="rect">
-            <a:avLst/>
-          </a:prstGeom>
-          <a:noFill/>
-        </p:spPr>
-        <p:txBody>
-          <a:bodyPr wrap="none" lIns="0" rIns="0" tIns="0" bIns="0">
+            <a:off x="1015999" y="372533"/>
+            <a:ext cx="4775200" cy="194733"/>
+          </a:xfrm>
+          <a:prstGeom prst="rect">
+            <a:avLst/>
+          </a:prstGeom>
+          <a:noFill/>
+        </p:spPr>
+        <p:txBody>
+          <a:bodyPr wrap="none" lIns="0" rIns="0" tIns="0" bIns="0" anchor="ctr">
             <a:noAutofit/>
           </a:bodyPr>
           <a:lstStyle/>
@@ -11429,7 +11543,7 @@
         <p:spPr>
           <a:xfrm>
             <a:off x="1015999" y="778933"/>
-            <a:ext cx="3815080" cy="533400"/>
+            <a:ext cx="10193866" cy="533400"/>
           </a:xfrm>
           <a:prstGeom prst="rect">
             <a:avLst/>
@@ -11468,7 +11582,7 @@
         <p:spPr>
           <a:xfrm>
             <a:off x="1015999" y="3016673"/>
-            <a:ext cx="174413" cy="203200"/>
+            <a:ext cx="440266" cy="203200"/>
           </a:xfrm>
           <a:prstGeom prst="rect">
             <a:avLst/>
@@ -11507,7 +11621,7 @@
         <p:spPr>
           <a:xfrm>
             <a:off x="1015999" y="3829473"/>
-            <a:ext cx="202353" cy="203200"/>
+            <a:ext cx="440266" cy="203200"/>
           </a:xfrm>
           <a:prstGeom prst="rect">
             <a:avLst/>
@@ -11546,7 +11660,7 @@
         <p:spPr>
           <a:xfrm>
             <a:off x="1015999" y="4642273"/>
-            <a:ext cx="203200" cy="203200"/>
+            <a:ext cx="440266" cy="203200"/>
           </a:xfrm>
           <a:prstGeom prst="rect">
             <a:avLst/>
@@ -11585,7 +11699,7 @@
         <p:spPr>
           <a:xfrm>
             <a:off x="1557866" y="2900680"/>
-            <a:ext cx="1176866" cy="448733"/>
+            <a:ext cx="4707466" cy="448733"/>
           </a:xfrm>
           <a:prstGeom prst="rect">
             <a:avLst/>
@@ -11643,7 +11757,7 @@
         <p:spPr>
           <a:xfrm>
             <a:off x="1557866" y="3713480"/>
-            <a:ext cx="1176866" cy="448733"/>
+            <a:ext cx="4707466" cy="448733"/>
           </a:xfrm>
           <a:prstGeom prst="rect">
             <a:avLst/>
@@ -11701,7 +11815,7 @@
         <p:spPr>
           <a:xfrm>
             <a:off x="1557866" y="4526280"/>
-            <a:ext cx="1176866" cy="448733"/>
+            <a:ext cx="4707466" cy="448733"/>
           </a:xfrm>
           <a:prstGeom prst="rect">
             <a:avLst/>
@@ -11758,16 +11872,16 @@
         </p:nvSpPr>
         <p:spPr>
           <a:xfrm>
-            <a:off x="2003213" y="6466839"/>
-            <a:ext cx="3928533" cy="160866"/>
-          </a:xfrm>
-          <a:prstGeom prst="rect">
-            <a:avLst/>
-          </a:prstGeom>
-          <a:noFill/>
-        </p:spPr>
-        <p:txBody>
-          <a:bodyPr wrap="none" lIns="0" rIns="0" tIns="0" bIns="0">
+            <a:off x="2003213" y="6449906"/>
+            <a:ext cx="3928533" cy="194733"/>
+          </a:xfrm>
+          <a:prstGeom prst="rect">
+            <a:avLst/>
+          </a:prstGeom>
+          <a:noFill/>
+        </p:spPr>
+        <p:txBody>
+          <a:bodyPr wrap="none" lIns="0" rIns="0" tIns="0" bIns="0" anchor="ctr">
             <a:noAutofit/>
           </a:bodyPr>
           <a:lstStyle/>
@@ -11798,7 +11912,7 @@
         <p:spPr>
           <a:xfrm>
             <a:off x="6366933" y="3016673"/>
-            <a:ext cx="206586" cy="203200"/>
+            <a:ext cx="440266" cy="203200"/>
           </a:xfrm>
           <a:prstGeom prst="rect">
             <a:avLst/>
@@ -11837,7 +11951,7 @@
         <p:spPr>
           <a:xfrm>
             <a:off x="6366933" y="3829473"/>
-            <a:ext cx="199813" cy="203200"/>
+            <a:ext cx="440266" cy="203200"/>
           </a:xfrm>
           <a:prstGeom prst="rect">
             <a:avLst/>
@@ -11876,7 +11990,7 @@
         <p:spPr>
           <a:xfrm>
             <a:off x="6366933" y="4642273"/>
-            <a:ext cx="203200" cy="203200"/>
+            <a:ext cx="440266" cy="203200"/>
           </a:xfrm>
           <a:prstGeom prst="rect">
             <a:avLst/>
@@ -11915,7 +12029,7 @@
         <p:spPr>
           <a:xfrm>
             <a:off x="6908799" y="2900680"/>
-            <a:ext cx="1176866" cy="448733"/>
+            <a:ext cx="4301066" cy="448733"/>
           </a:xfrm>
           <a:prstGeom prst="rect">
             <a:avLst/>
@@ -11973,7 +12087,7 @@
         <p:spPr>
           <a:xfrm>
             <a:off x="6908799" y="3713480"/>
-            <a:ext cx="1176866" cy="448733"/>
+            <a:ext cx="4301066" cy="448733"/>
           </a:xfrm>
           <a:prstGeom prst="rect">
             <a:avLst/>
@@ -12031,7 +12145,7 @@
         <p:spPr>
           <a:xfrm>
             <a:off x="6908799" y="4526280"/>
-            <a:ext cx="1228513" cy="448733"/>
+            <a:ext cx="4301066" cy="448733"/>
           </a:xfrm>
           <a:prstGeom prst="rect">
             <a:avLst/>
@@ -12088,16 +12202,16 @@
         </p:nvSpPr>
         <p:spPr>
           <a:xfrm>
-            <a:off x="10634133" y="6495626"/>
-            <a:ext cx="575733" cy="176106"/>
-          </a:xfrm>
-          <a:prstGeom prst="rect">
-            <a:avLst/>
-          </a:prstGeom>
-          <a:noFill/>
-        </p:spPr>
-        <p:txBody>
-          <a:bodyPr wrap="none" lIns="0" rIns="0" tIns="0" bIns="0">
+            <a:off x="10634133" y="6478693"/>
+            <a:ext cx="575733" cy="209973"/>
+          </a:xfrm>
+          <a:prstGeom prst="rect">
+            <a:avLst/>
+          </a:prstGeom>
+          <a:noFill/>
+        </p:spPr>
+        <p:txBody>
+          <a:bodyPr wrap="none" lIns="0" rIns="0" tIns="0" bIns="0" anchor="ctr">
             <a:noAutofit/>
           </a:bodyPr>
           <a:lstStyle/>
@@ -12139,7 +12253,7 @@
       <p:grpSpPr/>
       <p:pic>
         <p:nvPicPr>
-          <p:cNvPr id="2" name="Picture 1" descr="bg-19.png"/>
+          <p:cNvPr id="2" name="Picture 1" descr="bg-19.jpg"/>
           <p:cNvPicPr>
             <a:picLocks noChangeAspect="1"/>
           </p:cNvPicPr>
@@ -12177,7 +12291,7 @@
         </p:blipFill>
         <p:spPr>
           <a:xfrm>
-            <a:off x="5278966" y="2381673"/>
+            <a:off x="5278966" y="2273300"/>
             <a:ext cx="1634066" cy="203200"/>
           </a:xfrm>
           <a:prstGeom prst="rect">
@@ -12193,8 +12307,8 @@
         </p:nvSpPr>
         <p:spPr>
           <a:xfrm>
-            <a:off x="2171700" y="3075940"/>
-            <a:ext cx="7881619" cy="685800"/>
+            <a:off x="1015153" y="2967566"/>
+            <a:ext cx="10194713" cy="685800"/>
           </a:xfrm>
           <a:prstGeom prst="rect">
             <a:avLst/>
@@ -12232,8 +12346,8 @@
         </p:nvSpPr>
         <p:spPr>
           <a:xfrm>
-            <a:off x="4995333" y="4515273"/>
-            <a:ext cx="2235200" cy="177800"/>
+            <a:off x="1015999" y="4406900"/>
+            <a:ext cx="10193866" cy="177800"/>
           </a:xfrm>
           <a:prstGeom prst="rect">
             <a:avLst/>
@@ -12271,8 +12385,8 @@
         </p:nvSpPr>
         <p:spPr>
           <a:xfrm>
-            <a:off x="5251026" y="4264660"/>
-            <a:ext cx="1723813" cy="203200"/>
+            <a:off x="1015999" y="4156286"/>
+            <a:ext cx="10193866" cy="203200"/>
           </a:xfrm>
           <a:prstGeom prst="rect">
             <a:avLst/>
@@ -12570,16 +12684,16 @@
         </p:nvSpPr>
         <p:spPr>
           <a:xfrm>
-            <a:off x="1015999" y="389466"/>
-            <a:ext cx="4775200" cy="160866"/>
-          </a:xfrm>
-          <a:prstGeom prst="rect">
-            <a:avLst/>
-          </a:prstGeom>
-          <a:noFill/>
-        </p:spPr>
-        <p:txBody>
-          <a:bodyPr wrap="none" lIns="0" rIns="0" tIns="0" bIns="0">
+            <a:off x="1015999" y="372533"/>
+            <a:ext cx="4775200" cy="194733"/>
+          </a:xfrm>
+          <a:prstGeom prst="rect">
+            <a:avLst/>
+          </a:prstGeom>
+          <a:noFill/>
+        </p:spPr>
+        <p:txBody>
+          <a:bodyPr wrap="none" lIns="0" rIns="0" tIns="0" bIns="0" anchor="ctr">
             <a:noAutofit/>
           </a:bodyPr>
           <a:lstStyle/>
@@ -12610,7 +12724,7 @@
         <p:spPr>
           <a:xfrm>
             <a:off x="1015999" y="778933"/>
-            <a:ext cx="4467860" cy="1000760"/>
+            <a:ext cx="10193866" cy="1000760"/>
           </a:xfrm>
           <a:prstGeom prst="rect">
             <a:avLst/>
@@ -12648,16 +12762,16 @@
         </p:nvSpPr>
         <p:spPr>
           <a:xfrm>
-            <a:off x="1015999" y="2385906"/>
-            <a:ext cx="4436533" cy="160866"/>
-          </a:xfrm>
-          <a:prstGeom prst="rect">
-            <a:avLst/>
-          </a:prstGeom>
-          <a:noFill/>
-        </p:spPr>
-        <p:txBody>
-          <a:bodyPr wrap="none" lIns="0" rIns="0" tIns="0" bIns="0">
+            <a:off x="1015999" y="2368973"/>
+            <a:ext cx="4436533" cy="194733"/>
+          </a:xfrm>
+          <a:prstGeom prst="rect">
+            <a:avLst/>
+          </a:prstGeom>
+          <a:noFill/>
+        </p:spPr>
+        <p:txBody>
+          <a:bodyPr wrap="none" lIns="0" rIns="0" tIns="0" bIns="0" anchor="ctr">
             <a:noAutofit/>
           </a:bodyPr>
           <a:lstStyle/>
@@ -12688,7 +12802,7 @@
         <p:spPr>
           <a:xfrm>
             <a:off x="1015999" y="2982806"/>
-            <a:ext cx="174413" cy="203200"/>
+            <a:ext cx="440266" cy="203200"/>
           </a:xfrm>
           <a:prstGeom prst="rect">
             <a:avLst/>
@@ -12727,7 +12841,7 @@
         <p:spPr>
           <a:xfrm>
             <a:off x="1015999" y="3795606"/>
-            <a:ext cx="202353" cy="203200"/>
+            <a:ext cx="440266" cy="203200"/>
           </a:xfrm>
           <a:prstGeom prst="rect">
             <a:avLst/>
@@ -12766,7 +12880,7 @@
         <p:spPr>
           <a:xfrm>
             <a:off x="1015999" y="4608406"/>
-            <a:ext cx="203200" cy="203200"/>
+            <a:ext cx="440266" cy="203200"/>
           </a:xfrm>
           <a:prstGeom prst="rect">
             <a:avLst/>
@@ -12805,7 +12919,7 @@
         <p:spPr>
           <a:xfrm>
             <a:off x="1557866" y="2972646"/>
-            <a:ext cx="2153073" cy="237066"/>
+            <a:ext cx="4707466" cy="237066"/>
           </a:xfrm>
           <a:prstGeom prst="rect">
             <a:avLst/>
@@ -12844,7 +12958,7 @@
         <p:spPr>
           <a:xfrm>
             <a:off x="1557866" y="3785446"/>
-            <a:ext cx="2280073" cy="237066"/>
+            <a:ext cx="4707466" cy="237066"/>
           </a:xfrm>
           <a:prstGeom prst="rect">
             <a:avLst/>
@@ -12883,7 +12997,7 @@
         <p:spPr>
           <a:xfrm>
             <a:off x="1557866" y="4598246"/>
-            <a:ext cx="2181013" cy="237066"/>
+            <a:ext cx="4707466" cy="237066"/>
           </a:xfrm>
           <a:prstGeom prst="rect">
             <a:avLst/>
@@ -12921,16 +13035,16 @@
         </p:nvSpPr>
         <p:spPr>
           <a:xfrm>
-            <a:off x="2003213" y="6466839"/>
-            <a:ext cx="3928533" cy="160866"/>
-          </a:xfrm>
-          <a:prstGeom prst="rect">
-            <a:avLst/>
-          </a:prstGeom>
-          <a:noFill/>
-        </p:spPr>
-        <p:txBody>
-          <a:bodyPr wrap="none" lIns="0" rIns="0" tIns="0" bIns="0">
+            <a:off x="2003213" y="6449906"/>
+            <a:ext cx="3928533" cy="194733"/>
+          </a:xfrm>
+          <a:prstGeom prst="rect">
+            <a:avLst/>
+          </a:prstGeom>
+          <a:noFill/>
+        </p:spPr>
+        <p:txBody>
+          <a:bodyPr wrap="none" lIns="0" rIns="0" tIns="0" bIns="0" anchor="ctr">
             <a:noAutofit/>
           </a:bodyPr>
           <a:lstStyle/>
@@ -12960,16 +13074,16 @@
         </p:nvSpPr>
         <p:spPr>
           <a:xfrm>
-            <a:off x="6366933" y="2385906"/>
-            <a:ext cx="4436533" cy="160866"/>
-          </a:xfrm>
-          <a:prstGeom prst="rect">
-            <a:avLst/>
-          </a:prstGeom>
-          <a:noFill/>
-        </p:spPr>
-        <p:txBody>
-          <a:bodyPr wrap="none" lIns="0" rIns="0" tIns="0" bIns="0">
+            <a:off x="6366933" y="2368973"/>
+            <a:ext cx="4436533" cy="194733"/>
+          </a:xfrm>
+          <a:prstGeom prst="rect">
+            <a:avLst/>
+          </a:prstGeom>
+          <a:noFill/>
+        </p:spPr>
+        <p:txBody>
+          <a:bodyPr wrap="none" lIns="0" rIns="0" tIns="0" bIns="0" anchor="ctr">
             <a:noAutofit/>
           </a:bodyPr>
           <a:lstStyle/>
@@ -13000,7 +13114,7 @@
         <p:spPr>
           <a:xfrm>
             <a:off x="6366933" y="2982806"/>
-            <a:ext cx="174413" cy="203200"/>
+            <a:ext cx="440266" cy="203200"/>
           </a:xfrm>
           <a:prstGeom prst="rect">
             <a:avLst/>
@@ -13039,7 +13153,7 @@
         <p:spPr>
           <a:xfrm>
             <a:off x="6366933" y="3795606"/>
-            <a:ext cx="202353" cy="203200"/>
+            <a:ext cx="440266" cy="203200"/>
           </a:xfrm>
           <a:prstGeom prst="rect">
             <a:avLst/>
@@ -13078,7 +13192,7 @@
         <p:spPr>
           <a:xfrm>
             <a:off x="6366933" y="4608406"/>
-            <a:ext cx="203200" cy="203200"/>
+            <a:ext cx="440266" cy="203200"/>
           </a:xfrm>
           <a:prstGeom prst="rect">
             <a:avLst/>
@@ -13117,7 +13231,7 @@
         <p:spPr>
           <a:xfrm>
             <a:off x="6366933" y="5421206"/>
-            <a:ext cx="206586" cy="203200"/>
+            <a:ext cx="440266" cy="203200"/>
           </a:xfrm>
           <a:prstGeom prst="rect">
             <a:avLst/>
@@ -13156,7 +13270,7 @@
         <p:spPr>
           <a:xfrm>
             <a:off x="6908799" y="2866813"/>
-            <a:ext cx="1705186" cy="448733"/>
+            <a:ext cx="4301066" cy="448733"/>
           </a:xfrm>
           <a:prstGeom prst="rect">
             <a:avLst/>
@@ -13214,7 +13328,7 @@
         <p:spPr>
           <a:xfrm>
             <a:off x="6908799" y="3679613"/>
-            <a:ext cx="1705186" cy="448733"/>
+            <a:ext cx="4301066" cy="448733"/>
           </a:xfrm>
           <a:prstGeom prst="rect">
             <a:avLst/>
@@ -13272,7 +13386,7 @@
         <p:spPr>
           <a:xfrm>
             <a:off x="6908799" y="4492413"/>
-            <a:ext cx="1705186" cy="448733"/>
+            <a:ext cx="4301066" cy="448733"/>
           </a:xfrm>
           <a:prstGeom prst="rect">
             <a:avLst/>
@@ -13330,7 +13444,7 @@
         <p:spPr>
           <a:xfrm>
             <a:off x="6908799" y="5305213"/>
-            <a:ext cx="1705186" cy="448733"/>
+            <a:ext cx="4301066" cy="448733"/>
           </a:xfrm>
           <a:prstGeom prst="rect">
             <a:avLst/>
@@ -13387,16 +13501,16 @@
         </p:nvSpPr>
         <p:spPr>
           <a:xfrm>
-            <a:off x="10634133" y="6495626"/>
-            <a:ext cx="575733" cy="176106"/>
-          </a:xfrm>
-          <a:prstGeom prst="rect">
-            <a:avLst/>
-          </a:prstGeom>
-          <a:noFill/>
-        </p:spPr>
-        <p:txBody>
-          <a:bodyPr wrap="none" lIns="0" rIns="0" tIns="0" bIns="0">
+            <a:off x="10634133" y="6478693"/>
+            <a:ext cx="575733" cy="209973"/>
+          </a:xfrm>
+          <a:prstGeom prst="rect">
+            <a:avLst/>
+          </a:prstGeom>
+          <a:noFill/>
+        </p:spPr>
+        <p:txBody>
+          <a:bodyPr wrap="none" lIns="0" rIns="0" tIns="0" bIns="0" anchor="ctr">
             <a:noAutofit/>
           </a:bodyPr>
           <a:lstStyle/>
@@ -13438,7 +13552,7 @@
       <p:grpSpPr/>
       <p:pic>
         <p:nvPicPr>
-          <p:cNvPr id="2" name="Picture 1" descr="bg-03.png"/>
+          <p:cNvPr id="2" name="Picture 1" descr="bg-03.jpg"/>
           <p:cNvPicPr>
             <a:picLocks noChangeAspect="1"/>
           </p:cNvPicPr>
@@ -13492,16 +13606,16 @@
         </p:nvSpPr>
         <p:spPr>
           <a:xfrm>
-            <a:off x="1015999" y="4355253"/>
-            <a:ext cx="4436533" cy="160866"/>
-          </a:xfrm>
-          <a:prstGeom prst="rect">
-            <a:avLst/>
-          </a:prstGeom>
-          <a:noFill/>
-        </p:spPr>
-        <p:txBody>
-          <a:bodyPr wrap="none" lIns="0" rIns="0" tIns="0" bIns="0">
+            <a:off x="1015999" y="4338319"/>
+            <a:ext cx="4436533" cy="194733"/>
+          </a:xfrm>
+          <a:prstGeom prst="rect">
+            <a:avLst/>
+          </a:prstGeom>
+          <a:noFill/>
+        </p:spPr>
+        <p:txBody>
+          <a:bodyPr wrap="none" lIns="0" rIns="0" tIns="0" bIns="0" anchor="ctr">
             <a:noAutofit/>
           </a:bodyPr>
           <a:lstStyle/>
@@ -13532,7 +13646,7 @@
         <p:spPr>
           <a:xfrm>
             <a:off x="1015999" y="4666826"/>
-            <a:ext cx="4041140" cy="1281853"/>
+            <a:ext cx="8481906" cy="1281853"/>
           </a:xfrm>
           <a:prstGeom prst="rect">
             <a:avLst/>
@@ -13570,16 +13684,16 @@
         </p:nvSpPr>
         <p:spPr>
           <a:xfrm>
-            <a:off x="2003213" y="6466839"/>
-            <a:ext cx="3928533" cy="160866"/>
-          </a:xfrm>
-          <a:prstGeom prst="rect">
-            <a:avLst/>
-          </a:prstGeom>
-          <a:noFill/>
-        </p:spPr>
-        <p:txBody>
-          <a:bodyPr wrap="none" lIns="0" rIns="0" tIns="0" bIns="0">
+            <a:off x="2003213" y="6449906"/>
+            <a:ext cx="3928533" cy="194733"/>
+          </a:xfrm>
+          <a:prstGeom prst="rect">
+            <a:avLst/>
+          </a:prstGeom>
+          <a:noFill/>
+        </p:spPr>
+        <p:txBody>
+          <a:bodyPr wrap="none" lIns="0" rIns="0" tIns="0" bIns="0" anchor="ctr">
             <a:noAutofit/>
           </a:bodyPr>
           <a:lstStyle/>
@@ -13610,7 +13724,7 @@
         <p:spPr>
           <a:xfrm>
             <a:off x="9599506" y="4284133"/>
-            <a:ext cx="1610359" cy="2082799"/>
+            <a:ext cx="1610360" cy="2082799"/>
           </a:xfrm>
           <a:prstGeom prst="rect">
             <a:avLst/>
@@ -13648,16 +13762,16 @@
         </p:nvSpPr>
         <p:spPr>
           <a:xfrm>
-            <a:off x="10634133" y="6495626"/>
-            <a:ext cx="575733" cy="176106"/>
-          </a:xfrm>
-          <a:prstGeom prst="rect">
-            <a:avLst/>
-          </a:prstGeom>
-          <a:noFill/>
-        </p:spPr>
-        <p:txBody>
-          <a:bodyPr wrap="none" lIns="0" rIns="0" tIns="0" bIns="0">
+            <a:off x="10634133" y="6478693"/>
+            <a:ext cx="575733" cy="209973"/>
+          </a:xfrm>
+          <a:prstGeom prst="rect">
+            <a:avLst/>
+          </a:prstGeom>
+          <a:noFill/>
+        </p:spPr>
+        <p:txBody>
+          <a:bodyPr wrap="none" lIns="0" rIns="0" tIns="0" bIns="0" anchor="ctr">
             <a:noAutofit/>
           </a:bodyPr>
           <a:lstStyle/>
@@ -13699,7 +13813,7 @@
       <p:grpSpPr/>
       <p:pic>
         <p:nvPicPr>
-          <p:cNvPr id="2" name="Picture 1" descr="bg-04.png"/>
+          <p:cNvPr id="2" name="Picture 1" descr="bg-04.jpg"/>
           <p:cNvPicPr>
             <a:picLocks noChangeAspect="1"/>
           </p:cNvPicPr>
@@ -13753,16 +13867,16 @@
         </p:nvSpPr>
         <p:spPr>
           <a:xfrm>
-            <a:off x="1015999" y="4355253"/>
-            <a:ext cx="4436533" cy="160866"/>
-          </a:xfrm>
-          <a:prstGeom prst="rect">
-            <a:avLst/>
-          </a:prstGeom>
-          <a:noFill/>
-        </p:spPr>
-        <p:txBody>
-          <a:bodyPr wrap="none" lIns="0" rIns="0" tIns="0" bIns="0">
+            <a:off x="1015999" y="4338319"/>
+            <a:ext cx="4436533" cy="194733"/>
+          </a:xfrm>
+          <a:prstGeom prst="rect">
+            <a:avLst/>
+          </a:prstGeom>
+          <a:noFill/>
+        </p:spPr>
+        <p:txBody>
+          <a:bodyPr wrap="none" lIns="0" rIns="0" tIns="0" bIns="0" anchor="ctr">
             <a:noAutofit/>
           </a:bodyPr>
           <a:lstStyle/>
@@ -13793,7 +13907,7 @@
         <p:spPr>
           <a:xfrm>
             <a:off x="1015999" y="4666826"/>
-            <a:ext cx="4041140" cy="1281853"/>
+            <a:ext cx="8109373" cy="1281853"/>
           </a:xfrm>
           <a:prstGeom prst="rect">
             <a:avLst/>
@@ -13831,16 +13945,16 @@
         </p:nvSpPr>
         <p:spPr>
           <a:xfrm>
-            <a:off x="2003213" y="6466839"/>
-            <a:ext cx="3928533" cy="160866"/>
-          </a:xfrm>
-          <a:prstGeom prst="rect">
-            <a:avLst/>
-          </a:prstGeom>
-          <a:noFill/>
-        </p:spPr>
-        <p:txBody>
-          <a:bodyPr wrap="none" lIns="0" rIns="0" tIns="0" bIns="0">
+            <a:off x="2003213" y="6449906"/>
+            <a:ext cx="3928533" cy="194733"/>
+          </a:xfrm>
+          <a:prstGeom prst="rect">
+            <a:avLst/>
+          </a:prstGeom>
+          <a:noFill/>
+        </p:spPr>
+        <p:txBody>
+          <a:bodyPr wrap="none" lIns="0" rIns="0" tIns="0" bIns="0" anchor="ctr">
             <a:noAutofit/>
           </a:bodyPr>
           <a:lstStyle/>
@@ -13909,16 +14023,16 @@
         </p:nvSpPr>
         <p:spPr>
           <a:xfrm>
-            <a:off x="10634133" y="6495626"/>
-            <a:ext cx="575733" cy="176106"/>
-          </a:xfrm>
-          <a:prstGeom prst="rect">
-            <a:avLst/>
-          </a:prstGeom>
-          <a:noFill/>
-        </p:spPr>
-        <p:txBody>
-          <a:bodyPr wrap="none" lIns="0" rIns="0" tIns="0" bIns="0">
+            <a:off x="10634133" y="6478693"/>
+            <a:ext cx="575733" cy="209973"/>
+          </a:xfrm>
+          <a:prstGeom prst="rect">
+            <a:avLst/>
+          </a:prstGeom>
+          <a:noFill/>
+        </p:spPr>
+        <p:txBody>
+          <a:bodyPr wrap="none" lIns="0" rIns="0" tIns="0" bIns="0" anchor="ctr">
             <a:noAutofit/>
           </a:bodyPr>
           <a:lstStyle/>
@@ -13960,7 +14074,7 @@
       <p:grpSpPr/>
       <p:pic>
         <p:nvPicPr>
-          <p:cNvPr id="2" name="Picture 1" descr="bg-05.png"/>
+          <p:cNvPr id="2" name="Picture 1" descr="bg-05.jpg"/>
           <p:cNvPicPr>
             <a:picLocks noChangeAspect="1"/>
           </p:cNvPicPr>
@@ -14014,16 +14128,16 @@
         </p:nvSpPr>
         <p:spPr>
           <a:xfrm>
-            <a:off x="1015999" y="4355253"/>
-            <a:ext cx="4436533" cy="160866"/>
-          </a:xfrm>
-          <a:prstGeom prst="rect">
-            <a:avLst/>
-          </a:prstGeom>
-          <a:noFill/>
-        </p:spPr>
-        <p:txBody>
-          <a:bodyPr wrap="none" lIns="0" rIns="0" tIns="0" bIns="0">
+            <a:off x="1015999" y="4338319"/>
+            <a:ext cx="4436533" cy="194733"/>
+          </a:xfrm>
+          <a:prstGeom prst="rect">
+            <a:avLst/>
+          </a:prstGeom>
+          <a:noFill/>
+        </p:spPr>
+        <p:txBody>
+          <a:bodyPr wrap="none" lIns="0" rIns="0" tIns="0" bIns="0" anchor="ctr">
             <a:noAutofit/>
           </a:bodyPr>
           <a:lstStyle/>
@@ -14054,7 +14168,7 @@
         <p:spPr>
           <a:xfrm>
             <a:off x="1015999" y="4666826"/>
-            <a:ext cx="4041140" cy="1281853"/>
+            <a:ext cx="8122073" cy="1281853"/>
           </a:xfrm>
           <a:prstGeom prst="rect">
             <a:avLst/>
@@ -14092,16 +14206,16 @@
         </p:nvSpPr>
         <p:spPr>
           <a:xfrm>
-            <a:off x="2003213" y="6466839"/>
-            <a:ext cx="3928533" cy="160866"/>
-          </a:xfrm>
-          <a:prstGeom prst="rect">
-            <a:avLst/>
-          </a:prstGeom>
-          <a:noFill/>
-        </p:spPr>
-        <p:txBody>
-          <a:bodyPr wrap="none" lIns="0" rIns="0" tIns="0" bIns="0">
+            <a:off x="2003213" y="6449906"/>
+            <a:ext cx="3928533" cy="194733"/>
+          </a:xfrm>
+          <a:prstGeom prst="rect">
+            <a:avLst/>
+          </a:prstGeom>
+          <a:noFill/>
+        </p:spPr>
+        <p:txBody>
+          <a:bodyPr wrap="none" lIns="0" rIns="0" tIns="0" bIns="0" anchor="ctr">
             <a:noAutofit/>
           </a:bodyPr>
           <a:lstStyle/>
@@ -14170,16 +14284,16 @@
         </p:nvSpPr>
         <p:spPr>
           <a:xfrm>
-            <a:off x="10634133" y="6495626"/>
-            <a:ext cx="575733" cy="176106"/>
-          </a:xfrm>
-          <a:prstGeom prst="rect">
-            <a:avLst/>
-          </a:prstGeom>
-          <a:noFill/>
-        </p:spPr>
-        <p:txBody>
-          <a:bodyPr wrap="none" lIns="0" rIns="0" tIns="0" bIns="0">
+            <a:off x="10634133" y="6478693"/>
+            <a:ext cx="575733" cy="209973"/>
+          </a:xfrm>
+          <a:prstGeom prst="rect">
+            <a:avLst/>
+          </a:prstGeom>
+          <a:noFill/>
+        </p:spPr>
+        <p:txBody>
+          <a:bodyPr wrap="none" lIns="0" rIns="0" tIns="0" bIns="0" anchor="ctr">
             <a:noAutofit/>
           </a:bodyPr>
           <a:lstStyle/>
@@ -14221,7 +14335,7 @@
       <p:grpSpPr/>
       <p:pic>
         <p:nvPicPr>
-          <p:cNvPr id="2" name="Picture 1" descr="bg-06.png"/>
+          <p:cNvPr id="2" name="Picture 1" descr="bg-06.jpg"/>
           <p:cNvPicPr>
             <a:picLocks noChangeAspect="1"/>
           </p:cNvPicPr>
@@ -14275,16 +14389,16 @@
         </p:nvSpPr>
         <p:spPr>
           <a:xfrm>
-            <a:off x="1015999" y="4355253"/>
-            <a:ext cx="4436533" cy="160866"/>
-          </a:xfrm>
-          <a:prstGeom prst="rect">
-            <a:avLst/>
-          </a:prstGeom>
-          <a:noFill/>
-        </p:spPr>
-        <p:txBody>
-          <a:bodyPr wrap="none" lIns="0" rIns="0" tIns="0" bIns="0">
+            <a:off x="1015999" y="4338319"/>
+            <a:ext cx="4436533" cy="194733"/>
+          </a:xfrm>
+          <a:prstGeom prst="rect">
+            <a:avLst/>
+          </a:prstGeom>
+          <a:noFill/>
+        </p:spPr>
+        <p:txBody>
+          <a:bodyPr wrap="none" lIns="0" rIns="0" tIns="0" bIns="0" anchor="ctr">
             <a:noAutofit/>
           </a:bodyPr>
           <a:lstStyle/>
@@ -14315,7 +14429,7 @@
         <p:spPr>
           <a:xfrm>
             <a:off x="1015999" y="4666826"/>
-            <a:ext cx="4041140" cy="1281853"/>
+            <a:ext cx="8083126" cy="1281853"/>
           </a:xfrm>
           <a:prstGeom prst="rect">
             <a:avLst/>
@@ -14353,16 +14467,16 @@
         </p:nvSpPr>
         <p:spPr>
           <a:xfrm>
-            <a:off x="2003213" y="6466839"/>
-            <a:ext cx="3928533" cy="160866"/>
-          </a:xfrm>
-          <a:prstGeom prst="rect">
-            <a:avLst/>
-          </a:prstGeom>
-          <a:noFill/>
-        </p:spPr>
-        <p:txBody>
-          <a:bodyPr wrap="none" lIns="0" rIns="0" tIns="0" bIns="0">
+            <a:off x="2003213" y="6449906"/>
+            <a:ext cx="3928533" cy="194733"/>
+          </a:xfrm>
+          <a:prstGeom prst="rect">
+            <a:avLst/>
+          </a:prstGeom>
+          <a:noFill/>
+        </p:spPr>
+        <p:txBody>
+          <a:bodyPr wrap="none" lIns="0" rIns="0" tIns="0" bIns="0" anchor="ctr">
             <a:noAutofit/>
           </a:bodyPr>
           <a:lstStyle/>
@@ -14431,16 +14545,16 @@
         </p:nvSpPr>
         <p:spPr>
           <a:xfrm>
-            <a:off x="10634133" y="6495626"/>
-            <a:ext cx="575733" cy="176106"/>
-          </a:xfrm>
-          <a:prstGeom prst="rect">
-            <a:avLst/>
-          </a:prstGeom>
-          <a:noFill/>
-        </p:spPr>
-        <p:txBody>
-          <a:bodyPr wrap="none" lIns="0" rIns="0" tIns="0" bIns="0">
+            <a:off x="10634133" y="6478693"/>
+            <a:ext cx="575733" cy="209973"/>
+          </a:xfrm>
+          <a:prstGeom prst="rect">
+            <a:avLst/>
+          </a:prstGeom>
+          <a:noFill/>
+        </p:spPr>
+        <p:txBody>
+          <a:bodyPr wrap="none" lIns="0" rIns="0" tIns="0" bIns="0" anchor="ctr">
             <a:noAutofit/>
           </a:bodyPr>
           <a:lstStyle/>
@@ -14482,7 +14596,7 @@
       <p:grpSpPr/>
       <p:pic>
         <p:nvPicPr>
-          <p:cNvPr id="2" name="Picture 1" descr="bg-07.png"/>
+          <p:cNvPr id="2" name="Picture 1" descr="bg-07.jpg"/>
           <p:cNvPicPr>
             <a:picLocks noChangeAspect="1"/>
           </p:cNvPicPr>
@@ -14536,16 +14650,16 @@
         </p:nvSpPr>
         <p:spPr>
           <a:xfrm>
-            <a:off x="1015999" y="4355253"/>
-            <a:ext cx="4436533" cy="160866"/>
-          </a:xfrm>
-          <a:prstGeom prst="rect">
-            <a:avLst/>
-          </a:prstGeom>
-          <a:noFill/>
-        </p:spPr>
-        <p:txBody>
-          <a:bodyPr wrap="none" lIns="0" rIns="0" tIns="0" bIns="0">
+            <a:off x="1015999" y="4338319"/>
+            <a:ext cx="4436533" cy="194733"/>
+          </a:xfrm>
+          <a:prstGeom prst="rect">
+            <a:avLst/>
+          </a:prstGeom>
+          <a:noFill/>
+        </p:spPr>
+        <p:txBody>
+          <a:bodyPr wrap="none" lIns="0" rIns="0" tIns="0" bIns="0" anchor="ctr">
             <a:noAutofit/>
           </a:bodyPr>
           <a:lstStyle/>
@@ -14576,7 +14690,7 @@
         <p:spPr>
           <a:xfrm>
             <a:off x="1015999" y="4666826"/>
-            <a:ext cx="4041140" cy="1281853"/>
+            <a:ext cx="8166946" cy="1281853"/>
           </a:xfrm>
           <a:prstGeom prst="rect">
             <a:avLst/>
@@ -14614,16 +14728,16 @@
         </p:nvSpPr>
         <p:spPr>
           <a:xfrm>
-            <a:off x="2003213" y="6466839"/>
-            <a:ext cx="3928533" cy="160866"/>
-          </a:xfrm>
-          <a:prstGeom prst="rect">
-            <a:avLst/>
-          </a:prstGeom>
-          <a:noFill/>
-        </p:spPr>
-        <p:txBody>
-          <a:bodyPr wrap="none" lIns="0" rIns="0" tIns="0" bIns="0">
+            <a:off x="2003213" y="6449906"/>
+            <a:ext cx="3928533" cy="194733"/>
+          </a:xfrm>
+          <a:prstGeom prst="rect">
+            <a:avLst/>
+          </a:prstGeom>
+          <a:noFill/>
+        </p:spPr>
+        <p:txBody>
+          <a:bodyPr wrap="none" lIns="0" rIns="0" tIns="0" bIns="0" anchor="ctr">
             <a:noAutofit/>
           </a:bodyPr>
           <a:lstStyle/>
@@ -14692,16 +14806,16 @@
         </p:nvSpPr>
         <p:spPr>
           <a:xfrm>
-            <a:off x="10634133" y="6495626"/>
-            <a:ext cx="575733" cy="176106"/>
-          </a:xfrm>
-          <a:prstGeom prst="rect">
-            <a:avLst/>
-          </a:prstGeom>
-          <a:noFill/>
-        </p:spPr>
-        <p:txBody>
-          <a:bodyPr wrap="none" lIns="0" rIns="0" tIns="0" bIns="0">
+            <a:off x="10634133" y="6478693"/>
+            <a:ext cx="575733" cy="209973"/>
+          </a:xfrm>
+          <a:prstGeom prst="rect">
+            <a:avLst/>
+          </a:prstGeom>
+          <a:noFill/>
+        </p:spPr>
+        <p:txBody>
+          <a:bodyPr wrap="none" lIns="0" rIns="0" tIns="0" bIns="0" anchor="ctr">
             <a:noAutofit/>
           </a:bodyPr>
           <a:lstStyle/>
@@ -14749,9 +14863,81 @@
         <p:nvPr/>
       </p:nvGrpSpPr>
       <p:grpSpPr/>
-      <p:sp>
-        <p:nvSpPr>
-          <p:cNvPr id="2" name="Rounded Rectangle 1"/>
+      <p:pic>
+        <p:nvPicPr>
+          <p:cNvPr id="2" name="Picture 1" descr="pix-08-0.png"/>
+          <p:cNvPicPr>
+            <a:picLocks noChangeAspect="1"/>
+          </p:cNvPicPr>
+          <p:nvPr/>
+        </p:nvPicPr>
+        <p:blipFill>
+          <a:blip r:embed="rId2"/>
+          <a:stretch>
+            <a:fillRect/>
+          </a:stretch>
+        </p:blipFill>
+        <p:spPr>
+          <a:xfrm>
+            <a:off x="3979333" y="2801619"/>
+            <a:ext cx="152400" cy="152400"/>
+          </a:xfrm>
+          <a:prstGeom prst="rect">
+            <a:avLst/>
+          </a:prstGeom>
+        </p:spPr>
+      </p:pic>
+      <p:pic>
+        <p:nvPicPr>
+          <p:cNvPr id="3" name="Picture 2" descr="pix-08-0.png"/>
+          <p:cNvPicPr>
+            <a:picLocks noChangeAspect="1"/>
+          </p:cNvPicPr>
+          <p:nvPr/>
+        </p:nvPicPr>
+        <p:blipFill>
+          <a:blip r:embed="rId2"/>
+          <a:stretch>
+            <a:fillRect/>
+          </a:stretch>
+        </p:blipFill>
+        <p:spPr>
+          <a:xfrm>
+            <a:off x="7501466" y="2801619"/>
+            <a:ext cx="152400" cy="152400"/>
+          </a:xfrm>
+          <a:prstGeom prst="rect">
+            <a:avLst/>
+          </a:prstGeom>
+        </p:spPr>
+      </p:pic>
+      <p:pic>
+        <p:nvPicPr>
+          <p:cNvPr id="4" name="Picture 3" descr="pix-08-0.png"/>
+          <p:cNvPicPr>
+            <a:picLocks noChangeAspect="1"/>
+          </p:cNvPicPr>
+          <p:nvPr/>
+        </p:nvPicPr>
+        <p:blipFill>
+          <a:blip r:embed="rId2"/>
+          <a:stretch>
+            <a:fillRect/>
+          </a:stretch>
+        </p:blipFill>
+        <p:spPr>
+          <a:xfrm>
+            <a:off x="11023600" y="2801619"/>
+            <a:ext cx="152400" cy="152400"/>
+          </a:xfrm>
+          <a:prstGeom prst="rect">
+            <a:avLst/>
+          </a:prstGeom>
+        </p:spPr>
+      </p:pic>
+      <p:sp>
+        <p:nvSpPr>
+          <p:cNvPr id="5" name="Rounded Rectangle 4"/>
           <p:cNvSpPr/>
           <p:nvPr/>
         </p:nvSpPr>
@@ -14783,7 +14969,7 @@
       </p:sp>
       <p:sp>
         <p:nvSpPr>
-          <p:cNvPr id="3" name="Rectangle 2"/>
+          <p:cNvPr id="6" name="Rectangle 5"/>
           <p:cNvSpPr/>
           <p:nvPr/>
         </p:nvSpPr>
@@ -14813,7 +14999,7 @@
       </p:sp>
       <p:sp>
         <p:nvSpPr>
-          <p:cNvPr id="4" name="Rectangle 3"/>
+          <p:cNvPr id="7" name="Rectangle 6"/>
           <p:cNvSpPr/>
           <p:nvPr/>
         </p:nvSpPr>
@@ -14843,7 +15029,7 @@
       </p:sp>
       <p:sp>
         <p:nvSpPr>
-          <p:cNvPr id="5" name="Rectangle 4"/>
+          <p:cNvPr id="8" name="Rectangle 7"/>
           <p:cNvSpPr/>
           <p:nvPr/>
         </p:nvSpPr>
@@ -14873,14 +15059,14 @@
       </p:sp>
       <p:pic>
         <p:nvPicPr>
-          <p:cNvPr id="6" name="Picture 5" descr="wordmark-black-crop.png"/>
+          <p:cNvPr id="9" name="Picture 8" descr="wordmark-black-crop.png"/>
           <p:cNvPicPr>
             <a:picLocks noChangeAspect="1"/>
           </p:cNvPicPr>
           <p:nvPr/>
         </p:nvPicPr>
         <p:blipFill>
-          <a:blip r:embed="rId2"/>
+          <a:blip r:embed="rId3"/>
           <a:stretch>
             <a:fillRect/>
           </a:stretch>
@@ -14897,22 +15083,22 @@
       </p:pic>
       <p:sp>
         <p:nvSpPr>
-          <p:cNvPr id="7" name="TextBox 6"/>
-          <p:cNvSpPr txBox="1"/>
-          <p:nvPr/>
-        </p:nvSpPr>
-        <p:spPr>
-          <a:xfrm>
-            <a:off x="1015999" y="389466"/>
-            <a:ext cx="4775200" cy="160866"/>
-          </a:xfrm>
-          <a:prstGeom prst="rect">
-            <a:avLst/>
-          </a:prstGeom>
-          <a:noFill/>
-        </p:spPr>
-        <p:txBody>
-          <a:bodyPr wrap="none" lIns="0" rIns="0" tIns="0" bIns="0">
+          <p:cNvPr id="10" name="TextBox 9"/>
+          <p:cNvSpPr txBox="1"/>
+          <p:nvPr/>
+        </p:nvSpPr>
+        <p:spPr>
+          <a:xfrm>
+            <a:off x="1015999" y="372533"/>
+            <a:ext cx="4775200" cy="194733"/>
+          </a:xfrm>
+          <a:prstGeom prst="rect">
+            <a:avLst/>
+          </a:prstGeom>
+          <a:noFill/>
+        </p:spPr>
+        <p:txBody>
+          <a:bodyPr wrap="none" lIns="0" rIns="0" tIns="0" bIns="0" anchor="ctr">
             <a:noAutofit/>
           </a:bodyPr>
           <a:lstStyle/>
@@ -14936,14 +15122,14 @@
       </p:sp>
       <p:sp>
         <p:nvSpPr>
-          <p:cNvPr id="8" name="TextBox 7"/>
+          <p:cNvPr id="11" name="TextBox 10"/>
           <p:cNvSpPr txBox="1"/>
           <p:nvPr/>
         </p:nvSpPr>
         <p:spPr>
           <a:xfrm>
             <a:off x="1015999" y="778933"/>
-            <a:ext cx="6350000" cy="533400"/>
+            <a:ext cx="10193866" cy="533400"/>
           </a:xfrm>
           <a:prstGeom prst="rect">
             <a:avLst/>
@@ -14975,14 +15161,14 @@
       </p:sp>
       <p:sp>
         <p:nvSpPr>
-          <p:cNvPr id="9" name="TextBox 8"/>
+          <p:cNvPr id="12" name="TextBox 11"/>
           <p:cNvSpPr txBox="1"/>
           <p:nvPr/>
         </p:nvSpPr>
         <p:spPr>
           <a:xfrm>
             <a:off x="1015999" y="2788919"/>
-            <a:ext cx="3111500" cy="1457960"/>
+            <a:ext cx="3420533" cy="1457960"/>
           </a:xfrm>
           <a:prstGeom prst="rect">
             <a:avLst/>
@@ -15071,22 +15257,22 @@
       </p:sp>
       <p:sp>
         <p:nvSpPr>
-          <p:cNvPr id="10" name="TextBox 9"/>
-          <p:cNvSpPr txBox="1"/>
-          <p:nvPr/>
-        </p:nvSpPr>
-        <p:spPr>
-          <a:xfrm>
-            <a:off x="1286933" y="4836160"/>
-            <a:ext cx="4436533" cy="160866"/>
-          </a:xfrm>
-          <a:prstGeom prst="rect">
-            <a:avLst/>
-          </a:prstGeom>
-          <a:noFill/>
-        </p:spPr>
-        <p:txBody>
-          <a:bodyPr wrap="none" lIns="0" rIns="0" tIns="0" bIns="0">
+          <p:cNvPr id="13" name="TextBox 12"/>
+          <p:cNvSpPr txBox="1"/>
+          <p:nvPr/>
+        </p:nvSpPr>
+        <p:spPr>
+          <a:xfrm>
+            <a:off x="1286933" y="4819226"/>
+            <a:ext cx="4436533" cy="194733"/>
+          </a:xfrm>
+          <a:prstGeom prst="rect">
+            <a:avLst/>
+          </a:prstGeom>
+          <a:noFill/>
+        </p:spPr>
+        <p:txBody>
+          <a:bodyPr wrap="none" lIns="0" rIns="0" tIns="0" bIns="0" anchor="ctr">
             <a:noAutofit/>
           </a:bodyPr>
           <a:lstStyle/>
@@ -15110,22 +15296,22 @@
       </p:sp>
       <p:sp>
         <p:nvSpPr>
-          <p:cNvPr id="11" name="TextBox 10"/>
-          <p:cNvSpPr txBox="1"/>
-          <p:nvPr/>
-        </p:nvSpPr>
-        <p:spPr>
-          <a:xfrm>
-            <a:off x="2003213" y="6466839"/>
-            <a:ext cx="3928533" cy="160866"/>
-          </a:xfrm>
-          <a:prstGeom prst="rect">
-            <a:avLst/>
-          </a:prstGeom>
-          <a:noFill/>
-        </p:spPr>
-        <p:txBody>
-          <a:bodyPr wrap="none" lIns="0" rIns="0" tIns="0" bIns="0">
+          <p:cNvPr id="14" name="TextBox 13"/>
+          <p:cNvSpPr txBox="1"/>
+          <p:nvPr/>
+        </p:nvSpPr>
+        <p:spPr>
+          <a:xfrm>
+            <a:off x="2003213" y="6449906"/>
+            <a:ext cx="3928533" cy="194733"/>
+          </a:xfrm>
+          <a:prstGeom prst="rect">
+            <a:avLst/>
+          </a:prstGeom>
+          <a:noFill/>
+        </p:spPr>
+        <p:txBody>
+          <a:bodyPr wrap="none" lIns="0" rIns="0" tIns="0" bIns="0" anchor="ctr">
             <a:noAutofit/>
           </a:bodyPr>
           <a:lstStyle/>
@@ -15149,14 +15335,14 @@
       </p:sp>
       <p:sp>
         <p:nvSpPr>
-          <p:cNvPr id="12" name="TextBox 11"/>
+          <p:cNvPr id="15" name="TextBox 14"/>
           <p:cNvSpPr txBox="1"/>
           <p:nvPr/>
         </p:nvSpPr>
         <p:spPr>
           <a:xfrm>
             <a:off x="4538133" y="2788919"/>
-            <a:ext cx="2689013" cy="888999"/>
+            <a:ext cx="2861733" cy="888999"/>
           </a:xfrm>
           <a:prstGeom prst="rect">
             <a:avLst/>
@@ -15226,14 +15412,14 @@
       </p:sp>
       <p:sp>
         <p:nvSpPr>
-          <p:cNvPr id="13" name="TextBox 12"/>
+          <p:cNvPr id="16" name="TextBox 15"/>
           <p:cNvSpPr txBox="1"/>
           <p:nvPr/>
         </p:nvSpPr>
         <p:spPr>
           <a:xfrm>
             <a:off x="8060266" y="2788919"/>
-            <a:ext cx="2689013" cy="888999"/>
+            <a:ext cx="2861733" cy="888999"/>
           </a:xfrm>
           <a:prstGeom prst="rect">
             <a:avLst/>
@@ -15303,14 +15489,14 @@
       </p:sp>
       <p:sp>
         <p:nvSpPr>
-          <p:cNvPr id="14" name="TextBox 13"/>
+          <p:cNvPr id="17" name="TextBox 16"/>
           <p:cNvSpPr txBox="1"/>
           <p:nvPr/>
         </p:nvSpPr>
         <p:spPr>
           <a:xfrm>
             <a:off x="8311726" y="4802293"/>
-            <a:ext cx="2627206" cy="203200"/>
+            <a:ext cx="2728806" cy="203200"/>
           </a:xfrm>
           <a:prstGeom prst="rect">
             <a:avLst/>
@@ -15342,22 +15528,22 @@
       </p:sp>
       <p:sp>
         <p:nvSpPr>
-          <p:cNvPr id="15" name="TextBox 14"/>
-          <p:cNvSpPr txBox="1"/>
-          <p:nvPr/>
-        </p:nvSpPr>
-        <p:spPr>
-          <a:xfrm>
-            <a:off x="10634133" y="6495626"/>
-            <a:ext cx="575733" cy="176106"/>
-          </a:xfrm>
-          <a:prstGeom prst="rect">
-            <a:avLst/>
-          </a:prstGeom>
-          <a:noFill/>
-        </p:spPr>
-        <p:txBody>
-          <a:bodyPr wrap="none" lIns="0" rIns="0" tIns="0" bIns="0">
+          <p:cNvPr id="18" name="TextBox 17"/>
+          <p:cNvSpPr txBox="1"/>
+          <p:nvPr/>
+        </p:nvSpPr>
+        <p:spPr>
+          <a:xfrm>
+            <a:off x="10634133" y="6478693"/>
+            <a:ext cx="575733" cy="209973"/>
+          </a:xfrm>
+          <a:prstGeom prst="rect">
+            <a:avLst/>
+          </a:prstGeom>
+          <a:noFill/>
+        </p:spPr>
+        <p:txBody>
+          <a:bodyPr wrap="none" lIns="0" rIns="0" tIns="0" bIns="0" anchor="ctr">
             <a:noAutofit/>
           </a:bodyPr>
           <a:lstStyle/>
